--- a/Seminario de Sistemas/Clases/Clase 1 - Conceptos iniciales/Presentacion.pptx
+++ b/Seminario de Sistemas/Clases/Clase 1 - Conceptos iniciales/Presentacion.pptx
@@ -9,40 +9,33 @@
     <p:sldId id="257" r:id="rId8"/>
     <p:sldId id="258" r:id="rId9"/>
     <p:sldId id="259" r:id="rId10"/>
-    <p:sldId id="260" r:id="rId11"/>
-    <p:sldId id="261" r:id="rId12"/>
-    <p:sldId id="262" r:id="rId13"/>
-    <p:sldId id="263" r:id="rId14"/>
-    <p:sldId id="264" r:id="rId15"/>
-    <p:sldId id="265" r:id="rId16"/>
-    <p:sldId id="266" r:id="rId17"/>
-    <p:sldId id="267" r:id="rId18"/>
-    <p:sldId id="268" r:id="rId19"/>
-    <p:sldId id="269" r:id="rId20"/>
-    <p:sldId id="270" r:id="rId21"/>
-    <p:sldId id="271" r:id="rId22"/>
-    <p:sldId id="272" r:id="rId23"/>
-    <p:sldId id="273" r:id="rId24"/>
-    <p:sldId id="274" r:id="rId25"/>
-    <p:sldId id="275" r:id="rId26"/>
-    <p:sldId id="276" r:id="rId27"/>
-    <p:sldId id="277" r:id="rId28"/>
-    <p:sldId id="278" r:id="rId29"/>
-    <p:sldId id="279" r:id="rId30"/>
-    <p:sldId id="280" r:id="rId31"/>
-    <p:sldId id="281" r:id="rId32"/>
-    <p:sldId id="282" r:id="rId33"/>
-    <p:sldId id="283" r:id="rId34"/>
-    <p:sldId id="284" r:id="rId35"/>
-    <p:sldId id="285" r:id="rId36"/>
-    <p:sldId id="286" r:id="rId37"/>
-    <p:sldId id="287" r:id="rId38"/>
-    <p:sldId id="288" r:id="rId39"/>
-    <p:sldId id="289" r:id="rId40"/>
-    <p:sldId id="290" r:id="rId41"/>
-    <p:sldId id="291" r:id="rId42"/>
-    <p:sldId id="292" r:id="rId43"/>
-    <p:sldId id="293" r:id="rId44"/>
+    <p:sldId id="260" r:id="rId12"/>
+    <p:sldId id="261" r:id="rId13"/>
+    <p:sldId id="262" r:id="rId14"/>
+    <p:sldId id="263" r:id="rId15"/>
+    <p:sldId id="264" r:id="rId16"/>
+    <p:sldId id="265" r:id="rId17"/>
+    <p:sldId id="266" r:id="rId18"/>
+    <p:sldId id="267" r:id="rId19"/>
+    <p:sldId id="268" r:id="rId20"/>
+    <p:sldId id="269" r:id="rId21"/>
+    <p:sldId id="270" r:id="rId22"/>
+    <p:sldId id="271" r:id="rId23"/>
+    <p:sldId id="272" r:id="rId24"/>
+    <p:sldId id="273" r:id="rId25"/>
+    <p:sldId id="274" r:id="rId26"/>
+    <p:sldId id="275" r:id="rId27"/>
+    <p:sldId id="276" r:id="rId28"/>
+    <p:sldId id="277" r:id="rId29"/>
+    <p:sldId id="278" r:id="rId30"/>
+    <p:sldId id="279" r:id="rId31"/>
+    <p:sldId id="280" r:id="rId32"/>
+    <p:sldId id="281" r:id="rId33"/>
+    <p:sldId id="282" r:id="rId34"/>
+    <p:sldId id="283" r:id="rId35"/>
+    <p:sldId id="284" r:id="rId36"/>
+    <p:sldId id="285" r:id="rId37"/>
+    <p:sldId id="286" r:id="rId38"/>
   </p:sldIdLst>
   <p:sldSz cx="12191695" cy="6858000" type="screen4x3"/>
   <p:notesSz cx="6858000" cy="9144000"/>
@@ -142,6 +135,1304 @@
     </a:lvl9pPr>
   </p:defaultTextStyle>
 </p:presentation>
+</file>
+
+<file path=ppt/notesMasters/notesMaster1.xml><?xml version="1.0" encoding="utf-8"?>
+<p:notesMaster xmlns:a="http://schemas.openxmlformats.org/drawingml/2006/main" xmlns:p="http://schemas.openxmlformats.org/presentationml/2006/main" xmlns:r="http://schemas.openxmlformats.org/officeDocument/2006/relationships">
+  <p:cSld>
+    <p:bg>
+      <p:bgRef idx="1001">
+        <a:schemeClr val="bg1"/>
+      </p:bgRef>
+    </p:bg>
+    <p:spTree>
+      <p:nvGrpSpPr>
+        <p:cNvPr id="1" name=""/>
+        <p:cNvGrpSpPr/>
+        <p:nvPr/>
+      </p:nvGrpSpPr>
+      <p:grpSpPr>
+        <a:xfrm>
+          <a:off x="0" y="0"/>
+          <a:ext cx="0" cy="0"/>
+          <a:chOff x="0" y="0"/>
+          <a:chExt cx="0" cy="0"/>
+        </a:xfrm>
+      </p:grpSpPr>
+      <p:sp>
+        <p:nvSpPr>
+          <p:cNvPr id="2" name="Header Placeholder 1"/>
+          <p:cNvSpPr>
+            <a:spLocks noGrp="1"/>
+          </p:cNvSpPr>
+          <p:nvPr>
+            <p:ph type="hdr" sz="quarter"/>
+          </p:nvPr>
+        </p:nvSpPr>
+        <p:spPr>
+          <a:xfrm>
+            <a:off x="0" y="0"/>
+            <a:ext cx="2971800" cy="457200"/>
+          </a:xfrm>
+          <a:prstGeom prst="rect">
+            <a:avLst/>
+          </a:prstGeom>
+        </p:spPr>
+        <p:txBody>
+          <a:bodyPr vert="horz" lIns="91440" tIns="45720" rIns="91440" bIns="45720" rtlCol="0"/>
+          <a:lstStyle>
+            <a:lvl1pPr algn="l">
+              <a:defRPr sz="1200"/>
+            </a:lvl1pPr>
+          </a:lstStyle>
+          <a:p>
+            <a:endParaRPr lang="en-US"/>
+          </a:p>
+        </p:txBody>
+      </p:sp>
+      <p:sp>
+        <p:nvSpPr>
+          <p:cNvPr id="3" name="Date Placeholder 2"/>
+          <p:cNvSpPr>
+            <a:spLocks noGrp="1"/>
+          </p:cNvSpPr>
+          <p:nvPr>
+            <p:ph type="dt" idx="1"/>
+          </p:nvPr>
+        </p:nvSpPr>
+        <p:spPr>
+          <a:xfrm>
+            <a:off x="3884613" y="0"/>
+            <a:ext cx="2971800" cy="457200"/>
+          </a:xfrm>
+          <a:prstGeom prst="rect">
+            <a:avLst/>
+          </a:prstGeom>
+        </p:spPr>
+        <p:txBody>
+          <a:bodyPr vert="horz" lIns="91440" tIns="45720" rIns="91440" bIns="45720" rtlCol="0"/>
+          <a:lstStyle>
+            <a:lvl1pPr algn="r">
+              <a:defRPr sz="1200"/>
+            </a:lvl1pPr>
+          </a:lstStyle>
+          <a:p>
+            <a:fld id="{0F89C1C7-3DCD-1040-A9CF-14679D8B5DDD}" type="datetimeFigureOut">
+              <a:rPr lang="en-US" smtClean="0"/>
+              <a:t>10/17/16</a:t>
+            </a:fld>
+            <a:endParaRPr lang="en-US"/>
+          </a:p>
+        </p:txBody>
+      </p:sp>
+      <p:sp>
+        <p:nvSpPr>
+          <p:cNvPr id="4" name="Slide Image Placeholder 3"/>
+          <p:cNvSpPr>
+            <a:spLocks noGrp="1" noRot="1" noChangeAspect="1"/>
+          </p:cNvSpPr>
+          <p:nvPr>
+            <p:ph type="sldImg" idx="2"/>
+          </p:nvPr>
+        </p:nvSpPr>
+        <p:spPr>
+          <a:xfrm>
+            <a:off x="1143000" y="685800"/>
+            <a:ext cx="4572000" cy="3429000"/>
+          </a:xfrm>
+          <a:prstGeom prst="rect">
+            <a:avLst/>
+          </a:prstGeom>
+          <a:noFill/>
+          <a:ln w="12700">
+            <a:solidFill>
+              <a:prstClr val="black"/>
+            </a:solidFill>
+          </a:ln>
+        </p:spPr>
+        <p:txBody>
+          <a:bodyPr vert="horz" lIns="91440" tIns="45720" rIns="91440" bIns="45720" rtlCol="0" anchor="ctr"/>
+          <a:lstStyle/>
+          <a:p>
+            <a:endParaRPr lang="en-US"/>
+          </a:p>
+        </p:txBody>
+      </p:sp>
+      <p:sp>
+        <p:nvSpPr>
+          <p:cNvPr id="5" name="Notes Placeholder 4"/>
+          <p:cNvSpPr>
+            <a:spLocks noGrp="1"/>
+          </p:cNvSpPr>
+          <p:nvPr>
+            <p:ph type="body" sz="quarter" idx="3"/>
+          </p:nvPr>
+        </p:nvSpPr>
+        <p:spPr>
+          <a:xfrm>
+            <a:off x="685800" y="4343400"/>
+            <a:ext cx="5486400" cy="4114800"/>
+          </a:xfrm>
+          <a:prstGeom prst="rect">
+            <a:avLst/>
+          </a:prstGeom>
+        </p:spPr>
+        <p:txBody>
+          <a:bodyPr vert="horz" lIns="91440" tIns="45720" rIns="91440" bIns="45720" rtlCol="0"/>
+          <a:lstStyle/>
+          <a:p>
+            <a:pPr lvl="0"/>
+            <a:r>
+              <a:rPr lang="en-US" smtClean="0"/>
+              <a:t>Click to edit Master text styles</a:t>
+            </a:r>
+          </a:p>
+          <a:p>
+            <a:pPr lvl="1"/>
+            <a:r>
+              <a:rPr lang="en-US" smtClean="0"/>
+              <a:t>Second level</a:t>
+            </a:r>
+          </a:p>
+          <a:p>
+            <a:pPr lvl="2"/>
+            <a:r>
+              <a:rPr lang="en-US" smtClean="0"/>
+              <a:t>Third level</a:t>
+            </a:r>
+          </a:p>
+          <a:p>
+            <a:pPr lvl="3"/>
+            <a:r>
+              <a:rPr lang="en-US" smtClean="0"/>
+              <a:t>Fourth level</a:t>
+            </a:r>
+          </a:p>
+          <a:p>
+            <a:pPr lvl="4"/>
+            <a:r>
+              <a:rPr lang="en-US" smtClean="0"/>
+              <a:t>Fifth level</a:t>
+            </a:r>
+            <a:endParaRPr lang="en-US"/>
+          </a:p>
+        </p:txBody>
+      </p:sp>
+      <p:sp>
+        <p:nvSpPr>
+          <p:cNvPr id="6" name="Footer Placeholder 5"/>
+          <p:cNvSpPr>
+            <a:spLocks noGrp="1"/>
+          </p:cNvSpPr>
+          <p:nvPr>
+            <p:ph type="ftr" sz="quarter" idx="4"/>
+          </p:nvPr>
+        </p:nvSpPr>
+        <p:spPr>
+          <a:xfrm>
+            <a:off x="0" y="8685213"/>
+            <a:ext cx="2971800" cy="457200"/>
+          </a:xfrm>
+          <a:prstGeom prst="rect">
+            <a:avLst/>
+          </a:prstGeom>
+        </p:spPr>
+        <p:txBody>
+          <a:bodyPr vert="horz" lIns="91440" tIns="45720" rIns="91440" bIns="45720" rtlCol="0" anchor="b"/>
+          <a:lstStyle>
+            <a:lvl1pPr algn="l">
+              <a:defRPr sz="1200"/>
+            </a:lvl1pPr>
+          </a:lstStyle>
+          <a:p>
+            <a:endParaRPr lang="en-US"/>
+          </a:p>
+        </p:txBody>
+      </p:sp>
+      <p:sp>
+        <p:nvSpPr>
+          <p:cNvPr id="7" name="Slide Number Placeholder 6"/>
+          <p:cNvSpPr>
+            <a:spLocks noGrp="1"/>
+          </p:cNvSpPr>
+          <p:nvPr>
+            <p:ph type="sldNum" sz="quarter" idx="5"/>
+          </p:nvPr>
+        </p:nvSpPr>
+        <p:spPr>
+          <a:xfrm>
+            <a:off x="3884613" y="8685213"/>
+            <a:ext cx="2971800" cy="457200"/>
+          </a:xfrm>
+          <a:prstGeom prst="rect">
+            <a:avLst/>
+          </a:prstGeom>
+        </p:spPr>
+        <p:txBody>
+          <a:bodyPr vert="horz" lIns="91440" tIns="45720" rIns="91440" bIns="45720" rtlCol="0" anchor="b"/>
+          <a:lstStyle>
+            <a:lvl1pPr algn="r">
+              <a:defRPr sz="1200"/>
+            </a:lvl1pPr>
+          </a:lstStyle>
+          <a:p>
+            <a:fld id="{BB5E49A5-4136-284D-997B-48E1D791AD67}" type="slidenum">
+              <a:rPr lang="en-US" smtClean="0"/>
+              <a:t>‹#›</a:t>
+            </a:fld>
+            <a:endParaRPr lang="en-US"/>
+          </a:p>
+        </p:txBody>
+      </p:sp>
+    </p:spTree>
+    <p:extLst>
+      <p:ext uri="{BB962C8B-B14F-4D97-AF65-F5344CB8AC3E}">
+        <p14:creationId xmlns:p14="http://schemas.microsoft.com/office/powerpoint/2010/main" val="2623252185"/>
+      </p:ext>
+    </p:extLst>
+  </p:cSld>
+  <p:clrMap bg1="lt1" tx1="dk1" bg2="lt2" tx2="dk2" accent1="accent1" accent2="accent2" accent3="accent3" accent4="accent4" accent5="accent5" accent6="accent6" hlink="hlink" folHlink="folHlink"/>
+  <p:notesStyle>
+    <a:lvl1pPr marL="0" algn="l" defTabSz="457200" rtl="0" eaLnBrk="1" latinLnBrk="0" hangingPunct="1">
+      <a:defRPr sz="1200" kern="1200">
+        <a:solidFill>
+          <a:schemeClr val="tx1"/>
+        </a:solidFill>
+        <a:latin typeface="+mn-lt"/>
+        <a:ea typeface="+mn-ea"/>
+        <a:cs typeface="+mn-cs"/>
+      </a:defRPr>
+    </a:lvl1pPr>
+    <a:lvl2pPr marL="457200" algn="l" defTabSz="457200" rtl="0" eaLnBrk="1" latinLnBrk="0" hangingPunct="1">
+      <a:defRPr sz="1200" kern="1200">
+        <a:solidFill>
+          <a:schemeClr val="tx1"/>
+        </a:solidFill>
+        <a:latin typeface="+mn-lt"/>
+        <a:ea typeface="+mn-ea"/>
+        <a:cs typeface="+mn-cs"/>
+      </a:defRPr>
+    </a:lvl2pPr>
+    <a:lvl3pPr marL="914400" algn="l" defTabSz="457200" rtl="0" eaLnBrk="1" latinLnBrk="0" hangingPunct="1">
+      <a:defRPr sz="1200" kern="1200">
+        <a:solidFill>
+          <a:schemeClr val="tx1"/>
+        </a:solidFill>
+        <a:latin typeface="+mn-lt"/>
+        <a:ea typeface="+mn-ea"/>
+        <a:cs typeface="+mn-cs"/>
+      </a:defRPr>
+    </a:lvl3pPr>
+    <a:lvl4pPr marL="1371600" algn="l" defTabSz="457200" rtl="0" eaLnBrk="1" latinLnBrk="0" hangingPunct="1">
+      <a:defRPr sz="1200" kern="1200">
+        <a:solidFill>
+          <a:schemeClr val="tx1"/>
+        </a:solidFill>
+        <a:latin typeface="+mn-lt"/>
+        <a:ea typeface="+mn-ea"/>
+        <a:cs typeface="+mn-cs"/>
+      </a:defRPr>
+    </a:lvl4pPr>
+    <a:lvl5pPr marL="1828800" algn="l" defTabSz="457200" rtl="0" eaLnBrk="1" latinLnBrk="0" hangingPunct="1">
+      <a:defRPr sz="1200" kern="1200">
+        <a:solidFill>
+          <a:schemeClr val="tx1"/>
+        </a:solidFill>
+        <a:latin typeface="+mn-lt"/>
+        <a:ea typeface="+mn-ea"/>
+        <a:cs typeface="+mn-cs"/>
+      </a:defRPr>
+    </a:lvl5pPr>
+    <a:lvl6pPr marL="2286000" algn="l" defTabSz="457200" rtl="0" eaLnBrk="1" latinLnBrk="0" hangingPunct="1">
+      <a:defRPr sz="1200" kern="1200">
+        <a:solidFill>
+          <a:schemeClr val="tx1"/>
+        </a:solidFill>
+        <a:latin typeface="+mn-lt"/>
+        <a:ea typeface="+mn-ea"/>
+        <a:cs typeface="+mn-cs"/>
+      </a:defRPr>
+    </a:lvl6pPr>
+    <a:lvl7pPr marL="2743200" algn="l" defTabSz="457200" rtl="0" eaLnBrk="1" latinLnBrk="0" hangingPunct="1">
+      <a:defRPr sz="1200" kern="1200">
+        <a:solidFill>
+          <a:schemeClr val="tx1"/>
+        </a:solidFill>
+        <a:latin typeface="+mn-lt"/>
+        <a:ea typeface="+mn-ea"/>
+        <a:cs typeface="+mn-cs"/>
+      </a:defRPr>
+    </a:lvl7pPr>
+    <a:lvl8pPr marL="3200400" algn="l" defTabSz="457200" rtl="0" eaLnBrk="1" latinLnBrk="0" hangingPunct="1">
+      <a:defRPr sz="1200" kern="1200">
+        <a:solidFill>
+          <a:schemeClr val="tx1"/>
+        </a:solidFill>
+        <a:latin typeface="+mn-lt"/>
+        <a:ea typeface="+mn-ea"/>
+        <a:cs typeface="+mn-cs"/>
+      </a:defRPr>
+    </a:lvl8pPr>
+    <a:lvl9pPr marL="3657600" algn="l" defTabSz="457200" rtl="0" eaLnBrk="1" latinLnBrk="0" hangingPunct="1">
+      <a:defRPr sz="1200" kern="1200">
+        <a:solidFill>
+          <a:schemeClr val="tx1"/>
+        </a:solidFill>
+        <a:latin typeface="+mn-lt"/>
+        <a:ea typeface="+mn-ea"/>
+        <a:cs typeface="+mn-cs"/>
+      </a:defRPr>
+    </a:lvl9pPr>
+  </p:notesStyle>
+</p:notesMaster>
+</file>
+
+<file path=ppt/notesSlides/notesSlide1.xml><?xml version="1.0" encoding="utf-8"?>
+<p:notes xmlns:a="http://schemas.openxmlformats.org/drawingml/2006/main" xmlns:p="http://schemas.openxmlformats.org/presentationml/2006/main" xmlns:r="http://schemas.openxmlformats.org/officeDocument/2006/relationships">
+  <p:cSld>
+    <p:spTree>
+      <p:nvGrpSpPr>
+        <p:cNvPr id="1" name=""/>
+        <p:cNvGrpSpPr/>
+        <p:nvPr/>
+      </p:nvGrpSpPr>
+      <p:grpSpPr>
+        <a:xfrm>
+          <a:off x="0" y="0"/>
+          <a:ext cx="0" cy="0"/>
+          <a:chOff x="0" y="0"/>
+          <a:chExt cx="0" cy="0"/>
+        </a:xfrm>
+      </p:grpSpPr>
+      <p:sp>
+        <p:nvSpPr>
+          <p:cNvPr id="2" name="Slide Image Placeholder 1"/>
+          <p:cNvSpPr>
+            <a:spLocks noGrp="1"/>
+          </p:cNvSpPr>
+          <p:nvPr>
+            <p:ph type="sldImg" idx="2"/>
+          </p:nvPr>
+        </p:nvSpPr>
+        <p:spPr/>
+      </p:sp>
+      <p:sp>
+        <p:nvSpPr>
+          <p:cNvPr id="3" name="Notes Placeholder 2"/>
+          <p:cNvSpPr>
+            <a:spLocks noGrp="1"/>
+          </p:cNvSpPr>
+          <p:nvPr>
+            <p:ph type="body" idx="3" sz="quarter"/>
+          </p:nvPr>
+        </p:nvSpPr>
+        <p:spPr/>
+        <p:txBody>
+          <a:bodyPr/>
+          <a:lstStyle/>
+          <a:p>
+            <a:r>
+              <a:t>Esa curva de costo es la justificacion de todo lo que se vera en este curso; sin ella, las metodologias suenan a burocracia arbitraria.</a:t>
+            </a:r>
+          </a:p>
+        </p:txBody>
+      </p:sp>
+      <p:sp>
+        <p:nvSpPr>
+          <p:cNvPr id="4" name="Slide Number Placeholder 3"/>
+          <p:cNvSpPr>
+            <a:spLocks noGrp="1"/>
+          </p:cNvSpPr>
+          <p:nvPr>
+            <p:ph type="sldNum" idx="5" sz="quarter"/>
+          </p:nvPr>
+        </p:nvSpPr>
+        <p:spPr/>
+      </p:sp>
+    </p:spTree>
+  </p:cSld>
+  <p:clrMapOvr>
+    <a:masterClrMapping/>
+  </p:clrMapOvr>
+</p:notes>
+</file>
+
+<file path=ppt/notesSlides/notesSlide10.xml><?xml version="1.0" encoding="utf-8"?>
+<p:notes xmlns:a="http://schemas.openxmlformats.org/drawingml/2006/main" xmlns:p="http://schemas.openxmlformats.org/presentationml/2006/main" xmlns:r="http://schemas.openxmlformats.org/officeDocument/2006/relationships">
+  <p:cSld>
+    <p:spTree>
+      <p:nvGrpSpPr>
+        <p:cNvPr id="1" name=""/>
+        <p:cNvGrpSpPr/>
+        <p:nvPr/>
+      </p:nvGrpSpPr>
+      <p:grpSpPr>
+        <a:xfrm>
+          <a:off x="0" y="0"/>
+          <a:ext cx="0" cy="0"/>
+          <a:chOff x="0" y="0"/>
+          <a:chExt cx="0" cy="0"/>
+        </a:xfrm>
+      </p:grpSpPr>
+      <p:sp>
+        <p:nvSpPr>
+          <p:cNvPr id="2" name="Slide Image Placeholder 1"/>
+          <p:cNvSpPr>
+            <a:spLocks noGrp="1"/>
+          </p:cNvSpPr>
+          <p:nvPr>
+            <p:ph type="sldImg" idx="2"/>
+          </p:nvPr>
+        </p:nvSpPr>
+        <p:spPr/>
+      </p:sp>
+      <p:sp>
+        <p:nvSpPr>
+          <p:cNvPr id="3" name="Notes Placeholder 2"/>
+          <p:cNvSpPr>
+            <a:spLocks noGrp="1"/>
+          </p:cNvSpPr>
+          <p:nvPr>
+            <p:ph type="body" idx="3" sz="quarter"/>
+          </p:nvPr>
+        </p:nvSpPr>
+        <p:spPr/>
+        <p:txBody>
+          <a:bodyPr/>
+          <a:lstStyle/>
+          <a:p>
+            <a:r>
+              <a:t>Uno, tiene un lector nombrado y una pregunta que responde.</a:t>
+            </a:r>
+          </a:p>
+          <a:p/>
+          <a:p>
+            <a:r>
+              <a:t>Cuatro, esta fechado y versionado.</a:t>
+            </a:r>
+          </a:p>
+          <a:p/>
+          <a:p>
+            <a:r>
+              <a:t>Comparemos en VetCare.</a:t>
+            </a:r>
+          </a:p>
+          <a:p/>
+          <a:p>
+            <a:r>
+              <a:t>Nadie puede construir eso ni puede decir si se cumplio.</a:t>
+            </a:r>
+          </a:p>
+          <a:p/>
+          <a:p>
+            <a:r>
+              <a:t>La segunda version se puede programar, se puede probar y se puede discutir con el dueno de la clinica.</a:t>
+            </a:r>
+          </a:p>
+        </p:txBody>
+      </p:sp>
+      <p:sp>
+        <p:nvSpPr>
+          <p:cNvPr id="4" name="Slide Number Placeholder 3"/>
+          <p:cNvSpPr>
+            <a:spLocks noGrp="1"/>
+          </p:cNvSpPr>
+          <p:nvPr>
+            <p:ph type="sldNum" idx="5" sz="quarter"/>
+          </p:nvPr>
+        </p:nvSpPr>
+        <p:spPr/>
+      </p:sp>
+    </p:spTree>
+  </p:cSld>
+  <p:clrMapOvr>
+    <a:masterClrMapping/>
+  </p:clrMapOvr>
+</p:notes>
+</file>
+
+<file path=ppt/notesSlides/notesSlide11.xml><?xml version="1.0" encoding="utf-8"?>
+<p:notes xmlns:a="http://schemas.openxmlformats.org/drawingml/2006/main" xmlns:p="http://schemas.openxmlformats.org/presentationml/2006/main" xmlns:r="http://schemas.openxmlformats.org/officeDocument/2006/relationships">
+  <p:cSld>
+    <p:spTree>
+      <p:nvGrpSpPr>
+        <p:cNvPr id="1" name=""/>
+        <p:cNvGrpSpPr/>
+        <p:nvPr/>
+      </p:nvGrpSpPr>
+      <p:grpSpPr>
+        <a:xfrm>
+          <a:off x="0" y="0"/>
+          <a:ext cx="0" cy="0"/>
+          <a:chOff x="0" y="0"/>
+          <a:chExt cx="0" cy="0"/>
+        </a:xfrm>
+      </p:grpSpPr>
+      <p:sp>
+        <p:nvSpPr>
+          <p:cNvPr id="2" name="Slide Image Placeholder 1"/>
+          <p:cNvSpPr>
+            <a:spLocks noGrp="1"/>
+          </p:cNvSpPr>
+          <p:nvPr>
+            <p:ph type="sldImg" idx="2"/>
+          </p:nvPr>
+        </p:nvSpPr>
+        <p:spPr/>
+      </p:sp>
+      <p:sp>
+        <p:nvSpPr>
+          <p:cNvPr id="3" name="Notes Placeholder 2"/>
+          <p:cNvSpPr>
+            <a:spLocks noGrp="1"/>
+          </p:cNvSpPr>
+          <p:nvPr>
+            <p:ph type="body" idx="3" sz="quarter"/>
+          </p:nvPr>
+        </p:nvSpPr>
+        <p:spPr/>
+        <p:txBody>
+          <a:bodyPr/>
+          <a:lstStyle/>
+          <a:p>
+            <a:r>
+              <a:t>Hay un asunto de organizacion que el docente debe resolver el primer dia porque afecta la calificacion: los estudiantes llegan en tres situaciones de matricula distintas y cada una cierra su entregable de manera diferente.</a:t>
+            </a:r>
+          </a:p>
+          <a:p/>
+          <a:p>
+            <a:r>
+              <a:t>Primera situacion, quien cursa Seminario y Programacion II al mismo tiempo.</a:t>
+            </a:r>
+          </a:p>
+          <a:p/>
+          <a:p>
+            <a:r>
+              <a:t>De ahi sale una exigencia concreta para el documento: debe ser autosuficiente, entendible por alguien que no estuvo en las conversaciones del equipo; si el artefacto solo se entiende cuando su autor lo explica de viva voz, no sirve para ese companero y por lo tanto no sirve.</a:t>
+            </a:r>
+          </a:p>
+        </p:txBody>
+      </p:sp>
+      <p:sp>
+        <p:nvSpPr>
+          <p:cNvPr id="4" name="Slide Number Placeholder 3"/>
+          <p:cNvSpPr>
+            <a:spLocks noGrp="1"/>
+          </p:cNvSpPr>
+          <p:nvPr>
+            <p:ph type="sldNum" idx="5" sz="quarter"/>
+          </p:nvPr>
+        </p:nvSpPr>
+        <p:spPr/>
+      </p:sp>
+    </p:spTree>
+  </p:cSld>
+  <p:clrMapOvr>
+    <a:masterClrMapping/>
+  </p:clrMapOvr>
+</p:notes>
+</file>
+
+<file path=ppt/notesSlides/notesSlide12.xml><?xml version="1.0" encoding="utf-8"?>
+<p:notes xmlns:a="http://schemas.openxmlformats.org/drawingml/2006/main" xmlns:p="http://schemas.openxmlformats.org/presentationml/2006/main" xmlns:r="http://schemas.openxmlformats.org/officeDocument/2006/relationships">
+  <p:cSld>
+    <p:spTree>
+      <p:nvGrpSpPr>
+        <p:cNvPr id="1" name=""/>
+        <p:cNvGrpSpPr/>
+        <p:nvPr/>
+      </p:nvGrpSpPr>
+      <p:grpSpPr>
+        <a:xfrm>
+          <a:off x="0" y="0"/>
+          <a:ext cx="0" cy="0"/>
+          <a:chOff x="0" y="0"/>
+          <a:chExt cx="0" cy="0"/>
+        </a:xfrm>
+      </p:grpSpPr>
+      <p:sp>
+        <p:nvSpPr>
+          <p:cNvPr id="2" name="Slide Image Placeholder 1"/>
+          <p:cNvSpPr>
+            <a:spLocks noGrp="1"/>
+          </p:cNvSpPr>
+          <p:nvPr>
+            <p:ph type="sldImg" idx="2"/>
+          </p:nvPr>
+        </p:nvSpPr>
+        <p:spPr/>
+      </p:sp>
+      <p:sp>
+        <p:nvSpPr>
+          <p:cNvPr id="3" name="Notes Placeholder 2"/>
+          <p:cNvSpPr>
+            <a:spLocks noGrp="1"/>
+          </p:cNvSpPr>
+          <p:nvPr>
+            <p:ph type="body" idx="3" sz="quarter"/>
+          </p:nvPr>
+        </p:nvSpPr>
+        <p:spPr/>
+        <p:txBody>
+          <a:bodyPr/>
+          <a:lstStyle/>
+          <a:p>
+            <a:r>
+              <a:t>El encuadre tiene cuatro movimientos y conviene hacerlos en este orden.</a:t>
+            </a:r>
+          </a:p>
+          <a:p/>
+          <a:p>
+            <a:r>
+              <a:t>Conviene tambien nombrar el perfil profesional, porque el estudiante rara vez lo tiene claro: analista, arquitecto y product owner son cargos que existen y que se pagan bien precisamente por traducir entre el negocio y la tecnica.</a:t>
+            </a:r>
+          </a:p>
+          <a:p/>
+          <a:p>
+            <a:r>
+              <a:t>La respuesta es que el diagrama es justamente lo que hace barato ese cambio, y que cuando cambie, se actualiza y se anota el motivo, y ese registro es parte de lo que se evalua.</a:t>
+            </a:r>
+          </a:p>
+        </p:txBody>
+      </p:sp>
+      <p:sp>
+        <p:nvSpPr>
+          <p:cNvPr id="4" name="Slide Number Placeholder 3"/>
+          <p:cNvSpPr>
+            <a:spLocks noGrp="1"/>
+          </p:cNvSpPr>
+          <p:nvPr>
+            <p:ph type="sldNum" idx="5" sz="quarter"/>
+          </p:nvPr>
+        </p:nvSpPr>
+        <p:spPr/>
+      </p:sp>
+    </p:spTree>
+  </p:cSld>
+  <p:clrMapOvr>
+    <a:masterClrMapping/>
+  </p:clrMapOvr>
+</p:notes>
+</file>
+
+<file path=ppt/notesSlides/notesSlide2.xml><?xml version="1.0" encoding="utf-8"?>
+<p:notes xmlns:a="http://schemas.openxmlformats.org/drawingml/2006/main" xmlns:p="http://schemas.openxmlformats.org/presentationml/2006/main" xmlns:r="http://schemas.openxmlformats.org/officeDocument/2006/relationships">
+  <p:cSld>
+    <p:spTree>
+      <p:nvGrpSpPr>
+        <p:cNvPr id="1" name=""/>
+        <p:cNvGrpSpPr/>
+        <p:nvPr/>
+      </p:nvGrpSpPr>
+      <p:grpSpPr>
+        <a:xfrm>
+          <a:off x="0" y="0"/>
+          <a:ext cx="0" cy="0"/>
+          <a:chOff x="0" y="0"/>
+          <a:chExt cx="0" cy="0"/>
+        </a:xfrm>
+      </p:grpSpPr>
+      <p:sp>
+        <p:nvSpPr>
+          <p:cNvPr id="2" name="Slide Image Placeholder 1"/>
+          <p:cNvSpPr>
+            <a:spLocks noGrp="1"/>
+          </p:cNvSpPr>
+          <p:nvPr>
+            <p:ph type="sldImg" idx="2"/>
+          </p:nvPr>
+        </p:nvSpPr>
+        <p:spPr/>
+      </p:sp>
+      <p:sp>
+        <p:nvSpPr>
+          <p:cNvPr id="3" name="Notes Placeholder 2"/>
+          <p:cNvSpPr>
+            <a:spLocks noGrp="1"/>
+          </p:cNvSpPr>
+          <p:nvPr>
+            <p:ph type="body" idx="3" sz="quarter"/>
+          </p:nvPr>
+        </p:nvSpPr>
+        <p:spPr/>
+        <p:txBody>
+          <a:bodyPr/>
+          <a:lstStyle/>
+          <a:p>
+            <a:r>
+              <a:t>Conviene separar dos palabras que se usan como sinonimos y no lo son.</a:t>
+            </a:r>
+          </a:p>
+          <a:p/>
+          <a:p>
+            <a:r>
+              <a:t>Un proyecto termina; un producto puede seguir vivo diez años.</a:t>
+            </a:r>
+          </a:p>
+          <a:p/>
+          <a:p>
+            <a:r>
+              <a:t>Confundirlos lleva al equipo a pensar «ya entregamos, ya terminamos» y a no dejar nada escrito para quien venga despues.</a:t>
+            </a:r>
+          </a:p>
+        </p:txBody>
+      </p:sp>
+      <p:sp>
+        <p:nvSpPr>
+          <p:cNvPr id="4" name="Slide Number Placeholder 3"/>
+          <p:cNvSpPr>
+            <a:spLocks noGrp="1"/>
+          </p:cNvSpPr>
+          <p:nvPr>
+            <p:ph type="sldNum" idx="5" sz="quarter"/>
+          </p:nvPr>
+        </p:nvSpPr>
+        <p:spPr/>
+      </p:sp>
+    </p:spTree>
+  </p:cSld>
+  <p:clrMapOvr>
+    <a:masterClrMapping/>
+  </p:clrMapOvr>
+</p:notes>
+</file>
+
+<file path=ppt/notesSlides/notesSlide3.xml><?xml version="1.0" encoding="utf-8"?>
+<p:notes xmlns:a="http://schemas.openxmlformats.org/drawingml/2006/main" xmlns:p="http://schemas.openxmlformats.org/presentationml/2006/main" xmlns:r="http://schemas.openxmlformats.org/officeDocument/2006/relationships">
+  <p:cSld>
+    <p:spTree>
+      <p:nvGrpSpPr>
+        <p:cNvPr id="1" name=""/>
+        <p:cNvGrpSpPr/>
+        <p:nvPr/>
+      </p:nvGrpSpPr>
+      <p:grpSpPr>
+        <a:xfrm>
+          <a:off x="0" y="0"/>
+          <a:ext cx="0" cy="0"/>
+          <a:chOff x="0" y="0"/>
+          <a:chExt cx="0" cy="0"/>
+        </a:xfrm>
+      </p:grpSpPr>
+      <p:sp>
+        <p:nvSpPr>
+          <p:cNvPr id="2" name="Slide Image Placeholder 1"/>
+          <p:cNvSpPr>
+            <a:spLocks noGrp="1"/>
+          </p:cNvSpPr>
+          <p:nvPr>
+            <p:ph type="sldImg" idx="2"/>
+          </p:nvPr>
+        </p:nvSpPr>
+        <p:spPr/>
+      </p:sp>
+      <p:sp>
+        <p:nvSpPr>
+          <p:cNvPr id="3" name="Notes Placeholder 2"/>
+          <p:cNvSpPr>
+            <a:spLocks noGrp="1"/>
+          </p:cNvSpPr>
+          <p:nvPr>
+            <p:ph type="body" idx="3" sz="quarter"/>
+          </p:nvPr>
+        </p:nvSpPr>
+        <p:spPr/>
+        <p:txBody>
+          <a:bodyPr/>
+          <a:lstStyle/>
+          <a:p>
+            <a:r>
+              <a:t>Lo importante del primer dia es que el estudiante entienda su rol en esta asignatura: aqui no se construye la casa, se dibujan los planos para que cualquier equipo pueda construirla.</a:t>
+            </a:r>
+          </a:p>
+          <a:p/>
+          <a:p>
+            <a:r>
+              <a:t>Decirlo explicitamente evita que quien esperaba programar se frustre a mitad de semestre.</a:t>
+            </a:r>
+          </a:p>
+        </p:txBody>
+      </p:sp>
+      <p:sp>
+        <p:nvSpPr>
+          <p:cNvPr id="4" name="Slide Number Placeholder 3"/>
+          <p:cNvSpPr>
+            <a:spLocks noGrp="1"/>
+          </p:cNvSpPr>
+          <p:nvPr>
+            <p:ph type="sldNum" idx="5" sz="quarter"/>
+          </p:nvPr>
+        </p:nvSpPr>
+        <p:spPr/>
+      </p:sp>
+    </p:spTree>
+  </p:cSld>
+  <p:clrMapOvr>
+    <a:masterClrMapping/>
+  </p:clrMapOvr>
+</p:notes>
+</file>
+
+<file path=ppt/notesSlides/notesSlide4.xml><?xml version="1.0" encoding="utf-8"?>
+<p:notes xmlns:a="http://schemas.openxmlformats.org/drawingml/2006/main" xmlns:p="http://schemas.openxmlformats.org/presentationml/2006/main" xmlns:r="http://schemas.openxmlformats.org/officeDocument/2006/relationships">
+  <p:cSld>
+    <p:spTree>
+      <p:nvGrpSpPr>
+        <p:cNvPr id="1" name=""/>
+        <p:cNvGrpSpPr/>
+        <p:nvPr/>
+      </p:nvGrpSpPr>
+      <p:grpSpPr>
+        <a:xfrm>
+          <a:off x="0" y="0"/>
+          <a:ext cx="0" cy="0"/>
+          <a:chOff x="0" y="0"/>
+          <a:chExt cx="0" cy="0"/>
+        </a:xfrm>
+      </p:grpSpPr>
+      <p:sp>
+        <p:nvSpPr>
+          <p:cNvPr id="2" name="Slide Image Placeholder 1"/>
+          <p:cNvSpPr>
+            <a:spLocks noGrp="1"/>
+          </p:cNvSpPr>
+          <p:nvPr>
+            <p:ph type="sldImg" idx="2"/>
+          </p:nvPr>
+        </p:nvSpPr>
+        <p:spPr/>
+      </p:sp>
+      <p:sp>
+        <p:nvSpPr>
+          <p:cNvPr id="3" name="Notes Placeholder 2"/>
+          <p:cNvSpPr>
+            <a:spLocks noGrp="1"/>
+          </p:cNvSpPr>
+          <p:nvPr>
+            <p:ph type="body" idx="3" sz="quarter"/>
+          </p:nvPr>
+        </p:nvSpPr>
+        <p:spPr/>
+        <p:txBody>
+          <a:bodyPr/>
+          <a:lstStyle/>
+          <a:p>
+            <a:r>
+              <a:t>La respuesta esta en quien lee.</a:t>
+            </a:r>
+          </a:p>
+          <a:p/>
+          <a:p>
+            <a:r>
+              <a:t>Por eso en este curso cada entregable tiene un lector concreto, y la pregunta que se hace al calificar no es cuantas paginas tiene sino si ese lector podria trabajar con el sin preguntarle nada al autor.</a:t>
+            </a:r>
+          </a:p>
+        </p:txBody>
+      </p:sp>
+      <p:sp>
+        <p:nvSpPr>
+          <p:cNvPr id="4" name="Slide Number Placeholder 3"/>
+          <p:cNvSpPr>
+            <a:spLocks noGrp="1"/>
+          </p:cNvSpPr>
+          <p:nvPr>
+            <p:ph type="sldNum" idx="5" sz="quarter"/>
+          </p:nvPr>
+        </p:nvSpPr>
+        <p:spPr/>
+      </p:sp>
+    </p:spTree>
+  </p:cSld>
+  <p:clrMapOvr>
+    <a:masterClrMapping/>
+  </p:clrMapOvr>
+</p:notes>
+</file>
+
+<file path=ppt/notesSlides/notesSlide5.xml><?xml version="1.0" encoding="utf-8"?>
+<p:notes xmlns:a="http://schemas.openxmlformats.org/drawingml/2006/main" xmlns:p="http://schemas.openxmlformats.org/presentationml/2006/main" xmlns:r="http://schemas.openxmlformats.org/officeDocument/2006/relationships">
+  <p:cSld>
+    <p:spTree>
+      <p:nvGrpSpPr>
+        <p:cNvPr id="1" name=""/>
+        <p:cNvGrpSpPr/>
+        <p:nvPr/>
+      </p:nvGrpSpPr>
+      <p:grpSpPr>
+        <a:xfrm>
+          <a:off x="0" y="0"/>
+          <a:ext cx="0" cy="0"/>
+          <a:chOff x="0" y="0"/>
+          <a:chExt cx="0" cy="0"/>
+        </a:xfrm>
+      </p:grpSpPr>
+      <p:sp>
+        <p:nvSpPr>
+          <p:cNvPr id="2" name="Slide Image Placeholder 1"/>
+          <p:cNvSpPr>
+            <a:spLocks noGrp="1"/>
+          </p:cNvSpPr>
+          <p:nvPr>
+            <p:ph type="sldImg" idx="2"/>
+          </p:nvPr>
+        </p:nvSpPr>
+        <p:spPr/>
+      </p:sp>
+      <p:sp>
+        <p:nvSpPr>
+          <p:cNvPr id="3" name="Notes Placeholder 2"/>
+          <p:cNvSpPr>
+            <a:spLocks noGrp="1"/>
+          </p:cNvSpPr>
+          <p:nvPr>
+            <p:ph type="body" idx="3" sz="quarter"/>
+          </p:nvPr>
+        </p:nvSpPr>
+        <p:spPr/>
+        <p:txBody>
+          <a:bodyPr/>
+          <a:lstStyle/>
+          <a:p>
+            <a:r>
+              <a:t>Conviene tambien aclarar el mapa del semestre en una sola frase, porque de eso depende que el estudiante sepa donde esta parado en cada clase.</a:t>
+            </a:r>
+          </a:p>
+          <a:p/>
+          <a:p>
+            <a:r>
+              <a:t>Decir esto el primer dia evita la sensacion de estar haciendo tareas desconectadas.</a:t>
+            </a:r>
+          </a:p>
+        </p:txBody>
+      </p:sp>
+      <p:sp>
+        <p:nvSpPr>
+          <p:cNvPr id="4" name="Slide Number Placeholder 3"/>
+          <p:cNvSpPr>
+            <a:spLocks noGrp="1"/>
+          </p:cNvSpPr>
+          <p:nvPr>
+            <p:ph type="sldNum" idx="5" sz="quarter"/>
+          </p:nvPr>
+        </p:nvSpPr>
+        <p:spPr/>
+      </p:sp>
+    </p:spTree>
+  </p:cSld>
+  <p:clrMapOvr>
+    <a:masterClrMapping/>
+  </p:clrMapOvr>
+</p:notes>
+</file>
+
+<file path=ppt/notesSlides/notesSlide6.xml><?xml version="1.0" encoding="utf-8"?>
+<p:notes xmlns:a="http://schemas.openxmlformats.org/drawingml/2006/main" xmlns:p="http://schemas.openxmlformats.org/presentationml/2006/main" xmlns:r="http://schemas.openxmlformats.org/officeDocument/2006/relationships">
+  <p:cSld>
+    <p:spTree>
+      <p:nvGrpSpPr>
+        <p:cNvPr id="1" name=""/>
+        <p:cNvGrpSpPr/>
+        <p:nvPr/>
+      </p:nvGrpSpPr>
+      <p:grpSpPr>
+        <a:xfrm>
+          <a:off x="0" y="0"/>
+          <a:ext cx="0" cy="0"/>
+          <a:chOff x="0" y="0"/>
+          <a:chExt cx="0" cy="0"/>
+        </a:xfrm>
+      </p:grpSpPr>
+      <p:sp>
+        <p:nvSpPr>
+          <p:cNvPr id="2" name="Slide Image Placeholder 1"/>
+          <p:cNvSpPr>
+            <a:spLocks noGrp="1"/>
+          </p:cNvSpPr>
+          <p:nvPr>
+            <p:ph type="sldImg" idx="2"/>
+          </p:nvPr>
+        </p:nvSpPr>
+        <p:spPr/>
+      </p:sp>
+      <p:sp>
+        <p:nvSpPr>
+          <p:cNvPr id="3" name="Notes Placeholder 2"/>
+          <p:cNvSpPr>
+            <a:spLocks noGrp="1"/>
+          </p:cNvSpPr>
+          <p:nvPr>
+            <p:ph type="body" idx="3" sz="quarter"/>
+          </p:nvPr>
+        </p:nvSpPr>
+        <p:spPr/>
+        <p:txBody>
+          <a:bodyPr/>
+          <a:lstStyle/>
+          <a:p>
+            <a:r>
+              <a:t>Cada vez que un equipo elige la salida rapida en lugar de la correcta, esta pidiendo prestado tiempo al futuro.</a:t>
+            </a:r>
+          </a:p>
+          <a:p/>
+          <a:p>
+            <a:r>
+              <a:t>El prestamo puede ser razonable, igual que un credito, pero se paga con intereses, y los intereses se cobran en forma de tiempo adicional en cada cambio posterior.</a:t>
+            </a:r>
+          </a:p>
+          <a:p/>
+          <a:p>
+            <a:r>
+              <a:t>Tres semanas despues, dos integrantes han asumido cosas distintas; uno diseno la pantalla de registro pidiendo el dueno primero y el otro escribio un caso de uso donde la mascota se registra sola y el dueno se asocia despues.</a:t>
+            </a:r>
+          </a:p>
+        </p:txBody>
+      </p:sp>
+      <p:sp>
+        <p:nvSpPr>
+          <p:cNvPr id="4" name="Slide Number Placeholder 3"/>
+          <p:cNvSpPr>
+            <a:spLocks noGrp="1"/>
+          </p:cNvSpPr>
+          <p:nvPr>
+            <p:ph type="sldNum" idx="5" sz="quarter"/>
+          </p:nvPr>
+        </p:nvSpPr>
+        <p:spPr/>
+      </p:sp>
+    </p:spTree>
+  </p:cSld>
+  <p:clrMapOvr>
+    <a:masterClrMapping/>
+  </p:clrMapOvr>
+</p:notes>
+</file>
+
+<file path=ppt/notesSlides/notesSlide7.xml><?xml version="1.0" encoding="utf-8"?>
+<p:notes xmlns:a="http://schemas.openxmlformats.org/drawingml/2006/main" xmlns:p="http://schemas.openxmlformats.org/presentationml/2006/main" xmlns:r="http://schemas.openxmlformats.org/officeDocument/2006/relationships">
+  <p:cSld>
+    <p:spTree>
+      <p:nvGrpSpPr>
+        <p:cNvPr id="1" name=""/>
+        <p:cNvGrpSpPr/>
+        <p:nvPr/>
+      </p:nvGrpSpPr>
+      <p:grpSpPr>
+        <a:xfrm>
+          <a:off x="0" y="0"/>
+          <a:ext cx="0" cy="0"/>
+          <a:chOff x="0" y="0"/>
+          <a:chExt cx="0" cy="0"/>
+        </a:xfrm>
+      </p:grpSpPr>
+      <p:sp>
+        <p:nvSpPr>
+          <p:cNvPr id="2" name="Slide Image Placeholder 1"/>
+          <p:cNvSpPr>
+            <a:spLocks noGrp="1"/>
+          </p:cNvSpPr>
+          <p:nvPr>
+            <p:ph type="sldImg" idx="2"/>
+          </p:nvPr>
+        </p:nvSpPr>
+        <p:spPr/>
+      </p:sp>
+      <p:sp>
+        <p:nvSpPr>
+          <p:cNvPr id="3" name="Notes Placeholder 2"/>
+          <p:cNvSpPr>
+            <a:spLocks noGrp="1"/>
+          </p:cNvSpPr>
+          <p:nvPr>
+            <p:ph type="body" idx="3" sz="quarter"/>
+          </p:nvPr>
+        </p:nvSpPr>
+        <p:spPr/>
+        <p:txBody>
+          <a:bodyPr/>
+          <a:lstStyle/>
+          <a:p>
+            <a:r>
+              <a:t>Quien lo lea tomara decisiones a partir de informacion falsa y descubrira el problema tarde.</a:t>
+            </a:r>
+          </a:p>
+          <a:p/>
+          <a:p>
+            <a:r>
+              <a:t>De ahi salen dos reglas que este curso aplica a todos los entregables.</a:t>
+            </a:r>
+          </a:p>
+          <a:p/>
+          <a:p>
+            <a:r>
+              <a:t>Un equipo que cambio tres veces el alcance y lo registro esta mejor evaluado que uno que entrega un documento perfecto que nadie uso.</a:t>
+            </a:r>
+          </a:p>
+        </p:txBody>
+      </p:sp>
+      <p:sp>
+        <p:nvSpPr>
+          <p:cNvPr id="4" name="Slide Number Placeholder 3"/>
+          <p:cNvSpPr>
+            <a:spLocks noGrp="1"/>
+          </p:cNvSpPr>
+          <p:nvPr>
+            <p:ph type="sldNum" idx="5" sz="quarter"/>
+          </p:nvPr>
+        </p:nvSpPr>
+        <p:spPr/>
+      </p:sp>
+    </p:spTree>
+  </p:cSld>
+  <p:clrMapOvr>
+    <a:masterClrMapping/>
+  </p:clrMapOvr>
+</p:notes>
+</file>
+
+<file path=ppt/notesSlides/notesSlide8.xml><?xml version="1.0" encoding="utf-8"?>
+<p:notes xmlns:a="http://schemas.openxmlformats.org/drawingml/2006/main" xmlns:p="http://schemas.openxmlformats.org/presentationml/2006/main" xmlns:r="http://schemas.openxmlformats.org/officeDocument/2006/relationships">
+  <p:cSld>
+    <p:spTree>
+      <p:nvGrpSpPr>
+        <p:cNvPr id="1" name=""/>
+        <p:cNvGrpSpPr/>
+        <p:nvPr/>
+      </p:nvGrpSpPr>
+      <p:grpSpPr>
+        <a:xfrm>
+          <a:off x="0" y="0"/>
+          <a:ext cx="0" cy="0"/>
+          <a:chOff x="0" y="0"/>
+          <a:chExt cx="0" cy="0"/>
+        </a:xfrm>
+      </p:grpSpPr>
+      <p:sp>
+        <p:nvSpPr>
+          <p:cNvPr id="2" name="Slide Image Placeholder 1"/>
+          <p:cNvSpPr>
+            <a:spLocks noGrp="1"/>
+          </p:cNvSpPr>
+          <p:nvPr>
+            <p:ph type="sldImg" idx="2"/>
+          </p:nvPr>
+        </p:nvSpPr>
+        <p:spPr/>
+      </p:sp>
+      <p:sp>
+        <p:nvSpPr>
+          <p:cNvPr id="3" name="Notes Placeholder 2"/>
+          <p:cNvSpPr>
+            <a:spLocks noGrp="1"/>
+          </p:cNvSpPr>
+          <p:nvPr>
+            <p:ph type="body" idx="3" sz="quarter"/>
+          </p:nvPr>
+        </p:nvSpPr>
+        <p:spPr/>
+        <p:txBody>
+          <a:bodyPr/>
+          <a:lstStyle/>
+          <a:p>
+            <a:r>
+              <a:t>En VetCare, un diagrama de casos de uso responde quien hace que y con que finalidad, y le sirve al dueno de la clinica para confirmar que no falta ningun tramite; no responde en cuanto tiempo se busca un expediente ni como se guardan los datos, y quien busque eso ahi va a leer mal.</a:t>
+            </a:r>
+          </a:p>
+        </p:txBody>
+      </p:sp>
+      <p:sp>
+        <p:nvSpPr>
+          <p:cNvPr id="4" name="Slide Number Placeholder 3"/>
+          <p:cNvSpPr>
+            <a:spLocks noGrp="1"/>
+          </p:cNvSpPr>
+          <p:nvPr>
+            <p:ph type="sldNum" idx="5" sz="quarter"/>
+          </p:nvPr>
+        </p:nvSpPr>
+        <p:spPr/>
+      </p:sp>
+    </p:spTree>
+  </p:cSld>
+  <p:clrMapOvr>
+    <a:masterClrMapping/>
+  </p:clrMapOvr>
+</p:notes>
+</file>
+
+<file path=ppt/notesSlides/notesSlide9.xml><?xml version="1.0" encoding="utf-8"?>
+<p:notes xmlns:a="http://schemas.openxmlformats.org/drawingml/2006/main" xmlns:p="http://schemas.openxmlformats.org/presentationml/2006/main" xmlns:r="http://schemas.openxmlformats.org/officeDocument/2006/relationships">
+  <p:cSld>
+    <p:spTree>
+      <p:nvGrpSpPr>
+        <p:cNvPr id="1" name=""/>
+        <p:cNvGrpSpPr/>
+        <p:nvPr/>
+      </p:nvGrpSpPr>
+      <p:grpSpPr>
+        <a:xfrm>
+          <a:off x="0" y="0"/>
+          <a:ext cx="0" cy="0"/>
+          <a:chOff x="0" y="0"/>
+          <a:chExt cx="0" cy="0"/>
+        </a:xfrm>
+      </p:grpSpPr>
+      <p:sp>
+        <p:nvSpPr>
+          <p:cNvPr id="2" name="Slide Image Placeholder 1"/>
+          <p:cNvSpPr>
+            <a:spLocks noGrp="1"/>
+          </p:cNvSpPr>
+          <p:nvPr>
+            <p:ph type="sldImg" idx="2"/>
+          </p:nvPr>
+        </p:nvSpPr>
+        <p:spPr/>
+      </p:sp>
+      <p:sp>
+        <p:nvSpPr>
+          <p:cNvPr id="3" name="Notes Placeholder 2"/>
+          <p:cNvSpPr>
+            <a:spLocks noGrp="1"/>
+          </p:cNvSpPr>
+          <p:nvPr>
+            <p:ph type="body" idx="3" sz="quarter"/>
+          </p:nvPr>
+        </p:nvSpPr>
+        <p:spPr/>
+        <p:txBody>
+          <a:bodyPr/>
+          <a:lstStyle/>
+          <a:p>
+            <a:r>
+              <a:t>De ahi se sigue que un modelo puede estar mal de dos maneras opuestas, y conviene decirlas juntas porque los equipos suelen corregir una cayendo en la otra.</a:t>
+            </a:r>
+          </a:p>
+          <a:p/>
+          <a:p>
+            <a:r>
+              <a:t>Lo que no pueda explicar, no comunica, y hay que arreglarlo.</a:t>
+            </a:r>
+          </a:p>
+        </p:txBody>
+      </p:sp>
+      <p:sp>
+        <p:nvSpPr>
+          <p:cNvPr id="4" name="Slide Number Placeholder 3"/>
+          <p:cNvSpPr>
+            <a:spLocks noGrp="1"/>
+          </p:cNvSpPr>
+          <p:nvPr>
+            <p:ph type="sldNum" idx="5" sz="quarter"/>
+          </p:nvPr>
+        </p:nvSpPr>
+        <p:spPr/>
+      </p:sp>
+    </p:spTree>
+  </p:cSld>
+  <p:clrMapOvr>
+    <a:masterClrMapping/>
+  </p:clrMapOvr>
+</p:notes>
 </file>
 
 <file path=ppt/slideLayouts/slideLayout1.xml><?xml version="1.0" encoding="utf-8"?>
@@ -6307,7 +7598,7 @@
                 </a:solidFill>
                 <a:latin typeface="Calibri"/>
               </a:rPr>
-              <a:t>Encuadre de hoy · Objetivo del PI</a:t>
+              <a:t>Encuadre de hoy</a:t>
             </a:r>
           </a:p>
         </p:txBody>
@@ -6355,7 +7646,7 @@
                 </a:solidFill>
                 <a:latin typeface="Calibri"/>
               </a:rPr>
-              <a:t>Hoy avanzamos VetCare en:</a:t>
+              <a:t>Tema:</a:t>
             </a:r>
             <a:r>
               <a:rPr sz="2000" b="0" i="0">
@@ -6364,7 +7655,7 @@
                 </a:solidFill>
                 <a:latin typeface="Calibri"/>
               </a:rPr>
-              <a:t> Dominio del proyecto acotado (trabajo individual por defecto)</a:t>
+              <a:t> Conceptos iniciales de ingenieria de software</a:t>
             </a:r>
           </a:p>
           <a:p>
@@ -6380,34 +7671,7 @@
                 </a:solidFill>
                 <a:latin typeface="Calibri"/>
               </a:rPr>
-              <a:t>–   Herramienta: </a:t>
-            </a:r>
-            <a:r>
-              <a:rPr sz="2000" b="1" i="0">
-                <a:solidFill>
-                  <a:srgbClr val="333333"/>
-                </a:solidFill>
-                <a:latin typeface="Calibri"/>
-              </a:rPr>
-              <a:t>Google Docs · draw.io</a:t>
-            </a:r>
-            <a:r>
-              <a:rPr sz="2000" b="0" i="0">
-                <a:solidFill>
-                  <a:srgbClr val="333333"/>
-                </a:solidFill>
-                <a:latin typeface="Calibri"/>
-              </a:rPr>
-              <a:t> · Bloque </a:t>
-            </a:r>
-            <a:r>
-              <a:rPr sz="2000" b="1" i="0">
-                <a:solidFill>
-                  <a:srgbClr val="333333"/>
-                </a:solidFill>
-                <a:latin typeface="Calibri"/>
-              </a:rPr>
-              <a:t>120 min</a:t>
+              <a:t>–   Que es diseñar software y por que no es programar</a:t>
             </a:r>
           </a:p>
           <a:p>
@@ -6423,7 +7687,7 @@
                 </a:solidFill>
                 <a:latin typeface="Calibri"/>
               </a:rPr>
-              <a:t>–   </a:t>
+              <a:t>–   Herramienta del tema: </a:t>
             </a:r>
             <a:r>
               <a:rPr sz="2000" b="1" i="0">
@@ -6432,7 +7696,7 @@
                 </a:solidFill>
                 <a:latin typeface="Calibri"/>
               </a:rPr>
-              <a:t>Entregable de hoy:</a:t>
+              <a:t>Google Docs · draw.io</a:t>
             </a:r>
             <a:r>
               <a:rPr sz="2000" b="0" i="0">
@@ -6441,7 +7705,16 @@
                 </a:solidFill>
                 <a:latin typeface="Calibri"/>
               </a:rPr>
-              <a:t> Ficha de dominio: problema en 2-3 frases, 3-5 capacidades, 2-3 actores y lo que queda fuera de alcance</a:t>
+              <a:t> · Bloque </a:t>
+            </a:r>
+            <a:r>
+              <a:rPr sz="2000" b="1" i="0">
+                <a:solidFill>
+                  <a:srgbClr val="333333"/>
+                </a:solidFill>
+                <a:latin typeface="Calibri"/>
+              </a:rPr>
+              <a:t>120 min</a:t>
             </a:r>
           </a:p>
           <a:p>
@@ -6457,7 +7730,7 @@
                 </a:solidFill>
                 <a:latin typeface="Calibri"/>
               </a:rPr>
-              <a:t>–   La teoria esta al servicio del producto: al salir, VetCare avanzo.</a:t>
+              <a:t>–   Ejemplo de toda la clase: VetCare, el sistema de la clinica «Huellitas».</a:t>
             </a:r>
           </a:p>
         </p:txBody>
@@ -10367,7 +11640,7 @@
                 </a:solidFill>
                 <a:latin typeface="Calibri"/>
               </a:rPr>
-              <a:t>Encuadre y repaso del avance</a:t>
+              <a:t>Encuadre y repaso</a:t>
             </a:r>
           </a:p>
         </p:txBody>
@@ -10712,7 +11985,7 @@
                 </a:solidFill>
                 <a:latin typeface="Calibri"/>
               </a:rPr>
-              <a:t>Taller guiado = avance del PI</a:t>
+              <a:t>Practica (opcional, guia en la carpeta)</a:t>
             </a:r>
           </a:p>
         </p:txBody>
@@ -10827,7 +12100,7 @@
                 </a:solidFill>
                 <a:latin typeface="Calibri"/>
               </a:rPr>
-              <a:t>Criterios de exito y cierre</a:t>
+              <a:t>Sintesis y cierre</a:t>
             </a:r>
           </a:p>
         </p:txBody>
@@ -11243,13 +12516,13 @@
         <p:spPr>
           <a:xfrm>
             <a:off x="0" y="0"/>
-            <a:ext cx="12191695" cy="1170432"/>
+            <a:ext cx="12191695" cy="164592"/>
           </a:xfrm>
           <a:prstGeom prst="rect">
             <a:avLst/>
           </a:prstGeom>
           <a:solidFill>
-            <a:srgbClr val="095292"/>
+            <a:srgbClr val="269CCB"/>
           </a:solidFill>
           <a:ln>
             <a:noFill/>
@@ -11277,251 +12550,9 @@
           </a:p>
         </p:txBody>
       </p:sp>
-      <p:sp>
-        <p:nvSpPr>
-          <p:cNvPr id="3" name="Rectangle 2"/>
-          <p:cNvSpPr/>
-          <p:nvPr/>
-        </p:nvSpPr>
-        <p:spPr>
-          <a:xfrm>
-            <a:off x="0" y="1170432"/>
-            <a:ext cx="12191695" cy="41148"/>
-          </a:xfrm>
-          <a:prstGeom prst="rect">
-            <a:avLst/>
-          </a:prstGeom>
-          <a:solidFill>
-            <a:srgbClr val="FFD000"/>
-          </a:solidFill>
-          <a:ln>
-            <a:noFill/>
-          </a:ln>
-        </p:spPr>
-        <p:style>
-          <a:lnRef idx="1">
-            <a:schemeClr val="accent1"/>
-          </a:lnRef>
-          <a:fillRef idx="3">
-            <a:schemeClr val="accent1"/>
-          </a:fillRef>
-          <a:effectRef idx="2">
-            <a:schemeClr val="accent1"/>
-          </a:effectRef>
-          <a:fontRef idx="minor">
-            <a:schemeClr val="lt1"/>
-          </a:fontRef>
-        </p:style>
-        <p:txBody>
-          <a:bodyPr rtlCol="0" anchor="ctr"/>
-          <a:lstStyle/>
-          <a:p>
-            <a:pPr algn="ctr"/>
-          </a:p>
-        </p:txBody>
-      </p:sp>
-      <p:sp>
-        <p:nvSpPr>
-          <p:cNvPr id="4" name="TextBox 3"/>
-          <p:cNvSpPr txBox="1"/>
-          <p:nvPr/>
-        </p:nvSpPr>
-        <p:spPr>
-          <a:xfrm>
-            <a:off x="457200" y="164592"/>
-            <a:ext cx="11277295" cy="384048"/>
-          </a:xfrm>
-          <a:prstGeom prst="rect">
-            <a:avLst/>
-          </a:prstGeom>
-          <a:noFill/>
-        </p:spPr>
-        <p:txBody>
-          <a:bodyPr wrap="square">
-            <a:spAutoFit/>
-          </a:bodyPr>
-          <a:lstStyle/>
-          <a:p>
-            <a:r>
-              <a:rPr sz="2600" b="1" i="0">
-                <a:solidFill>
-                  <a:srgbClr val="FFFFFF"/>
-                </a:solidFill>
-                <a:latin typeface="Calibri"/>
-              </a:rPr>
-              <a:t>Herramientas de hoy</a:t>
-            </a:r>
-          </a:p>
-        </p:txBody>
-      </p:sp>
-      <p:sp>
-        <p:nvSpPr>
-          <p:cNvPr id="5" name="TextBox 4"/>
-          <p:cNvSpPr txBox="1"/>
-          <p:nvPr/>
-        </p:nvSpPr>
-        <p:spPr>
-          <a:xfrm>
-            <a:off x="457200" y="566928"/>
-            <a:ext cx="11277295" cy="411480"/>
-          </a:xfrm>
-          <a:prstGeom prst="rect">
-            <a:avLst/>
-          </a:prstGeom>
-          <a:noFill/>
-        </p:spPr>
-        <p:txBody>
-          <a:bodyPr wrap="square">
-            <a:spAutoFit/>
-          </a:bodyPr>
-          <a:lstStyle/>
-          <a:p>
-            <a:r>
-              <a:rPr sz="1400" b="0" i="0">
-                <a:solidFill>
-                  <a:srgbClr val="B8D8EE"/>
-                </a:solidFill>
-                <a:latin typeface="Calibri"/>
-              </a:rPr>
-              <a:t>Gratis · funcionan en el navegador</a:t>
-            </a:r>
-          </a:p>
-        </p:txBody>
-      </p:sp>
-      <p:sp>
-        <p:nvSpPr>
-          <p:cNvPr id="6" name="Rounded Rectangle 5"/>
-          <p:cNvSpPr/>
-          <p:nvPr/>
-        </p:nvSpPr>
-        <p:spPr>
-          <a:xfrm>
-            <a:off x="457200" y="1591056"/>
-            <a:ext cx="3624986" cy="2331720"/>
-          </a:xfrm>
-          <a:prstGeom prst="roundRect">
-            <a:avLst>
-              <a:gd name="adj" fmla="val 12000"/>
-            </a:avLst>
-          </a:prstGeom>
-          <a:solidFill>
-            <a:srgbClr val="F2F2F2"/>
-          </a:solidFill>
-          <a:ln>
-            <a:noFill/>
-          </a:ln>
-        </p:spPr>
-        <p:style>
-          <a:lnRef idx="1">
-            <a:schemeClr val="accent1"/>
-          </a:lnRef>
-          <a:fillRef idx="3">
-            <a:schemeClr val="accent1"/>
-          </a:fillRef>
-          <a:effectRef idx="2">
-            <a:schemeClr val="accent1"/>
-          </a:effectRef>
-          <a:fontRef idx="minor">
-            <a:schemeClr val="lt1"/>
-          </a:fontRef>
-        </p:style>
-        <p:txBody>
-          <a:bodyPr rtlCol="0" anchor="ctr"/>
-          <a:lstStyle/>
-          <a:p>
-            <a:pPr algn="ctr"/>
-          </a:p>
-        </p:txBody>
-      </p:sp>
-      <p:sp>
-        <p:nvSpPr>
-          <p:cNvPr id="7" name="Rectangle 6"/>
-          <p:cNvSpPr/>
-          <p:nvPr/>
-        </p:nvSpPr>
-        <p:spPr>
-          <a:xfrm>
-            <a:off x="457200" y="1591056"/>
-            <a:ext cx="3624986" cy="64008"/>
-          </a:xfrm>
-          <a:prstGeom prst="rect">
-            <a:avLst/>
-          </a:prstGeom>
-          <a:solidFill>
-            <a:srgbClr val="095292"/>
-          </a:solidFill>
-          <a:ln>
-            <a:noFill/>
-          </a:ln>
-        </p:spPr>
-        <p:style>
-          <a:lnRef idx="1">
-            <a:schemeClr val="accent1"/>
-          </a:lnRef>
-          <a:fillRef idx="3">
-            <a:schemeClr val="accent1"/>
-          </a:fillRef>
-          <a:effectRef idx="2">
-            <a:schemeClr val="accent1"/>
-          </a:effectRef>
-          <a:fontRef idx="minor">
-            <a:schemeClr val="lt1"/>
-          </a:fontRef>
-        </p:style>
-        <p:txBody>
-          <a:bodyPr rtlCol="0" anchor="ctr"/>
-          <a:lstStyle/>
-          <a:p>
-            <a:pPr algn="ctr"/>
-          </a:p>
-        </p:txBody>
-      </p:sp>
-      <p:sp>
-        <p:nvSpPr>
-          <p:cNvPr id="8" name="Rectangle 7"/>
-          <p:cNvSpPr/>
-          <p:nvPr/>
-        </p:nvSpPr>
-        <p:spPr>
-          <a:xfrm>
-            <a:off x="457200" y="1655064"/>
-            <a:ext cx="3624986" cy="27432"/>
-          </a:xfrm>
-          <a:prstGeom prst="rect">
-            <a:avLst/>
-          </a:prstGeom>
-          <a:solidFill>
-            <a:srgbClr val="FFD000"/>
-          </a:solidFill>
-          <a:ln>
-            <a:noFill/>
-          </a:ln>
-        </p:spPr>
-        <p:style>
-          <a:lnRef idx="1">
-            <a:schemeClr val="accent1"/>
-          </a:lnRef>
-          <a:fillRef idx="3">
-            <a:schemeClr val="accent1"/>
-          </a:fillRef>
-          <a:effectRef idx="2">
-            <a:schemeClr val="accent1"/>
-          </a:effectRef>
-          <a:fontRef idx="minor">
-            <a:schemeClr val="lt1"/>
-          </a:fontRef>
-        </p:style>
-        <p:txBody>
-          <a:bodyPr rtlCol="0" anchor="ctr"/>
-          <a:lstStyle/>
-          <a:p>
-            <a:pPr algn="ctr"/>
-          </a:p>
-        </p:txBody>
-      </p:sp>
       <p:pic>
         <p:nvPicPr>
-          <p:cNvPr id="9" name="Picture 8" descr="drawio.png"/>
+          <p:cNvPr id="3" name="Picture 2" descr="logo_uniajc_color.png"/>
           <p:cNvPicPr>
             <a:picLocks noChangeAspect="1"/>
           </p:cNvPicPr>
@@ -11535,618 +12566,14 @@
         </p:blipFill>
         <p:spPr>
           <a:xfrm>
-            <a:off x="1643329" y="1847087"/>
-            <a:ext cx="1252728" cy="1252728"/>
+            <a:off x="10271455" y="5998464"/>
+            <a:ext cx="1463040" cy="643233"/>
           </a:xfrm>
           <a:prstGeom prst="rect">
             <a:avLst/>
           </a:prstGeom>
         </p:spPr>
       </p:pic>
-      <p:sp>
-        <p:nvSpPr>
-          <p:cNvPr id="10" name="TextBox 9"/>
-          <p:cNvSpPr txBox="1"/>
-          <p:nvPr/>
-        </p:nvSpPr>
-        <p:spPr>
-          <a:xfrm>
-            <a:off x="530352" y="3191256"/>
-            <a:ext cx="3478682" cy="621792"/>
-          </a:xfrm>
-          <a:prstGeom prst="rect">
-            <a:avLst/>
-          </a:prstGeom>
-          <a:noFill/>
-        </p:spPr>
-        <p:txBody>
-          <a:bodyPr wrap="square" anchor="t"/>
-          <a:lstStyle/>
-          <a:p>
-            <a:pPr algn="ctr"/>
-            <a:r>
-              <a:rPr sz="1300" b="1" i="0">
-                <a:solidFill>
-                  <a:srgbClr val="095292"/>
-                </a:solidFill>
-                <a:latin typeface="Calibri"/>
-              </a:rPr>
-              <a:t>Draw.Io</a:t>
-            </a:r>
-          </a:p>
-          <a:p>
-            <a:pPr algn="ctr">
-              <a:spcBef>
-                <a:spcPts val="200"/>
-              </a:spcBef>
-            </a:pPr>
-            <a:r>
-              <a:rPr sz="1000" b="0" i="0">
-                <a:solidFill>
-                  <a:srgbClr val="666666"/>
-                </a:solidFill>
-                <a:latin typeface="Calibri"/>
-              </a:rPr>
-              <a:t>Diagramas UML y de contexto</a:t>
-            </a:r>
-          </a:p>
-        </p:txBody>
-      </p:sp>
-      <p:sp>
-        <p:nvSpPr>
-          <p:cNvPr id="11" name="Rounded Rectangle 10"/>
-          <p:cNvSpPr/>
-          <p:nvPr/>
-        </p:nvSpPr>
-        <p:spPr>
-          <a:xfrm>
-            <a:off x="4283354" y="1591056"/>
-            <a:ext cx="3624986" cy="2331720"/>
-          </a:xfrm>
-          <a:prstGeom prst="roundRect">
-            <a:avLst>
-              <a:gd name="adj" fmla="val 12000"/>
-            </a:avLst>
-          </a:prstGeom>
-          <a:solidFill>
-            <a:srgbClr val="F2F2F2"/>
-          </a:solidFill>
-          <a:ln>
-            <a:noFill/>
-          </a:ln>
-        </p:spPr>
-        <p:style>
-          <a:lnRef idx="1">
-            <a:schemeClr val="accent1"/>
-          </a:lnRef>
-          <a:fillRef idx="3">
-            <a:schemeClr val="accent1"/>
-          </a:fillRef>
-          <a:effectRef idx="2">
-            <a:schemeClr val="accent1"/>
-          </a:effectRef>
-          <a:fontRef idx="minor">
-            <a:schemeClr val="lt1"/>
-          </a:fontRef>
-        </p:style>
-        <p:txBody>
-          <a:bodyPr rtlCol="0" anchor="ctr"/>
-          <a:lstStyle/>
-          <a:p>
-            <a:pPr algn="ctr"/>
-          </a:p>
-        </p:txBody>
-      </p:sp>
-      <p:sp>
-        <p:nvSpPr>
-          <p:cNvPr id="12" name="Rectangle 11"/>
-          <p:cNvSpPr/>
-          <p:nvPr/>
-        </p:nvSpPr>
-        <p:spPr>
-          <a:xfrm>
-            <a:off x="4283354" y="1591056"/>
-            <a:ext cx="3624986" cy="64008"/>
-          </a:xfrm>
-          <a:prstGeom prst="rect">
-            <a:avLst/>
-          </a:prstGeom>
-          <a:solidFill>
-            <a:srgbClr val="095292"/>
-          </a:solidFill>
-          <a:ln>
-            <a:noFill/>
-          </a:ln>
-        </p:spPr>
-        <p:style>
-          <a:lnRef idx="1">
-            <a:schemeClr val="accent1"/>
-          </a:lnRef>
-          <a:fillRef idx="3">
-            <a:schemeClr val="accent1"/>
-          </a:fillRef>
-          <a:effectRef idx="2">
-            <a:schemeClr val="accent1"/>
-          </a:effectRef>
-          <a:fontRef idx="minor">
-            <a:schemeClr val="lt1"/>
-          </a:fontRef>
-        </p:style>
-        <p:txBody>
-          <a:bodyPr rtlCol="0" anchor="ctr"/>
-          <a:lstStyle/>
-          <a:p>
-            <a:pPr algn="ctr"/>
-          </a:p>
-        </p:txBody>
-      </p:sp>
-      <p:sp>
-        <p:nvSpPr>
-          <p:cNvPr id="13" name="Rectangle 12"/>
-          <p:cNvSpPr/>
-          <p:nvPr/>
-        </p:nvSpPr>
-        <p:spPr>
-          <a:xfrm>
-            <a:off x="4283354" y="1655064"/>
-            <a:ext cx="3624986" cy="27432"/>
-          </a:xfrm>
-          <a:prstGeom prst="rect">
-            <a:avLst/>
-          </a:prstGeom>
-          <a:solidFill>
-            <a:srgbClr val="FFD000"/>
-          </a:solidFill>
-          <a:ln>
-            <a:noFill/>
-          </a:ln>
-        </p:spPr>
-        <p:style>
-          <a:lnRef idx="1">
-            <a:schemeClr val="accent1"/>
-          </a:lnRef>
-          <a:fillRef idx="3">
-            <a:schemeClr val="accent1"/>
-          </a:fillRef>
-          <a:effectRef idx="2">
-            <a:schemeClr val="accent1"/>
-          </a:effectRef>
-          <a:fontRef idx="minor">
-            <a:schemeClr val="lt1"/>
-          </a:fontRef>
-        </p:style>
-        <p:txBody>
-          <a:bodyPr rtlCol="0" anchor="ctr"/>
-          <a:lstStyle/>
-          <a:p>
-            <a:pPr algn="ctr"/>
-          </a:p>
-        </p:txBody>
-      </p:sp>
-      <p:pic>
-        <p:nvPicPr>
-          <p:cNvPr id="14" name="Picture 13" descr="google_docs.png"/>
-          <p:cNvPicPr>
-            <a:picLocks noChangeAspect="1"/>
-          </p:cNvPicPr>
-          <p:nvPr/>
-        </p:nvPicPr>
-        <p:blipFill>
-          <a:blip r:embed="rId3"/>
-          <a:stretch>
-            <a:fillRect/>
-          </a:stretch>
-        </p:blipFill>
-        <p:spPr>
-          <a:xfrm>
-            <a:off x="5469483" y="1847087"/>
-            <a:ext cx="1252728" cy="1252728"/>
-          </a:xfrm>
-          <a:prstGeom prst="rect">
-            <a:avLst/>
-          </a:prstGeom>
-        </p:spPr>
-      </p:pic>
-      <p:sp>
-        <p:nvSpPr>
-          <p:cNvPr id="15" name="TextBox 14"/>
-          <p:cNvSpPr txBox="1"/>
-          <p:nvPr/>
-        </p:nvSpPr>
-        <p:spPr>
-          <a:xfrm>
-            <a:off x="4356506" y="3191256"/>
-            <a:ext cx="3478682" cy="621792"/>
-          </a:xfrm>
-          <a:prstGeom prst="rect">
-            <a:avLst/>
-          </a:prstGeom>
-          <a:noFill/>
-        </p:spPr>
-        <p:txBody>
-          <a:bodyPr wrap="square" anchor="t"/>
-          <a:lstStyle/>
-          <a:p>
-            <a:pPr algn="ctr"/>
-            <a:r>
-              <a:rPr sz="1300" b="1" i="0">
-                <a:solidFill>
-                  <a:srgbClr val="095292"/>
-                </a:solidFill>
-                <a:latin typeface="Calibri"/>
-              </a:rPr>
-              <a:t>google docs</a:t>
-            </a:r>
-          </a:p>
-          <a:p>
-            <a:pPr algn="ctr">
-              <a:spcBef>
-                <a:spcPts val="200"/>
-              </a:spcBef>
-            </a:pPr>
-            <a:r>
-              <a:rPr sz="1000" b="0" i="0">
-                <a:solidFill>
-                  <a:srgbClr val="666666"/>
-                </a:solidFill>
-                <a:latin typeface="Calibri"/>
-              </a:rPr>
-              <a:t>Documentos del paquete de diseño</a:t>
-            </a:r>
-          </a:p>
-        </p:txBody>
-      </p:sp>
-      <p:sp>
-        <p:nvSpPr>
-          <p:cNvPr id="16" name="Rounded Rectangle 15"/>
-          <p:cNvSpPr/>
-          <p:nvPr/>
-        </p:nvSpPr>
-        <p:spPr>
-          <a:xfrm>
-            <a:off x="8109508" y="1591056"/>
-            <a:ext cx="3624986" cy="2331720"/>
-          </a:xfrm>
-          <a:prstGeom prst="roundRect">
-            <a:avLst>
-              <a:gd name="adj" fmla="val 12000"/>
-            </a:avLst>
-          </a:prstGeom>
-          <a:solidFill>
-            <a:srgbClr val="F2F2F2"/>
-          </a:solidFill>
-          <a:ln>
-            <a:noFill/>
-          </a:ln>
-        </p:spPr>
-        <p:style>
-          <a:lnRef idx="1">
-            <a:schemeClr val="accent1"/>
-          </a:lnRef>
-          <a:fillRef idx="3">
-            <a:schemeClr val="accent1"/>
-          </a:fillRef>
-          <a:effectRef idx="2">
-            <a:schemeClr val="accent1"/>
-          </a:effectRef>
-          <a:fontRef idx="minor">
-            <a:schemeClr val="lt1"/>
-          </a:fontRef>
-        </p:style>
-        <p:txBody>
-          <a:bodyPr rtlCol="0" anchor="ctr"/>
-          <a:lstStyle/>
-          <a:p>
-            <a:pPr algn="ctr"/>
-          </a:p>
-        </p:txBody>
-      </p:sp>
-      <p:sp>
-        <p:nvSpPr>
-          <p:cNvPr id="17" name="Rectangle 16"/>
-          <p:cNvSpPr/>
-          <p:nvPr/>
-        </p:nvSpPr>
-        <p:spPr>
-          <a:xfrm>
-            <a:off x="8109508" y="1591056"/>
-            <a:ext cx="3624986" cy="64008"/>
-          </a:xfrm>
-          <a:prstGeom prst="rect">
-            <a:avLst/>
-          </a:prstGeom>
-          <a:solidFill>
-            <a:srgbClr val="095292"/>
-          </a:solidFill>
-          <a:ln>
-            <a:noFill/>
-          </a:ln>
-        </p:spPr>
-        <p:style>
-          <a:lnRef idx="1">
-            <a:schemeClr val="accent1"/>
-          </a:lnRef>
-          <a:fillRef idx="3">
-            <a:schemeClr val="accent1"/>
-          </a:fillRef>
-          <a:effectRef idx="2">
-            <a:schemeClr val="accent1"/>
-          </a:effectRef>
-          <a:fontRef idx="minor">
-            <a:schemeClr val="lt1"/>
-          </a:fontRef>
-        </p:style>
-        <p:txBody>
-          <a:bodyPr rtlCol="0" anchor="ctr"/>
-          <a:lstStyle/>
-          <a:p>
-            <a:pPr algn="ctr"/>
-          </a:p>
-        </p:txBody>
-      </p:sp>
-      <p:sp>
-        <p:nvSpPr>
-          <p:cNvPr id="18" name="Rectangle 17"/>
-          <p:cNvSpPr/>
-          <p:nvPr/>
-        </p:nvSpPr>
-        <p:spPr>
-          <a:xfrm>
-            <a:off x="8109508" y="1655064"/>
-            <a:ext cx="3624986" cy="27432"/>
-          </a:xfrm>
-          <a:prstGeom prst="rect">
-            <a:avLst/>
-          </a:prstGeom>
-          <a:solidFill>
-            <a:srgbClr val="FFD000"/>
-          </a:solidFill>
-          <a:ln>
-            <a:noFill/>
-          </a:ln>
-        </p:spPr>
-        <p:style>
-          <a:lnRef idx="1">
-            <a:schemeClr val="accent1"/>
-          </a:lnRef>
-          <a:fillRef idx="3">
-            <a:schemeClr val="accent1"/>
-          </a:fillRef>
-          <a:effectRef idx="2">
-            <a:schemeClr val="accent1"/>
-          </a:effectRef>
-          <a:fontRef idx="minor">
-            <a:schemeClr val="lt1"/>
-          </a:fontRef>
-        </p:style>
-        <p:txBody>
-          <a:bodyPr rtlCol="0" anchor="ctr"/>
-          <a:lstStyle/>
-          <a:p>
-            <a:pPr algn="ctr"/>
-          </a:p>
-        </p:txBody>
-      </p:sp>
-      <p:pic>
-        <p:nvPicPr>
-          <p:cNvPr id="19" name="Picture 18" descr="examlab.png"/>
-          <p:cNvPicPr>
-            <a:picLocks noChangeAspect="1"/>
-          </p:cNvPicPr>
-          <p:nvPr/>
-        </p:nvPicPr>
-        <p:blipFill>
-          <a:blip r:embed="rId4"/>
-          <a:stretch>
-            <a:fillRect/>
-          </a:stretch>
-        </p:blipFill>
-        <p:spPr>
-          <a:xfrm>
-            <a:off x="9295638" y="1847087"/>
-            <a:ext cx="1252728" cy="1252728"/>
-          </a:xfrm>
-          <a:prstGeom prst="rect">
-            <a:avLst/>
-          </a:prstGeom>
-        </p:spPr>
-      </p:pic>
-      <p:sp>
-        <p:nvSpPr>
-          <p:cNvPr id="20" name="TextBox 19"/>
-          <p:cNvSpPr txBox="1"/>
-          <p:nvPr/>
-        </p:nvSpPr>
-        <p:spPr>
-          <a:xfrm>
-            <a:off x="8182660" y="3191256"/>
-            <a:ext cx="3478682" cy="621792"/>
-          </a:xfrm>
-          <a:prstGeom prst="rect">
-            <a:avLst/>
-          </a:prstGeom>
-          <a:noFill/>
-        </p:spPr>
-        <p:txBody>
-          <a:bodyPr wrap="square" anchor="t"/>
-          <a:lstStyle/>
-          <a:p>
-            <a:pPr algn="ctr"/>
-            <a:r>
-              <a:rPr sz="1300" b="1" i="0">
-                <a:solidFill>
-                  <a:srgbClr val="095292"/>
-                </a:solidFill>
-                <a:latin typeface="Calibri"/>
-              </a:rPr>
-              <a:t>la plataforma del curso</a:t>
-            </a:r>
-          </a:p>
-          <a:p>
-            <a:pPr algn="ctr">
-              <a:spcBef>
-                <a:spcPts val="200"/>
-              </a:spcBef>
-            </a:pPr>
-            <a:r>
-              <a:rPr sz="1000" b="0" i="0">
-                <a:solidFill>
-                  <a:srgbClr val="666666"/>
-                </a:solidFill>
-                <a:latin typeface="Calibri"/>
-              </a:rPr>
-              <a:t>Entrega del taller · en la fecha que indique el docente</a:t>
-            </a:r>
-          </a:p>
-        </p:txBody>
-      </p:sp>
-      <p:sp>
-        <p:nvSpPr>
-          <p:cNvPr id="21" name="TextBox 20"/>
-          <p:cNvSpPr txBox="1"/>
-          <p:nvPr/>
-        </p:nvSpPr>
-        <p:spPr>
-          <a:xfrm>
-            <a:off x="11185855" y="6473952"/>
-            <a:ext cx="640080" cy="274320"/>
-          </a:xfrm>
-          <a:prstGeom prst="rect">
-            <a:avLst/>
-          </a:prstGeom>
-          <a:noFill/>
-        </p:spPr>
-        <p:txBody>
-          <a:bodyPr wrap="square">
-            <a:spAutoFit/>
-          </a:bodyPr>
-          <a:lstStyle/>
-          <a:p>
-            <a:pPr algn="r"/>
-            <a:r>
-              <a:rPr sz="1100" b="0" i="0">
-                <a:solidFill>
-                  <a:srgbClr val="666666"/>
-                </a:solidFill>
-                <a:latin typeface="Calibri"/>
-              </a:rPr>
-              <a:t>31</a:t>
-            </a:r>
-          </a:p>
-        </p:txBody>
-      </p:sp>
-    </p:spTree>
-  </p:cSld>
-  <p:clrMapOvr>
-    <a:masterClrMapping/>
-  </p:clrMapOvr>
-</p:sld>
-</file>
-
-<file path=ppt/slides/slide32.xml><?xml version="1.0" encoding="utf-8"?>
-<p:sld xmlns:a="http://schemas.openxmlformats.org/drawingml/2006/main" xmlns:p="http://schemas.openxmlformats.org/presentationml/2006/main" xmlns:r="http://schemas.openxmlformats.org/officeDocument/2006/relationships">
-  <p:cSld>
-    <p:bg>
-      <p:bgPr>
-        <a:solidFill>
-          <a:srgbClr val="FFFFFF"/>
-        </a:solidFill>
-        <a:effectLst/>
-      </p:bgPr>
-    </p:bg>
-    <p:spTree>
-      <p:nvGrpSpPr>
-        <p:cNvPr id="1" name=""/>
-        <p:cNvGrpSpPr/>
-        <p:nvPr/>
-      </p:nvGrpSpPr>
-      <p:grpSpPr/>
-      <p:sp>
-        <p:nvSpPr>
-          <p:cNvPr id="2" name="Rectangle 1"/>
-          <p:cNvSpPr/>
-          <p:nvPr/>
-        </p:nvSpPr>
-        <p:spPr>
-          <a:xfrm>
-            <a:off x="0" y="0"/>
-            <a:ext cx="12191695" cy="960120"/>
-          </a:xfrm>
-          <a:prstGeom prst="rect">
-            <a:avLst/>
-          </a:prstGeom>
-          <a:solidFill>
-            <a:srgbClr val="095292"/>
-          </a:solidFill>
-          <a:ln>
-            <a:noFill/>
-          </a:ln>
-        </p:spPr>
-        <p:style>
-          <a:lnRef idx="1">
-            <a:schemeClr val="accent1"/>
-          </a:lnRef>
-          <a:fillRef idx="3">
-            <a:schemeClr val="accent1"/>
-          </a:fillRef>
-          <a:effectRef idx="2">
-            <a:schemeClr val="accent1"/>
-          </a:effectRef>
-          <a:fontRef idx="minor">
-            <a:schemeClr val="lt1"/>
-          </a:fontRef>
-        </p:style>
-        <p:txBody>
-          <a:bodyPr rtlCol="0" anchor="ctr"/>
-          <a:lstStyle/>
-          <a:p>
-            <a:pPr algn="ctr"/>
-          </a:p>
-        </p:txBody>
-      </p:sp>
-      <p:sp>
-        <p:nvSpPr>
-          <p:cNvPr id="3" name="Rectangle 2"/>
-          <p:cNvSpPr/>
-          <p:nvPr/>
-        </p:nvSpPr>
-        <p:spPr>
-          <a:xfrm>
-            <a:off x="0" y="960120"/>
-            <a:ext cx="12191695" cy="41148"/>
-          </a:xfrm>
-          <a:prstGeom prst="rect">
-            <a:avLst/>
-          </a:prstGeom>
-          <a:solidFill>
-            <a:srgbClr val="FFD000"/>
-          </a:solidFill>
-          <a:ln>
-            <a:noFill/>
-          </a:ln>
-        </p:spPr>
-        <p:style>
-          <a:lnRef idx="1">
-            <a:schemeClr val="accent1"/>
-          </a:lnRef>
-          <a:fillRef idx="3">
-            <a:schemeClr val="accent1"/>
-          </a:fillRef>
-          <a:effectRef idx="2">
-            <a:schemeClr val="accent1"/>
-          </a:effectRef>
-          <a:fontRef idx="minor">
-            <a:schemeClr val="lt1"/>
-          </a:fontRef>
-        </p:style>
-        <p:txBody>
-          <a:bodyPr rtlCol="0" anchor="ctr"/>
-          <a:lstStyle/>
-          <a:p>
-            <a:pPr algn="ctr"/>
-          </a:p>
-        </p:txBody>
-      </p:sp>
       <p:sp>
         <p:nvSpPr>
           <p:cNvPr id="4" name="TextBox 3"/>
@@ -12155,3144 +12582,6 @@
         </p:nvSpPr>
         <p:spPr>
           <a:xfrm>
-            <a:off x="457200" y="164592"/>
-            <a:ext cx="11277295" cy="502920"/>
-          </a:xfrm>
-          <a:prstGeom prst="rect">
-            <a:avLst/>
-          </a:prstGeom>
-          <a:noFill/>
-        </p:spPr>
-        <p:txBody>
-          <a:bodyPr wrap="square">
-            <a:spAutoFit/>
-          </a:bodyPr>
-          <a:lstStyle/>
-          <a:p>
-            <a:r>
-              <a:rPr sz="2600" b="1" i="0">
-                <a:solidFill>
-                  <a:srgbClr val="FFFFFF"/>
-                </a:solidFill>
-                <a:latin typeface="Calibri"/>
-              </a:rPr>
-              <a:t>Taller PI — por que importa</a:t>
-            </a:r>
-          </a:p>
-        </p:txBody>
-      </p:sp>
-      <p:sp>
-        <p:nvSpPr>
-          <p:cNvPr id="5" name="TextBox 4"/>
-          <p:cNvSpPr txBox="1"/>
-          <p:nvPr/>
-        </p:nvSpPr>
-        <p:spPr>
-          <a:xfrm>
-            <a:off x="457200" y="1170432"/>
-            <a:ext cx="11277295" cy="5230368"/>
-          </a:xfrm>
-          <a:prstGeom prst="rect">
-            <a:avLst/>
-          </a:prstGeom>
-          <a:noFill/>
-        </p:spPr>
-        <p:txBody>
-          <a:bodyPr wrap="square">
-            <a:spAutoFit/>
-          </a:bodyPr>
-          <a:lstStyle/>
-          <a:p>
-            <a:pPr>
-              <a:spcAft>
-                <a:spcPts val="800"/>
-              </a:spcAft>
-            </a:pPr>
-            <a:r>
-              <a:rPr sz="2000" b="0" i="0">
-                <a:solidFill>
-                  <a:srgbClr val="333333"/>
-                </a:solidFill>
-                <a:latin typeface="Calibri"/>
-              </a:rPr>
-              <a:t>–   </a:t>
-            </a:r>
-            <a:r>
-              <a:rPr sz="2000" b="1" i="0">
-                <a:solidFill>
-                  <a:srgbClr val="333333"/>
-                </a:solidFill>
-                <a:latin typeface="Calibri"/>
-              </a:rPr>
-              <a:t>Por que importa al PI:</a:t>
-            </a:r>
-            <a:r>
-              <a:rPr sz="2000" b="0" i="0">
-                <a:solidFill>
-                  <a:srgbClr val="333333"/>
-                </a:solidFill>
-                <a:latin typeface="Calibri"/>
-              </a:rPr>
-              <a:t> la ficha de hoy es la base de todo el paquete de diseño; si el dominio queda vago, los requisitos y los diagramas tambien.</a:t>
-            </a:r>
-          </a:p>
-          <a:p>
-            <a:pPr>
-              <a:spcAft>
-                <a:spcPts val="800"/>
-              </a:spcAft>
-            </a:pPr>
-            <a:r>
-              <a:rPr sz="2000" b="0" i="0">
-                <a:solidFill>
-                  <a:srgbClr val="333333"/>
-                </a:solidFill>
-                <a:latin typeface="Calibri"/>
-              </a:rPr>
-              <a:t>–   En esta asignatura el entregable son los planos, no el codigo: conviene decirlo desde el primer dia.</a:t>
-            </a:r>
-          </a:p>
-          <a:p>
-            <a:pPr>
-              <a:spcAft>
-                <a:spcPts val="800"/>
-              </a:spcAft>
-            </a:pPr>
-            <a:r>
-              <a:rPr sz="2000" b="0" i="0">
-                <a:solidFill>
-                  <a:srgbClr val="333333"/>
-                </a:solidFill>
-                <a:latin typeface="Calibri"/>
-              </a:rPr>
-              <a:t>–   El diagnostico de hoy no tiene nota: sirve para calibrar el ritmo de las proximas clases.</a:t>
-            </a:r>
-          </a:p>
-        </p:txBody>
-      </p:sp>
-      <p:sp>
-        <p:nvSpPr>
-          <p:cNvPr id="6" name="TextBox 5"/>
-          <p:cNvSpPr txBox="1"/>
-          <p:nvPr/>
-        </p:nvSpPr>
-        <p:spPr>
-          <a:xfrm>
-            <a:off x="11185855" y="6473952"/>
-            <a:ext cx="640080" cy="274320"/>
-          </a:xfrm>
-          <a:prstGeom prst="rect">
-            <a:avLst/>
-          </a:prstGeom>
-          <a:noFill/>
-        </p:spPr>
-        <p:txBody>
-          <a:bodyPr wrap="square">
-            <a:spAutoFit/>
-          </a:bodyPr>
-          <a:lstStyle/>
-          <a:p>
-            <a:pPr algn="r"/>
-            <a:r>
-              <a:rPr sz="1100" b="0" i="0">
-                <a:solidFill>
-                  <a:srgbClr val="666666"/>
-                </a:solidFill>
-                <a:latin typeface="Calibri"/>
-              </a:rPr>
-              <a:t>32</a:t>
-            </a:r>
-          </a:p>
-        </p:txBody>
-      </p:sp>
-    </p:spTree>
-  </p:cSld>
-  <p:clrMapOvr>
-    <a:masterClrMapping/>
-  </p:clrMapOvr>
-</p:sld>
-</file>
-
-<file path=ppt/slides/slide33.xml><?xml version="1.0" encoding="utf-8"?>
-<p:sld xmlns:a="http://schemas.openxmlformats.org/drawingml/2006/main" xmlns:p="http://schemas.openxmlformats.org/presentationml/2006/main" xmlns:r="http://schemas.openxmlformats.org/officeDocument/2006/relationships">
-  <p:cSld>
-    <p:bg>
-      <p:bgPr>
-        <a:solidFill>
-          <a:srgbClr val="FFFFFF"/>
-        </a:solidFill>
-        <a:effectLst/>
-      </p:bgPr>
-    </p:bg>
-    <p:spTree>
-      <p:nvGrpSpPr>
-        <p:cNvPr id="1" name=""/>
-        <p:cNvGrpSpPr/>
-        <p:nvPr/>
-      </p:nvGrpSpPr>
-      <p:grpSpPr/>
-      <p:sp>
-        <p:nvSpPr>
-          <p:cNvPr id="2" name="Rectangle 1"/>
-          <p:cNvSpPr/>
-          <p:nvPr/>
-        </p:nvSpPr>
-        <p:spPr>
-          <a:xfrm>
-            <a:off x="0" y="0"/>
-            <a:ext cx="12191695" cy="960120"/>
-          </a:xfrm>
-          <a:prstGeom prst="rect">
-            <a:avLst/>
-          </a:prstGeom>
-          <a:solidFill>
-            <a:srgbClr val="095292"/>
-          </a:solidFill>
-          <a:ln>
-            <a:noFill/>
-          </a:ln>
-        </p:spPr>
-        <p:style>
-          <a:lnRef idx="1">
-            <a:schemeClr val="accent1"/>
-          </a:lnRef>
-          <a:fillRef idx="3">
-            <a:schemeClr val="accent1"/>
-          </a:fillRef>
-          <a:effectRef idx="2">
-            <a:schemeClr val="accent1"/>
-          </a:effectRef>
-          <a:fontRef idx="minor">
-            <a:schemeClr val="lt1"/>
-          </a:fontRef>
-        </p:style>
-        <p:txBody>
-          <a:bodyPr rtlCol="0" anchor="ctr"/>
-          <a:lstStyle/>
-          <a:p>
-            <a:pPr algn="ctr"/>
-          </a:p>
-        </p:txBody>
-      </p:sp>
-      <p:sp>
-        <p:nvSpPr>
-          <p:cNvPr id="3" name="Rectangle 2"/>
-          <p:cNvSpPr/>
-          <p:nvPr/>
-        </p:nvSpPr>
-        <p:spPr>
-          <a:xfrm>
-            <a:off x="0" y="960120"/>
-            <a:ext cx="12191695" cy="41148"/>
-          </a:xfrm>
-          <a:prstGeom prst="rect">
-            <a:avLst/>
-          </a:prstGeom>
-          <a:solidFill>
-            <a:srgbClr val="FFD000"/>
-          </a:solidFill>
-          <a:ln>
-            <a:noFill/>
-          </a:ln>
-        </p:spPr>
-        <p:style>
-          <a:lnRef idx="1">
-            <a:schemeClr val="accent1"/>
-          </a:lnRef>
-          <a:fillRef idx="3">
-            <a:schemeClr val="accent1"/>
-          </a:fillRef>
-          <a:effectRef idx="2">
-            <a:schemeClr val="accent1"/>
-          </a:effectRef>
-          <a:fontRef idx="minor">
-            <a:schemeClr val="lt1"/>
-          </a:fontRef>
-        </p:style>
-        <p:txBody>
-          <a:bodyPr rtlCol="0" anchor="ctr"/>
-          <a:lstStyle/>
-          <a:p>
-            <a:pPr algn="ctr"/>
-          </a:p>
-        </p:txBody>
-      </p:sp>
-      <p:sp>
-        <p:nvSpPr>
-          <p:cNvPr id="4" name="TextBox 3"/>
-          <p:cNvSpPr txBox="1"/>
-          <p:nvPr/>
-        </p:nvSpPr>
-        <p:spPr>
-          <a:xfrm>
-            <a:off x="457200" y="164592"/>
-            <a:ext cx="11277295" cy="502920"/>
-          </a:xfrm>
-          <a:prstGeom prst="rect">
-            <a:avLst/>
-          </a:prstGeom>
-          <a:noFill/>
-        </p:spPr>
-        <p:txBody>
-          <a:bodyPr wrap="square">
-            <a:spAutoFit/>
-          </a:bodyPr>
-          <a:lstStyle/>
-          <a:p>
-            <a:r>
-              <a:rPr sz="2600" b="1" i="0">
-                <a:solidFill>
-                  <a:srgbClr val="FFFFFF"/>
-                </a:solidFill>
-                <a:latin typeface="Calibri"/>
-              </a:rPr>
-              <a:t>Taller PI — punto de partida</a:t>
-            </a:r>
-          </a:p>
-        </p:txBody>
-      </p:sp>
-      <p:sp>
-        <p:nvSpPr>
-          <p:cNvPr id="5" name="TextBox 4"/>
-          <p:cNvSpPr txBox="1"/>
-          <p:nvPr/>
-        </p:nvSpPr>
-        <p:spPr>
-          <a:xfrm>
-            <a:off x="457200" y="1170432"/>
-            <a:ext cx="11277295" cy="5230368"/>
-          </a:xfrm>
-          <a:prstGeom prst="rect">
-            <a:avLst/>
-          </a:prstGeom>
-          <a:noFill/>
-        </p:spPr>
-        <p:txBody>
-          <a:bodyPr wrap="square">
-            <a:spAutoFit/>
-          </a:bodyPr>
-          <a:lstStyle/>
-          <a:p>
-            <a:pPr>
-              <a:spcAft>
-                <a:spcPts val="800"/>
-              </a:spcAft>
-            </a:pPr>
-            <a:r>
-              <a:rPr sz="2000" b="0" i="0">
-                <a:solidFill>
-                  <a:srgbClr val="333333"/>
-                </a:solidFill>
-                <a:latin typeface="Calibri"/>
-              </a:rPr>
-              <a:t>–   Dominio por defecto: la clinica veterinaria Huellitas del Proyecto Integrador.</a:t>
-            </a:r>
-          </a:p>
-          <a:p>
-            <a:pPr>
-              <a:spcAft>
-                <a:spcPts val="800"/>
-              </a:spcAft>
-            </a:pPr>
-            <a:r>
-              <a:rPr sz="2000" b="0" i="0">
-                <a:solidFill>
-                  <a:srgbClr val="333333"/>
-                </a:solidFill>
-                <a:latin typeface="Calibri"/>
-              </a:rPr>
-              <a:t>–   Herramientas: Google Docs para la ficha y draw.io o Excalidraw para el boceto.</a:t>
-            </a:r>
-          </a:p>
-          <a:p>
-            <a:pPr>
-              <a:spcAft>
-                <a:spcPts val="800"/>
-              </a:spcAft>
-            </a:pPr>
-            <a:r>
-              <a:rPr sz="2000" b="0" i="0">
-                <a:solidFill>
-                  <a:srgbClr val="333333"/>
-                </a:solidFill>
-                <a:latin typeface="Calibri"/>
-              </a:rPr>
-              <a:t>–   Se parte de cero: no hay documentacion previa del sistema.</a:t>
-            </a:r>
-          </a:p>
-        </p:txBody>
-      </p:sp>
-      <p:sp>
-        <p:nvSpPr>
-          <p:cNvPr id="6" name="TextBox 5"/>
-          <p:cNvSpPr txBox="1"/>
-          <p:nvPr/>
-        </p:nvSpPr>
-        <p:spPr>
-          <a:xfrm>
-            <a:off x="11185855" y="6473952"/>
-            <a:ext cx="640080" cy="274320"/>
-          </a:xfrm>
-          <a:prstGeom prst="rect">
-            <a:avLst/>
-          </a:prstGeom>
-          <a:noFill/>
-        </p:spPr>
-        <p:txBody>
-          <a:bodyPr wrap="square">
-            <a:spAutoFit/>
-          </a:bodyPr>
-          <a:lstStyle/>
-          <a:p>
-            <a:pPr algn="r"/>
-            <a:r>
-              <a:rPr sz="1100" b="0" i="0">
-                <a:solidFill>
-                  <a:srgbClr val="666666"/>
-                </a:solidFill>
-                <a:latin typeface="Calibri"/>
-              </a:rPr>
-              <a:t>33</a:t>
-            </a:r>
-          </a:p>
-        </p:txBody>
-      </p:sp>
-    </p:spTree>
-  </p:cSld>
-  <p:clrMapOvr>
-    <a:masterClrMapping/>
-  </p:clrMapOvr>
-</p:sld>
-</file>
-
-<file path=ppt/slides/slide34.xml><?xml version="1.0" encoding="utf-8"?>
-<p:sld xmlns:a="http://schemas.openxmlformats.org/drawingml/2006/main" xmlns:p="http://schemas.openxmlformats.org/presentationml/2006/main" xmlns:r="http://schemas.openxmlformats.org/officeDocument/2006/relationships">
-  <p:cSld>
-    <p:bg>
-      <p:bgPr>
-        <a:solidFill>
-          <a:srgbClr val="FFFFFF"/>
-        </a:solidFill>
-        <a:effectLst/>
-      </p:bgPr>
-    </p:bg>
-    <p:spTree>
-      <p:nvGrpSpPr>
-        <p:cNvPr id="1" name=""/>
-        <p:cNvGrpSpPr/>
-        <p:nvPr/>
-      </p:nvGrpSpPr>
-      <p:grpSpPr/>
-      <p:sp>
-        <p:nvSpPr>
-          <p:cNvPr id="2" name="Rectangle 1"/>
-          <p:cNvSpPr/>
-          <p:nvPr/>
-        </p:nvSpPr>
-        <p:spPr>
-          <a:xfrm>
-            <a:off x="0" y="0"/>
-            <a:ext cx="12191695" cy="960120"/>
-          </a:xfrm>
-          <a:prstGeom prst="rect">
-            <a:avLst/>
-          </a:prstGeom>
-          <a:solidFill>
-            <a:srgbClr val="095292"/>
-          </a:solidFill>
-          <a:ln>
-            <a:noFill/>
-          </a:ln>
-        </p:spPr>
-        <p:style>
-          <a:lnRef idx="1">
-            <a:schemeClr val="accent1"/>
-          </a:lnRef>
-          <a:fillRef idx="3">
-            <a:schemeClr val="accent1"/>
-          </a:fillRef>
-          <a:effectRef idx="2">
-            <a:schemeClr val="accent1"/>
-          </a:effectRef>
-          <a:fontRef idx="minor">
-            <a:schemeClr val="lt1"/>
-          </a:fontRef>
-        </p:style>
-        <p:txBody>
-          <a:bodyPr rtlCol="0" anchor="ctr"/>
-          <a:lstStyle/>
-          <a:p>
-            <a:pPr algn="ctr"/>
-          </a:p>
-        </p:txBody>
-      </p:sp>
-      <p:sp>
-        <p:nvSpPr>
-          <p:cNvPr id="3" name="Rectangle 2"/>
-          <p:cNvSpPr/>
-          <p:nvPr/>
-        </p:nvSpPr>
-        <p:spPr>
-          <a:xfrm>
-            <a:off x="0" y="960120"/>
-            <a:ext cx="12191695" cy="41148"/>
-          </a:xfrm>
-          <a:prstGeom prst="rect">
-            <a:avLst/>
-          </a:prstGeom>
-          <a:solidFill>
-            <a:srgbClr val="FFD000"/>
-          </a:solidFill>
-          <a:ln>
-            <a:noFill/>
-          </a:ln>
-        </p:spPr>
-        <p:style>
-          <a:lnRef idx="1">
-            <a:schemeClr val="accent1"/>
-          </a:lnRef>
-          <a:fillRef idx="3">
-            <a:schemeClr val="accent1"/>
-          </a:fillRef>
-          <a:effectRef idx="2">
-            <a:schemeClr val="accent1"/>
-          </a:effectRef>
-          <a:fontRef idx="minor">
-            <a:schemeClr val="lt1"/>
-          </a:fontRef>
-        </p:style>
-        <p:txBody>
-          <a:bodyPr rtlCol="0" anchor="ctr"/>
-          <a:lstStyle/>
-          <a:p>
-            <a:pPr algn="ctr"/>
-          </a:p>
-        </p:txBody>
-      </p:sp>
-      <p:sp>
-        <p:nvSpPr>
-          <p:cNvPr id="4" name="TextBox 3"/>
-          <p:cNvSpPr txBox="1"/>
-          <p:nvPr/>
-        </p:nvSpPr>
-        <p:spPr>
-          <a:xfrm>
-            <a:off x="457200" y="164592"/>
-            <a:ext cx="11277295" cy="502920"/>
-          </a:xfrm>
-          <a:prstGeom prst="rect">
-            <a:avLst/>
-          </a:prstGeom>
-          <a:noFill/>
-        </p:spPr>
-        <p:txBody>
-          <a:bodyPr wrap="square">
-            <a:spAutoFit/>
-          </a:bodyPr>
-          <a:lstStyle/>
-          <a:p>
-            <a:r>
-              <a:rPr sz="2600" b="1" i="0">
-                <a:solidFill>
-                  <a:srgbClr val="FFFFFF"/>
-                </a:solidFill>
-                <a:latin typeface="Calibri"/>
-              </a:rPr>
-              <a:t>Taller PI — pasos guiados</a:t>
-            </a:r>
-          </a:p>
-        </p:txBody>
-      </p:sp>
-      <p:sp>
-        <p:nvSpPr>
-          <p:cNvPr id="5" name="Rounded Rectangle 4"/>
-          <p:cNvSpPr/>
-          <p:nvPr/>
-        </p:nvSpPr>
-        <p:spPr>
-          <a:xfrm>
-            <a:off x="457200" y="1234440"/>
-            <a:ext cx="11277295" cy="950976"/>
-          </a:xfrm>
-          <a:prstGeom prst="roundRect">
-            <a:avLst>
-              <a:gd name="adj" fmla="val 12000"/>
-            </a:avLst>
-          </a:prstGeom>
-          <a:solidFill>
-            <a:srgbClr val="F2F2F2"/>
-          </a:solidFill>
-          <a:ln>
-            <a:noFill/>
-          </a:ln>
-        </p:spPr>
-        <p:style>
-          <a:lnRef idx="1">
-            <a:schemeClr val="accent1"/>
-          </a:lnRef>
-          <a:fillRef idx="3">
-            <a:schemeClr val="accent1"/>
-          </a:fillRef>
-          <a:effectRef idx="2">
-            <a:schemeClr val="accent1"/>
-          </a:effectRef>
-          <a:fontRef idx="minor">
-            <a:schemeClr val="lt1"/>
-          </a:fontRef>
-        </p:style>
-        <p:txBody>
-          <a:bodyPr rtlCol="0" anchor="ctr"/>
-          <a:lstStyle/>
-          <a:p>
-            <a:pPr algn="ctr"/>
-          </a:p>
-        </p:txBody>
-      </p:sp>
-      <p:sp>
-        <p:nvSpPr>
-          <p:cNvPr id="6" name="Rounded Rectangle 5"/>
-          <p:cNvSpPr/>
-          <p:nvPr/>
-        </p:nvSpPr>
-        <p:spPr>
-          <a:xfrm>
-            <a:off x="594360" y="1490472"/>
-            <a:ext cx="438912" cy="438912"/>
-          </a:xfrm>
-          <a:prstGeom prst="roundRect">
-            <a:avLst>
-              <a:gd name="adj" fmla="val 12000"/>
-            </a:avLst>
-          </a:prstGeom>
-          <a:solidFill>
-            <a:srgbClr val="095292"/>
-          </a:solidFill>
-          <a:ln>
-            <a:noFill/>
-          </a:ln>
-        </p:spPr>
-        <p:style>
-          <a:lnRef idx="1">
-            <a:schemeClr val="accent1"/>
-          </a:lnRef>
-          <a:fillRef idx="3">
-            <a:schemeClr val="accent1"/>
-          </a:fillRef>
-          <a:effectRef idx="2">
-            <a:schemeClr val="accent1"/>
-          </a:effectRef>
-          <a:fontRef idx="minor">
-            <a:schemeClr val="lt1"/>
-          </a:fontRef>
-        </p:style>
-        <p:txBody>
-          <a:bodyPr rtlCol="0" anchor="ctr"/>
-          <a:lstStyle/>
-          <a:p>
-            <a:pPr algn="ctr"/>
-          </a:p>
-        </p:txBody>
-      </p:sp>
-      <p:sp>
-        <p:nvSpPr>
-          <p:cNvPr id="7" name="TextBox 6"/>
-          <p:cNvSpPr txBox="1"/>
-          <p:nvPr/>
-        </p:nvSpPr>
-        <p:spPr>
-          <a:xfrm>
-            <a:off x="594360" y="1490472"/>
-            <a:ext cx="438912" cy="438912"/>
-          </a:xfrm>
-          <a:prstGeom prst="rect">
-            <a:avLst/>
-          </a:prstGeom>
-          <a:noFill/>
-        </p:spPr>
-        <p:txBody>
-          <a:bodyPr wrap="square" anchor="ctr"/>
-          <a:lstStyle/>
-          <a:p>
-            <a:pPr algn="ctr"/>
-            <a:r>
-              <a:rPr sz="1600" b="1" i="0">
-                <a:solidFill>
-                  <a:srgbClr val="FFFFFF"/>
-                </a:solidFill>
-                <a:latin typeface="Calibri"/>
-              </a:rPr>
-              <a:t>1</a:t>
-            </a:r>
-          </a:p>
-        </p:txBody>
-      </p:sp>
-      <p:sp>
-        <p:nvSpPr>
-          <p:cNvPr id="8" name="TextBox 7"/>
-          <p:cNvSpPr txBox="1"/>
-          <p:nvPr/>
-        </p:nvSpPr>
-        <p:spPr>
-          <a:xfrm>
-            <a:off x="1188720" y="1325880"/>
-            <a:ext cx="10271455" cy="786384"/>
-          </a:xfrm>
-          <a:prstGeom prst="rect">
-            <a:avLst/>
-          </a:prstGeom>
-          <a:noFill/>
-        </p:spPr>
-        <p:txBody>
-          <a:bodyPr wrap="square" anchor="ctr"/>
-          <a:lstStyle/>
-          <a:p>
-            <a:r>
-              <a:rPr sz="1400" b="1" i="0">
-                <a:solidFill>
-                  <a:srgbClr val="095292"/>
-                </a:solidFill>
-                <a:latin typeface="Calibri"/>
-              </a:rPr>
-              <a:t>Modalidad de trabajo: individual por defecto. Abra su ficha de dominio y escriba su nombre. Si el docente autoriza equipos de 2 o 3 integrantes, la ficha puede ser compartida, pero la entrega en la plataforma del curso siempre es individual y con sus propias palabras.</a:t>
-            </a:r>
-          </a:p>
-        </p:txBody>
-      </p:sp>
-      <p:sp>
-        <p:nvSpPr>
-          <p:cNvPr id="9" name="Rounded Rectangle 8"/>
-          <p:cNvSpPr/>
-          <p:nvPr/>
-        </p:nvSpPr>
-        <p:spPr>
-          <a:xfrm>
-            <a:off x="457200" y="2276856"/>
-            <a:ext cx="11277295" cy="950976"/>
-          </a:xfrm>
-          <a:prstGeom prst="roundRect">
-            <a:avLst>
-              <a:gd name="adj" fmla="val 12000"/>
-            </a:avLst>
-          </a:prstGeom>
-          <a:solidFill>
-            <a:srgbClr val="E8F4FA"/>
-          </a:solidFill>
-          <a:ln>
-            <a:noFill/>
-          </a:ln>
-        </p:spPr>
-        <p:style>
-          <a:lnRef idx="1">
-            <a:schemeClr val="accent1"/>
-          </a:lnRef>
-          <a:fillRef idx="3">
-            <a:schemeClr val="accent1"/>
-          </a:fillRef>
-          <a:effectRef idx="2">
-            <a:schemeClr val="accent1"/>
-          </a:effectRef>
-          <a:fontRef idx="minor">
-            <a:schemeClr val="lt1"/>
-          </a:fontRef>
-        </p:style>
-        <p:txBody>
-          <a:bodyPr rtlCol="0" anchor="ctr"/>
-          <a:lstStyle/>
-          <a:p>
-            <a:pPr algn="ctr"/>
-          </a:p>
-        </p:txBody>
-      </p:sp>
-      <p:sp>
-        <p:nvSpPr>
-          <p:cNvPr id="10" name="Rounded Rectangle 9"/>
-          <p:cNvSpPr/>
-          <p:nvPr/>
-        </p:nvSpPr>
-        <p:spPr>
-          <a:xfrm>
-            <a:off x="594360" y="2532888"/>
-            <a:ext cx="438912" cy="438912"/>
-          </a:xfrm>
-          <a:prstGeom prst="roundRect">
-            <a:avLst>
-              <a:gd name="adj" fmla="val 12000"/>
-            </a:avLst>
-          </a:prstGeom>
-          <a:solidFill>
-            <a:srgbClr val="095292"/>
-          </a:solidFill>
-          <a:ln>
-            <a:noFill/>
-          </a:ln>
-        </p:spPr>
-        <p:style>
-          <a:lnRef idx="1">
-            <a:schemeClr val="accent1"/>
-          </a:lnRef>
-          <a:fillRef idx="3">
-            <a:schemeClr val="accent1"/>
-          </a:fillRef>
-          <a:effectRef idx="2">
-            <a:schemeClr val="accent1"/>
-          </a:effectRef>
-          <a:fontRef idx="minor">
-            <a:schemeClr val="lt1"/>
-          </a:fontRef>
-        </p:style>
-        <p:txBody>
-          <a:bodyPr rtlCol="0" anchor="ctr"/>
-          <a:lstStyle/>
-          <a:p>
-            <a:pPr algn="ctr"/>
-          </a:p>
-        </p:txBody>
-      </p:sp>
-      <p:sp>
-        <p:nvSpPr>
-          <p:cNvPr id="11" name="TextBox 10"/>
-          <p:cNvSpPr txBox="1"/>
-          <p:nvPr/>
-        </p:nvSpPr>
-        <p:spPr>
-          <a:xfrm>
-            <a:off x="594360" y="2532888"/>
-            <a:ext cx="438912" cy="438912"/>
-          </a:xfrm>
-          <a:prstGeom prst="rect">
-            <a:avLst/>
-          </a:prstGeom>
-          <a:noFill/>
-        </p:spPr>
-        <p:txBody>
-          <a:bodyPr wrap="square" anchor="ctr"/>
-          <a:lstStyle/>
-          <a:p>
-            <a:pPr algn="ctr"/>
-            <a:r>
-              <a:rPr sz="1600" b="1" i="0">
-                <a:solidFill>
-                  <a:srgbClr val="FFFFFF"/>
-                </a:solidFill>
-                <a:latin typeface="Calibri"/>
-              </a:rPr>
-              <a:t>2</a:t>
-            </a:r>
-          </a:p>
-        </p:txBody>
-      </p:sp>
-      <p:sp>
-        <p:nvSpPr>
-          <p:cNvPr id="12" name="TextBox 11"/>
-          <p:cNvSpPr txBox="1"/>
-          <p:nvPr/>
-        </p:nvSpPr>
-        <p:spPr>
-          <a:xfrm>
-            <a:off x="1188720" y="2368296"/>
-            <a:ext cx="10271455" cy="786384"/>
-          </a:xfrm>
-          <a:prstGeom prst="rect">
-            <a:avLst/>
-          </a:prstGeom>
-          <a:noFill/>
-        </p:spPr>
-        <p:txBody>
-          <a:bodyPr wrap="square" anchor="ctr"/>
-          <a:lstStyle/>
-          <a:p>
-            <a:r>
-              <a:rPr sz="1500" b="1" i="0">
-                <a:solidFill>
-                  <a:srgbClr val="095292"/>
-                </a:solidFill>
-                <a:latin typeface="Calibri"/>
-              </a:rPr>
-              <a:t>Escriban el problema en 2-3 frases: quien sufre que, y como se nota hoy ese dolor en la operacion diaria de la clinica.</a:t>
-            </a:r>
-          </a:p>
-        </p:txBody>
-      </p:sp>
-      <p:sp>
-        <p:nvSpPr>
-          <p:cNvPr id="13" name="Rounded Rectangle 12"/>
-          <p:cNvSpPr/>
-          <p:nvPr/>
-        </p:nvSpPr>
-        <p:spPr>
-          <a:xfrm>
-            <a:off x="457200" y="3319272"/>
-            <a:ext cx="11277295" cy="950976"/>
-          </a:xfrm>
-          <a:prstGeom prst="roundRect">
-            <a:avLst>
-              <a:gd name="adj" fmla="val 12000"/>
-            </a:avLst>
-          </a:prstGeom>
-          <a:solidFill>
-            <a:srgbClr val="F2F2F2"/>
-          </a:solidFill>
-          <a:ln>
-            <a:noFill/>
-          </a:ln>
-        </p:spPr>
-        <p:style>
-          <a:lnRef idx="1">
-            <a:schemeClr val="accent1"/>
-          </a:lnRef>
-          <a:fillRef idx="3">
-            <a:schemeClr val="accent1"/>
-          </a:fillRef>
-          <a:effectRef idx="2">
-            <a:schemeClr val="accent1"/>
-          </a:effectRef>
-          <a:fontRef idx="minor">
-            <a:schemeClr val="lt1"/>
-          </a:fontRef>
-        </p:style>
-        <p:txBody>
-          <a:bodyPr rtlCol="0" anchor="ctr"/>
-          <a:lstStyle/>
-          <a:p>
-            <a:pPr algn="ctr"/>
-          </a:p>
-        </p:txBody>
-      </p:sp>
-      <p:sp>
-        <p:nvSpPr>
-          <p:cNvPr id="14" name="Rounded Rectangle 13"/>
-          <p:cNvSpPr/>
-          <p:nvPr/>
-        </p:nvSpPr>
-        <p:spPr>
-          <a:xfrm>
-            <a:off x="594360" y="3575304"/>
-            <a:ext cx="438912" cy="438912"/>
-          </a:xfrm>
-          <a:prstGeom prst="roundRect">
-            <a:avLst>
-              <a:gd name="adj" fmla="val 12000"/>
-            </a:avLst>
-          </a:prstGeom>
-          <a:solidFill>
-            <a:srgbClr val="095292"/>
-          </a:solidFill>
-          <a:ln>
-            <a:noFill/>
-          </a:ln>
-        </p:spPr>
-        <p:style>
-          <a:lnRef idx="1">
-            <a:schemeClr val="accent1"/>
-          </a:lnRef>
-          <a:fillRef idx="3">
-            <a:schemeClr val="accent1"/>
-          </a:fillRef>
-          <a:effectRef idx="2">
-            <a:schemeClr val="accent1"/>
-          </a:effectRef>
-          <a:fontRef idx="minor">
-            <a:schemeClr val="lt1"/>
-          </a:fontRef>
-        </p:style>
-        <p:txBody>
-          <a:bodyPr rtlCol="0" anchor="ctr"/>
-          <a:lstStyle/>
-          <a:p>
-            <a:pPr algn="ctr"/>
-          </a:p>
-        </p:txBody>
-      </p:sp>
-      <p:sp>
-        <p:nvSpPr>
-          <p:cNvPr id="15" name="TextBox 14"/>
-          <p:cNvSpPr txBox="1"/>
-          <p:nvPr/>
-        </p:nvSpPr>
-        <p:spPr>
-          <a:xfrm>
-            <a:off x="594360" y="3575304"/>
-            <a:ext cx="438912" cy="438912"/>
-          </a:xfrm>
-          <a:prstGeom prst="rect">
-            <a:avLst/>
-          </a:prstGeom>
-          <a:noFill/>
-        </p:spPr>
-        <p:txBody>
-          <a:bodyPr wrap="square" anchor="ctr"/>
-          <a:lstStyle/>
-          <a:p>
-            <a:pPr algn="ctr"/>
-            <a:r>
-              <a:rPr sz="1600" b="1" i="0">
-                <a:solidFill>
-                  <a:srgbClr val="FFFFFF"/>
-                </a:solidFill>
-                <a:latin typeface="Calibri"/>
-              </a:rPr>
-              <a:t>3</a:t>
-            </a:r>
-          </a:p>
-        </p:txBody>
-      </p:sp>
-      <p:sp>
-        <p:nvSpPr>
-          <p:cNvPr id="16" name="TextBox 15"/>
-          <p:cNvSpPr txBox="1"/>
-          <p:nvPr/>
-        </p:nvSpPr>
-        <p:spPr>
-          <a:xfrm>
-            <a:off x="1188720" y="3410712"/>
-            <a:ext cx="10271455" cy="786384"/>
-          </a:xfrm>
-          <a:prstGeom prst="rect">
-            <a:avLst/>
-          </a:prstGeom>
-          <a:noFill/>
-        </p:spPr>
-        <p:txBody>
-          <a:bodyPr wrap="square" anchor="ctr"/>
-          <a:lstStyle/>
-          <a:p>
-            <a:r>
-              <a:rPr sz="1500" b="1" i="0">
-                <a:solidFill>
-                  <a:srgbClr val="095292"/>
-                </a:solidFill>
-                <a:latin typeface="Calibri"/>
-              </a:rPr>
-              <a:t>Listen 3-5 capacidades del sistema, escritas como verbos de negocio (registrar, agendar, consultar), no como pantallas.</a:t>
-            </a:r>
-          </a:p>
-        </p:txBody>
-      </p:sp>
-      <p:sp>
-        <p:nvSpPr>
-          <p:cNvPr id="17" name="Rounded Rectangle 16"/>
-          <p:cNvSpPr/>
-          <p:nvPr/>
-        </p:nvSpPr>
-        <p:spPr>
-          <a:xfrm>
-            <a:off x="457200" y="4361688"/>
-            <a:ext cx="11277295" cy="950976"/>
-          </a:xfrm>
-          <a:prstGeom prst="roundRect">
-            <a:avLst>
-              <a:gd name="adj" fmla="val 12000"/>
-            </a:avLst>
-          </a:prstGeom>
-          <a:solidFill>
-            <a:srgbClr val="E8F4FA"/>
-          </a:solidFill>
-          <a:ln>
-            <a:noFill/>
-          </a:ln>
-        </p:spPr>
-        <p:style>
-          <a:lnRef idx="1">
-            <a:schemeClr val="accent1"/>
-          </a:lnRef>
-          <a:fillRef idx="3">
-            <a:schemeClr val="accent1"/>
-          </a:fillRef>
-          <a:effectRef idx="2">
-            <a:schemeClr val="accent1"/>
-          </a:effectRef>
-          <a:fontRef idx="minor">
-            <a:schemeClr val="lt1"/>
-          </a:fontRef>
-        </p:style>
-        <p:txBody>
-          <a:bodyPr rtlCol="0" anchor="ctr"/>
-          <a:lstStyle/>
-          <a:p>
-            <a:pPr algn="ctr"/>
-          </a:p>
-        </p:txBody>
-      </p:sp>
-      <p:sp>
-        <p:nvSpPr>
-          <p:cNvPr id="18" name="Rounded Rectangle 17"/>
-          <p:cNvSpPr/>
-          <p:nvPr/>
-        </p:nvSpPr>
-        <p:spPr>
-          <a:xfrm>
-            <a:off x="594360" y="4617720"/>
-            <a:ext cx="438912" cy="438912"/>
-          </a:xfrm>
-          <a:prstGeom prst="roundRect">
-            <a:avLst>
-              <a:gd name="adj" fmla="val 12000"/>
-            </a:avLst>
-          </a:prstGeom>
-          <a:solidFill>
-            <a:srgbClr val="095292"/>
-          </a:solidFill>
-          <a:ln>
-            <a:noFill/>
-          </a:ln>
-        </p:spPr>
-        <p:style>
-          <a:lnRef idx="1">
-            <a:schemeClr val="accent1"/>
-          </a:lnRef>
-          <a:fillRef idx="3">
-            <a:schemeClr val="accent1"/>
-          </a:fillRef>
-          <a:effectRef idx="2">
-            <a:schemeClr val="accent1"/>
-          </a:effectRef>
-          <a:fontRef idx="minor">
-            <a:schemeClr val="lt1"/>
-          </a:fontRef>
-        </p:style>
-        <p:txBody>
-          <a:bodyPr rtlCol="0" anchor="ctr"/>
-          <a:lstStyle/>
-          <a:p>
-            <a:pPr algn="ctr"/>
-          </a:p>
-        </p:txBody>
-      </p:sp>
-      <p:sp>
-        <p:nvSpPr>
-          <p:cNvPr id="19" name="TextBox 18"/>
-          <p:cNvSpPr txBox="1"/>
-          <p:nvPr/>
-        </p:nvSpPr>
-        <p:spPr>
-          <a:xfrm>
-            <a:off x="594360" y="4617720"/>
-            <a:ext cx="438912" cy="438912"/>
-          </a:xfrm>
-          <a:prstGeom prst="rect">
-            <a:avLst/>
-          </a:prstGeom>
-          <a:noFill/>
-        </p:spPr>
-        <p:txBody>
-          <a:bodyPr wrap="square" anchor="ctr"/>
-          <a:lstStyle/>
-          <a:p>
-            <a:pPr algn="ctr"/>
-            <a:r>
-              <a:rPr sz="1600" b="1" i="0">
-                <a:solidFill>
-                  <a:srgbClr val="FFFFFF"/>
-                </a:solidFill>
-                <a:latin typeface="Calibri"/>
-              </a:rPr>
-              <a:t>4</a:t>
-            </a:r>
-          </a:p>
-        </p:txBody>
-      </p:sp>
-      <p:sp>
-        <p:nvSpPr>
-          <p:cNvPr id="20" name="TextBox 19"/>
-          <p:cNvSpPr txBox="1"/>
-          <p:nvPr/>
-        </p:nvSpPr>
-        <p:spPr>
-          <a:xfrm>
-            <a:off x="1188720" y="4453128"/>
-            <a:ext cx="10271455" cy="786384"/>
-          </a:xfrm>
-          <a:prstGeom prst="rect">
-            <a:avLst/>
-          </a:prstGeom>
-          <a:noFill/>
-        </p:spPr>
-        <p:txBody>
-          <a:bodyPr wrap="square" anchor="ctr"/>
-          <a:lstStyle/>
-          <a:p>
-            <a:r>
-              <a:rPr sz="1500" b="1" i="0">
-                <a:solidFill>
-                  <a:srgbClr val="095292"/>
-                </a:solidFill>
-                <a:latin typeface="Calibri"/>
-              </a:rPr>
-              <a:t>Identifiquen 2-3 actores y, para cada uno, que espera obtener del sistema.</a:t>
-            </a:r>
-          </a:p>
-        </p:txBody>
-      </p:sp>
-      <p:sp>
-        <p:nvSpPr>
-          <p:cNvPr id="21" name="Rounded Rectangle 20"/>
-          <p:cNvSpPr/>
-          <p:nvPr/>
-        </p:nvSpPr>
-        <p:spPr>
-          <a:xfrm>
-            <a:off x="457200" y="5404104"/>
-            <a:ext cx="11277295" cy="950976"/>
-          </a:xfrm>
-          <a:prstGeom prst="roundRect">
-            <a:avLst>
-              <a:gd name="adj" fmla="val 12000"/>
-            </a:avLst>
-          </a:prstGeom>
-          <a:solidFill>
-            <a:srgbClr val="F2F2F2"/>
-          </a:solidFill>
-          <a:ln>
-            <a:noFill/>
-          </a:ln>
-        </p:spPr>
-        <p:style>
-          <a:lnRef idx="1">
-            <a:schemeClr val="accent1"/>
-          </a:lnRef>
-          <a:fillRef idx="3">
-            <a:schemeClr val="accent1"/>
-          </a:fillRef>
-          <a:effectRef idx="2">
-            <a:schemeClr val="accent1"/>
-          </a:effectRef>
-          <a:fontRef idx="minor">
-            <a:schemeClr val="lt1"/>
-          </a:fontRef>
-        </p:style>
-        <p:txBody>
-          <a:bodyPr rtlCol="0" anchor="ctr"/>
-          <a:lstStyle/>
-          <a:p>
-            <a:pPr algn="ctr"/>
-          </a:p>
-        </p:txBody>
-      </p:sp>
-      <p:sp>
-        <p:nvSpPr>
-          <p:cNvPr id="22" name="Rounded Rectangle 21"/>
-          <p:cNvSpPr/>
-          <p:nvPr/>
-        </p:nvSpPr>
-        <p:spPr>
-          <a:xfrm>
-            <a:off x="594360" y="5660136"/>
-            <a:ext cx="438912" cy="438912"/>
-          </a:xfrm>
-          <a:prstGeom prst="roundRect">
-            <a:avLst>
-              <a:gd name="adj" fmla="val 12000"/>
-            </a:avLst>
-          </a:prstGeom>
-          <a:solidFill>
-            <a:srgbClr val="095292"/>
-          </a:solidFill>
-          <a:ln>
-            <a:noFill/>
-          </a:ln>
-        </p:spPr>
-        <p:style>
-          <a:lnRef idx="1">
-            <a:schemeClr val="accent1"/>
-          </a:lnRef>
-          <a:fillRef idx="3">
-            <a:schemeClr val="accent1"/>
-          </a:fillRef>
-          <a:effectRef idx="2">
-            <a:schemeClr val="accent1"/>
-          </a:effectRef>
-          <a:fontRef idx="minor">
-            <a:schemeClr val="lt1"/>
-          </a:fontRef>
-        </p:style>
-        <p:txBody>
-          <a:bodyPr rtlCol="0" anchor="ctr"/>
-          <a:lstStyle/>
-          <a:p>
-            <a:pPr algn="ctr"/>
-          </a:p>
-        </p:txBody>
-      </p:sp>
-      <p:sp>
-        <p:nvSpPr>
-          <p:cNvPr id="23" name="TextBox 22"/>
-          <p:cNvSpPr txBox="1"/>
-          <p:nvPr/>
-        </p:nvSpPr>
-        <p:spPr>
-          <a:xfrm>
-            <a:off x="594360" y="5660136"/>
-            <a:ext cx="438912" cy="438912"/>
-          </a:xfrm>
-          <a:prstGeom prst="rect">
-            <a:avLst/>
-          </a:prstGeom>
-          <a:noFill/>
-        </p:spPr>
-        <p:txBody>
-          <a:bodyPr wrap="square" anchor="ctr"/>
-          <a:lstStyle/>
-          <a:p>
-            <a:pPr algn="ctr"/>
-            <a:r>
-              <a:rPr sz="1600" b="1" i="0">
-                <a:solidFill>
-                  <a:srgbClr val="FFFFFF"/>
-                </a:solidFill>
-                <a:latin typeface="Calibri"/>
-              </a:rPr>
-              <a:t>5</a:t>
-            </a:r>
-          </a:p>
-        </p:txBody>
-      </p:sp>
-      <p:sp>
-        <p:nvSpPr>
-          <p:cNvPr id="24" name="TextBox 23"/>
-          <p:cNvSpPr txBox="1"/>
-          <p:nvPr/>
-        </p:nvSpPr>
-        <p:spPr>
-          <a:xfrm>
-            <a:off x="1188720" y="5495544"/>
-            <a:ext cx="10271455" cy="786384"/>
-          </a:xfrm>
-          <a:prstGeom prst="rect">
-            <a:avLst/>
-          </a:prstGeom>
-          <a:noFill/>
-        </p:spPr>
-        <p:txBody>
-          <a:bodyPr wrap="square" anchor="ctr"/>
-          <a:lstStyle/>
-          <a:p>
-            <a:r>
-              <a:rPr sz="1500" b="1" i="0">
-                <a:solidFill>
-                  <a:srgbClr val="095292"/>
-                </a:solidFill>
-                <a:latin typeface="Calibri"/>
-              </a:rPr>
-              <a:t>Escriban explicitamente que NO hara el sistema este semestre (fuera de alcance): sin esa lista, el proyecto crece sin control.</a:t>
-            </a:r>
-          </a:p>
-        </p:txBody>
-      </p:sp>
-      <p:sp>
-        <p:nvSpPr>
-          <p:cNvPr id="25" name="TextBox 24"/>
-          <p:cNvSpPr txBox="1"/>
-          <p:nvPr/>
-        </p:nvSpPr>
-        <p:spPr>
-          <a:xfrm>
-            <a:off x="11185855" y="6473952"/>
-            <a:ext cx="640080" cy="274320"/>
-          </a:xfrm>
-          <a:prstGeom prst="rect">
-            <a:avLst/>
-          </a:prstGeom>
-          <a:noFill/>
-        </p:spPr>
-        <p:txBody>
-          <a:bodyPr wrap="square">
-            <a:spAutoFit/>
-          </a:bodyPr>
-          <a:lstStyle/>
-          <a:p>
-            <a:pPr algn="r"/>
-            <a:r>
-              <a:rPr sz="1100" b="0" i="0">
-                <a:solidFill>
-                  <a:srgbClr val="666666"/>
-                </a:solidFill>
-                <a:latin typeface="Calibri"/>
-              </a:rPr>
-              <a:t>34</a:t>
-            </a:r>
-          </a:p>
-        </p:txBody>
-      </p:sp>
-    </p:spTree>
-  </p:cSld>
-  <p:clrMapOvr>
-    <a:masterClrMapping/>
-  </p:clrMapOvr>
-</p:sld>
-</file>
-
-<file path=ppt/slides/slide35.xml><?xml version="1.0" encoding="utf-8"?>
-<p:sld xmlns:a="http://schemas.openxmlformats.org/drawingml/2006/main" xmlns:p="http://schemas.openxmlformats.org/presentationml/2006/main" xmlns:r="http://schemas.openxmlformats.org/officeDocument/2006/relationships">
-  <p:cSld>
-    <p:bg>
-      <p:bgPr>
-        <a:solidFill>
-          <a:srgbClr val="FFFFFF"/>
-        </a:solidFill>
-        <a:effectLst/>
-      </p:bgPr>
-    </p:bg>
-    <p:spTree>
-      <p:nvGrpSpPr>
-        <p:cNvPr id="1" name=""/>
-        <p:cNvGrpSpPr/>
-        <p:nvPr/>
-      </p:nvGrpSpPr>
-      <p:grpSpPr/>
-      <p:sp>
-        <p:nvSpPr>
-          <p:cNvPr id="2" name="Rectangle 1"/>
-          <p:cNvSpPr/>
-          <p:nvPr/>
-        </p:nvSpPr>
-        <p:spPr>
-          <a:xfrm>
-            <a:off x="0" y="0"/>
-            <a:ext cx="12191695" cy="960120"/>
-          </a:xfrm>
-          <a:prstGeom prst="rect">
-            <a:avLst/>
-          </a:prstGeom>
-          <a:solidFill>
-            <a:srgbClr val="095292"/>
-          </a:solidFill>
-          <a:ln>
-            <a:noFill/>
-          </a:ln>
-        </p:spPr>
-        <p:style>
-          <a:lnRef idx="1">
-            <a:schemeClr val="accent1"/>
-          </a:lnRef>
-          <a:fillRef idx="3">
-            <a:schemeClr val="accent1"/>
-          </a:fillRef>
-          <a:effectRef idx="2">
-            <a:schemeClr val="accent1"/>
-          </a:effectRef>
-          <a:fontRef idx="minor">
-            <a:schemeClr val="lt1"/>
-          </a:fontRef>
-        </p:style>
-        <p:txBody>
-          <a:bodyPr rtlCol="0" anchor="ctr"/>
-          <a:lstStyle/>
-          <a:p>
-            <a:pPr algn="ctr"/>
-          </a:p>
-        </p:txBody>
-      </p:sp>
-      <p:sp>
-        <p:nvSpPr>
-          <p:cNvPr id="3" name="Rectangle 2"/>
-          <p:cNvSpPr/>
-          <p:nvPr/>
-        </p:nvSpPr>
-        <p:spPr>
-          <a:xfrm>
-            <a:off x="0" y="960120"/>
-            <a:ext cx="12191695" cy="41148"/>
-          </a:xfrm>
-          <a:prstGeom prst="rect">
-            <a:avLst/>
-          </a:prstGeom>
-          <a:solidFill>
-            <a:srgbClr val="FFD000"/>
-          </a:solidFill>
-          <a:ln>
-            <a:noFill/>
-          </a:ln>
-        </p:spPr>
-        <p:style>
-          <a:lnRef idx="1">
-            <a:schemeClr val="accent1"/>
-          </a:lnRef>
-          <a:fillRef idx="3">
-            <a:schemeClr val="accent1"/>
-          </a:fillRef>
-          <a:effectRef idx="2">
-            <a:schemeClr val="accent1"/>
-          </a:effectRef>
-          <a:fontRef idx="minor">
-            <a:schemeClr val="lt1"/>
-          </a:fontRef>
-        </p:style>
-        <p:txBody>
-          <a:bodyPr rtlCol="0" anchor="ctr"/>
-          <a:lstStyle/>
-          <a:p>
-            <a:pPr algn="ctr"/>
-          </a:p>
-        </p:txBody>
-      </p:sp>
-      <p:sp>
-        <p:nvSpPr>
-          <p:cNvPr id="4" name="TextBox 3"/>
-          <p:cNvSpPr txBox="1"/>
-          <p:nvPr/>
-        </p:nvSpPr>
-        <p:spPr>
-          <a:xfrm>
-            <a:off x="457200" y="164592"/>
-            <a:ext cx="11277295" cy="502920"/>
-          </a:xfrm>
-          <a:prstGeom prst="rect">
-            <a:avLst/>
-          </a:prstGeom>
-          <a:noFill/>
-        </p:spPr>
-        <p:txBody>
-          <a:bodyPr wrap="square">
-            <a:spAutoFit/>
-          </a:bodyPr>
-          <a:lstStyle/>
-          <a:p>
-            <a:r>
-              <a:rPr sz="2600" b="1" i="0">
-                <a:solidFill>
-                  <a:srgbClr val="FFFFFF"/>
-                </a:solidFill>
-                <a:latin typeface="Calibri"/>
-              </a:rPr>
-              <a:t>Antes de entregar — autochequeo</a:t>
-            </a:r>
-          </a:p>
-        </p:txBody>
-      </p:sp>
-      <p:sp>
-        <p:nvSpPr>
-          <p:cNvPr id="5" name="Rounded Rectangle 4"/>
-          <p:cNvSpPr/>
-          <p:nvPr/>
-        </p:nvSpPr>
-        <p:spPr>
-          <a:xfrm>
-            <a:off x="457200" y="1261872"/>
-            <a:ext cx="11277295" cy="566928"/>
-          </a:xfrm>
-          <a:prstGeom prst="roundRect">
-            <a:avLst>
-              <a:gd name="adj" fmla="val 12000"/>
-            </a:avLst>
-          </a:prstGeom>
-          <a:solidFill>
-            <a:srgbClr val="F2F2F2"/>
-          </a:solidFill>
-          <a:ln>
-            <a:noFill/>
-          </a:ln>
-        </p:spPr>
-        <p:style>
-          <a:lnRef idx="1">
-            <a:schemeClr val="accent1"/>
-          </a:lnRef>
-          <a:fillRef idx="3">
-            <a:schemeClr val="accent1"/>
-          </a:fillRef>
-          <a:effectRef idx="2">
-            <a:schemeClr val="accent1"/>
-          </a:effectRef>
-          <a:fontRef idx="minor">
-            <a:schemeClr val="lt1"/>
-          </a:fontRef>
-        </p:style>
-        <p:txBody>
-          <a:bodyPr rtlCol="0" anchor="ctr"/>
-          <a:lstStyle/>
-          <a:p>
-            <a:pPr algn="ctr"/>
-          </a:p>
-        </p:txBody>
-      </p:sp>
-      <p:sp>
-        <p:nvSpPr>
-          <p:cNvPr id="6" name="Rectangle 5"/>
-          <p:cNvSpPr/>
-          <p:nvPr/>
-        </p:nvSpPr>
-        <p:spPr>
-          <a:xfrm>
-            <a:off x="640080" y="1408175"/>
-            <a:ext cx="274320" cy="274320"/>
-          </a:xfrm>
-          <a:prstGeom prst="rect">
-            <a:avLst/>
-          </a:prstGeom>
-          <a:solidFill>
-            <a:srgbClr val="FFFFFF"/>
-          </a:solidFill>
-          <a:ln>
-            <a:solidFill>
-              <a:srgbClr val="333333"/>
-            </a:solidFill>
-          </a:ln>
-        </p:spPr>
-        <p:style>
-          <a:lnRef idx="1">
-            <a:schemeClr val="accent1"/>
-          </a:lnRef>
-          <a:fillRef idx="3">
-            <a:schemeClr val="accent1"/>
-          </a:fillRef>
-          <a:effectRef idx="2">
-            <a:schemeClr val="accent1"/>
-          </a:effectRef>
-          <a:fontRef idx="minor">
-            <a:schemeClr val="lt1"/>
-          </a:fontRef>
-        </p:style>
-        <p:txBody>
-          <a:bodyPr rtlCol="0" anchor="ctr"/>
-          <a:lstStyle/>
-          <a:p>
-            <a:pPr algn="ctr"/>
-          </a:p>
-        </p:txBody>
-      </p:sp>
-      <p:sp>
-        <p:nvSpPr>
-          <p:cNvPr id="7" name="Rectangle 6"/>
-          <p:cNvSpPr/>
-          <p:nvPr/>
-        </p:nvSpPr>
-        <p:spPr>
-          <a:xfrm>
-            <a:off x="640080" y="1408175"/>
-            <a:ext cx="73152" cy="274320"/>
-          </a:xfrm>
-          <a:prstGeom prst="rect">
-            <a:avLst/>
-          </a:prstGeom>
-          <a:solidFill>
-            <a:srgbClr val="269CCB"/>
-          </a:solidFill>
-          <a:ln>
-            <a:noFill/>
-          </a:ln>
-        </p:spPr>
-        <p:style>
-          <a:lnRef idx="1">
-            <a:schemeClr val="accent1"/>
-          </a:lnRef>
-          <a:fillRef idx="3">
-            <a:schemeClr val="accent1"/>
-          </a:fillRef>
-          <a:effectRef idx="2">
-            <a:schemeClr val="accent1"/>
-          </a:effectRef>
-          <a:fontRef idx="minor">
-            <a:schemeClr val="lt1"/>
-          </a:fontRef>
-        </p:style>
-        <p:txBody>
-          <a:bodyPr rtlCol="0" anchor="ctr"/>
-          <a:lstStyle/>
-          <a:p>
-            <a:pPr algn="ctr"/>
-          </a:p>
-        </p:txBody>
-      </p:sp>
-      <p:sp>
-        <p:nvSpPr>
-          <p:cNvPr id="8" name="TextBox 7"/>
-          <p:cNvSpPr txBox="1"/>
-          <p:nvPr/>
-        </p:nvSpPr>
-        <p:spPr>
-          <a:xfrm>
-            <a:off x="1097280" y="1353312"/>
-            <a:ext cx="10362895" cy="402336"/>
-          </a:xfrm>
-          <a:prstGeom prst="rect">
-            <a:avLst/>
-          </a:prstGeom>
-          <a:noFill/>
-        </p:spPr>
-        <p:txBody>
-          <a:bodyPr wrap="square" anchor="ctr"/>
-          <a:lstStyle/>
-          <a:p>
-            <a:r>
-              <a:rPr sz="1500" b="0" i="0">
-                <a:solidFill>
-                  <a:srgbClr val="333333"/>
-                </a:solidFill>
-                <a:latin typeface="Calibri"/>
-              </a:rPr>
-              <a:t>¿Quien sufre el problema y como se mide hoy ese sufrimiento?</a:t>
-            </a:r>
-          </a:p>
-        </p:txBody>
-      </p:sp>
-      <p:sp>
-        <p:nvSpPr>
-          <p:cNvPr id="9" name="Rounded Rectangle 8"/>
-          <p:cNvSpPr/>
-          <p:nvPr/>
-        </p:nvSpPr>
-        <p:spPr>
-          <a:xfrm>
-            <a:off x="457200" y="1938528"/>
-            <a:ext cx="11277295" cy="566928"/>
-          </a:xfrm>
-          <a:prstGeom prst="roundRect">
-            <a:avLst>
-              <a:gd name="adj" fmla="val 12000"/>
-            </a:avLst>
-          </a:prstGeom>
-          <a:solidFill>
-            <a:srgbClr val="F2F2F2"/>
-          </a:solidFill>
-          <a:ln>
-            <a:noFill/>
-          </a:ln>
-        </p:spPr>
-        <p:style>
-          <a:lnRef idx="1">
-            <a:schemeClr val="accent1"/>
-          </a:lnRef>
-          <a:fillRef idx="3">
-            <a:schemeClr val="accent1"/>
-          </a:fillRef>
-          <a:effectRef idx="2">
-            <a:schemeClr val="accent1"/>
-          </a:effectRef>
-          <a:fontRef idx="minor">
-            <a:schemeClr val="lt1"/>
-          </a:fontRef>
-        </p:style>
-        <p:txBody>
-          <a:bodyPr rtlCol="0" anchor="ctr"/>
-          <a:lstStyle/>
-          <a:p>
-            <a:pPr algn="ctr"/>
-          </a:p>
-        </p:txBody>
-      </p:sp>
-      <p:sp>
-        <p:nvSpPr>
-          <p:cNvPr id="10" name="Rectangle 9"/>
-          <p:cNvSpPr/>
-          <p:nvPr/>
-        </p:nvSpPr>
-        <p:spPr>
-          <a:xfrm>
-            <a:off x="640080" y="2084832"/>
-            <a:ext cx="274320" cy="274320"/>
-          </a:xfrm>
-          <a:prstGeom prst="rect">
-            <a:avLst/>
-          </a:prstGeom>
-          <a:solidFill>
-            <a:srgbClr val="FFFFFF"/>
-          </a:solidFill>
-          <a:ln>
-            <a:solidFill>
-              <a:srgbClr val="333333"/>
-            </a:solidFill>
-          </a:ln>
-        </p:spPr>
-        <p:style>
-          <a:lnRef idx="1">
-            <a:schemeClr val="accent1"/>
-          </a:lnRef>
-          <a:fillRef idx="3">
-            <a:schemeClr val="accent1"/>
-          </a:fillRef>
-          <a:effectRef idx="2">
-            <a:schemeClr val="accent1"/>
-          </a:effectRef>
-          <a:fontRef idx="minor">
-            <a:schemeClr val="lt1"/>
-          </a:fontRef>
-        </p:style>
-        <p:txBody>
-          <a:bodyPr rtlCol="0" anchor="ctr"/>
-          <a:lstStyle/>
-          <a:p>
-            <a:pPr algn="ctr"/>
-          </a:p>
-        </p:txBody>
-      </p:sp>
-      <p:sp>
-        <p:nvSpPr>
-          <p:cNvPr id="11" name="Rectangle 10"/>
-          <p:cNvSpPr/>
-          <p:nvPr/>
-        </p:nvSpPr>
-        <p:spPr>
-          <a:xfrm>
-            <a:off x="640080" y="2084832"/>
-            <a:ext cx="73152" cy="274320"/>
-          </a:xfrm>
-          <a:prstGeom prst="rect">
-            <a:avLst/>
-          </a:prstGeom>
-          <a:solidFill>
-            <a:srgbClr val="269CCB"/>
-          </a:solidFill>
-          <a:ln>
-            <a:noFill/>
-          </a:ln>
-        </p:spPr>
-        <p:style>
-          <a:lnRef idx="1">
-            <a:schemeClr val="accent1"/>
-          </a:lnRef>
-          <a:fillRef idx="3">
-            <a:schemeClr val="accent1"/>
-          </a:fillRef>
-          <a:effectRef idx="2">
-            <a:schemeClr val="accent1"/>
-          </a:effectRef>
-          <a:fontRef idx="minor">
-            <a:schemeClr val="lt1"/>
-          </a:fontRef>
-        </p:style>
-        <p:txBody>
-          <a:bodyPr rtlCol="0" anchor="ctr"/>
-          <a:lstStyle/>
-          <a:p>
-            <a:pPr algn="ctr"/>
-          </a:p>
-        </p:txBody>
-      </p:sp>
-      <p:sp>
-        <p:nvSpPr>
-          <p:cNvPr id="12" name="TextBox 11"/>
-          <p:cNvSpPr txBox="1"/>
-          <p:nvPr/>
-        </p:nvSpPr>
-        <p:spPr>
-          <a:xfrm>
-            <a:off x="1097280" y="2029968"/>
-            <a:ext cx="10362895" cy="402336"/>
-          </a:xfrm>
-          <a:prstGeom prst="rect">
-            <a:avLst/>
-          </a:prstGeom>
-          <a:noFill/>
-        </p:spPr>
-        <p:txBody>
-          <a:bodyPr wrap="square" anchor="ctr"/>
-          <a:lstStyle/>
-          <a:p>
-            <a:r>
-              <a:rPr sz="1500" b="0" i="0">
-                <a:solidFill>
-                  <a:srgbClr val="333333"/>
-                </a:solidFill>
-                <a:latin typeface="Calibri"/>
-              </a:rPr>
-              <a:t>¿Otro compañero entenderia mi sistema en 30 segundos, sin que se lo explique?</a:t>
-            </a:r>
-          </a:p>
-        </p:txBody>
-      </p:sp>
-      <p:sp>
-        <p:nvSpPr>
-          <p:cNvPr id="13" name="Rounded Rectangle 12"/>
-          <p:cNvSpPr/>
-          <p:nvPr/>
-        </p:nvSpPr>
-        <p:spPr>
-          <a:xfrm>
-            <a:off x="457200" y="2615184"/>
-            <a:ext cx="11277295" cy="566928"/>
-          </a:xfrm>
-          <a:prstGeom prst="roundRect">
-            <a:avLst>
-              <a:gd name="adj" fmla="val 12000"/>
-            </a:avLst>
-          </a:prstGeom>
-          <a:solidFill>
-            <a:srgbClr val="F2F2F2"/>
-          </a:solidFill>
-          <a:ln>
-            <a:noFill/>
-          </a:ln>
-        </p:spPr>
-        <p:style>
-          <a:lnRef idx="1">
-            <a:schemeClr val="accent1"/>
-          </a:lnRef>
-          <a:fillRef idx="3">
-            <a:schemeClr val="accent1"/>
-          </a:fillRef>
-          <a:effectRef idx="2">
-            <a:schemeClr val="accent1"/>
-          </a:effectRef>
-          <a:fontRef idx="minor">
-            <a:schemeClr val="lt1"/>
-          </a:fontRef>
-        </p:style>
-        <p:txBody>
-          <a:bodyPr rtlCol="0" anchor="ctr"/>
-          <a:lstStyle/>
-          <a:p>
-            <a:pPr algn="ctr"/>
-          </a:p>
-        </p:txBody>
-      </p:sp>
-      <p:sp>
-        <p:nvSpPr>
-          <p:cNvPr id="14" name="Rectangle 13"/>
-          <p:cNvSpPr/>
-          <p:nvPr/>
-        </p:nvSpPr>
-        <p:spPr>
-          <a:xfrm>
-            <a:off x="640080" y="2761488"/>
-            <a:ext cx="274320" cy="274320"/>
-          </a:xfrm>
-          <a:prstGeom prst="rect">
-            <a:avLst/>
-          </a:prstGeom>
-          <a:solidFill>
-            <a:srgbClr val="FFFFFF"/>
-          </a:solidFill>
-          <a:ln>
-            <a:solidFill>
-              <a:srgbClr val="333333"/>
-            </a:solidFill>
-          </a:ln>
-        </p:spPr>
-        <p:style>
-          <a:lnRef idx="1">
-            <a:schemeClr val="accent1"/>
-          </a:lnRef>
-          <a:fillRef idx="3">
-            <a:schemeClr val="accent1"/>
-          </a:fillRef>
-          <a:effectRef idx="2">
-            <a:schemeClr val="accent1"/>
-          </a:effectRef>
-          <a:fontRef idx="minor">
-            <a:schemeClr val="lt1"/>
-          </a:fontRef>
-        </p:style>
-        <p:txBody>
-          <a:bodyPr rtlCol="0" anchor="ctr"/>
-          <a:lstStyle/>
-          <a:p>
-            <a:pPr algn="ctr"/>
-          </a:p>
-        </p:txBody>
-      </p:sp>
-      <p:sp>
-        <p:nvSpPr>
-          <p:cNvPr id="15" name="Rectangle 14"/>
-          <p:cNvSpPr/>
-          <p:nvPr/>
-        </p:nvSpPr>
-        <p:spPr>
-          <a:xfrm>
-            <a:off x="640080" y="2761488"/>
-            <a:ext cx="73152" cy="274320"/>
-          </a:xfrm>
-          <a:prstGeom prst="rect">
-            <a:avLst/>
-          </a:prstGeom>
-          <a:solidFill>
-            <a:srgbClr val="269CCB"/>
-          </a:solidFill>
-          <a:ln>
-            <a:noFill/>
-          </a:ln>
-        </p:spPr>
-        <p:style>
-          <a:lnRef idx="1">
-            <a:schemeClr val="accent1"/>
-          </a:lnRef>
-          <a:fillRef idx="3">
-            <a:schemeClr val="accent1"/>
-          </a:fillRef>
-          <a:effectRef idx="2">
-            <a:schemeClr val="accent1"/>
-          </a:effectRef>
-          <a:fontRef idx="minor">
-            <a:schemeClr val="lt1"/>
-          </a:fontRef>
-        </p:style>
-        <p:txBody>
-          <a:bodyPr rtlCol="0" anchor="ctr"/>
-          <a:lstStyle/>
-          <a:p>
-            <a:pPr algn="ctr"/>
-          </a:p>
-        </p:txBody>
-      </p:sp>
-      <p:sp>
-        <p:nvSpPr>
-          <p:cNvPr id="16" name="TextBox 15"/>
-          <p:cNvSpPr txBox="1"/>
-          <p:nvPr/>
-        </p:nvSpPr>
-        <p:spPr>
-          <a:xfrm>
-            <a:off x="1097280" y="2706624"/>
-            <a:ext cx="10362895" cy="402336"/>
-          </a:xfrm>
-          <a:prstGeom prst="rect">
-            <a:avLst/>
-          </a:prstGeom>
-          <a:noFill/>
-        </p:spPr>
-        <p:txBody>
-          <a:bodyPr wrap="square" anchor="ctr"/>
-          <a:lstStyle/>
-          <a:p>
-            <a:r>
-              <a:rPr sz="1500" b="0" i="0">
-                <a:solidFill>
-                  <a:srgbClr val="333333"/>
-                </a:solidFill>
-                <a:latin typeface="Calibri"/>
-              </a:rPr>
-              <a:t>¿Escribimos que NO hara el sistema, o dejamos la puerta abierta a que crezca sin control?</a:t>
-            </a:r>
-          </a:p>
-        </p:txBody>
-      </p:sp>
-      <p:sp>
-        <p:nvSpPr>
-          <p:cNvPr id="17" name="TextBox 16"/>
-          <p:cNvSpPr txBox="1"/>
-          <p:nvPr/>
-        </p:nvSpPr>
-        <p:spPr>
-          <a:xfrm>
-            <a:off x="11185855" y="6473952"/>
-            <a:ext cx="640080" cy="274320"/>
-          </a:xfrm>
-          <a:prstGeom prst="rect">
-            <a:avLst/>
-          </a:prstGeom>
-          <a:noFill/>
-        </p:spPr>
-        <p:txBody>
-          <a:bodyPr wrap="square">
-            <a:spAutoFit/>
-          </a:bodyPr>
-          <a:lstStyle/>
-          <a:p>
-            <a:pPr algn="r"/>
-            <a:r>
-              <a:rPr sz="1100" b="0" i="0">
-                <a:solidFill>
-                  <a:srgbClr val="666666"/>
-                </a:solidFill>
-                <a:latin typeface="Calibri"/>
-              </a:rPr>
-              <a:t>35</a:t>
-            </a:r>
-          </a:p>
-        </p:txBody>
-      </p:sp>
-    </p:spTree>
-  </p:cSld>
-  <p:clrMapOvr>
-    <a:masterClrMapping/>
-  </p:clrMapOvr>
-</p:sld>
-</file>
-
-<file path=ppt/slides/slide36.xml><?xml version="1.0" encoding="utf-8"?>
-<p:sld xmlns:a="http://schemas.openxmlformats.org/drawingml/2006/main" xmlns:p="http://schemas.openxmlformats.org/presentationml/2006/main" xmlns:r="http://schemas.openxmlformats.org/officeDocument/2006/relationships">
-  <p:cSld>
-    <p:bg>
-      <p:bgPr>
-        <a:solidFill>
-          <a:srgbClr val="FFFFFF"/>
-        </a:solidFill>
-        <a:effectLst/>
-      </p:bgPr>
-    </p:bg>
-    <p:spTree>
-      <p:nvGrpSpPr>
-        <p:cNvPr id="1" name=""/>
-        <p:cNvGrpSpPr/>
-        <p:nvPr/>
-      </p:nvGrpSpPr>
-      <p:grpSpPr/>
-      <p:sp>
-        <p:nvSpPr>
-          <p:cNvPr id="2" name="Rectangle 1"/>
-          <p:cNvSpPr/>
-          <p:nvPr/>
-        </p:nvSpPr>
-        <p:spPr>
-          <a:xfrm>
-            <a:off x="0" y="0"/>
-            <a:ext cx="12191695" cy="960120"/>
-          </a:xfrm>
-          <a:prstGeom prst="rect">
-            <a:avLst/>
-          </a:prstGeom>
-          <a:solidFill>
-            <a:srgbClr val="095292"/>
-          </a:solidFill>
-          <a:ln>
-            <a:noFill/>
-          </a:ln>
-        </p:spPr>
-        <p:style>
-          <a:lnRef idx="1">
-            <a:schemeClr val="accent1"/>
-          </a:lnRef>
-          <a:fillRef idx="3">
-            <a:schemeClr val="accent1"/>
-          </a:fillRef>
-          <a:effectRef idx="2">
-            <a:schemeClr val="accent1"/>
-          </a:effectRef>
-          <a:fontRef idx="minor">
-            <a:schemeClr val="lt1"/>
-          </a:fontRef>
-        </p:style>
-        <p:txBody>
-          <a:bodyPr rtlCol="0" anchor="ctr"/>
-          <a:lstStyle/>
-          <a:p>
-            <a:pPr algn="ctr"/>
-          </a:p>
-        </p:txBody>
-      </p:sp>
-      <p:sp>
-        <p:nvSpPr>
-          <p:cNvPr id="3" name="Rectangle 2"/>
-          <p:cNvSpPr/>
-          <p:nvPr/>
-        </p:nvSpPr>
-        <p:spPr>
-          <a:xfrm>
-            <a:off x="0" y="960120"/>
-            <a:ext cx="12191695" cy="41148"/>
-          </a:xfrm>
-          <a:prstGeom prst="rect">
-            <a:avLst/>
-          </a:prstGeom>
-          <a:solidFill>
-            <a:srgbClr val="FFD000"/>
-          </a:solidFill>
-          <a:ln>
-            <a:noFill/>
-          </a:ln>
-        </p:spPr>
-        <p:style>
-          <a:lnRef idx="1">
-            <a:schemeClr val="accent1"/>
-          </a:lnRef>
-          <a:fillRef idx="3">
-            <a:schemeClr val="accent1"/>
-          </a:fillRef>
-          <a:effectRef idx="2">
-            <a:schemeClr val="accent1"/>
-          </a:effectRef>
-          <a:fontRef idx="minor">
-            <a:schemeClr val="lt1"/>
-          </a:fontRef>
-        </p:style>
-        <p:txBody>
-          <a:bodyPr rtlCol="0" anchor="ctr"/>
-          <a:lstStyle/>
-          <a:p>
-            <a:pPr algn="ctr"/>
-          </a:p>
-        </p:txBody>
-      </p:sp>
-      <p:sp>
-        <p:nvSpPr>
-          <p:cNvPr id="4" name="TextBox 3"/>
-          <p:cNvSpPr txBox="1"/>
-          <p:nvPr/>
-        </p:nvSpPr>
-        <p:spPr>
-          <a:xfrm>
-            <a:off x="457200" y="164592"/>
-            <a:ext cx="11277295" cy="502920"/>
-          </a:xfrm>
-          <a:prstGeom prst="rect">
-            <a:avLst/>
-          </a:prstGeom>
-          <a:noFill/>
-        </p:spPr>
-        <p:txBody>
-          <a:bodyPr wrap="square">
-            <a:spAutoFit/>
-          </a:bodyPr>
-          <a:lstStyle/>
-          <a:p>
-            <a:r>
-              <a:rPr sz="2600" b="1" i="0">
-                <a:solidFill>
-                  <a:srgbClr val="FFFFFF"/>
-                </a:solidFill>
-                <a:latin typeface="Calibri"/>
-              </a:rPr>
-              <a:t>Criterios de exito / entregable</a:t>
-            </a:r>
-          </a:p>
-        </p:txBody>
-      </p:sp>
-      <p:sp>
-        <p:nvSpPr>
-          <p:cNvPr id="5" name="TextBox 4"/>
-          <p:cNvSpPr txBox="1"/>
-          <p:nvPr/>
-        </p:nvSpPr>
-        <p:spPr>
-          <a:xfrm>
-            <a:off x="457200" y="1170432"/>
-            <a:ext cx="11277295" cy="5230368"/>
-          </a:xfrm>
-          <a:prstGeom prst="rect">
-            <a:avLst/>
-          </a:prstGeom>
-          <a:noFill/>
-        </p:spPr>
-        <p:txBody>
-          <a:bodyPr wrap="square">
-            <a:spAutoFit/>
-          </a:bodyPr>
-          <a:lstStyle/>
-          <a:p>
-            <a:pPr>
-              <a:spcAft>
-                <a:spcPts val="800"/>
-              </a:spcAft>
-            </a:pPr>
-            <a:r>
-              <a:rPr sz="2000" b="0" i="0">
-                <a:solidFill>
-                  <a:srgbClr val="333333"/>
-                </a:solidFill>
-                <a:latin typeface="Calibri"/>
-              </a:rPr>
-              <a:t>–   </a:t>
-            </a:r>
-            <a:r>
-              <a:rPr sz="2000" b="1" i="0">
-                <a:solidFill>
-                  <a:srgbClr val="333333"/>
-                </a:solidFill>
-                <a:latin typeface="Calibri"/>
-              </a:rPr>
-              <a:t>Entregable:</a:t>
-            </a:r>
-            <a:r>
-              <a:rPr sz="2000" b="0" i="0">
-                <a:solidFill>
-                  <a:srgbClr val="333333"/>
-                </a:solidFill>
-                <a:latin typeface="Calibri"/>
-              </a:rPr>
-              <a:t> Ficha de dominio: problema en 2-3 frases, 3-5 capacidades, 2-3 actores y lo que queda fuera de alcance</a:t>
-            </a:r>
-          </a:p>
-          <a:p>
-            <a:pPr>
-              <a:spcAft>
-                <a:spcPts val="800"/>
-              </a:spcAft>
-            </a:pPr>
-            <a:r>
-              <a:rPr sz="2000" b="0" i="0">
-                <a:solidFill>
-                  <a:srgbClr val="333333"/>
-                </a:solidFill>
-                <a:latin typeface="Calibri"/>
-              </a:rPr>
-              <a:t>–   </a:t>
-            </a:r>
-            <a:r>
-              <a:rPr sz="2000" b="1" i="0">
-                <a:solidFill>
-                  <a:srgbClr val="333333"/>
-                </a:solidFill>
-                <a:latin typeface="Calibri"/>
-              </a:rPr>
-              <a:t>Exito:</a:t>
-            </a:r>
-            <a:r>
-              <a:rPr sz="2000" b="0" i="0">
-                <a:solidFill>
-                  <a:srgbClr val="333333"/>
-                </a:solidFill>
-                <a:latin typeface="Calibri"/>
-              </a:rPr>
-              <a:t> El problema nombra un actor concreto y un dolor observable, no una generalidad.</a:t>
-            </a:r>
-          </a:p>
-          <a:p>
-            <a:pPr>
-              <a:spcAft>
-                <a:spcPts val="800"/>
-              </a:spcAft>
-            </a:pPr>
-            <a:r>
-              <a:rPr sz="2000" b="0" i="0">
-                <a:solidFill>
-                  <a:srgbClr val="333333"/>
-                </a:solidFill>
-                <a:latin typeface="Calibri"/>
-              </a:rPr>
-              <a:t>–   </a:t>
-            </a:r>
-            <a:r>
-              <a:rPr sz="2000" b="1" i="0">
-                <a:solidFill>
-                  <a:srgbClr val="333333"/>
-                </a:solidFill>
-                <a:latin typeface="Calibri"/>
-              </a:rPr>
-              <a:t>Exito:</a:t>
-            </a:r>
-            <a:r>
-              <a:rPr sz="2000" b="0" i="0">
-                <a:solidFill>
-                  <a:srgbClr val="333333"/>
-                </a:solidFill>
-                <a:latin typeface="Calibri"/>
-              </a:rPr>
-              <a:t> Las capacidades estan escritas como verbos de negocio y son entre 3 y 5.</a:t>
-            </a:r>
-          </a:p>
-          <a:p>
-            <a:pPr>
-              <a:spcAft>
-                <a:spcPts val="800"/>
-              </a:spcAft>
-            </a:pPr>
-            <a:r>
-              <a:rPr sz="2000" b="0" i="0">
-                <a:solidFill>
-                  <a:srgbClr val="333333"/>
-                </a:solidFill>
-                <a:latin typeface="Calibri"/>
-              </a:rPr>
-              <a:t>–   </a:t>
-            </a:r>
-            <a:r>
-              <a:rPr sz="2000" b="1" i="0">
-                <a:solidFill>
-                  <a:srgbClr val="333333"/>
-                </a:solidFill>
-                <a:latin typeface="Calibri"/>
-              </a:rPr>
-              <a:t>Exito:</a:t>
-            </a:r>
-            <a:r>
-              <a:rPr sz="2000" b="0" i="0">
-                <a:solidFill>
-                  <a:srgbClr val="333333"/>
-                </a:solidFill>
-                <a:latin typeface="Calibri"/>
-              </a:rPr>
-              <a:t> Los actores identificados tienen un interes explicito, no solo un nombre.</a:t>
-            </a:r>
-          </a:p>
-          <a:p>
-            <a:pPr>
-              <a:spcAft>
-                <a:spcPts val="800"/>
-              </a:spcAft>
-            </a:pPr>
-            <a:r>
-              <a:rPr sz="2000" b="0" i="0">
-                <a:solidFill>
-                  <a:srgbClr val="333333"/>
-                </a:solidFill>
-                <a:latin typeface="Calibri"/>
-              </a:rPr>
-              <a:t>–   </a:t>
-            </a:r>
-            <a:r>
-              <a:rPr sz="2000" b="1" i="0">
-                <a:solidFill>
-                  <a:srgbClr val="333333"/>
-                </a:solidFill>
-                <a:latin typeface="Calibri"/>
-              </a:rPr>
-              <a:t>Exito:</a:t>
-            </a:r>
-            <a:r>
-              <a:rPr sz="2000" b="0" i="0">
-                <a:solidFill>
-                  <a:srgbClr val="333333"/>
-                </a:solidFill>
-                <a:latin typeface="Calibri"/>
-              </a:rPr>
-              <a:t> La lista de fuera de alcance existe y es especifica.</a:t>
-            </a:r>
-          </a:p>
-          <a:p>
-            <a:pPr>
-              <a:spcAft>
-                <a:spcPts val="800"/>
-              </a:spcAft>
-            </a:pPr>
-            <a:r>
-              <a:rPr sz="2000" b="0" i="0">
-                <a:solidFill>
-                  <a:srgbClr val="333333"/>
-                </a:solidFill>
-                <a:latin typeface="Calibri"/>
-              </a:rPr>
-              <a:t>–   </a:t>
-            </a:r>
-            <a:r>
-              <a:rPr sz="2000" b="1" i="0">
-                <a:solidFill>
-                  <a:srgbClr val="333333"/>
-                </a:solidFill>
-                <a:latin typeface="Calibri"/>
-              </a:rPr>
-              <a:t>Entrega en la plataforma del curso</a:t>
-            </a:r>
-            <a:r>
-              <a:rPr sz="2000" b="0" i="0">
-                <a:solidFill>
-                  <a:srgbClr val="333333"/>
-                </a:solidFill>
-                <a:latin typeface="Calibri"/>
-              </a:rPr>
-              <a:t> — en la fecha que indique el docente.</a:t>
-            </a:r>
-          </a:p>
-        </p:txBody>
-      </p:sp>
-      <p:sp>
-        <p:nvSpPr>
-          <p:cNvPr id="6" name="TextBox 5"/>
-          <p:cNvSpPr txBox="1"/>
-          <p:nvPr/>
-        </p:nvSpPr>
-        <p:spPr>
-          <a:xfrm>
-            <a:off x="11185855" y="6473952"/>
-            <a:ext cx="640080" cy="274320"/>
-          </a:xfrm>
-          <a:prstGeom prst="rect">
-            <a:avLst/>
-          </a:prstGeom>
-          <a:noFill/>
-        </p:spPr>
-        <p:txBody>
-          <a:bodyPr wrap="square">
-            <a:spAutoFit/>
-          </a:bodyPr>
-          <a:lstStyle/>
-          <a:p>
-            <a:pPr algn="r"/>
-            <a:r>
-              <a:rPr sz="1100" b="0" i="0">
-                <a:solidFill>
-                  <a:srgbClr val="666666"/>
-                </a:solidFill>
-                <a:latin typeface="Calibri"/>
-              </a:rPr>
-              <a:t>36</a:t>
-            </a:r>
-          </a:p>
-        </p:txBody>
-      </p:sp>
-    </p:spTree>
-  </p:cSld>
-  <p:clrMapOvr>
-    <a:masterClrMapping/>
-  </p:clrMapOvr>
-</p:sld>
-</file>
-
-<file path=ppt/slides/slide37.xml><?xml version="1.0" encoding="utf-8"?>
-<p:sld xmlns:a="http://schemas.openxmlformats.org/drawingml/2006/main" xmlns:p="http://schemas.openxmlformats.org/presentationml/2006/main" xmlns:r="http://schemas.openxmlformats.org/officeDocument/2006/relationships">
-  <p:cSld>
-    <p:bg>
-      <p:bgPr>
-        <a:solidFill>
-          <a:srgbClr val="FFFFFF"/>
-        </a:solidFill>
-        <a:effectLst/>
-      </p:bgPr>
-    </p:bg>
-    <p:spTree>
-      <p:nvGrpSpPr>
-        <p:cNvPr id="1" name=""/>
-        <p:cNvGrpSpPr/>
-        <p:nvPr/>
-      </p:nvGrpSpPr>
-      <p:grpSpPr/>
-      <p:sp>
-        <p:nvSpPr>
-          <p:cNvPr id="2" name="Rectangle 1"/>
-          <p:cNvSpPr/>
-          <p:nvPr/>
-        </p:nvSpPr>
-        <p:spPr>
-          <a:xfrm>
-            <a:off x="0" y="0"/>
-            <a:ext cx="12191695" cy="960120"/>
-          </a:xfrm>
-          <a:prstGeom prst="rect">
-            <a:avLst/>
-          </a:prstGeom>
-          <a:solidFill>
-            <a:srgbClr val="095292"/>
-          </a:solidFill>
-          <a:ln>
-            <a:noFill/>
-          </a:ln>
-        </p:spPr>
-        <p:style>
-          <a:lnRef idx="1">
-            <a:schemeClr val="accent1"/>
-          </a:lnRef>
-          <a:fillRef idx="3">
-            <a:schemeClr val="accent1"/>
-          </a:fillRef>
-          <a:effectRef idx="2">
-            <a:schemeClr val="accent1"/>
-          </a:effectRef>
-          <a:fontRef idx="minor">
-            <a:schemeClr val="lt1"/>
-          </a:fontRef>
-        </p:style>
-        <p:txBody>
-          <a:bodyPr rtlCol="0" anchor="ctr"/>
-          <a:lstStyle/>
-          <a:p>
-            <a:pPr algn="ctr"/>
-          </a:p>
-        </p:txBody>
-      </p:sp>
-      <p:sp>
-        <p:nvSpPr>
-          <p:cNvPr id="3" name="Rectangle 2"/>
-          <p:cNvSpPr/>
-          <p:nvPr/>
-        </p:nvSpPr>
-        <p:spPr>
-          <a:xfrm>
-            <a:off x="0" y="960120"/>
-            <a:ext cx="12191695" cy="41148"/>
-          </a:xfrm>
-          <a:prstGeom prst="rect">
-            <a:avLst/>
-          </a:prstGeom>
-          <a:solidFill>
-            <a:srgbClr val="FFD000"/>
-          </a:solidFill>
-          <a:ln>
-            <a:noFill/>
-          </a:ln>
-        </p:spPr>
-        <p:style>
-          <a:lnRef idx="1">
-            <a:schemeClr val="accent1"/>
-          </a:lnRef>
-          <a:fillRef idx="3">
-            <a:schemeClr val="accent1"/>
-          </a:fillRef>
-          <a:effectRef idx="2">
-            <a:schemeClr val="accent1"/>
-          </a:effectRef>
-          <a:fontRef idx="minor">
-            <a:schemeClr val="lt1"/>
-          </a:fontRef>
-        </p:style>
-        <p:txBody>
-          <a:bodyPr rtlCol="0" anchor="ctr"/>
-          <a:lstStyle/>
-          <a:p>
-            <a:pPr algn="ctr"/>
-          </a:p>
-        </p:txBody>
-      </p:sp>
-      <p:sp>
-        <p:nvSpPr>
-          <p:cNvPr id="4" name="TextBox 3"/>
-          <p:cNvSpPr txBox="1"/>
-          <p:nvPr/>
-        </p:nvSpPr>
-        <p:spPr>
-          <a:xfrm>
-            <a:off x="457200" y="164592"/>
-            <a:ext cx="11277295" cy="502920"/>
-          </a:xfrm>
-          <a:prstGeom prst="rect">
-            <a:avLst/>
-          </a:prstGeom>
-          <a:noFill/>
-        </p:spPr>
-        <p:txBody>
-          <a:bodyPr wrap="square">
-            <a:spAutoFit/>
-          </a:bodyPr>
-          <a:lstStyle/>
-          <a:p>
-            <a:r>
-              <a:rPr sz="2600" b="1" i="0">
-                <a:solidFill>
-                  <a:srgbClr val="FFFFFF"/>
-                </a:solidFill>
-                <a:latin typeface="Calibri"/>
-              </a:rPr>
-              <a:t>Para el PI esta semana</a:t>
-            </a:r>
-          </a:p>
-        </p:txBody>
-      </p:sp>
-      <p:sp>
-        <p:nvSpPr>
-          <p:cNvPr id="5" name="Rounded Rectangle 4"/>
-          <p:cNvSpPr/>
-          <p:nvPr/>
-        </p:nvSpPr>
-        <p:spPr>
-          <a:xfrm>
-            <a:off x="457200" y="1261872"/>
-            <a:ext cx="11277295" cy="1051560"/>
-          </a:xfrm>
-          <a:prstGeom prst="roundRect">
-            <a:avLst>
-              <a:gd name="adj" fmla="val 12000"/>
-            </a:avLst>
-          </a:prstGeom>
-          <a:solidFill>
-            <a:srgbClr val="E8F4FA"/>
-          </a:solidFill>
-          <a:ln>
-            <a:noFill/>
-          </a:ln>
-        </p:spPr>
-        <p:style>
-          <a:lnRef idx="1">
-            <a:schemeClr val="accent1"/>
-          </a:lnRef>
-          <a:fillRef idx="3">
-            <a:schemeClr val="accent1"/>
-          </a:fillRef>
-          <a:effectRef idx="2">
-            <a:schemeClr val="accent1"/>
-          </a:effectRef>
-          <a:fontRef idx="minor">
-            <a:schemeClr val="lt1"/>
-          </a:fontRef>
-        </p:style>
-        <p:txBody>
-          <a:bodyPr rtlCol="0" anchor="ctr"/>
-          <a:lstStyle/>
-          <a:p>
-            <a:pPr algn="ctr"/>
-          </a:p>
-        </p:txBody>
-      </p:sp>
-      <p:sp>
-        <p:nvSpPr>
-          <p:cNvPr id="6" name="Rectangle 5"/>
-          <p:cNvSpPr/>
-          <p:nvPr/>
-        </p:nvSpPr>
-        <p:spPr>
-          <a:xfrm>
-            <a:off x="457200" y="1261872"/>
-            <a:ext cx="128016" cy="1051560"/>
-          </a:xfrm>
-          <a:prstGeom prst="rect">
-            <a:avLst/>
-          </a:prstGeom>
-          <a:solidFill>
-            <a:srgbClr val="269CCB"/>
-          </a:solidFill>
-          <a:ln>
-            <a:noFill/>
-          </a:ln>
-        </p:spPr>
-        <p:style>
-          <a:lnRef idx="1">
-            <a:schemeClr val="accent1"/>
-          </a:lnRef>
-          <a:fillRef idx="3">
-            <a:schemeClr val="accent1"/>
-          </a:fillRef>
-          <a:effectRef idx="2">
-            <a:schemeClr val="accent1"/>
-          </a:effectRef>
-          <a:fontRef idx="minor">
-            <a:schemeClr val="lt1"/>
-          </a:fontRef>
-        </p:style>
-        <p:txBody>
-          <a:bodyPr rtlCol="0" anchor="ctr"/>
-          <a:lstStyle/>
-          <a:p>
-            <a:pPr algn="ctr"/>
-          </a:p>
-        </p:txBody>
-      </p:sp>
-      <p:sp>
-        <p:nvSpPr>
-          <p:cNvPr id="7" name="TextBox 6"/>
-          <p:cNvSpPr txBox="1"/>
-          <p:nvPr/>
-        </p:nvSpPr>
-        <p:spPr>
-          <a:xfrm>
-            <a:off x="777240" y="1399031"/>
-            <a:ext cx="10774375" cy="822959"/>
-          </a:xfrm>
-          <a:prstGeom prst="rect">
-            <a:avLst/>
-          </a:prstGeom>
-          <a:noFill/>
-        </p:spPr>
-        <p:txBody>
-          <a:bodyPr wrap="square">
-            <a:spAutoFit/>
-          </a:bodyPr>
-          <a:lstStyle/>
-          <a:p>
-            <a:r>
-              <a:rPr sz="1200" b="1" i="0">
-                <a:solidFill>
-                  <a:srgbClr val="269CCB"/>
-                </a:solidFill>
-                <a:latin typeface="Calibri"/>
-              </a:rPr>
-              <a:t>Info</a:t>
-            </a:r>
-          </a:p>
-          <a:p>
-            <a:pPr>
-              <a:spcBef>
-                <a:spcPts val="400"/>
-              </a:spcBef>
-            </a:pPr>
-            <a:r>
-              <a:rPr sz="1400" b="0" i="0">
-                <a:solidFill>
-                  <a:srgbClr val="333333"/>
-                </a:solidFill>
-                <a:latin typeface="Calibri"/>
-              </a:rPr>
-              <a:t>Hito: Dominio del proyecto acotado (trabajo individual por defecto)</a:t>
-            </a:r>
-          </a:p>
-        </p:txBody>
-      </p:sp>
-      <p:sp>
-        <p:nvSpPr>
-          <p:cNvPr id="8" name="Rounded Rectangle 7"/>
-          <p:cNvSpPr/>
-          <p:nvPr/>
-        </p:nvSpPr>
-        <p:spPr>
-          <a:xfrm>
-            <a:off x="457200" y="2478024"/>
-            <a:ext cx="11277295" cy="1051560"/>
-          </a:xfrm>
-          <a:prstGeom prst="roundRect">
-            <a:avLst>
-              <a:gd name="adj" fmla="val 12000"/>
-            </a:avLst>
-          </a:prstGeom>
-          <a:solidFill>
-            <a:srgbClr val="FFF8E1"/>
-          </a:solidFill>
-          <a:ln>
-            <a:noFill/>
-          </a:ln>
-        </p:spPr>
-        <p:style>
-          <a:lnRef idx="1">
-            <a:schemeClr val="accent1"/>
-          </a:lnRef>
-          <a:fillRef idx="3">
-            <a:schemeClr val="accent1"/>
-          </a:fillRef>
-          <a:effectRef idx="2">
-            <a:schemeClr val="accent1"/>
-          </a:effectRef>
-          <a:fontRef idx="minor">
-            <a:schemeClr val="lt1"/>
-          </a:fontRef>
-        </p:style>
-        <p:txBody>
-          <a:bodyPr rtlCol="0" anchor="ctr"/>
-          <a:lstStyle/>
-          <a:p>
-            <a:pPr algn="ctr"/>
-          </a:p>
-        </p:txBody>
-      </p:sp>
-      <p:sp>
-        <p:nvSpPr>
-          <p:cNvPr id="9" name="Rectangle 8"/>
-          <p:cNvSpPr/>
-          <p:nvPr/>
-        </p:nvSpPr>
-        <p:spPr>
-          <a:xfrm>
-            <a:off x="457200" y="2478024"/>
-            <a:ext cx="128016" cy="1051560"/>
-          </a:xfrm>
-          <a:prstGeom prst="rect">
-            <a:avLst/>
-          </a:prstGeom>
-          <a:solidFill>
-            <a:srgbClr val="FFD000"/>
-          </a:solidFill>
-          <a:ln>
-            <a:noFill/>
-          </a:ln>
-        </p:spPr>
-        <p:style>
-          <a:lnRef idx="1">
-            <a:schemeClr val="accent1"/>
-          </a:lnRef>
-          <a:fillRef idx="3">
-            <a:schemeClr val="accent1"/>
-          </a:fillRef>
-          <a:effectRef idx="2">
-            <a:schemeClr val="accent1"/>
-          </a:effectRef>
-          <a:fontRef idx="minor">
-            <a:schemeClr val="lt1"/>
-          </a:fontRef>
-        </p:style>
-        <p:txBody>
-          <a:bodyPr rtlCol="0" anchor="ctr"/>
-          <a:lstStyle/>
-          <a:p>
-            <a:pPr algn="ctr"/>
-          </a:p>
-        </p:txBody>
-      </p:sp>
-      <p:sp>
-        <p:nvSpPr>
-          <p:cNvPr id="10" name="TextBox 9"/>
-          <p:cNvSpPr txBox="1"/>
-          <p:nvPr/>
-        </p:nvSpPr>
-        <p:spPr>
-          <a:xfrm>
-            <a:off x="777240" y="2615184"/>
-            <a:ext cx="10774375" cy="822959"/>
-          </a:xfrm>
-          <a:prstGeom prst="rect">
-            <a:avLst/>
-          </a:prstGeom>
-          <a:noFill/>
-        </p:spPr>
-        <p:txBody>
-          <a:bodyPr wrap="square">
-            <a:spAutoFit/>
-          </a:bodyPr>
-          <a:lstStyle/>
-          <a:p>
-            <a:r>
-              <a:rPr sz="1200" b="1" i="0">
-                <a:solidFill>
-                  <a:srgbClr val="FFD000"/>
-                </a:solidFill>
-                <a:latin typeface="Calibri"/>
-              </a:rPr>
-              <a:t>Aclaración</a:t>
-            </a:r>
-          </a:p>
-          <a:p>
-            <a:pPr>
-              <a:spcBef>
-                <a:spcPts val="400"/>
-              </a:spcBef>
-            </a:pPr>
-            <a:r>
-              <a:rPr sz="1400" b="0" i="0">
-                <a:solidFill>
-                  <a:srgbClr val="333333"/>
-                </a:solidFill>
-                <a:latin typeface="Calibri"/>
-              </a:rPr>
-              <a:t>Enunciado completo: Clases/Proyecto Integrador/ (VetCare).</a:t>
-            </a:r>
-          </a:p>
-        </p:txBody>
-      </p:sp>
-      <p:sp>
-        <p:nvSpPr>
-          <p:cNvPr id="11" name="Rounded Rectangle 10"/>
-          <p:cNvSpPr/>
-          <p:nvPr/>
-        </p:nvSpPr>
-        <p:spPr>
-          <a:xfrm>
-            <a:off x="457200" y="3694176"/>
-            <a:ext cx="11277295" cy="1051560"/>
-          </a:xfrm>
-          <a:prstGeom prst="roundRect">
-            <a:avLst>
-              <a:gd name="adj" fmla="val 12000"/>
-            </a:avLst>
-          </a:prstGeom>
-          <a:solidFill>
-            <a:srgbClr val="FBE4E4"/>
-          </a:solidFill>
-          <a:ln>
-            <a:noFill/>
-          </a:ln>
-        </p:spPr>
-        <p:style>
-          <a:lnRef idx="1">
-            <a:schemeClr val="accent1"/>
-          </a:lnRef>
-          <a:fillRef idx="3">
-            <a:schemeClr val="accent1"/>
-          </a:fillRef>
-          <a:effectRef idx="2">
-            <a:schemeClr val="accent1"/>
-          </a:effectRef>
-          <a:fontRef idx="minor">
-            <a:schemeClr val="lt1"/>
-          </a:fontRef>
-        </p:style>
-        <p:txBody>
-          <a:bodyPr rtlCol="0" anchor="ctr"/>
-          <a:lstStyle/>
-          <a:p>
-            <a:pPr algn="ctr"/>
-          </a:p>
-        </p:txBody>
-      </p:sp>
-      <p:sp>
-        <p:nvSpPr>
-          <p:cNvPr id="12" name="Rectangle 11"/>
-          <p:cNvSpPr/>
-          <p:nvPr/>
-        </p:nvSpPr>
-        <p:spPr>
-          <a:xfrm>
-            <a:off x="457200" y="3694176"/>
-            <a:ext cx="128016" cy="1051560"/>
-          </a:xfrm>
-          <a:prstGeom prst="rect">
-            <a:avLst/>
-          </a:prstGeom>
-          <a:solidFill>
-            <a:srgbClr val="A02030"/>
-          </a:solidFill>
-          <a:ln>
-            <a:noFill/>
-          </a:ln>
-        </p:spPr>
-        <p:style>
-          <a:lnRef idx="1">
-            <a:schemeClr val="accent1"/>
-          </a:lnRef>
-          <a:fillRef idx="3">
-            <a:schemeClr val="accent1"/>
-          </a:fillRef>
-          <a:effectRef idx="2">
-            <a:schemeClr val="accent1"/>
-          </a:effectRef>
-          <a:fontRef idx="minor">
-            <a:schemeClr val="lt1"/>
-          </a:fontRef>
-        </p:style>
-        <p:txBody>
-          <a:bodyPr rtlCol="0" anchor="ctr"/>
-          <a:lstStyle/>
-          <a:p>
-            <a:pPr algn="ctr"/>
-          </a:p>
-        </p:txBody>
-      </p:sp>
-      <p:sp>
-        <p:nvSpPr>
-          <p:cNvPr id="13" name="TextBox 12"/>
-          <p:cNvSpPr txBox="1"/>
-          <p:nvPr/>
-        </p:nvSpPr>
-        <p:spPr>
-          <a:xfrm>
-            <a:off x="777240" y="3831336"/>
-            <a:ext cx="10774375" cy="822959"/>
-          </a:xfrm>
-          <a:prstGeom prst="rect">
-            <a:avLst/>
-          </a:prstGeom>
-          <a:noFill/>
-        </p:spPr>
-        <p:txBody>
-          <a:bodyPr wrap="square">
-            <a:spAutoFit/>
-          </a:bodyPr>
-          <a:lstStyle/>
-          <a:p>
-            <a:r>
-              <a:rPr sz="1200" b="1" i="0">
-                <a:solidFill>
-                  <a:srgbClr val="A02030"/>
-                </a:solidFill>
-                <a:latin typeface="Calibri"/>
-              </a:rPr>
-              <a:t>Atención</a:t>
-            </a:r>
-          </a:p>
-          <a:p>
-            <a:pPr>
-              <a:spcBef>
-                <a:spcPts val="400"/>
-              </a:spcBef>
-            </a:pPr>
-            <a:r>
-              <a:rPr sz="1400" b="0" i="0">
-                <a:solidFill>
-                  <a:srgbClr val="333333"/>
-                </a:solidFill>
-                <a:latin typeface="Calibri"/>
-              </a:rPr>
-              <a:t>Entrega del taller, si el docente lo asigna · en la fecha que indique el docente.</a:t>
-            </a:r>
-          </a:p>
-        </p:txBody>
-      </p:sp>
-      <p:sp>
-        <p:nvSpPr>
-          <p:cNvPr id="14" name="TextBox 13"/>
-          <p:cNvSpPr txBox="1"/>
-          <p:nvPr/>
-        </p:nvSpPr>
-        <p:spPr>
-          <a:xfrm>
-            <a:off x="11185855" y="6473952"/>
-            <a:ext cx="640080" cy="274320"/>
-          </a:xfrm>
-          <a:prstGeom prst="rect">
-            <a:avLst/>
-          </a:prstGeom>
-          <a:noFill/>
-        </p:spPr>
-        <p:txBody>
-          <a:bodyPr wrap="square">
-            <a:spAutoFit/>
-          </a:bodyPr>
-          <a:lstStyle/>
-          <a:p>
-            <a:pPr algn="r"/>
-            <a:r>
-              <a:rPr sz="1100" b="0" i="0">
-                <a:solidFill>
-                  <a:srgbClr val="666666"/>
-                </a:solidFill>
-                <a:latin typeface="Calibri"/>
-              </a:rPr>
-              <a:t>37</a:t>
-            </a:r>
-          </a:p>
-        </p:txBody>
-      </p:sp>
-    </p:spTree>
-  </p:cSld>
-  <p:clrMapOvr>
-    <a:masterClrMapping/>
-  </p:clrMapOvr>
-</p:sld>
-</file>
-
-<file path=ppt/slides/slide38.xml><?xml version="1.0" encoding="utf-8"?>
-<p:sld xmlns:a="http://schemas.openxmlformats.org/drawingml/2006/main" xmlns:p="http://schemas.openxmlformats.org/presentationml/2006/main" xmlns:r="http://schemas.openxmlformats.org/officeDocument/2006/relationships">
-  <p:cSld>
-    <p:bg>
-      <p:bgPr>
-        <a:solidFill>
-          <a:srgbClr val="FFFFFF"/>
-        </a:solidFill>
-        <a:effectLst/>
-      </p:bgPr>
-    </p:bg>
-    <p:spTree>
-      <p:nvGrpSpPr>
-        <p:cNvPr id="1" name=""/>
-        <p:cNvGrpSpPr/>
-        <p:nvPr/>
-      </p:nvGrpSpPr>
-      <p:grpSpPr/>
-      <p:sp>
-        <p:nvSpPr>
-          <p:cNvPr id="2" name="Rectangle 1"/>
-          <p:cNvSpPr/>
-          <p:nvPr/>
-        </p:nvSpPr>
-        <p:spPr>
-          <a:xfrm>
-            <a:off x="0" y="0"/>
-            <a:ext cx="12191695" cy="164592"/>
-          </a:xfrm>
-          <a:prstGeom prst="rect">
-            <a:avLst/>
-          </a:prstGeom>
-          <a:solidFill>
-            <a:srgbClr val="269CCB"/>
-          </a:solidFill>
-          <a:ln>
-            <a:noFill/>
-          </a:ln>
-        </p:spPr>
-        <p:style>
-          <a:lnRef idx="1">
-            <a:schemeClr val="accent1"/>
-          </a:lnRef>
-          <a:fillRef idx="3">
-            <a:schemeClr val="accent1"/>
-          </a:fillRef>
-          <a:effectRef idx="2">
-            <a:schemeClr val="accent1"/>
-          </a:effectRef>
-          <a:fontRef idx="minor">
-            <a:schemeClr val="lt1"/>
-          </a:fontRef>
-        </p:style>
-        <p:txBody>
-          <a:bodyPr rtlCol="0" anchor="ctr"/>
-          <a:lstStyle/>
-          <a:p>
-            <a:pPr algn="ctr"/>
-          </a:p>
-        </p:txBody>
-      </p:sp>
-      <p:pic>
-        <p:nvPicPr>
-          <p:cNvPr id="3" name="Picture 2" descr="logo_uniajc_color.png"/>
-          <p:cNvPicPr>
-            <a:picLocks noChangeAspect="1"/>
-          </p:cNvPicPr>
-          <p:nvPr/>
-        </p:nvPicPr>
-        <p:blipFill>
-          <a:blip r:embed="rId2"/>
-          <a:stretch>
-            <a:fillRect/>
-          </a:stretch>
-        </p:blipFill>
-        <p:spPr>
-          <a:xfrm>
-            <a:off x="10271455" y="5998464"/>
-            <a:ext cx="1463040" cy="643233"/>
-          </a:xfrm>
-          <a:prstGeom prst="rect">
-            <a:avLst/>
-          </a:prstGeom>
-        </p:spPr>
-      </p:pic>
-      <p:sp>
-        <p:nvSpPr>
-          <p:cNvPr id="4" name="TextBox 3"/>
-          <p:cNvSpPr txBox="1"/>
-          <p:nvPr/>
-        </p:nvSpPr>
-        <p:spPr>
-          <a:xfrm>
             <a:off x="457200" y="1737360"/>
             <a:ext cx="11277295" cy="1097280"/>
           </a:xfrm>
@@ -15313,7 +12602,7 @@
                 </a:solidFill>
                 <a:latin typeface="Calibri"/>
               </a:rPr>
-              <a:t>Clase 1 · VetCare avanza</a:t>
+              <a:t>Clase 1 · Conceptos iniciales de ingenieria de software</a:t>
             </a:r>
           </a:p>
         </p:txBody>
@@ -15352,7 +12641,7 @@
                 </a:solidFill>
                 <a:latin typeface="Calibri"/>
               </a:rPr>
-              <a:t>Dominio del proyecto acotado (trabajo individual por defecto)</a:t>
+              <a:t>Que es diseñar software y por que no es programar</a:t>
             </a:r>
           </a:p>
           <a:p>
@@ -15368,7 +12657,7 @@
                 </a:solidFill>
                 <a:latin typeface="Calibri"/>
               </a:rPr>
-              <a:t>Entregable: Ficha de dominio: problema en 2-3 frases, 3-5 capacidades, 2-3 actores y lo que queda fuera de alcance</a:t>
+              <a:t>Repasen las laminas de teoria: cada concepto esta completo</a:t>
             </a:r>
           </a:p>
           <a:p>
@@ -15384,7 +12673,7 @@
                 </a:solidFill>
                 <a:latin typeface="Calibri"/>
               </a:rPr>
-              <a:t>Siguiente clase: continuamos el hilo del PI</a:t>
+              <a:t>Siguiente clase: continuamos con el siguiente tema</a:t>
             </a:r>
           </a:p>
         </p:txBody>
@@ -15419,7 +12708,7 @@
                 </a:solidFill>
                 <a:latin typeface="Calibri"/>
               </a:rPr>
-              <a:t>Teoria al servicio del proyecto</a:t>
+              <a:t>Teoria al servicio del diseño</a:t>
             </a:r>
           </a:p>
         </p:txBody>
@@ -17342,4 +14631,324 @@
   </a:objectDefaults>
   <a:extraClrSchemeLst/>
 </a:theme>
+</file>
+
+<file path=ppt/theme/theme2.xml><?xml version="1.0" encoding="utf-8"?>
+<a:theme xmlns:a="http://schemas.openxmlformats.org/drawingml/2006/main" name="Office Theme">
+  <a:themeElements>
+    <a:clrScheme name="Office">
+      <a:dk1>
+        <a:sysClr val="windowText" lastClr="000000"/>
+      </a:dk1>
+      <a:lt1>
+        <a:sysClr val="window" lastClr="FFFFFF"/>
+      </a:lt1>
+      <a:dk2>
+        <a:srgbClr val="1F497D"/>
+      </a:dk2>
+      <a:lt2>
+        <a:srgbClr val="EEECE1"/>
+      </a:lt2>
+      <a:accent1>
+        <a:srgbClr val="4F81BD"/>
+      </a:accent1>
+      <a:accent2>
+        <a:srgbClr val="C0504D"/>
+      </a:accent2>
+      <a:accent3>
+        <a:srgbClr val="9BBB59"/>
+      </a:accent3>
+      <a:accent4>
+        <a:srgbClr val="8064A2"/>
+      </a:accent4>
+      <a:accent5>
+        <a:srgbClr val="4BACC6"/>
+      </a:accent5>
+      <a:accent6>
+        <a:srgbClr val="F79646"/>
+      </a:accent6>
+      <a:hlink>
+        <a:srgbClr val="0000FF"/>
+      </a:hlink>
+      <a:folHlink>
+        <a:srgbClr val="800080"/>
+      </a:folHlink>
+    </a:clrScheme>
+    <a:fontScheme name="Office">
+      <a:majorFont>
+        <a:latin typeface="Calibri"/>
+        <a:ea typeface=""/>
+        <a:cs typeface=""/>
+        <a:font script="Jpan" typeface="ＭＳ Ｐゴシック"/>
+        <a:font script="Hang" typeface="맑은 고딕"/>
+        <a:font script="Hans" typeface="宋体"/>
+        <a:font script="Hant" typeface="新細明體"/>
+        <a:font script="Arab" typeface="Times New Roman"/>
+        <a:font script="Hebr" typeface="Times New Roman"/>
+        <a:font script="Thai" typeface="Angsana New"/>
+        <a:font script="Ethi" typeface="Nyala"/>
+        <a:font script="Beng" typeface="Vrinda"/>
+        <a:font script="Gujr" typeface="Shruti"/>
+        <a:font script="Khmr" typeface="MoolBoran"/>
+        <a:font script="Knda" typeface="Tunga"/>
+        <a:font script="Guru" typeface="Raavi"/>
+        <a:font script="Cans" typeface="Euphemia"/>
+        <a:font script="Cher" typeface="Plantagenet Cherokee"/>
+        <a:font script="Yiii" typeface="Microsoft Yi Baiti"/>
+        <a:font script="Tibt" typeface="Microsoft Himalaya"/>
+        <a:font script="Thaa" typeface="MV Boli"/>
+        <a:font script="Deva" typeface="Mangal"/>
+        <a:font script="Telu" typeface="Gautami"/>
+        <a:font script="Taml" typeface="Latha"/>
+        <a:font script="Syrc" typeface="Estrangelo Edessa"/>
+        <a:font script="Orya" typeface="Kalinga"/>
+        <a:font script="Mlym" typeface="Kartika"/>
+        <a:font script="Laoo" typeface="DokChampa"/>
+        <a:font script="Sinh" typeface="Iskoola Pota"/>
+        <a:font script="Mong" typeface="Mongolian Baiti"/>
+        <a:font script="Viet" typeface="Times New Roman"/>
+        <a:font script="Uigh" typeface="Microsoft Uighur"/>
+        <a:font script="Geor" typeface="Sylfaen"/>
+      </a:majorFont>
+      <a:minorFont>
+        <a:latin typeface="Calibri"/>
+        <a:ea typeface=""/>
+        <a:cs typeface=""/>
+        <a:font script="Jpan" typeface="ＭＳ Ｐゴシック"/>
+        <a:font script="Hang" typeface="맑은 고딕"/>
+        <a:font script="Hans" typeface="宋体"/>
+        <a:font script="Hant" typeface="新細明體"/>
+        <a:font script="Arab" typeface="Arial"/>
+        <a:font script="Hebr" typeface="Arial"/>
+        <a:font script="Thai" typeface="Cordia New"/>
+        <a:font script="Ethi" typeface="Nyala"/>
+        <a:font script="Beng" typeface="Vrinda"/>
+        <a:font script="Gujr" typeface="Shruti"/>
+        <a:font script="Khmr" typeface="DaunPenh"/>
+        <a:font script="Knda" typeface="Tunga"/>
+        <a:font script="Guru" typeface="Raavi"/>
+        <a:font script="Cans" typeface="Euphemia"/>
+        <a:font script="Cher" typeface="Plantagenet Cherokee"/>
+        <a:font script="Yiii" typeface="Microsoft Yi Baiti"/>
+        <a:font script="Tibt" typeface="Microsoft Himalaya"/>
+        <a:font script="Thaa" typeface="MV Boli"/>
+        <a:font script="Deva" typeface="Mangal"/>
+        <a:font script="Telu" typeface="Gautami"/>
+        <a:font script="Taml" typeface="Latha"/>
+        <a:font script="Syrc" typeface="Estrangelo Edessa"/>
+        <a:font script="Orya" typeface="Kalinga"/>
+        <a:font script="Mlym" typeface="Kartika"/>
+        <a:font script="Laoo" typeface="DokChampa"/>
+        <a:font script="Sinh" typeface="Iskoola Pota"/>
+        <a:font script="Mong" typeface="Mongolian Baiti"/>
+        <a:font script="Viet" typeface="Arial"/>
+        <a:font script="Uigh" typeface="Microsoft Uighur"/>
+        <a:font script="Geor" typeface="Sylfaen"/>
+      </a:minorFont>
+    </a:fontScheme>
+    <a:fmtScheme name="Office">
+      <a:fillStyleLst>
+        <a:solidFill>
+          <a:schemeClr val="phClr"/>
+        </a:solidFill>
+        <a:gradFill rotWithShape="1">
+          <a:gsLst>
+            <a:gs pos="0">
+              <a:schemeClr val="phClr">
+                <a:tint val="50000"/>
+                <a:satMod val="300000"/>
+              </a:schemeClr>
+            </a:gs>
+            <a:gs pos="35000">
+              <a:schemeClr val="phClr">
+                <a:tint val="37000"/>
+                <a:satMod val="300000"/>
+              </a:schemeClr>
+            </a:gs>
+            <a:gs pos="100000">
+              <a:schemeClr val="phClr">
+                <a:tint val="15000"/>
+                <a:satMod val="350000"/>
+              </a:schemeClr>
+            </a:gs>
+          </a:gsLst>
+          <a:lin ang="16200000" scaled="1"/>
+        </a:gradFill>
+        <a:gradFill rotWithShape="1">
+          <a:gsLst>
+            <a:gs pos="0">
+              <a:schemeClr val="phClr">
+                <a:tint val="100000"/>
+                <a:shade val="100000"/>
+                <a:satMod val="130000"/>
+              </a:schemeClr>
+            </a:gs>
+            <a:gs pos="100000">
+              <a:schemeClr val="phClr">
+                <a:tint val="50000"/>
+                <a:shade val="100000"/>
+                <a:satMod val="350000"/>
+              </a:schemeClr>
+            </a:gs>
+          </a:gsLst>
+          <a:lin ang="16200000" scaled="0"/>
+        </a:gradFill>
+      </a:fillStyleLst>
+      <a:lnStyleLst>
+        <a:ln w="9525" cap="flat" cmpd="sng" algn="ctr">
+          <a:solidFill>
+            <a:schemeClr val="phClr">
+              <a:shade val="95000"/>
+              <a:satMod val="105000"/>
+            </a:schemeClr>
+          </a:solidFill>
+          <a:prstDash val="solid"/>
+        </a:ln>
+        <a:ln w="25400" cap="flat" cmpd="sng" algn="ctr">
+          <a:solidFill>
+            <a:schemeClr val="phClr"/>
+          </a:solidFill>
+          <a:prstDash val="solid"/>
+        </a:ln>
+        <a:ln w="38100" cap="flat" cmpd="sng" algn="ctr">
+          <a:solidFill>
+            <a:schemeClr val="phClr"/>
+          </a:solidFill>
+          <a:prstDash val="solid"/>
+        </a:ln>
+      </a:lnStyleLst>
+      <a:effectStyleLst>
+        <a:effectStyle>
+          <a:effectLst>
+            <a:outerShdw blurRad="40000" dist="20000" dir="5400000" rotWithShape="0">
+              <a:srgbClr val="000000">
+                <a:alpha val="38000"/>
+              </a:srgbClr>
+            </a:outerShdw>
+          </a:effectLst>
+        </a:effectStyle>
+        <a:effectStyle>
+          <a:effectLst>
+            <a:outerShdw blurRad="40000" dist="23000" dir="5400000" rotWithShape="0">
+              <a:srgbClr val="000000">
+                <a:alpha val="35000"/>
+              </a:srgbClr>
+            </a:outerShdw>
+          </a:effectLst>
+        </a:effectStyle>
+        <a:effectStyle>
+          <a:effectLst>
+            <a:outerShdw blurRad="40000" dist="23000" dir="5400000" rotWithShape="0">
+              <a:srgbClr val="000000">
+                <a:alpha val="35000"/>
+              </a:srgbClr>
+            </a:outerShdw>
+          </a:effectLst>
+          <a:scene3d>
+            <a:camera prst="orthographicFront">
+              <a:rot lat="0" lon="0" rev="0"/>
+            </a:camera>
+            <a:lightRig rig="threePt" dir="t">
+              <a:rot lat="0" lon="0" rev="1200000"/>
+            </a:lightRig>
+          </a:scene3d>
+          <a:sp3d>
+            <a:bevelT w="63500" h="25400"/>
+          </a:sp3d>
+        </a:effectStyle>
+      </a:effectStyleLst>
+      <a:bgFillStyleLst>
+        <a:solidFill>
+          <a:schemeClr val="phClr"/>
+        </a:solidFill>
+        <a:gradFill rotWithShape="1">
+          <a:gsLst>
+            <a:gs pos="0">
+              <a:schemeClr val="phClr">
+                <a:tint val="40000"/>
+                <a:satMod val="350000"/>
+              </a:schemeClr>
+            </a:gs>
+            <a:gs pos="40000">
+              <a:schemeClr val="phClr">
+                <a:tint val="45000"/>
+                <a:shade val="99000"/>
+                <a:satMod val="350000"/>
+              </a:schemeClr>
+            </a:gs>
+            <a:gs pos="100000">
+              <a:schemeClr val="phClr">
+                <a:shade val="20000"/>
+                <a:satMod val="255000"/>
+              </a:schemeClr>
+            </a:gs>
+          </a:gsLst>
+          <a:path path="circle">
+            <a:fillToRect l="50000" t="-80000" r="50000" b="180000"/>
+          </a:path>
+        </a:gradFill>
+        <a:gradFill rotWithShape="1">
+          <a:gsLst>
+            <a:gs pos="0">
+              <a:schemeClr val="phClr">
+                <a:tint val="80000"/>
+                <a:satMod val="300000"/>
+              </a:schemeClr>
+            </a:gs>
+            <a:gs pos="100000">
+              <a:schemeClr val="phClr">
+                <a:shade val="30000"/>
+                <a:satMod val="200000"/>
+              </a:schemeClr>
+            </a:gs>
+          </a:gsLst>
+          <a:path path="circle">
+            <a:fillToRect l="50000" t="50000" r="50000" b="50000"/>
+          </a:path>
+        </a:gradFill>
+      </a:bgFillStyleLst>
+    </a:fmtScheme>
+  </a:themeElements>
+  <a:objectDefaults>
+    <a:spDef>
+      <a:spPr/>
+      <a:bodyPr/>
+      <a:lstStyle/>
+      <a:style>
+        <a:lnRef idx="1">
+          <a:schemeClr val="accent1"/>
+        </a:lnRef>
+        <a:fillRef idx="3">
+          <a:schemeClr val="accent1"/>
+        </a:fillRef>
+        <a:effectRef idx="2">
+          <a:schemeClr val="accent1"/>
+        </a:effectRef>
+        <a:fontRef idx="minor">
+          <a:schemeClr val="lt1"/>
+        </a:fontRef>
+      </a:style>
+    </a:spDef>
+    <a:lnDef>
+      <a:spPr/>
+      <a:bodyPr/>
+      <a:lstStyle/>
+      <a:style>
+        <a:lnRef idx="2">
+          <a:schemeClr val="accent1"/>
+        </a:lnRef>
+        <a:fillRef idx="0">
+          <a:schemeClr val="accent1"/>
+        </a:fillRef>
+        <a:effectRef idx="1">
+          <a:schemeClr val="accent1"/>
+        </a:effectRef>
+        <a:fontRef idx="minor">
+          <a:schemeClr val="tx1"/>
+        </a:fontRef>
+      </a:style>
+    </a:lnDef>
+  </a:objectDefaults>
+  <a:extraClrSchemeLst/>
+</a:theme>
 </file>
--- a/Seminario de Sistemas/Clases/Clase 1 - Conceptos iniciales/Presentacion.pptx
+++ b/Seminario de Sistemas/Clases/Clase 1 - Conceptos iniciales/Presentacion.pptx
@@ -34,8 +34,6 @@
     <p:sldId id="282" r:id="rId34"/>
     <p:sldId id="283" r:id="rId35"/>
     <p:sldId id="284" r:id="rId36"/>
-    <p:sldId id="285" r:id="rId37"/>
-    <p:sldId id="286" r:id="rId38"/>
   </p:sldIdLst>
   <p:sldSz cx="12191695" cy="6858000" type="screen4x3"/>
   <p:notesSz cx="6858000" cy="9144000"/>
@@ -535,6 +533,18 @@
               <a:t>Esa curva de costo es la justificacion de todo lo que se vera en este curso; sin ella, las metodologias suenan a burocracia arbitraria.</a:t>
             </a:r>
           </a:p>
+          <a:p/>
+          <a:p>
+            <a:r>
+              <a:t>PARA EL DOCENTE</a:t>
+            </a:r>
+          </a:p>
+          <a:p/>
+          <a:p>
+            <a:r>
+              <a:t>Hay un asunto de organizacion que el docente debe resolver el primer dia porque afecta la calificacion: los estudiantes llegan en tres situaciones de matricula distintas y cada una cierra su entregable de manera diferente. Primera situacion, quien cursa Seminario y Programacion II al mismo tiempo. Este es el caso ideal y hay que aprovecharlo: se acota el dominio de VetCare una sola vez y el entregable de diseno de este curso se convierte en el insumo real del codigo del otro. El riesgo es conocido, y consiste en que el estudiante se entusiasme programando y descuide el documento; la regla de cierre es que aqui se califica el plano y no la demostracion, y que si el codigo se desvio del plano lo correcto es actualizar el plano y anotar por que, nunca esconder la diferencia. Segunda situacion, quien cursa solo Programacion II: no entrega en este curso, pero importa porque los equipos son mixtos y puede haber companeros de proyecto que no esten en esta aula. De ahi sale una exigencia concreta para el documento: debe ser autosuficiente, entendible por alguien que no estuvo en las conversaciones del equipo; si el artefacto solo se entiende cuando su autor lo explica de viva voz, no sirve para ese companero y por lo tanto no sirve. Tercera situacion, quien cursa solo Seminario: cierra el semestre con el juego completo de planos y la sustentacion, y no se le exige ni una linea de codigo ni una demostracion funcionando; su nota no depende de que exista implementacion. Su prueba de calidad es otra y hay que decirsela en estos terminos: que un tercero pueda construir el producto leyendo su documento. En su caso el wireframe de la Clase 13 cumple el papel que en el otro curso cumple la pantalla.</a:t>
+            </a:r>
+          </a:p>
         </p:txBody>
       </p:sp>
       <p:sp>
@@ -652,88 +662,6 @@
 </file>
 
 <file path=ppt/notesSlides/notesSlide11.xml><?xml version="1.0" encoding="utf-8"?>
-<p:notes xmlns:a="http://schemas.openxmlformats.org/drawingml/2006/main" xmlns:p="http://schemas.openxmlformats.org/presentationml/2006/main" xmlns:r="http://schemas.openxmlformats.org/officeDocument/2006/relationships">
-  <p:cSld>
-    <p:spTree>
-      <p:nvGrpSpPr>
-        <p:cNvPr id="1" name=""/>
-        <p:cNvGrpSpPr/>
-        <p:nvPr/>
-      </p:nvGrpSpPr>
-      <p:grpSpPr>
-        <a:xfrm>
-          <a:off x="0" y="0"/>
-          <a:ext cx="0" cy="0"/>
-          <a:chOff x="0" y="0"/>
-          <a:chExt cx="0" cy="0"/>
-        </a:xfrm>
-      </p:grpSpPr>
-      <p:sp>
-        <p:nvSpPr>
-          <p:cNvPr id="2" name="Slide Image Placeholder 1"/>
-          <p:cNvSpPr>
-            <a:spLocks noGrp="1"/>
-          </p:cNvSpPr>
-          <p:nvPr>
-            <p:ph type="sldImg" idx="2"/>
-          </p:nvPr>
-        </p:nvSpPr>
-        <p:spPr/>
-      </p:sp>
-      <p:sp>
-        <p:nvSpPr>
-          <p:cNvPr id="3" name="Notes Placeholder 2"/>
-          <p:cNvSpPr>
-            <a:spLocks noGrp="1"/>
-          </p:cNvSpPr>
-          <p:nvPr>
-            <p:ph type="body" idx="3" sz="quarter"/>
-          </p:nvPr>
-        </p:nvSpPr>
-        <p:spPr/>
-        <p:txBody>
-          <a:bodyPr/>
-          <a:lstStyle/>
-          <a:p>
-            <a:r>
-              <a:t>Hay un asunto de organizacion que el docente debe resolver el primer dia porque afecta la calificacion: los estudiantes llegan en tres situaciones de matricula distintas y cada una cierra su entregable de manera diferente.</a:t>
-            </a:r>
-          </a:p>
-          <a:p/>
-          <a:p>
-            <a:r>
-              <a:t>Primera situacion, quien cursa Seminario y Programacion II al mismo tiempo.</a:t>
-            </a:r>
-          </a:p>
-          <a:p/>
-          <a:p>
-            <a:r>
-              <a:t>De ahi sale una exigencia concreta para el documento: debe ser autosuficiente, entendible por alguien que no estuvo en las conversaciones del equipo; si el artefacto solo se entiende cuando su autor lo explica de viva voz, no sirve para ese companero y por lo tanto no sirve.</a:t>
-            </a:r>
-          </a:p>
-        </p:txBody>
-      </p:sp>
-      <p:sp>
-        <p:nvSpPr>
-          <p:cNvPr id="4" name="Slide Number Placeholder 3"/>
-          <p:cNvSpPr>
-            <a:spLocks noGrp="1"/>
-          </p:cNvSpPr>
-          <p:nvPr>
-            <p:ph type="sldNum" idx="5" sz="quarter"/>
-          </p:nvPr>
-        </p:nvSpPr>
-        <p:spPr/>
-      </p:sp>
-    </p:spTree>
-  </p:cSld>
-  <p:clrMapOvr>
-    <a:masterClrMapping/>
-  </p:clrMapOvr>
-</p:notes>
-</file>
-
-<file path=ppt/notesSlides/notesSlide12.xml><?xml version="1.0" encoding="utf-8"?>
 <p:notes xmlns:a="http://schemas.openxmlformats.org/drawingml/2006/main" xmlns:p="http://schemas.openxmlformats.org/presentationml/2006/main" xmlns:r="http://schemas.openxmlformats.org/officeDocument/2006/relationships">
   <p:cSld>
     <p:spTree>
@@ -8715,7 +8643,7 @@
                 </a:solidFill>
                 <a:latin typeface="Calibri"/>
               </a:rPr>
-              <a:t>Hay un asunto de organizacion que el docente debe resolver el primer... (1/2)</a:t>
+              <a:t>Queda la trampa pedagogica de este primer dia, y es la mas seria del... (1/2)</a:t>
             </a:r>
           </a:p>
         </p:txBody>
@@ -8754,7 +8682,7 @@
                 </a:solidFill>
                 <a:latin typeface="Calibri"/>
               </a:rPr>
-              <a:t>–   Este es el caso ideal y hay que aprovecharlo: se acota el dominio de VetCare una sola vez y el entregable de diseno de este curso se convierte en el insumo real del codigo del otro.</a:t>
+              <a:t>–   Queda la trampa pedagogica de este primer dia, y es la mas seria del curso: el estudiante que se matriculo esperando programar y descubre que va a escribir documentos.</a:t>
             </a:r>
           </a:p>
           <a:p>
@@ -8770,7 +8698,7 @@
                 </a:solidFill>
                 <a:latin typeface="Calibri"/>
               </a:rPr>
-              <a:t>–   El riesgo es conocido, y consiste en que el estudiante se entusiasme programando y descuide el documento; la regla de cierre es que aqui se califica el plano y no la demostracion</a:t>
+              <a:t>–   Si no se encuadra hoy, ese estudiante pasa quince semanas convencido de que el curso es trabajo administrativo, y el sintoma aparece en la primera entrega en forma de documentos hechos en la ultima hora.</a:t>
             </a:r>
           </a:p>
           <a:p>
@@ -8786,7 +8714,7 @@
                 </a:solidFill>
                 <a:latin typeface="Calibri"/>
               </a:rPr>
-              <a:t>–   Y que si el codigo se desvio del plano lo correcto es actualizar el plano y anotar por que, nunca esconder la diferencia.</a:t>
+              <a:t>–   Primero, reconocerlo en voz alta, porque negarlo lo confirma: aqui varios querian programar, y programar es legitimo y necesario.</a:t>
             </a:r>
           </a:p>
           <a:p>
@@ -8802,7 +8730,23 @@
                 </a:solidFill>
                 <a:latin typeface="Calibri"/>
               </a:rPr>
-              <a:t>–   Segunda situacion, quien cursa solo Programacion II: no entrega en este curso, pero importa porque los equipos son mixtos y puede haber companeros de proyecto que no esten en esta aula.</a:t>
+              <a:t>–   Segundo, dar el argumento del costo con numeros aunque sean gruesos: borrar una caja de un diagrama toma diez segundos, mientras que eliminar un modulo ya programado</a:t>
+            </a:r>
+          </a:p>
+          <a:p>
+            <a:pPr>
+              <a:spcAft>
+                <a:spcPts val="800"/>
+              </a:spcAft>
+            </a:pPr>
+            <a:r>
+              <a:rPr sz="2000" b="0" i="0">
+                <a:solidFill>
+                  <a:srgbClr val="333333"/>
+                </a:solidFill>
+                <a:latin typeface="Calibri"/>
+              </a:rPr>
+              <a:t>–   Probado e integrado toma dias y arrastra todo lo que dependia de el; ese es el orden de magnitud que justifica dibujar antes.</a:t>
             </a:r>
           </a:p>
         </p:txBody>
@@ -8983,7 +8927,7 @@
                 </a:solidFill>
                 <a:latin typeface="Calibri"/>
               </a:rPr>
-              <a:t>Hay un asunto de organizacion que el docente debe resolver el primer... (2/2)</a:t>
+              <a:t>Queda la trampa pedagogica de este primer dia, y es la mas seria del... (2/2)</a:t>
             </a:r>
           </a:p>
         </p:txBody>
@@ -9022,7 +8966,7 @@
                 </a:solidFill>
                 <a:latin typeface="Calibri"/>
               </a:rPr>
-              <a:t>–   Tercera situacion, quien cursa solo Seminario: cierra el semestre con el juego completo de planos y la sustentacion, y no se le exige ni una linea de codigo ni una demostracion funcionando; su nota no depende de que exista implementacion.</a:t>
+              <a:t>–   Tercero, mostrar que las decisiones que el programador ya no podra cambiar se toman aqui, con ejemplos que se sienten reales: si una Mascota puede existir sin Dueno, o si reagendar una cita es modificarla o es cancelarla y crear otra</a:t>
             </a:r>
           </a:p>
           <a:p>
@@ -9038,7 +8982,7 @@
                 </a:solidFill>
                 <a:latin typeface="Calibri"/>
               </a:rPr>
-              <a:t>–   Su prueba de calidad es otra y hay que decirsela en estos terminos: que un tercero pueda construir el producto leyendo su documento.</a:t>
+              <a:t>–   Que es una decision de diseno con consecuencias en el historial clinico durante anos.</a:t>
             </a:r>
           </a:p>
           <a:p>
@@ -9054,7 +8998,23 @@
                 </a:solidFill>
                 <a:latin typeface="Calibri"/>
               </a:rPr>
-              <a:t>–   En su caso el wireframe de la Clase 13 cumple el papel que en el otro curso cumple la pantalla.</a:t>
+              <a:t>–   Cuarto, dar salidas legitimas al deseo de construir: en la Clase 13 hay trabajo visual concreto con interfaces, en la Clase 11 se compara el diseno con lo que se esta construyendo, y en la Clase 12 los diagramas avanzados exigen precision tecnica.</a:t>
+            </a:r>
+          </a:p>
+          <a:p>
+            <a:pPr>
+              <a:spcAft>
+                <a:spcPts val="800"/>
+              </a:spcAft>
+            </a:pPr>
+            <a:r>
+              <a:rPr sz="2000" b="0" i="0">
+                <a:solidFill>
+                  <a:srgbClr val="333333"/>
+                </a:solidFill>
+                <a:latin typeface="Calibri"/>
+              </a:rPr>
+              <a:t>–   Y hay que anticipar la pregunta textual, porque va a llegar: profesor, para que dibujo esto si lo voy a cambiar cuando programe.</a:t>
             </a:r>
           </a:p>
         </p:txBody>
@@ -9235,21 +9195,141 @@
                 </a:solidFill>
                 <a:latin typeface="Calibri"/>
               </a:rPr>
-              <a:t>Queda la trampa pedagogica de este primer dia, y es la mas seria del... (1/2)</a:t>
-            </a:r>
-          </a:p>
-        </p:txBody>
-      </p:sp>
-      <p:sp>
-        <p:nvSpPr>
-          <p:cNvPr id="5" name="TextBox 4"/>
+              <a:t>El mapa de dominio en Mermaid: la sintaxis</a:t>
+            </a:r>
+          </a:p>
+        </p:txBody>
+      </p:sp>
+      <p:sp>
+        <p:nvSpPr>
+          <p:cNvPr id="5" name="Rounded Rectangle 4"/>
+          <p:cNvSpPr/>
+          <p:nvPr/>
+        </p:nvSpPr>
+        <p:spPr>
+          <a:xfrm>
+            <a:off x="457200" y="1261872"/>
+            <a:ext cx="11277295" cy="5093208"/>
+          </a:xfrm>
+          <a:prstGeom prst="roundRect">
+            <a:avLst>
+              <a:gd name="adj" fmla="val 12000"/>
+            </a:avLst>
+          </a:prstGeom>
+          <a:solidFill>
+            <a:srgbClr val="1E2A38"/>
+          </a:solidFill>
+          <a:ln>
+            <a:noFill/>
+          </a:ln>
+        </p:spPr>
+        <p:style>
+          <a:lnRef idx="1">
+            <a:schemeClr val="accent1"/>
+          </a:lnRef>
+          <a:fillRef idx="3">
+            <a:schemeClr val="accent1"/>
+          </a:fillRef>
+          <a:effectRef idx="2">
+            <a:schemeClr val="accent1"/>
+          </a:effectRef>
+          <a:fontRef idx="minor">
+            <a:schemeClr val="lt1"/>
+          </a:fontRef>
+        </p:style>
+        <p:txBody>
+          <a:bodyPr rtlCol="0" anchor="ctr"/>
+          <a:lstStyle/>
+          <a:p>
+            <a:pPr algn="ctr"/>
+          </a:p>
+        </p:txBody>
+      </p:sp>
+      <p:sp>
+        <p:nvSpPr>
+          <p:cNvPr id="6" name="Rectangle 5"/>
+          <p:cNvSpPr/>
+          <p:nvPr/>
+        </p:nvSpPr>
+        <p:spPr>
+          <a:xfrm>
+            <a:off x="457200" y="1261872"/>
+            <a:ext cx="11277295" cy="320040"/>
+          </a:xfrm>
+          <a:prstGeom prst="rect">
+            <a:avLst/>
+          </a:prstGeom>
+          <a:solidFill>
+            <a:srgbClr val="095292"/>
+          </a:solidFill>
+          <a:ln>
+            <a:noFill/>
+          </a:ln>
+        </p:spPr>
+        <p:style>
+          <a:lnRef idx="1">
+            <a:schemeClr val="accent1"/>
+          </a:lnRef>
+          <a:fillRef idx="3">
+            <a:schemeClr val="accent1"/>
+          </a:fillRef>
+          <a:effectRef idx="2">
+            <a:schemeClr val="accent1"/>
+          </a:effectRef>
+          <a:fontRef idx="minor">
+            <a:schemeClr val="lt1"/>
+          </a:fontRef>
+        </p:style>
+        <p:txBody>
+          <a:bodyPr rtlCol="0" anchor="ctr"/>
+          <a:lstStyle/>
+          <a:p>
+            <a:pPr algn="ctr"/>
+          </a:p>
+        </p:txBody>
+      </p:sp>
+      <p:sp>
+        <p:nvSpPr>
+          <p:cNvPr id="7" name="TextBox 6"/>
           <p:cNvSpPr txBox="1"/>
           <p:nvPr/>
         </p:nvSpPr>
         <p:spPr>
           <a:xfrm>
-            <a:off x="457200" y="1170432"/>
-            <a:ext cx="11277295" cy="5230368"/>
+            <a:off x="685800" y="1307592"/>
+            <a:ext cx="10820095" cy="256032"/>
+          </a:xfrm>
+          <a:prstGeom prst="rect">
+            <a:avLst/>
+          </a:prstGeom>
+          <a:noFill/>
+        </p:spPr>
+        <p:txBody>
+          <a:bodyPr wrap="square" anchor="ctr"/>
+          <a:lstStyle/>
+          <a:p>
+            <a:r>
+              <a:rPr sz="1000" b="1" i="0">
+                <a:solidFill>
+                  <a:srgbClr val="269CCB"/>
+                </a:solidFill>
+                <a:latin typeface="Calibri"/>
+              </a:rPr>
+              <a:t>● ● ●</a:t>
+            </a:r>
+          </a:p>
+        </p:txBody>
+      </p:sp>
+      <p:sp>
+        <p:nvSpPr>
+          <p:cNvPr id="8" name="TextBox 7"/>
+          <p:cNvSpPr txBox="1"/>
+          <p:nvPr/>
+        </p:nvSpPr>
+        <p:spPr>
+          <a:xfrm>
+            <a:off x="777240" y="1719072"/>
+            <a:ext cx="10637215" cy="4453128"/>
           </a:xfrm>
           <a:prstGeom prst="rect">
             <a:avLst/>
@@ -9264,88 +9344,296 @@
           <a:p>
             <a:pPr>
               <a:spcAft>
-                <a:spcPts val="800"/>
+                <a:spcPts val="342"/>
               </a:spcAft>
             </a:pPr>
             <a:r>
-              <a:rPr sz="2000" b="0" i="0">
-                <a:solidFill>
-                  <a:srgbClr val="333333"/>
-                </a:solidFill>
-                <a:latin typeface="Calibri"/>
-              </a:rPr>
-              <a:t>–   Queda la trampa pedagogica de este primer dia, y es la mas seria del curso: el estudiante que se matriculo esperando programar y descubre que va a escribir documentos.</a:t>
+              <a:rPr sz="1200" b="0" i="0">
+                <a:solidFill>
+                  <a:srgbClr val="FFFFFF"/>
+                </a:solidFill>
+                <a:latin typeface="Calibri"/>
+              </a:rPr>
+              <a:t>flowchart LR</a:t>
             </a:r>
           </a:p>
           <a:p>
             <a:pPr>
               <a:spcAft>
-                <a:spcPts val="800"/>
+                <a:spcPts val="342"/>
               </a:spcAft>
             </a:pPr>
             <a:r>
-              <a:rPr sz="2000" b="0" i="0">
-                <a:solidFill>
-                  <a:srgbClr val="333333"/>
-                </a:solidFill>
-                <a:latin typeface="Calibri"/>
-              </a:rPr>
-              <a:t>–   Si no se encuadra hoy, ese estudiante pasa quince semanas convencido de que el curso es trabajo administrativo, y el sintoma aparece en la primera entrega en forma de documentos hechos en la ultima hora.</a:t>
+              <a:rPr sz="1200" b="0" i="0">
+                <a:solidFill>
+                  <a:srgbClr val="FFFFFF"/>
+                </a:solidFill>
+                <a:latin typeface="Calibri"/>
+              </a:rPr>
+              <a:t>  subgraph clinica[Clinica Huellitas]</a:t>
             </a:r>
           </a:p>
           <a:p>
             <a:pPr>
               <a:spcAft>
-                <a:spcPts val="800"/>
+                <a:spcPts val="342"/>
               </a:spcAft>
             </a:pPr>
             <a:r>
-              <a:rPr sz="2000" b="0" i="0">
-                <a:solidFill>
-                  <a:srgbClr val="333333"/>
-                </a:solidFill>
-                <a:latin typeface="Calibri"/>
-              </a:rPr>
-              <a:t>–   Primero, reconocerlo en voz alta, porque negarlo lo confirma: aqui varios querian programar, y programar es legitimo y necesario.</a:t>
+              <a:rPr sz="1200" b="0" i="0">
+                <a:solidFill>
+                  <a:srgbClr val="FFFFFF"/>
+                </a:solidFill>
+                <a:latin typeface="Calibri"/>
+              </a:rPr>
+              <a:t>    rec([Recepcionista])</a:t>
             </a:r>
           </a:p>
           <a:p>
             <a:pPr>
               <a:spcAft>
-                <a:spcPts val="800"/>
+                <a:spcPts val="342"/>
               </a:spcAft>
             </a:pPr>
             <a:r>
-              <a:rPr sz="2000" b="0" i="0">
-                <a:solidFill>
-                  <a:srgbClr val="333333"/>
-                </a:solidFill>
-                <a:latin typeface="Calibri"/>
-              </a:rPr>
-              <a:t>–   Segundo, dar el argumento del costo con numeros aunque sean gruesos: borrar una caja de un diagrama toma diez segundos, mientras que eliminar un modulo ya programado</a:t>
+              <a:rPr sz="1200" b="0" i="0">
+                <a:solidFill>
+                  <a:srgbClr val="FFFFFF"/>
+                </a:solidFill>
+                <a:latin typeface="Calibri"/>
+              </a:rPr>
+              <a:t>    vet([Veterinario])</a:t>
             </a:r>
           </a:p>
           <a:p>
             <a:pPr>
               <a:spcAft>
-                <a:spcPts val="800"/>
+                <a:spcPts val="342"/>
               </a:spcAft>
             </a:pPr>
             <a:r>
-              <a:rPr sz="2000" b="0" i="0">
-                <a:solidFill>
-                  <a:srgbClr val="333333"/>
-                </a:solidFill>
-                <a:latin typeface="Calibri"/>
-              </a:rPr>
-              <a:t>–   Probado e integrado toma dias y arrastra todo lo que dependia de el; ese es el orden de magnitud que justifica dibujar antes.</a:t>
-            </a:r>
-          </a:p>
-        </p:txBody>
-      </p:sp>
-      <p:sp>
-        <p:nvSpPr>
-          <p:cNvPr id="6" name="TextBox 5"/>
+              <a:rPr sz="1200" b="0" i="0">
+                <a:solidFill>
+                  <a:srgbClr val="FFFFFF"/>
+                </a:solidFill>
+                <a:latin typeface="Calibri"/>
+              </a:rPr>
+              <a:t>  end</a:t>
+            </a:r>
+          </a:p>
+          <a:p>
+            <a:pPr>
+              <a:spcAft>
+                <a:spcPts val="342"/>
+              </a:spcAft>
+            </a:pPr>
+            <a:r>
+              <a:rPr sz="1200" b="0" i="0">
+                <a:solidFill>
+                  <a:srgbClr val="FFFFFF"/>
+                </a:solidFill>
+                <a:latin typeface="Calibri"/>
+              </a:rPr>
+              <a:t/>
+            </a:r>
+          </a:p>
+          <a:p>
+            <a:pPr>
+              <a:spcAft>
+                <a:spcPts val="342"/>
+              </a:spcAft>
+            </a:pPr>
+            <a:r>
+              <a:rPr sz="1200" b="0" i="0">
+                <a:solidFill>
+                  <a:srgbClr val="FFFFFF"/>
+                </a:solidFill>
+                <a:latin typeface="Calibri"/>
+              </a:rPr>
+              <a:t>  subgraph vetcare[VetCare - el sistema]</a:t>
+            </a:r>
+          </a:p>
+          <a:p>
+            <a:pPr>
+              <a:spcAft>
+                <a:spcPts val="342"/>
+              </a:spcAft>
+            </a:pPr>
+            <a:r>
+              <a:rPr sz="1200" b="0" i="0">
+                <a:solidFill>
+                  <a:srgbClr val="FFFFFF"/>
+                </a:solidFill>
+                <a:latin typeface="Calibri"/>
+              </a:rPr>
+              <a:t>    agenda[Agendar cita]</a:t>
+            </a:r>
+          </a:p>
+          <a:p>
+            <a:pPr>
+              <a:spcAft>
+                <a:spcPts val="342"/>
+              </a:spcAft>
+            </a:pPr>
+            <a:r>
+              <a:rPr sz="1200" b="0" i="0">
+                <a:solidFill>
+                  <a:srgbClr val="FFFFFF"/>
+                </a:solidFill>
+                <a:latin typeface="Calibri"/>
+              </a:rPr>
+              <a:t>    exped[Consultar expediente]</a:t>
+            </a:r>
+          </a:p>
+          <a:p>
+            <a:pPr>
+              <a:spcAft>
+                <a:spcPts val="342"/>
+              </a:spcAft>
+            </a:pPr>
+            <a:r>
+              <a:rPr sz="1200" b="0" i="0">
+                <a:solidFill>
+                  <a:srgbClr val="FFFFFF"/>
+                </a:solidFill>
+                <a:latin typeface="Calibri"/>
+              </a:rPr>
+              <a:t>  end</a:t>
+            </a:r>
+          </a:p>
+          <a:p>
+            <a:pPr>
+              <a:spcAft>
+                <a:spcPts val="342"/>
+              </a:spcAft>
+            </a:pPr>
+            <a:r>
+              <a:rPr sz="1200" b="0" i="0">
+                <a:solidFill>
+                  <a:srgbClr val="FFFFFF"/>
+                </a:solidFill>
+                <a:latin typeface="Calibri"/>
+              </a:rPr>
+              <a:t/>
+            </a:r>
+          </a:p>
+          <a:p>
+            <a:pPr>
+              <a:spcAft>
+                <a:spcPts val="342"/>
+              </a:spcAft>
+            </a:pPr>
+            <a:r>
+              <a:rPr sz="1200" b="0" i="0">
+                <a:solidFill>
+                  <a:srgbClr val="FFFFFF"/>
+                </a:solidFill>
+                <a:latin typeface="Calibri"/>
+              </a:rPr>
+              <a:t>  lab[Laboratorio externo]</a:t>
+            </a:r>
+          </a:p>
+          <a:p>
+            <a:pPr>
+              <a:spcAft>
+                <a:spcPts val="342"/>
+              </a:spcAft>
+            </a:pPr>
+            <a:r>
+              <a:rPr sz="1200" b="0" i="0">
+                <a:solidFill>
+                  <a:srgbClr val="FFFFFF"/>
+                </a:solidFill>
+                <a:latin typeface="Calibri"/>
+              </a:rPr>
+              <a:t/>
+            </a:r>
+          </a:p>
+          <a:p>
+            <a:pPr>
+              <a:spcAft>
+                <a:spcPts val="342"/>
+              </a:spcAft>
+            </a:pPr>
+            <a:r>
+              <a:rPr sz="1200" b="0" i="0">
+                <a:solidFill>
+                  <a:srgbClr val="FFFFFF"/>
+                </a:solidFill>
+                <a:latin typeface="Calibri"/>
+              </a:rPr>
+              <a:t>  rec --&gt;|agenda| agenda</a:t>
+            </a:r>
+          </a:p>
+          <a:p>
+            <a:pPr>
+              <a:spcAft>
+                <a:spcPts val="342"/>
+              </a:spcAft>
+            </a:pPr>
+            <a:r>
+              <a:rPr sz="1200" b="0" i="0">
+                <a:solidFill>
+                  <a:srgbClr val="FFFFFF"/>
+                </a:solidFill>
+                <a:latin typeface="Calibri"/>
+              </a:rPr>
+              <a:t>  vet --&gt;|consulta| exped</a:t>
+            </a:r>
+          </a:p>
+          <a:p>
+            <a:pPr>
+              <a:spcAft>
+                <a:spcPts val="342"/>
+              </a:spcAft>
+            </a:pPr>
+            <a:r>
+              <a:rPr sz="1200" b="0" i="0">
+                <a:solidFill>
+                  <a:srgbClr val="FFFFFF"/>
+                </a:solidFill>
+                <a:latin typeface="Calibri"/>
+              </a:rPr>
+              <a:t>  exped --&gt;|pide examen| lab</a:t>
+            </a:r>
+          </a:p>
+          <a:p>
+            <a:pPr>
+              <a:spcAft>
+                <a:spcPts val="342"/>
+              </a:spcAft>
+            </a:pPr>
+            <a:r>
+              <a:rPr sz="1200" b="0" i="0">
+                <a:solidFill>
+                  <a:srgbClr val="FFFFFF"/>
+                </a:solidFill>
+                <a:latin typeface="Calibri"/>
+              </a:rPr>
+              <a:t/>
+            </a:r>
+          </a:p>
+          <a:p>
+            <a:pPr>
+              <a:spcAft>
+                <a:spcPts val="342"/>
+              </a:spcAft>
+            </a:pPr>
+            <a:r>
+              <a:rPr sz="1200" b="0" i="0">
+                <a:solidFill>
+                  <a:srgbClr val="FFFFFF"/>
+                </a:solidFill>
+                <a:latin typeface="Calibri"/>
+              </a:rPr>
+              <a:t>%% Complete con SUS capacidades y actores: estas son dos de cada uno.</a:t>
+            </a:r>
+          </a:p>
+        </p:txBody>
+      </p:sp>
+      <p:sp>
+        <p:nvSpPr>
+          <p:cNvPr id="9" name="TextBox 8"/>
           <p:cNvSpPr txBox="1"/>
           <p:nvPr/>
         </p:nvSpPr>
@@ -9519,21 +9807,141 @@
                 </a:solidFill>
                 <a:latin typeface="Calibri"/>
               </a:rPr>
-              <a:t>Queda la trampa pedagogica de este primer dia, y es la mas seria del... (2/2)</a:t>
-            </a:r>
-          </a:p>
-        </p:txBody>
-      </p:sp>
-      <p:sp>
-        <p:nvSpPr>
-          <p:cNvPr id="5" name="TextBox 4"/>
+              <a:t>La ficha de requisito bien escrito, campo por campo</a:t>
+            </a:r>
+          </a:p>
+        </p:txBody>
+      </p:sp>
+      <p:sp>
+        <p:nvSpPr>
+          <p:cNvPr id="5" name="Rounded Rectangle 4"/>
+          <p:cNvSpPr/>
+          <p:nvPr/>
+        </p:nvSpPr>
+        <p:spPr>
+          <a:xfrm>
+            <a:off x="457200" y="1261872"/>
+            <a:ext cx="11277295" cy="5093208"/>
+          </a:xfrm>
+          <a:prstGeom prst="roundRect">
+            <a:avLst>
+              <a:gd name="adj" fmla="val 12000"/>
+            </a:avLst>
+          </a:prstGeom>
+          <a:solidFill>
+            <a:srgbClr val="1E2A38"/>
+          </a:solidFill>
+          <a:ln>
+            <a:noFill/>
+          </a:ln>
+        </p:spPr>
+        <p:style>
+          <a:lnRef idx="1">
+            <a:schemeClr val="accent1"/>
+          </a:lnRef>
+          <a:fillRef idx="3">
+            <a:schemeClr val="accent1"/>
+          </a:fillRef>
+          <a:effectRef idx="2">
+            <a:schemeClr val="accent1"/>
+          </a:effectRef>
+          <a:fontRef idx="minor">
+            <a:schemeClr val="lt1"/>
+          </a:fontRef>
+        </p:style>
+        <p:txBody>
+          <a:bodyPr rtlCol="0" anchor="ctr"/>
+          <a:lstStyle/>
+          <a:p>
+            <a:pPr algn="ctr"/>
+          </a:p>
+        </p:txBody>
+      </p:sp>
+      <p:sp>
+        <p:nvSpPr>
+          <p:cNvPr id="6" name="Rectangle 5"/>
+          <p:cNvSpPr/>
+          <p:nvPr/>
+        </p:nvSpPr>
+        <p:spPr>
+          <a:xfrm>
+            <a:off x="457200" y="1261872"/>
+            <a:ext cx="11277295" cy="320040"/>
+          </a:xfrm>
+          <a:prstGeom prst="rect">
+            <a:avLst/>
+          </a:prstGeom>
+          <a:solidFill>
+            <a:srgbClr val="095292"/>
+          </a:solidFill>
+          <a:ln>
+            <a:noFill/>
+          </a:ln>
+        </p:spPr>
+        <p:style>
+          <a:lnRef idx="1">
+            <a:schemeClr val="accent1"/>
+          </a:lnRef>
+          <a:fillRef idx="3">
+            <a:schemeClr val="accent1"/>
+          </a:fillRef>
+          <a:effectRef idx="2">
+            <a:schemeClr val="accent1"/>
+          </a:effectRef>
+          <a:fontRef idx="minor">
+            <a:schemeClr val="lt1"/>
+          </a:fontRef>
+        </p:style>
+        <p:txBody>
+          <a:bodyPr rtlCol="0" anchor="ctr"/>
+          <a:lstStyle/>
+          <a:p>
+            <a:pPr algn="ctr"/>
+          </a:p>
+        </p:txBody>
+      </p:sp>
+      <p:sp>
+        <p:nvSpPr>
+          <p:cNvPr id="7" name="TextBox 6"/>
           <p:cNvSpPr txBox="1"/>
           <p:nvPr/>
         </p:nvSpPr>
         <p:spPr>
           <a:xfrm>
-            <a:off x="457200" y="1170432"/>
-            <a:ext cx="11277295" cy="5230368"/>
+            <a:off x="685800" y="1307592"/>
+            <a:ext cx="10820095" cy="256032"/>
+          </a:xfrm>
+          <a:prstGeom prst="rect">
+            <a:avLst/>
+          </a:prstGeom>
+          <a:noFill/>
+        </p:spPr>
+        <p:txBody>
+          <a:bodyPr wrap="square" anchor="ctr"/>
+          <a:lstStyle/>
+          <a:p>
+            <a:r>
+              <a:rPr sz="1000" b="1" i="0">
+                <a:solidFill>
+                  <a:srgbClr val="269CCB"/>
+                </a:solidFill>
+                <a:latin typeface="Calibri"/>
+              </a:rPr>
+              <a:t>● ● ●</a:t>
+            </a:r>
+          </a:p>
+        </p:txBody>
+      </p:sp>
+      <p:sp>
+        <p:nvSpPr>
+          <p:cNvPr id="8" name="TextBox 7"/>
+          <p:cNvSpPr txBox="1"/>
+          <p:nvPr/>
+        </p:nvSpPr>
+        <p:spPr>
+          <a:xfrm>
+            <a:off x="777240" y="1719072"/>
+            <a:ext cx="10637215" cy="4453128"/>
           </a:xfrm>
           <a:prstGeom prst="rect">
             <a:avLst/>
@@ -9548,72 +9956,216 @@
           <a:p>
             <a:pPr>
               <a:spcAft>
-                <a:spcPts val="800"/>
+                <a:spcPts val="400"/>
               </a:spcAft>
             </a:pPr>
             <a:r>
-              <a:rPr sz="2000" b="0" i="0">
-                <a:solidFill>
-                  <a:srgbClr val="333333"/>
-                </a:solidFill>
-                <a:latin typeface="Calibri"/>
-              </a:rPr>
-              <a:t>–   Tercero, mostrar que las decisiones que el programador ya no podra cambiar se toman aqui, con ejemplos que se sienten reales: si una Mascota puede existir sin Dueno, o si reagendar una cita es modificarla o es cancelarla y crear otra</a:t>
+              <a:rPr sz="1400" b="0" i="0">
+                <a:solidFill>
+                  <a:srgbClr val="FFFFFF"/>
+                </a:solidFill>
+                <a:latin typeface="Calibri"/>
+              </a:rPr>
+              <a:t>RF-01  Registrar mascota</a:t>
             </a:r>
           </a:p>
           <a:p>
             <a:pPr>
               <a:spcAft>
-                <a:spcPts val="800"/>
+                <a:spcPts val="400"/>
               </a:spcAft>
             </a:pPr>
             <a:r>
-              <a:rPr sz="2000" b="0" i="0">
-                <a:solidFill>
-                  <a:srgbClr val="333333"/>
-                </a:solidFill>
-                <a:latin typeface="Calibri"/>
-              </a:rPr>
-              <a:t>–   Que es una decision de diseno con consecuencias en el historial clinico durante anos.</a:t>
+              <a:rPr sz="1400" b="0" i="0">
+                <a:solidFill>
+                  <a:srgbClr val="FFFFFF"/>
+                </a:solidFill>
+                <a:latin typeface="Calibri"/>
+              </a:rPr>
+              <a:t/>
             </a:r>
           </a:p>
           <a:p>
             <a:pPr>
               <a:spcAft>
-                <a:spcPts val="800"/>
+                <a:spcPts val="400"/>
               </a:spcAft>
             </a:pPr>
             <a:r>
-              <a:rPr sz="2000" b="0" i="0">
-                <a:solidFill>
-                  <a:srgbClr val="333333"/>
-                </a:solidFill>
-                <a:latin typeface="Calibri"/>
-              </a:rPr>
-              <a:t>–   Cuarto, dar salidas legitimas al deseo de construir: en la Clase 13 hay trabajo visual concreto con interfaces, en la Clase 11 se compara el diseno con lo que se esta construyendo, y en la Clase 12 los diagramas avanzados exigen precision tecnica.</a:t>
+              <a:rPr sz="1400" b="0" i="0">
+                <a:solidFill>
+                  <a:srgbClr val="FFFFFF"/>
+                </a:solidFill>
+                <a:latin typeface="Calibri"/>
+              </a:rPr>
+              <a:t>Actor:        Recepcionista</a:t>
             </a:r>
           </a:p>
           <a:p>
             <a:pPr>
               <a:spcAft>
-                <a:spcPts val="800"/>
+                <a:spcPts val="400"/>
               </a:spcAft>
             </a:pPr>
             <a:r>
-              <a:rPr sz="2000" b="0" i="0">
-                <a:solidFill>
-                  <a:srgbClr val="333333"/>
-                </a:solidFill>
-                <a:latin typeface="Calibri"/>
-              </a:rPr>
-              <a:t>–   Y hay que anticipar la pregunta textual, porque va a llegar: profesor, para que dibujo esto si lo voy a cambiar cuando programe.</a:t>
-            </a:r>
-          </a:p>
-        </p:txBody>
-      </p:sp>
-      <p:sp>
-        <p:nvSpPr>
-          <p:cNvPr id="6" name="TextBox 5"/>
+              <a:rPr sz="1400" b="0" i="0">
+                <a:solidFill>
+                  <a:srgbClr val="FFFFFF"/>
+                </a:solidFill>
+                <a:latin typeface="Calibri"/>
+              </a:rPr>
+              <a:t>Precondicion: el dueno ya esta registrado</a:t>
+            </a:r>
+          </a:p>
+          <a:p>
+            <a:pPr>
+              <a:spcAft>
+                <a:spcPts val="400"/>
+              </a:spcAft>
+            </a:pPr>
+            <a:r>
+              <a:rPr sz="1400" b="0" i="0">
+                <a:solidFill>
+                  <a:srgbClr val="FFFFFF"/>
+                </a:solidFill>
+                <a:latin typeface="Calibri"/>
+              </a:rPr>
+              <a:t>Descripcion:  El sistema DEBE permitir registrar una mascota con nombre,</a:t>
+            </a:r>
+          </a:p>
+          <a:p>
+            <a:pPr>
+              <a:spcAft>
+                <a:spcPts val="400"/>
+              </a:spcAft>
+            </a:pPr>
+            <a:r>
+              <a:rPr sz="1400" b="0" i="0">
+                <a:solidFill>
+                  <a:srgbClr val="FFFFFF"/>
+                </a:solidFill>
+                <a:latin typeface="Calibri"/>
+              </a:rPr>
+              <a:t>              especie, fecha de nacimiento y dueno asociado.</a:t>
+            </a:r>
+          </a:p>
+          <a:p>
+            <a:pPr>
+              <a:spcAft>
+                <a:spcPts val="400"/>
+              </a:spcAft>
+            </a:pPr>
+            <a:r>
+              <a:rPr sz="1400" b="0" i="0">
+                <a:solidFill>
+                  <a:srgbClr val="FFFFFF"/>
+                </a:solidFill>
+                <a:latin typeface="Calibri"/>
+              </a:rPr>
+              <a:t>Postcondicion: la mascota queda con expediente abierto y activa = 'S'</a:t>
+            </a:r>
+          </a:p>
+          <a:p>
+            <a:pPr>
+              <a:spcAft>
+                <a:spcPts val="400"/>
+              </a:spcAft>
+            </a:pPr>
+            <a:r>
+              <a:rPr sz="1400" b="0" i="0">
+                <a:solidFill>
+                  <a:srgbClr val="FFFFFF"/>
+                </a:solidFill>
+                <a:latin typeface="Calibri"/>
+              </a:rPr>
+              <a:t>Prioridad:    Must</a:t>
+            </a:r>
+          </a:p>
+          <a:p>
+            <a:pPr>
+              <a:spcAft>
+                <a:spcPts val="400"/>
+              </a:spcAft>
+            </a:pPr>
+            <a:r>
+              <a:rPr sz="1400" b="0" i="0">
+                <a:solidFill>
+                  <a:srgbClr val="FFFFFF"/>
+                </a:solidFill>
+                <a:latin typeface="Calibri"/>
+              </a:rPr>
+              <a:t>Origen:       entrevista Dr. Ramirez, 12/08/2026</a:t>
+            </a:r>
+          </a:p>
+          <a:p>
+            <a:pPr>
+              <a:spcAft>
+                <a:spcPts val="400"/>
+              </a:spcAft>
+            </a:pPr>
+            <a:r>
+              <a:rPr sz="1400" b="0" i="0">
+                <a:solidFill>
+                  <a:srgbClr val="FFFFFF"/>
+                </a:solidFill>
+                <a:latin typeface="Calibri"/>
+              </a:rPr>
+              <a:t/>
+            </a:r>
+          </a:p>
+          <a:p>
+            <a:pPr>
+              <a:spcAft>
+                <a:spcPts val="400"/>
+              </a:spcAft>
+            </a:pPr>
+            <a:r>
+              <a:rPr sz="1400" b="0" i="0">
+                <a:solidFill>
+                  <a:srgbClr val="FFFFFF"/>
+                </a:solidFill>
+                <a:latin typeface="Calibri"/>
+              </a:rPr>
+              <a:t>-- Lo que convierte una frase cruda en requisito: sujeto (el sistema),</a:t>
+            </a:r>
+          </a:p>
+          <a:p>
+            <a:pPr>
+              <a:spcAft>
+                <a:spcPts val="400"/>
+              </a:spcAft>
+            </a:pPr>
+            <a:r>
+              <a:rPr sz="1400" b="0" i="0">
+                <a:solidFill>
+                  <a:srgbClr val="FFFFFF"/>
+                </a:solidFill>
+                <a:latin typeface="Calibri"/>
+              </a:rPr>
+              <a:t>-- verbo normativo (DEBE), objeto verificable, y de donde salio.</a:t>
+            </a:r>
+          </a:p>
+          <a:p>
+            <a:pPr>
+              <a:spcAft>
+                <a:spcPts val="400"/>
+              </a:spcAft>
+            </a:pPr>
+            <a:r>
+              <a:rPr sz="1400" b="0" i="0">
+                <a:solidFill>
+                  <a:srgbClr val="FFFFFF"/>
+                </a:solidFill>
+                <a:latin typeface="Calibri"/>
+              </a:rPr>
+              <a:t>-- «El sistema debe ser facil de usar» no es un requisito: no se verifica.</a:t>
+            </a:r>
+          </a:p>
+        </p:txBody>
+      </p:sp>
+      <p:sp>
+        <p:nvSpPr>
+          <p:cNvPr id="9" name="TextBox 8"/>
           <p:cNvSpPr txBox="1"/>
           <p:nvPr/>
         </p:nvSpPr>
@@ -9787,7 +10339,7 @@
                 </a:solidFill>
                 <a:latin typeface="Calibri"/>
               </a:rPr>
-              <a:t>El mapa de dominio en Mermaid: la sintaxis</a:t>
+              <a:t>De frase cruda a requisito verificable</a:t>
             </a:r>
           </a:p>
         </p:txBody>
@@ -9801,7 +10353,7 @@
         <p:spPr>
           <a:xfrm>
             <a:off x="457200" y="1261872"/>
-            <a:ext cx="11277295" cy="5093208"/>
+            <a:ext cx="11277295" cy="4773168"/>
           </a:xfrm>
           <a:prstGeom prst="roundRect">
             <a:avLst>
@@ -9921,7 +10473,7 @@
         <p:spPr>
           <a:xfrm>
             <a:off x="777240" y="1719072"/>
-            <a:ext cx="10637215" cy="4453128"/>
+            <a:ext cx="10637215" cy="4133087"/>
           </a:xfrm>
           <a:prstGeom prst="rect">
             <a:avLst/>
@@ -9936,289 +10488,193 @@
           <a:p>
             <a:pPr>
               <a:spcAft>
-                <a:spcPts val="342"/>
+                <a:spcPts val="400"/>
               </a:spcAft>
             </a:pPr>
             <a:r>
-              <a:rPr sz="1200" b="0" i="0">
+              <a:rPr sz="1400" b="0" i="0">
                 <a:solidFill>
                   <a:srgbClr val="FFFFFF"/>
                 </a:solidFill>
                 <a:latin typeface="Calibri"/>
               </a:rPr>
-              <a:t>flowchart LR</a:t>
+              <a:t>FRASE DEL CLIENTE (entrevista):</a:t>
             </a:r>
           </a:p>
           <a:p>
             <a:pPr>
               <a:spcAft>
-                <a:spcPts val="342"/>
+                <a:spcPts val="400"/>
               </a:spcAft>
             </a:pPr>
             <a:r>
-              <a:rPr sz="1200" b="0" i="0">
+              <a:rPr sz="1400" b="0" i="0">
                 <a:solidFill>
                   <a:srgbClr val="FFFFFF"/>
                 </a:solidFill>
                 <a:latin typeface="Calibri"/>
               </a:rPr>
-              <a:t>  subgraph clinica[Clinica Huellitas]</a:t>
+              <a:t>  "Necesito buscar rapido el expediente de un animal usando solo su ID."</a:t>
             </a:r>
           </a:p>
           <a:p>
             <a:pPr>
               <a:spcAft>
-                <a:spcPts val="342"/>
+                <a:spcPts val="400"/>
               </a:spcAft>
             </a:pPr>
             <a:r>
-              <a:rPr sz="1200" b="0" i="0">
+              <a:rPr sz="1400" b="0" i="0">
                 <a:solidFill>
                   <a:srgbClr val="FFFFFF"/>
                 </a:solidFill>
                 <a:latin typeface="Calibri"/>
               </a:rPr>
-              <a:t>    rec([Recepcionista])</a:t>
+              <a:t/>
             </a:r>
           </a:p>
           <a:p>
             <a:pPr>
               <a:spcAft>
-                <a:spcPts val="342"/>
+                <a:spcPts val="400"/>
               </a:spcAft>
             </a:pPr>
             <a:r>
-              <a:rPr sz="1200" b="0" i="0">
+              <a:rPr sz="1400" b="0" i="0">
                 <a:solidFill>
                   <a:srgbClr val="FFFFFF"/>
                 </a:solidFill>
                 <a:latin typeface="Calibri"/>
               </a:rPr>
-              <a:t>    vet([Veterinario])</a:t>
+              <a:t>RF-01  Buscar expediente por identificador</a:t>
             </a:r>
           </a:p>
           <a:p>
             <a:pPr>
               <a:spcAft>
-                <a:spcPts val="342"/>
+                <a:spcPts val="400"/>
               </a:spcAft>
             </a:pPr>
             <a:r>
-              <a:rPr sz="1200" b="0" i="0">
+              <a:rPr sz="1400" b="0" i="0">
                 <a:solidFill>
                   <a:srgbClr val="FFFFFF"/>
                 </a:solidFill>
                 <a:latin typeface="Calibri"/>
               </a:rPr>
-              <a:t>  end</a:t>
+              <a:t>  El sistema permite consultar la ficha completa de una mascota</a:t>
             </a:r>
           </a:p>
           <a:p>
             <a:pPr>
               <a:spcAft>
-                <a:spcPts val="342"/>
+                <a:spcPts val="400"/>
               </a:spcAft>
             </a:pPr>
             <a:r>
-              <a:rPr sz="1200" b="0" i="0">
+              <a:rPr sz="1400" b="0" i="0">
                 <a:solidFill>
                   <a:srgbClr val="FFFFFF"/>
                 </a:solidFill>
                 <a:latin typeface="Calibri"/>
               </a:rPr>
-              <a:t/>
+              <a:t>  a partir de su identificador unico.</a:t>
             </a:r>
           </a:p>
           <a:p>
             <a:pPr>
               <a:spcAft>
-                <a:spcPts val="342"/>
+                <a:spcPts val="400"/>
               </a:spcAft>
             </a:pPr>
             <a:r>
-              <a:rPr sz="1200" b="0" i="0">
+              <a:rPr sz="1400" b="0" i="0">
                 <a:solidFill>
                   <a:srgbClr val="FFFFFF"/>
                 </a:solidFill>
                 <a:latin typeface="Calibri"/>
               </a:rPr>
-              <a:t>  subgraph vetcare[VetCare - el sistema]</a:t>
+              <a:t>  Actor: Recepcionista, Veterinario</a:t>
             </a:r>
           </a:p>
           <a:p>
             <a:pPr>
               <a:spcAft>
-                <a:spcPts val="342"/>
+                <a:spcPts val="400"/>
               </a:spcAft>
             </a:pPr>
             <a:r>
-              <a:rPr sz="1200" b="0" i="0">
+              <a:rPr sz="1400" b="0" i="0">
                 <a:solidFill>
                   <a:srgbClr val="FFFFFF"/>
                 </a:solidFill>
                 <a:latin typeface="Calibri"/>
               </a:rPr>
-              <a:t>    agenda[Agendar cita]</a:t>
+              <a:t/>
             </a:r>
           </a:p>
           <a:p>
             <a:pPr>
               <a:spcAft>
-                <a:spcPts val="342"/>
+                <a:spcPts val="400"/>
               </a:spcAft>
             </a:pPr>
             <a:r>
-              <a:rPr sz="1200" b="0" i="0">
+              <a:rPr sz="1400" b="0" i="0">
                 <a:solidFill>
                   <a:srgbClr val="FFFFFF"/>
                 </a:solidFill>
                 <a:latin typeface="Calibri"/>
               </a:rPr>
-              <a:t>    exped[Consultar expediente]</a:t>
+              <a:t>RNF-01 Tiempo de respuesta de la busqueda</a:t>
             </a:r>
           </a:p>
           <a:p>
             <a:pPr>
               <a:spcAft>
-                <a:spcPts val="342"/>
+                <a:spcPts val="400"/>
               </a:spcAft>
             </a:pPr>
             <a:r>
-              <a:rPr sz="1200" b="0" i="0">
+              <a:rPr sz="1400" b="0" i="0">
                 <a:solidFill>
                   <a:srgbClr val="FFFFFF"/>
                 </a:solidFill>
                 <a:latin typeface="Calibri"/>
               </a:rPr>
-              <a:t>  end</a:t>
+              <a:t>  La consulta del RF-01 devuelve el resultado en menos de 2 segundos</a:t>
             </a:r>
           </a:p>
           <a:p>
             <a:pPr>
               <a:spcAft>
-                <a:spcPts val="342"/>
+                <a:spcPts val="400"/>
               </a:spcAft>
             </a:pPr>
             <a:r>
-              <a:rPr sz="1200" b="0" i="0">
+              <a:rPr sz="1400" b="0" i="0">
                 <a:solidFill>
                   <a:srgbClr val="FFFFFF"/>
                 </a:solidFill>
                 <a:latin typeface="Calibri"/>
               </a:rPr>
-              <a:t/>
+              <a:t>  con hasta 500 mascotas registradas.</a:t>
             </a:r>
           </a:p>
           <a:p>
             <a:pPr>
               <a:spcAft>
-                <a:spcPts val="342"/>
+                <a:spcPts val="400"/>
               </a:spcAft>
             </a:pPr>
             <a:r>
-              <a:rPr sz="1200" b="0" i="0">
+              <a:rPr sz="1400" b="0" i="0">
                 <a:solidFill>
                   <a:srgbClr val="FFFFFF"/>
                 </a:solidFill>
                 <a:latin typeface="Calibri"/>
               </a:rPr>
-              <a:t>  lab[Laboratorio externo]</a:t>
-            </a:r>
-          </a:p>
-          <a:p>
-            <a:pPr>
-              <a:spcAft>
-                <a:spcPts val="342"/>
-              </a:spcAft>
-            </a:pPr>
-            <a:r>
-              <a:rPr sz="1200" b="0" i="0">
-                <a:solidFill>
-                  <a:srgbClr val="FFFFFF"/>
-                </a:solidFill>
-                <a:latin typeface="Calibri"/>
-              </a:rPr>
-              <a:t/>
-            </a:r>
-          </a:p>
-          <a:p>
-            <a:pPr>
-              <a:spcAft>
-                <a:spcPts val="342"/>
-              </a:spcAft>
-            </a:pPr>
-            <a:r>
-              <a:rPr sz="1200" b="0" i="0">
-                <a:solidFill>
-                  <a:srgbClr val="FFFFFF"/>
-                </a:solidFill>
-                <a:latin typeface="Calibri"/>
-              </a:rPr>
-              <a:t>  rec --&gt;|agenda| agenda</a:t>
-            </a:r>
-          </a:p>
-          <a:p>
-            <a:pPr>
-              <a:spcAft>
-                <a:spcPts val="342"/>
-              </a:spcAft>
-            </a:pPr>
-            <a:r>
-              <a:rPr sz="1200" b="0" i="0">
-                <a:solidFill>
-                  <a:srgbClr val="FFFFFF"/>
-                </a:solidFill>
-                <a:latin typeface="Calibri"/>
-              </a:rPr>
-              <a:t>  vet --&gt;|consulta| exped</a:t>
-            </a:r>
-          </a:p>
-          <a:p>
-            <a:pPr>
-              <a:spcAft>
-                <a:spcPts val="342"/>
-              </a:spcAft>
-            </a:pPr>
-            <a:r>
-              <a:rPr sz="1200" b="0" i="0">
-                <a:solidFill>
-                  <a:srgbClr val="FFFFFF"/>
-                </a:solidFill>
-                <a:latin typeface="Calibri"/>
-              </a:rPr>
-              <a:t>  exped --&gt;|pide examen| lab</a:t>
-            </a:r>
-          </a:p>
-          <a:p>
-            <a:pPr>
-              <a:spcAft>
-                <a:spcPts val="342"/>
-              </a:spcAft>
-            </a:pPr>
-            <a:r>
-              <a:rPr sz="1200" b="0" i="0">
-                <a:solidFill>
-                  <a:srgbClr val="FFFFFF"/>
-                </a:solidFill>
-                <a:latin typeface="Calibri"/>
-              </a:rPr>
-              <a:t/>
-            </a:r>
-          </a:p>
-          <a:p>
-            <a:pPr>
-              <a:spcAft>
-                <a:spcPts val="342"/>
-              </a:spcAft>
-            </a:pPr>
-            <a:r>
-              <a:rPr sz="1200" b="0" i="0">
-                <a:solidFill>
-                  <a:srgbClr val="FFFFFF"/>
-                </a:solidFill>
-                <a:latin typeface="Calibri"/>
-              </a:rPr>
-              <a:t>%% Complete con SUS capacidades y actores: estas son dos de cada uno.</a:t>
+              <a:t>  Verificacion: medir con cronometro sobre el juego de datos de prueba.</a:t>
             </a:r>
           </a:p>
         </p:txBody>
@@ -10226,6 +10682,41 @@
       <p:sp>
         <p:nvSpPr>
           <p:cNvPr id="9" name="TextBox 8"/>
+          <p:cNvSpPr txBox="1"/>
+          <p:nvPr/>
+        </p:nvSpPr>
+        <p:spPr>
+          <a:xfrm>
+            <a:off x="457200" y="6080760"/>
+            <a:ext cx="11277295" cy="320040"/>
+          </a:xfrm>
+          <a:prstGeom prst="rect">
+            <a:avLst/>
+          </a:prstGeom>
+          <a:noFill/>
+        </p:spPr>
+        <p:txBody>
+          <a:bodyPr wrap="square">
+            <a:spAutoFit/>
+          </a:bodyPr>
+          <a:lstStyle/>
+          <a:p>
+            <a:pPr algn="ctr"/>
+            <a:r>
+              <a:rPr sz="1200" b="0" i="1">
+                <a:solidFill>
+                  <a:srgbClr val="666666"/>
+                </a:solidFill>
+                <a:latin typeface="Calibri"/>
+              </a:rPr>
+              <a:t>Si no se puede verificar, no es un requisito: es un deseo.</a:t>
+            </a:r>
+          </a:p>
+        </p:txBody>
+      </p:sp>
+      <p:sp>
+        <p:nvSpPr>
+          <p:cNvPr id="10" name="TextBox 9"/>
           <p:cNvSpPr txBox="1"/>
           <p:nvPr/>
         </p:nvSpPr>
@@ -10399,141 +10890,21 @@
                 </a:solidFill>
                 <a:latin typeface="Calibri"/>
               </a:rPr>
-              <a:t>La ficha de requisito bien escrito, campo por campo</a:t>
-            </a:r>
-          </a:p>
-        </p:txBody>
-      </p:sp>
-      <p:sp>
-        <p:nvSpPr>
-          <p:cNvPr id="5" name="Rounded Rectangle 4"/>
-          <p:cNvSpPr/>
-          <p:nvPr/>
-        </p:nvSpPr>
-        <p:spPr>
-          <a:xfrm>
-            <a:off x="457200" y="1261872"/>
-            <a:ext cx="11277295" cy="5093208"/>
-          </a:xfrm>
-          <a:prstGeom prst="roundRect">
-            <a:avLst>
-              <a:gd name="adj" fmla="val 12000"/>
-            </a:avLst>
-          </a:prstGeom>
-          <a:solidFill>
-            <a:srgbClr val="1E2A38"/>
-          </a:solidFill>
-          <a:ln>
-            <a:noFill/>
-          </a:ln>
-        </p:spPr>
-        <p:style>
-          <a:lnRef idx="1">
-            <a:schemeClr val="accent1"/>
-          </a:lnRef>
-          <a:fillRef idx="3">
-            <a:schemeClr val="accent1"/>
-          </a:fillRef>
-          <a:effectRef idx="2">
-            <a:schemeClr val="accent1"/>
-          </a:effectRef>
-          <a:fontRef idx="minor">
-            <a:schemeClr val="lt1"/>
-          </a:fontRef>
-        </p:style>
-        <p:txBody>
-          <a:bodyPr rtlCol="0" anchor="ctr"/>
-          <a:lstStyle/>
-          <a:p>
-            <a:pPr algn="ctr"/>
-          </a:p>
-        </p:txBody>
-      </p:sp>
-      <p:sp>
-        <p:nvSpPr>
-          <p:cNvPr id="6" name="Rectangle 5"/>
-          <p:cNvSpPr/>
-          <p:nvPr/>
-        </p:nvSpPr>
-        <p:spPr>
-          <a:xfrm>
-            <a:off x="457200" y="1261872"/>
-            <a:ext cx="11277295" cy="320040"/>
-          </a:xfrm>
-          <a:prstGeom prst="rect">
-            <a:avLst/>
-          </a:prstGeom>
-          <a:solidFill>
-            <a:srgbClr val="095292"/>
-          </a:solidFill>
-          <a:ln>
-            <a:noFill/>
-          </a:ln>
-        </p:spPr>
-        <p:style>
-          <a:lnRef idx="1">
-            <a:schemeClr val="accent1"/>
-          </a:lnRef>
-          <a:fillRef idx="3">
-            <a:schemeClr val="accent1"/>
-          </a:fillRef>
-          <a:effectRef idx="2">
-            <a:schemeClr val="accent1"/>
-          </a:effectRef>
-          <a:fontRef idx="minor">
-            <a:schemeClr val="lt1"/>
-          </a:fontRef>
-        </p:style>
-        <p:txBody>
-          <a:bodyPr rtlCol="0" anchor="ctr"/>
-          <a:lstStyle/>
-          <a:p>
-            <a:pPr algn="ctr"/>
-          </a:p>
-        </p:txBody>
-      </p:sp>
-      <p:sp>
-        <p:nvSpPr>
-          <p:cNvPr id="7" name="TextBox 6"/>
+              <a:t>Demo del dia</a:t>
+            </a:r>
+          </a:p>
+        </p:txBody>
+      </p:sp>
+      <p:sp>
+        <p:nvSpPr>
+          <p:cNvPr id="5" name="TextBox 4"/>
           <p:cNvSpPr txBox="1"/>
           <p:nvPr/>
         </p:nvSpPr>
         <p:spPr>
           <a:xfrm>
-            <a:off x="685800" y="1307592"/>
-            <a:ext cx="10820095" cy="256032"/>
-          </a:xfrm>
-          <a:prstGeom prst="rect">
-            <a:avLst/>
-          </a:prstGeom>
-          <a:noFill/>
-        </p:spPr>
-        <p:txBody>
-          <a:bodyPr wrap="square" anchor="ctr"/>
-          <a:lstStyle/>
-          <a:p>
-            <a:r>
-              <a:rPr sz="1000" b="1" i="0">
-                <a:solidFill>
-                  <a:srgbClr val="269CCB"/>
-                </a:solidFill>
-                <a:latin typeface="Calibri"/>
-              </a:rPr>
-              <a:t>● ● ●</a:t>
-            </a:r>
-          </a:p>
-        </p:txBody>
-      </p:sp>
-      <p:sp>
-        <p:nvSpPr>
-          <p:cNvPr id="8" name="TextBox 7"/>
-          <p:cNvSpPr txBox="1"/>
-          <p:nvPr/>
-        </p:nvSpPr>
-        <p:spPr>
-          <a:xfrm>
-            <a:off x="777240" y="1719072"/>
-            <a:ext cx="10637215" cy="4453128"/>
+            <a:off x="457200" y="1170432"/>
+            <a:ext cx="11277295" cy="5230368"/>
           </a:xfrm>
           <a:prstGeom prst="rect">
             <a:avLst/>
@@ -10548,216 +10919,92 @@
           <a:p>
             <a:pPr>
               <a:spcAft>
-                <a:spcPts val="400"/>
+                <a:spcPts val="800"/>
               </a:spcAft>
             </a:pPr>
             <a:r>
-              <a:rPr sz="1400" b="0" i="0">
-                <a:solidFill>
-                  <a:srgbClr val="FFFFFF"/>
-                </a:solidFill>
-                <a:latin typeface="Calibri"/>
-              </a:rPr>
-              <a:t>RF-01  Registrar mascota</a:t>
+              <a:rPr sz="2000" b="0" i="0">
+                <a:solidFill>
+                  <a:srgbClr val="333333"/>
+                </a:solidFill>
+                <a:latin typeface="Calibri"/>
+              </a:rPr>
+              <a:t>–   </a:t>
+            </a:r>
+            <a:r>
+              <a:rPr sz="2000" b="1" i="0">
+                <a:solidFill>
+                  <a:srgbClr val="333333"/>
+                </a:solidFill>
+                <a:latin typeface="Calibri"/>
+              </a:rPr>
+              <a:t>Herramienta:</a:t>
+            </a:r>
+            <a:r>
+              <a:rPr sz="2000" b="0" i="0">
+                <a:solidFill>
+                  <a:srgbClr val="333333"/>
+                </a:solidFill>
+                <a:latin typeface="Calibri"/>
+              </a:rPr>
+              <a:t> Google Docs · draw.io</a:t>
             </a:r>
           </a:p>
           <a:p>
             <a:pPr>
               <a:spcAft>
-                <a:spcPts val="400"/>
+                <a:spcPts val="800"/>
               </a:spcAft>
             </a:pPr>
             <a:r>
-              <a:rPr sz="1400" b="0" i="0">
-                <a:solidFill>
-                  <a:srgbClr val="FFFFFF"/>
-                </a:solidFill>
-                <a:latin typeface="Calibri"/>
-              </a:rPr>
-              <a:t/>
+              <a:rPr sz="2000" b="0" i="0">
+                <a:solidFill>
+                  <a:srgbClr val="333333"/>
+                </a:solidFill>
+                <a:latin typeface="Calibri"/>
+              </a:rPr>
+              <a:t>–   </a:t>
+            </a:r>
+            <a:r>
+              <a:rPr sz="2000" b="1" i="0">
+                <a:solidFill>
+                  <a:srgbClr val="333333"/>
+                </a:solidFill>
+                <a:latin typeface="Calibri"/>
+              </a:rPr>
+              <a:t>Demo:</a:t>
+            </a:r>
+            <a:r>
+              <a:rPr sz="2000" b="0" i="0">
+                <a:solidFill>
+                  <a:srgbClr val="333333"/>
+                </a:solidFill>
+                <a:latin typeface="Calibri"/>
+              </a:rPr>
+              <a:t> Convertir en vivo la frase cruda «necesito buscar rapido el expediente de un animal» en un requisito funcional y uno no funcional bien escritos</a:t>
             </a:r>
           </a:p>
           <a:p>
             <a:pPr>
               <a:spcAft>
-                <a:spcPts val="400"/>
+                <a:spcPts val="800"/>
               </a:spcAft>
             </a:pPr>
             <a:r>
-              <a:rPr sz="1400" b="0" i="0">
-                <a:solidFill>
-                  <a:srgbClr val="FFFFFF"/>
-                </a:solidFill>
-                <a:latin typeface="Calibri"/>
-              </a:rPr>
-              <a:t>Actor:        Recepcionista</a:t>
-            </a:r>
-          </a:p>
-          <a:p>
-            <a:pPr>
-              <a:spcAft>
-                <a:spcPts val="400"/>
-              </a:spcAft>
-            </a:pPr>
-            <a:r>
-              <a:rPr sz="1400" b="0" i="0">
-                <a:solidFill>
-                  <a:srgbClr val="FFFFFF"/>
-                </a:solidFill>
-                <a:latin typeface="Calibri"/>
-              </a:rPr>
-              <a:t>Precondicion: el dueno ya esta registrado</a:t>
-            </a:r>
-          </a:p>
-          <a:p>
-            <a:pPr>
-              <a:spcAft>
-                <a:spcPts val="400"/>
-              </a:spcAft>
-            </a:pPr>
-            <a:r>
-              <a:rPr sz="1400" b="0" i="0">
-                <a:solidFill>
-                  <a:srgbClr val="FFFFFF"/>
-                </a:solidFill>
-                <a:latin typeface="Calibri"/>
-              </a:rPr>
-              <a:t>Descripcion:  El sistema DEBE permitir registrar una mascota con nombre,</a:t>
-            </a:r>
-          </a:p>
-          <a:p>
-            <a:pPr>
-              <a:spcAft>
-                <a:spcPts val="400"/>
-              </a:spcAft>
-            </a:pPr>
-            <a:r>
-              <a:rPr sz="1400" b="0" i="0">
-                <a:solidFill>
-                  <a:srgbClr val="FFFFFF"/>
-                </a:solidFill>
-                <a:latin typeface="Calibri"/>
-              </a:rPr>
-              <a:t>              especie, fecha de nacimiento y dueno asociado.</a:t>
-            </a:r>
-          </a:p>
-          <a:p>
-            <a:pPr>
-              <a:spcAft>
-                <a:spcPts val="400"/>
-              </a:spcAft>
-            </a:pPr>
-            <a:r>
-              <a:rPr sz="1400" b="0" i="0">
-                <a:solidFill>
-                  <a:srgbClr val="FFFFFF"/>
-                </a:solidFill>
-                <a:latin typeface="Calibri"/>
-              </a:rPr>
-              <a:t>Postcondicion: la mascota queda con expediente abierto y activa = 'S'</a:t>
-            </a:r>
-          </a:p>
-          <a:p>
-            <a:pPr>
-              <a:spcAft>
-                <a:spcPts val="400"/>
-              </a:spcAft>
-            </a:pPr>
-            <a:r>
-              <a:rPr sz="1400" b="0" i="0">
-                <a:solidFill>
-                  <a:srgbClr val="FFFFFF"/>
-                </a:solidFill>
-                <a:latin typeface="Calibri"/>
-              </a:rPr>
-              <a:t>Prioridad:    Must</a:t>
-            </a:r>
-          </a:p>
-          <a:p>
-            <a:pPr>
-              <a:spcAft>
-                <a:spcPts val="400"/>
-              </a:spcAft>
-            </a:pPr>
-            <a:r>
-              <a:rPr sz="1400" b="0" i="0">
-                <a:solidFill>
-                  <a:srgbClr val="FFFFFF"/>
-                </a:solidFill>
-                <a:latin typeface="Calibri"/>
-              </a:rPr>
-              <a:t>Origen:       entrevista Dr. Ramirez, 12/08/2026</a:t>
-            </a:r>
-          </a:p>
-          <a:p>
-            <a:pPr>
-              <a:spcAft>
-                <a:spcPts val="400"/>
-              </a:spcAft>
-            </a:pPr>
-            <a:r>
-              <a:rPr sz="1400" b="0" i="0">
-                <a:solidFill>
-                  <a:srgbClr val="FFFFFF"/>
-                </a:solidFill>
-                <a:latin typeface="Calibri"/>
-              </a:rPr>
-              <a:t/>
-            </a:r>
-          </a:p>
-          <a:p>
-            <a:pPr>
-              <a:spcAft>
-                <a:spcPts val="400"/>
-              </a:spcAft>
-            </a:pPr>
-            <a:r>
-              <a:rPr sz="1400" b="0" i="0">
-                <a:solidFill>
-                  <a:srgbClr val="FFFFFF"/>
-                </a:solidFill>
-                <a:latin typeface="Calibri"/>
-              </a:rPr>
-              <a:t>-- Lo que convierte una frase cruda en requisito: sujeto (el sistema),</a:t>
-            </a:r>
-          </a:p>
-          <a:p>
-            <a:pPr>
-              <a:spcAft>
-                <a:spcPts val="400"/>
-              </a:spcAft>
-            </a:pPr>
-            <a:r>
-              <a:rPr sz="1400" b="0" i="0">
-                <a:solidFill>
-                  <a:srgbClr val="FFFFFF"/>
-                </a:solidFill>
-                <a:latin typeface="Calibri"/>
-              </a:rPr>
-              <a:t>-- verbo normativo (DEBE), objeto verificable, y de donde salio.</a:t>
-            </a:r>
-          </a:p>
-          <a:p>
-            <a:pPr>
-              <a:spcAft>
-                <a:spcPts val="400"/>
-              </a:spcAft>
-            </a:pPr>
-            <a:r>
-              <a:rPr sz="1400" b="0" i="0">
-                <a:solidFill>
-                  <a:srgbClr val="FFFFFF"/>
-                </a:solidFill>
-                <a:latin typeface="Calibri"/>
-              </a:rPr>
-              <a:t>-- «El sistema debe ser facil de usar» no es un requisito: no se verifica.</a:t>
-            </a:r>
-          </a:p>
-        </p:txBody>
-      </p:sp>
-      <p:sp>
-        <p:nvSpPr>
-          <p:cNvPr id="9" name="TextBox 8"/>
+              <a:rPr sz="2000" b="0" i="0">
+                <a:solidFill>
+                  <a:srgbClr val="333333"/>
+                </a:solidFill>
+                <a:latin typeface="Calibri"/>
+              </a:rPr>
+              <a:t>–   Mismo dominio VetCare — no otro ejemplo. Aqui se diseña, no se programa.</a:t>
+            </a:r>
+          </a:p>
+        </p:txBody>
+      </p:sp>
+      <p:sp>
+        <p:nvSpPr>
+          <p:cNvPr id="6" name="TextBox 5"/>
           <p:cNvSpPr txBox="1"/>
           <p:nvPr/>
         </p:nvSpPr>
@@ -10825,13 +11072,13 @@
         <p:spPr>
           <a:xfrm>
             <a:off x="0" y="0"/>
-            <a:ext cx="12191695" cy="960120"/>
+            <a:ext cx="12191695" cy="164592"/>
           </a:xfrm>
           <a:prstGeom prst="rect">
             <a:avLst/>
           </a:prstGeom>
           <a:solidFill>
-            <a:srgbClr val="095292"/>
+            <a:srgbClr val="269CCB"/>
           </a:solidFill>
           <a:ln>
             <a:noFill/>
@@ -10859,49 +11106,30 @@
           </a:p>
         </p:txBody>
       </p:sp>
-      <p:sp>
-        <p:nvSpPr>
-          <p:cNvPr id="3" name="Rectangle 2"/>
-          <p:cNvSpPr/>
-          <p:nvPr/>
-        </p:nvSpPr>
-        <p:spPr>
-          <a:xfrm>
-            <a:off x="0" y="960120"/>
-            <a:ext cx="12191695" cy="41148"/>
-          </a:xfrm>
-          <a:prstGeom prst="rect">
-            <a:avLst/>
-          </a:prstGeom>
-          <a:solidFill>
-            <a:srgbClr val="FFD000"/>
-          </a:solidFill>
-          <a:ln>
-            <a:noFill/>
-          </a:ln>
-        </p:spPr>
-        <p:style>
-          <a:lnRef idx="1">
-            <a:schemeClr val="accent1"/>
-          </a:lnRef>
-          <a:fillRef idx="3">
-            <a:schemeClr val="accent1"/>
-          </a:fillRef>
-          <a:effectRef idx="2">
-            <a:schemeClr val="accent1"/>
-          </a:effectRef>
-          <a:fontRef idx="minor">
-            <a:schemeClr val="lt1"/>
-          </a:fontRef>
-        </p:style>
-        <p:txBody>
-          <a:bodyPr rtlCol="0" anchor="ctr"/>
-          <a:lstStyle/>
-          <a:p>
-            <a:pPr algn="ctr"/>
-          </a:p>
-        </p:txBody>
-      </p:sp>
+      <p:pic>
+        <p:nvPicPr>
+          <p:cNvPr id="3" name="Picture 2" descr="logo_uniajc_color.png"/>
+          <p:cNvPicPr>
+            <a:picLocks noChangeAspect="1"/>
+          </p:cNvPicPr>
+          <p:nvPr/>
+        </p:nvPicPr>
+        <p:blipFill>
+          <a:blip r:embed="rId2"/>
+          <a:stretch>
+            <a:fillRect/>
+          </a:stretch>
+        </p:blipFill>
+        <p:spPr>
+          <a:xfrm>
+            <a:off x="10271455" y="5998464"/>
+            <a:ext cx="1463040" cy="643233"/>
+          </a:xfrm>
+          <a:prstGeom prst="rect">
+            <a:avLst/>
+          </a:prstGeom>
+        </p:spPr>
+      </p:pic>
       <p:sp>
         <p:nvSpPr>
           <p:cNvPr id="4" name="TextBox 3"/>
@@ -10910,8 +11138,41 @@
         </p:nvSpPr>
         <p:spPr>
           <a:xfrm>
-            <a:off x="457200" y="164592"/>
-            <a:ext cx="11277295" cy="502920"/>
+            <a:off x="457200" y="1737360"/>
+            <a:ext cx="11277295" cy="1097280"/>
+          </a:xfrm>
+          <a:prstGeom prst="rect">
+            <a:avLst/>
+          </a:prstGeom>
+          <a:noFill/>
+        </p:spPr>
+        <p:txBody>
+          <a:bodyPr wrap="square" anchor="ctr"/>
+          <a:lstStyle/>
+          <a:p>
+            <a:pPr algn="ctr"/>
+            <a:r>
+              <a:rPr sz="3400" b="1" i="0">
+                <a:solidFill>
+                  <a:srgbClr val="095292"/>
+                </a:solidFill>
+                <a:latin typeface="Calibri"/>
+              </a:rPr>
+              <a:t>Clase 1 · Conceptos iniciales de ingenieria de software</a:t>
+            </a:r>
+          </a:p>
+        </p:txBody>
+      </p:sp>
+      <p:sp>
+        <p:nvSpPr>
+          <p:cNvPr id="5" name="TextBox 4"/>
+          <p:cNvSpPr txBox="1"/>
+          <p:nvPr/>
+        </p:nvSpPr>
+        <p:spPr>
+          <a:xfrm>
+            <a:off x="457200" y="3017520"/>
+            <a:ext cx="11277295" cy="1645920"/>
           </a:xfrm>
           <a:prstGeom prst="rect">
             <a:avLst/>
@@ -10924,148 +11185,65 @@
           </a:bodyPr>
           <a:lstStyle/>
           <a:p>
-            <a:r>
-              <a:rPr sz="2600" b="1" i="0">
-                <a:solidFill>
-                  <a:srgbClr val="FFFFFF"/>
-                </a:solidFill>
-                <a:latin typeface="Calibri"/>
-              </a:rPr>
-              <a:t>De frase cruda a requisito verificable</a:t>
-            </a:r>
-          </a:p>
-        </p:txBody>
-      </p:sp>
-      <p:sp>
-        <p:nvSpPr>
-          <p:cNvPr id="5" name="Rounded Rectangle 4"/>
-          <p:cNvSpPr/>
-          <p:nvPr/>
-        </p:nvSpPr>
-        <p:spPr>
-          <a:xfrm>
-            <a:off x="457200" y="1261872"/>
-            <a:ext cx="11277295" cy="4773168"/>
-          </a:xfrm>
-          <a:prstGeom prst="roundRect">
-            <a:avLst>
-              <a:gd name="adj" fmla="val 12000"/>
-            </a:avLst>
-          </a:prstGeom>
-          <a:solidFill>
-            <a:srgbClr val="1E2A38"/>
-          </a:solidFill>
-          <a:ln>
-            <a:noFill/>
-          </a:ln>
-        </p:spPr>
-        <p:style>
-          <a:lnRef idx="1">
-            <a:schemeClr val="accent1"/>
-          </a:lnRef>
-          <a:fillRef idx="3">
-            <a:schemeClr val="accent1"/>
-          </a:fillRef>
-          <a:effectRef idx="2">
-            <a:schemeClr val="accent1"/>
-          </a:effectRef>
-          <a:fontRef idx="minor">
-            <a:schemeClr val="lt1"/>
-          </a:fontRef>
-        </p:style>
-        <p:txBody>
-          <a:bodyPr rtlCol="0" anchor="ctr"/>
-          <a:lstStyle/>
-          <a:p>
-            <a:pPr algn="ctr"/>
-          </a:p>
-        </p:txBody>
-      </p:sp>
-      <p:sp>
-        <p:nvSpPr>
-          <p:cNvPr id="6" name="Rectangle 5"/>
-          <p:cNvSpPr/>
-          <p:nvPr/>
-        </p:nvSpPr>
-        <p:spPr>
-          <a:xfrm>
-            <a:off x="457200" y="1261872"/>
-            <a:ext cx="11277295" cy="320040"/>
-          </a:xfrm>
-          <a:prstGeom prst="rect">
-            <a:avLst/>
-          </a:prstGeom>
-          <a:solidFill>
-            <a:srgbClr val="095292"/>
-          </a:solidFill>
-          <a:ln>
-            <a:noFill/>
-          </a:ln>
-        </p:spPr>
-        <p:style>
-          <a:lnRef idx="1">
-            <a:schemeClr val="accent1"/>
-          </a:lnRef>
-          <a:fillRef idx="3">
-            <a:schemeClr val="accent1"/>
-          </a:fillRef>
-          <a:effectRef idx="2">
-            <a:schemeClr val="accent1"/>
-          </a:effectRef>
-          <a:fontRef idx="minor">
-            <a:schemeClr val="lt1"/>
-          </a:fontRef>
-        </p:style>
-        <p:txBody>
-          <a:bodyPr rtlCol="0" anchor="ctr"/>
-          <a:lstStyle/>
-          <a:p>
-            <a:pPr algn="ctr"/>
-          </a:p>
-        </p:txBody>
-      </p:sp>
-      <p:sp>
-        <p:nvSpPr>
-          <p:cNvPr id="7" name="TextBox 6"/>
+            <a:pPr algn="ctr">
+              <a:spcAft>
+                <a:spcPts val="600"/>
+              </a:spcAft>
+            </a:pPr>
+            <a:r>
+              <a:rPr sz="1600" b="0" i="0">
+                <a:solidFill>
+                  <a:srgbClr val="333333"/>
+                </a:solidFill>
+                <a:latin typeface="Calibri"/>
+              </a:rPr>
+              <a:t>Que es diseñar software y por que no es programar</a:t>
+            </a:r>
+          </a:p>
+          <a:p>
+            <a:pPr algn="ctr">
+              <a:spcAft>
+                <a:spcPts val="600"/>
+              </a:spcAft>
+            </a:pPr>
+            <a:r>
+              <a:rPr sz="1600" b="0" i="0">
+                <a:solidFill>
+                  <a:srgbClr val="333333"/>
+                </a:solidFill>
+                <a:latin typeface="Calibri"/>
+              </a:rPr>
+              <a:t>Repasen las laminas de teoria: cada concepto esta completo</a:t>
+            </a:r>
+          </a:p>
+          <a:p>
+            <a:pPr algn="ctr">
+              <a:spcAft>
+                <a:spcPts val="600"/>
+              </a:spcAft>
+            </a:pPr>
+            <a:r>
+              <a:rPr sz="1600" b="0" i="0">
+                <a:solidFill>
+                  <a:srgbClr val="333333"/>
+                </a:solidFill>
+                <a:latin typeface="Calibri"/>
+              </a:rPr>
+              <a:t>Siguiente clase: continuamos con el siguiente tema</a:t>
+            </a:r>
+          </a:p>
+        </p:txBody>
+      </p:sp>
+      <p:sp>
+        <p:nvSpPr>
+          <p:cNvPr id="6" name="TextBox 5"/>
           <p:cNvSpPr txBox="1"/>
           <p:nvPr/>
         </p:nvSpPr>
         <p:spPr>
           <a:xfrm>
-            <a:off x="685800" y="1307592"/>
-            <a:ext cx="10820095" cy="256032"/>
-          </a:xfrm>
-          <a:prstGeom prst="rect">
-            <a:avLst/>
-          </a:prstGeom>
-          <a:noFill/>
-        </p:spPr>
-        <p:txBody>
-          <a:bodyPr wrap="square" anchor="ctr"/>
-          <a:lstStyle/>
-          <a:p>
-            <a:r>
-              <a:rPr sz="1000" b="1" i="0">
-                <a:solidFill>
-                  <a:srgbClr val="269CCB"/>
-                </a:solidFill>
-                <a:latin typeface="Calibri"/>
-              </a:rPr>
-              <a:t>● ● ●</a:t>
-            </a:r>
-          </a:p>
-        </p:txBody>
-      </p:sp>
-      <p:sp>
-        <p:nvSpPr>
-          <p:cNvPr id="8" name="TextBox 7"/>
-          <p:cNvSpPr txBox="1"/>
-          <p:nvPr/>
-        </p:nvSpPr>
-        <p:spPr>
-          <a:xfrm>
-            <a:off x="777240" y="1719072"/>
-            <a:ext cx="10637215" cy="4133087"/>
+            <a:off x="457200" y="4754880"/>
+            <a:ext cx="11277295" cy="640080"/>
           </a:xfrm>
           <a:prstGeom prst="rect">
             <a:avLst/>
@@ -11078,265 +11256,15 @@
           </a:bodyPr>
           <a:lstStyle/>
           <a:p>
-            <a:pPr>
-              <a:spcAft>
-                <a:spcPts val="400"/>
-              </a:spcAft>
-            </a:pPr>
-            <a:r>
-              <a:rPr sz="1400" b="0" i="0">
-                <a:solidFill>
-                  <a:srgbClr val="FFFFFF"/>
-                </a:solidFill>
-                <a:latin typeface="Calibri"/>
-              </a:rPr>
-              <a:t>FRASE DEL CLIENTE (entrevista):</a:t>
-            </a:r>
-          </a:p>
-          <a:p>
-            <a:pPr>
-              <a:spcAft>
-                <a:spcPts val="400"/>
-              </a:spcAft>
-            </a:pPr>
-            <a:r>
-              <a:rPr sz="1400" b="0" i="0">
-                <a:solidFill>
-                  <a:srgbClr val="FFFFFF"/>
-                </a:solidFill>
-                <a:latin typeface="Calibri"/>
-              </a:rPr>
-              <a:t>  "Necesito buscar rapido el expediente de un animal usando solo su ID."</a:t>
-            </a:r>
-          </a:p>
-          <a:p>
-            <a:pPr>
-              <a:spcAft>
-                <a:spcPts val="400"/>
-              </a:spcAft>
-            </a:pPr>
-            <a:r>
-              <a:rPr sz="1400" b="0" i="0">
-                <a:solidFill>
-                  <a:srgbClr val="FFFFFF"/>
-                </a:solidFill>
-                <a:latin typeface="Calibri"/>
-              </a:rPr>
-              <a:t/>
-            </a:r>
-          </a:p>
-          <a:p>
-            <a:pPr>
-              <a:spcAft>
-                <a:spcPts val="400"/>
-              </a:spcAft>
-            </a:pPr>
-            <a:r>
-              <a:rPr sz="1400" b="0" i="0">
-                <a:solidFill>
-                  <a:srgbClr val="FFFFFF"/>
-                </a:solidFill>
-                <a:latin typeface="Calibri"/>
-              </a:rPr>
-              <a:t>RF-01  Buscar expediente por identificador</a:t>
-            </a:r>
-          </a:p>
-          <a:p>
-            <a:pPr>
-              <a:spcAft>
-                <a:spcPts val="400"/>
-              </a:spcAft>
-            </a:pPr>
-            <a:r>
-              <a:rPr sz="1400" b="0" i="0">
-                <a:solidFill>
-                  <a:srgbClr val="FFFFFF"/>
-                </a:solidFill>
-                <a:latin typeface="Calibri"/>
-              </a:rPr>
-              <a:t>  El sistema permite consultar la ficha completa de una mascota</a:t>
-            </a:r>
-          </a:p>
-          <a:p>
-            <a:pPr>
-              <a:spcAft>
-                <a:spcPts val="400"/>
-              </a:spcAft>
-            </a:pPr>
-            <a:r>
-              <a:rPr sz="1400" b="0" i="0">
-                <a:solidFill>
-                  <a:srgbClr val="FFFFFF"/>
-                </a:solidFill>
-                <a:latin typeface="Calibri"/>
-              </a:rPr>
-              <a:t>  a partir de su identificador unico.</a:t>
-            </a:r>
-          </a:p>
-          <a:p>
-            <a:pPr>
-              <a:spcAft>
-                <a:spcPts val="400"/>
-              </a:spcAft>
-            </a:pPr>
-            <a:r>
-              <a:rPr sz="1400" b="0" i="0">
-                <a:solidFill>
-                  <a:srgbClr val="FFFFFF"/>
-                </a:solidFill>
-                <a:latin typeface="Calibri"/>
-              </a:rPr>
-              <a:t>  Actor: Recepcionista, Veterinario</a:t>
-            </a:r>
-          </a:p>
-          <a:p>
-            <a:pPr>
-              <a:spcAft>
-                <a:spcPts val="400"/>
-              </a:spcAft>
-            </a:pPr>
-            <a:r>
-              <a:rPr sz="1400" b="0" i="0">
-                <a:solidFill>
-                  <a:srgbClr val="FFFFFF"/>
-                </a:solidFill>
-                <a:latin typeface="Calibri"/>
-              </a:rPr>
-              <a:t/>
-            </a:r>
-          </a:p>
-          <a:p>
-            <a:pPr>
-              <a:spcAft>
-                <a:spcPts val="400"/>
-              </a:spcAft>
-            </a:pPr>
-            <a:r>
-              <a:rPr sz="1400" b="0" i="0">
-                <a:solidFill>
-                  <a:srgbClr val="FFFFFF"/>
-                </a:solidFill>
-                <a:latin typeface="Calibri"/>
-              </a:rPr>
-              <a:t>RNF-01 Tiempo de respuesta de la busqueda</a:t>
-            </a:r>
-          </a:p>
-          <a:p>
-            <a:pPr>
-              <a:spcAft>
-                <a:spcPts val="400"/>
-              </a:spcAft>
-            </a:pPr>
-            <a:r>
-              <a:rPr sz="1400" b="0" i="0">
-                <a:solidFill>
-                  <a:srgbClr val="FFFFFF"/>
-                </a:solidFill>
-                <a:latin typeface="Calibri"/>
-              </a:rPr>
-              <a:t>  La consulta del RF-01 devuelve el resultado en menos de 2 segundos</a:t>
-            </a:r>
-          </a:p>
-          <a:p>
-            <a:pPr>
-              <a:spcAft>
-                <a:spcPts val="400"/>
-              </a:spcAft>
-            </a:pPr>
-            <a:r>
-              <a:rPr sz="1400" b="0" i="0">
-                <a:solidFill>
-                  <a:srgbClr val="FFFFFF"/>
-                </a:solidFill>
-                <a:latin typeface="Calibri"/>
-              </a:rPr>
-              <a:t>  con hasta 500 mascotas registradas.</a:t>
-            </a:r>
-          </a:p>
-          <a:p>
-            <a:pPr>
-              <a:spcAft>
-                <a:spcPts val="400"/>
-              </a:spcAft>
-            </a:pPr>
-            <a:r>
-              <a:rPr sz="1400" b="0" i="0">
-                <a:solidFill>
-                  <a:srgbClr val="FFFFFF"/>
-                </a:solidFill>
-                <a:latin typeface="Calibri"/>
-              </a:rPr>
-              <a:t>  Verificacion: medir con cronometro sobre el juego de datos de prueba.</a:t>
-            </a:r>
-          </a:p>
-        </p:txBody>
-      </p:sp>
-      <p:sp>
-        <p:nvSpPr>
-          <p:cNvPr id="9" name="TextBox 8"/>
-          <p:cNvSpPr txBox="1"/>
-          <p:nvPr/>
-        </p:nvSpPr>
-        <p:spPr>
-          <a:xfrm>
-            <a:off x="457200" y="6080760"/>
-            <a:ext cx="11277295" cy="320040"/>
-          </a:xfrm>
-          <a:prstGeom prst="rect">
-            <a:avLst/>
-          </a:prstGeom>
-          <a:noFill/>
-        </p:spPr>
-        <p:txBody>
-          <a:bodyPr wrap="square">
-            <a:spAutoFit/>
-          </a:bodyPr>
-          <a:lstStyle/>
-          <a:p>
             <a:pPr algn="ctr"/>
             <a:r>
-              <a:rPr sz="1200" b="0" i="1">
-                <a:solidFill>
-                  <a:srgbClr val="666666"/>
-                </a:solidFill>
-                <a:latin typeface="Calibri"/>
-              </a:rPr>
-              <a:t>Si no se puede verificar, no es un requisito: es un deseo.</a:t>
-            </a:r>
-          </a:p>
-        </p:txBody>
-      </p:sp>
-      <p:sp>
-        <p:nvSpPr>
-          <p:cNvPr id="10" name="TextBox 9"/>
-          <p:cNvSpPr txBox="1"/>
-          <p:nvPr/>
-        </p:nvSpPr>
-        <p:spPr>
-          <a:xfrm>
-            <a:off x="11185855" y="6473952"/>
-            <a:ext cx="640080" cy="274320"/>
-          </a:xfrm>
-          <a:prstGeom prst="rect">
-            <a:avLst/>
-          </a:prstGeom>
-          <a:noFill/>
-        </p:spPr>
-        <p:txBody>
-          <a:bodyPr wrap="square">
-            <a:spAutoFit/>
-          </a:bodyPr>
-          <a:lstStyle/>
-          <a:p>
-            <a:pPr algn="r"/>
-            <a:r>
-              <a:rPr sz="1100" b="0" i="0">
-                <a:solidFill>
-                  <a:srgbClr val="666666"/>
-                </a:solidFill>
-                <a:latin typeface="Calibri"/>
-              </a:rPr>
-              <a:t>29</a:t>
+              <a:rPr sz="2000" b="1" i="0">
+                <a:solidFill>
+                  <a:srgbClr val="269CCB"/>
+                </a:solidFill>
+                <a:latin typeface="Calibri"/>
+              </a:rPr>
+              <a:t>Teoria al servicio del diseño</a:t>
             </a:r>
           </a:p>
         </p:txBody>
@@ -12189,526 +12117,6 @@
                 <a:latin typeface="Calibri"/>
               </a:rPr>
               <a:t>3</a:t>
-            </a:r>
-          </a:p>
-        </p:txBody>
-      </p:sp>
-    </p:spTree>
-  </p:cSld>
-  <p:clrMapOvr>
-    <a:masterClrMapping/>
-  </p:clrMapOvr>
-</p:sld>
-</file>
-
-<file path=ppt/slides/slide30.xml><?xml version="1.0" encoding="utf-8"?>
-<p:sld xmlns:a="http://schemas.openxmlformats.org/drawingml/2006/main" xmlns:p="http://schemas.openxmlformats.org/presentationml/2006/main" xmlns:r="http://schemas.openxmlformats.org/officeDocument/2006/relationships">
-  <p:cSld>
-    <p:bg>
-      <p:bgPr>
-        <a:solidFill>
-          <a:srgbClr val="FFFFFF"/>
-        </a:solidFill>
-        <a:effectLst/>
-      </p:bgPr>
-    </p:bg>
-    <p:spTree>
-      <p:nvGrpSpPr>
-        <p:cNvPr id="1" name=""/>
-        <p:cNvGrpSpPr/>
-        <p:nvPr/>
-      </p:nvGrpSpPr>
-      <p:grpSpPr/>
-      <p:sp>
-        <p:nvSpPr>
-          <p:cNvPr id="2" name="Rectangle 1"/>
-          <p:cNvSpPr/>
-          <p:nvPr/>
-        </p:nvSpPr>
-        <p:spPr>
-          <a:xfrm>
-            <a:off x="0" y="0"/>
-            <a:ext cx="12191695" cy="960120"/>
-          </a:xfrm>
-          <a:prstGeom prst="rect">
-            <a:avLst/>
-          </a:prstGeom>
-          <a:solidFill>
-            <a:srgbClr val="095292"/>
-          </a:solidFill>
-          <a:ln>
-            <a:noFill/>
-          </a:ln>
-        </p:spPr>
-        <p:style>
-          <a:lnRef idx="1">
-            <a:schemeClr val="accent1"/>
-          </a:lnRef>
-          <a:fillRef idx="3">
-            <a:schemeClr val="accent1"/>
-          </a:fillRef>
-          <a:effectRef idx="2">
-            <a:schemeClr val="accent1"/>
-          </a:effectRef>
-          <a:fontRef idx="minor">
-            <a:schemeClr val="lt1"/>
-          </a:fontRef>
-        </p:style>
-        <p:txBody>
-          <a:bodyPr rtlCol="0" anchor="ctr"/>
-          <a:lstStyle/>
-          <a:p>
-            <a:pPr algn="ctr"/>
-          </a:p>
-        </p:txBody>
-      </p:sp>
-      <p:sp>
-        <p:nvSpPr>
-          <p:cNvPr id="3" name="Rectangle 2"/>
-          <p:cNvSpPr/>
-          <p:nvPr/>
-        </p:nvSpPr>
-        <p:spPr>
-          <a:xfrm>
-            <a:off x="0" y="960120"/>
-            <a:ext cx="12191695" cy="41148"/>
-          </a:xfrm>
-          <a:prstGeom prst="rect">
-            <a:avLst/>
-          </a:prstGeom>
-          <a:solidFill>
-            <a:srgbClr val="FFD000"/>
-          </a:solidFill>
-          <a:ln>
-            <a:noFill/>
-          </a:ln>
-        </p:spPr>
-        <p:style>
-          <a:lnRef idx="1">
-            <a:schemeClr val="accent1"/>
-          </a:lnRef>
-          <a:fillRef idx="3">
-            <a:schemeClr val="accent1"/>
-          </a:fillRef>
-          <a:effectRef idx="2">
-            <a:schemeClr val="accent1"/>
-          </a:effectRef>
-          <a:fontRef idx="minor">
-            <a:schemeClr val="lt1"/>
-          </a:fontRef>
-        </p:style>
-        <p:txBody>
-          <a:bodyPr rtlCol="0" anchor="ctr"/>
-          <a:lstStyle/>
-          <a:p>
-            <a:pPr algn="ctr"/>
-          </a:p>
-        </p:txBody>
-      </p:sp>
-      <p:sp>
-        <p:nvSpPr>
-          <p:cNvPr id="4" name="TextBox 3"/>
-          <p:cNvSpPr txBox="1"/>
-          <p:nvPr/>
-        </p:nvSpPr>
-        <p:spPr>
-          <a:xfrm>
-            <a:off x="457200" y="164592"/>
-            <a:ext cx="11277295" cy="502920"/>
-          </a:xfrm>
-          <a:prstGeom prst="rect">
-            <a:avLst/>
-          </a:prstGeom>
-          <a:noFill/>
-        </p:spPr>
-        <p:txBody>
-          <a:bodyPr wrap="square">
-            <a:spAutoFit/>
-          </a:bodyPr>
-          <a:lstStyle/>
-          <a:p>
-            <a:r>
-              <a:rPr sz="2600" b="1" i="0">
-                <a:solidFill>
-                  <a:srgbClr val="FFFFFF"/>
-                </a:solidFill>
-                <a:latin typeface="Calibri"/>
-              </a:rPr>
-              <a:t>Demo del dia</a:t>
-            </a:r>
-          </a:p>
-        </p:txBody>
-      </p:sp>
-      <p:sp>
-        <p:nvSpPr>
-          <p:cNvPr id="5" name="TextBox 4"/>
-          <p:cNvSpPr txBox="1"/>
-          <p:nvPr/>
-        </p:nvSpPr>
-        <p:spPr>
-          <a:xfrm>
-            <a:off x="457200" y="1170432"/>
-            <a:ext cx="11277295" cy="5230368"/>
-          </a:xfrm>
-          <a:prstGeom prst="rect">
-            <a:avLst/>
-          </a:prstGeom>
-          <a:noFill/>
-        </p:spPr>
-        <p:txBody>
-          <a:bodyPr wrap="square">
-            <a:spAutoFit/>
-          </a:bodyPr>
-          <a:lstStyle/>
-          <a:p>
-            <a:pPr>
-              <a:spcAft>
-                <a:spcPts val="800"/>
-              </a:spcAft>
-            </a:pPr>
-            <a:r>
-              <a:rPr sz="2000" b="0" i="0">
-                <a:solidFill>
-                  <a:srgbClr val="333333"/>
-                </a:solidFill>
-                <a:latin typeface="Calibri"/>
-              </a:rPr>
-              <a:t>–   </a:t>
-            </a:r>
-            <a:r>
-              <a:rPr sz="2000" b="1" i="0">
-                <a:solidFill>
-                  <a:srgbClr val="333333"/>
-                </a:solidFill>
-                <a:latin typeface="Calibri"/>
-              </a:rPr>
-              <a:t>Herramienta:</a:t>
-            </a:r>
-            <a:r>
-              <a:rPr sz="2000" b="0" i="0">
-                <a:solidFill>
-                  <a:srgbClr val="333333"/>
-                </a:solidFill>
-                <a:latin typeface="Calibri"/>
-              </a:rPr>
-              <a:t> Google Docs · draw.io</a:t>
-            </a:r>
-          </a:p>
-          <a:p>
-            <a:pPr>
-              <a:spcAft>
-                <a:spcPts val="800"/>
-              </a:spcAft>
-            </a:pPr>
-            <a:r>
-              <a:rPr sz="2000" b="0" i="0">
-                <a:solidFill>
-                  <a:srgbClr val="333333"/>
-                </a:solidFill>
-                <a:latin typeface="Calibri"/>
-              </a:rPr>
-              <a:t>–   </a:t>
-            </a:r>
-            <a:r>
-              <a:rPr sz="2000" b="1" i="0">
-                <a:solidFill>
-                  <a:srgbClr val="333333"/>
-                </a:solidFill>
-                <a:latin typeface="Calibri"/>
-              </a:rPr>
-              <a:t>Demo:</a:t>
-            </a:r>
-            <a:r>
-              <a:rPr sz="2000" b="0" i="0">
-                <a:solidFill>
-                  <a:srgbClr val="333333"/>
-                </a:solidFill>
-                <a:latin typeface="Calibri"/>
-              </a:rPr>
-              <a:t> Convertir en vivo la frase cruda «necesito buscar rapido el expediente de un animal» en un requisito funcional y uno no funcional bien escritos</a:t>
-            </a:r>
-          </a:p>
-          <a:p>
-            <a:pPr>
-              <a:spcAft>
-                <a:spcPts val="800"/>
-              </a:spcAft>
-            </a:pPr>
-            <a:r>
-              <a:rPr sz="2000" b="0" i="0">
-                <a:solidFill>
-                  <a:srgbClr val="333333"/>
-                </a:solidFill>
-                <a:latin typeface="Calibri"/>
-              </a:rPr>
-              <a:t>–   Mismo dominio VetCare — no otro ejemplo. Aqui se diseña, no se programa.</a:t>
-            </a:r>
-          </a:p>
-        </p:txBody>
-      </p:sp>
-      <p:sp>
-        <p:nvSpPr>
-          <p:cNvPr id="6" name="TextBox 5"/>
-          <p:cNvSpPr txBox="1"/>
-          <p:nvPr/>
-        </p:nvSpPr>
-        <p:spPr>
-          <a:xfrm>
-            <a:off x="11185855" y="6473952"/>
-            <a:ext cx="640080" cy="274320"/>
-          </a:xfrm>
-          <a:prstGeom prst="rect">
-            <a:avLst/>
-          </a:prstGeom>
-          <a:noFill/>
-        </p:spPr>
-        <p:txBody>
-          <a:bodyPr wrap="square">
-            <a:spAutoFit/>
-          </a:bodyPr>
-          <a:lstStyle/>
-          <a:p>
-            <a:pPr algn="r"/>
-            <a:r>
-              <a:rPr sz="1100" b="0" i="0">
-                <a:solidFill>
-                  <a:srgbClr val="666666"/>
-                </a:solidFill>
-                <a:latin typeface="Calibri"/>
-              </a:rPr>
-              <a:t>30</a:t>
-            </a:r>
-          </a:p>
-        </p:txBody>
-      </p:sp>
-    </p:spTree>
-  </p:cSld>
-  <p:clrMapOvr>
-    <a:masterClrMapping/>
-  </p:clrMapOvr>
-</p:sld>
-</file>
-
-<file path=ppt/slides/slide31.xml><?xml version="1.0" encoding="utf-8"?>
-<p:sld xmlns:a="http://schemas.openxmlformats.org/drawingml/2006/main" xmlns:p="http://schemas.openxmlformats.org/presentationml/2006/main" xmlns:r="http://schemas.openxmlformats.org/officeDocument/2006/relationships">
-  <p:cSld>
-    <p:bg>
-      <p:bgPr>
-        <a:solidFill>
-          <a:srgbClr val="FFFFFF"/>
-        </a:solidFill>
-        <a:effectLst/>
-      </p:bgPr>
-    </p:bg>
-    <p:spTree>
-      <p:nvGrpSpPr>
-        <p:cNvPr id="1" name=""/>
-        <p:cNvGrpSpPr/>
-        <p:nvPr/>
-      </p:nvGrpSpPr>
-      <p:grpSpPr/>
-      <p:sp>
-        <p:nvSpPr>
-          <p:cNvPr id="2" name="Rectangle 1"/>
-          <p:cNvSpPr/>
-          <p:nvPr/>
-        </p:nvSpPr>
-        <p:spPr>
-          <a:xfrm>
-            <a:off x="0" y="0"/>
-            <a:ext cx="12191695" cy="164592"/>
-          </a:xfrm>
-          <a:prstGeom prst="rect">
-            <a:avLst/>
-          </a:prstGeom>
-          <a:solidFill>
-            <a:srgbClr val="269CCB"/>
-          </a:solidFill>
-          <a:ln>
-            <a:noFill/>
-          </a:ln>
-        </p:spPr>
-        <p:style>
-          <a:lnRef idx="1">
-            <a:schemeClr val="accent1"/>
-          </a:lnRef>
-          <a:fillRef idx="3">
-            <a:schemeClr val="accent1"/>
-          </a:fillRef>
-          <a:effectRef idx="2">
-            <a:schemeClr val="accent1"/>
-          </a:effectRef>
-          <a:fontRef idx="minor">
-            <a:schemeClr val="lt1"/>
-          </a:fontRef>
-        </p:style>
-        <p:txBody>
-          <a:bodyPr rtlCol="0" anchor="ctr"/>
-          <a:lstStyle/>
-          <a:p>
-            <a:pPr algn="ctr"/>
-          </a:p>
-        </p:txBody>
-      </p:sp>
-      <p:pic>
-        <p:nvPicPr>
-          <p:cNvPr id="3" name="Picture 2" descr="logo_uniajc_color.png"/>
-          <p:cNvPicPr>
-            <a:picLocks noChangeAspect="1"/>
-          </p:cNvPicPr>
-          <p:nvPr/>
-        </p:nvPicPr>
-        <p:blipFill>
-          <a:blip r:embed="rId2"/>
-          <a:stretch>
-            <a:fillRect/>
-          </a:stretch>
-        </p:blipFill>
-        <p:spPr>
-          <a:xfrm>
-            <a:off x="10271455" y="5998464"/>
-            <a:ext cx="1463040" cy="643233"/>
-          </a:xfrm>
-          <a:prstGeom prst="rect">
-            <a:avLst/>
-          </a:prstGeom>
-        </p:spPr>
-      </p:pic>
-      <p:sp>
-        <p:nvSpPr>
-          <p:cNvPr id="4" name="TextBox 3"/>
-          <p:cNvSpPr txBox="1"/>
-          <p:nvPr/>
-        </p:nvSpPr>
-        <p:spPr>
-          <a:xfrm>
-            <a:off x="457200" y="1737360"/>
-            <a:ext cx="11277295" cy="1097280"/>
-          </a:xfrm>
-          <a:prstGeom prst="rect">
-            <a:avLst/>
-          </a:prstGeom>
-          <a:noFill/>
-        </p:spPr>
-        <p:txBody>
-          <a:bodyPr wrap="square" anchor="ctr"/>
-          <a:lstStyle/>
-          <a:p>
-            <a:pPr algn="ctr"/>
-            <a:r>
-              <a:rPr sz="3400" b="1" i="0">
-                <a:solidFill>
-                  <a:srgbClr val="095292"/>
-                </a:solidFill>
-                <a:latin typeface="Calibri"/>
-              </a:rPr>
-              <a:t>Clase 1 · Conceptos iniciales de ingenieria de software</a:t>
-            </a:r>
-          </a:p>
-        </p:txBody>
-      </p:sp>
-      <p:sp>
-        <p:nvSpPr>
-          <p:cNvPr id="5" name="TextBox 4"/>
-          <p:cNvSpPr txBox="1"/>
-          <p:nvPr/>
-        </p:nvSpPr>
-        <p:spPr>
-          <a:xfrm>
-            <a:off x="457200" y="3017520"/>
-            <a:ext cx="11277295" cy="1645920"/>
-          </a:xfrm>
-          <a:prstGeom prst="rect">
-            <a:avLst/>
-          </a:prstGeom>
-          <a:noFill/>
-        </p:spPr>
-        <p:txBody>
-          <a:bodyPr wrap="square">
-            <a:spAutoFit/>
-          </a:bodyPr>
-          <a:lstStyle/>
-          <a:p>
-            <a:pPr algn="ctr">
-              <a:spcAft>
-                <a:spcPts val="600"/>
-              </a:spcAft>
-            </a:pPr>
-            <a:r>
-              <a:rPr sz="1600" b="0" i="0">
-                <a:solidFill>
-                  <a:srgbClr val="333333"/>
-                </a:solidFill>
-                <a:latin typeface="Calibri"/>
-              </a:rPr>
-              <a:t>Que es diseñar software y por que no es programar</a:t>
-            </a:r>
-          </a:p>
-          <a:p>
-            <a:pPr algn="ctr">
-              <a:spcAft>
-                <a:spcPts val="600"/>
-              </a:spcAft>
-            </a:pPr>
-            <a:r>
-              <a:rPr sz="1600" b="0" i="0">
-                <a:solidFill>
-                  <a:srgbClr val="333333"/>
-                </a:solidFill>
-                <a:latin typeface="Calibri"/>
-              </a:rPr>
-              <a:t>Repasen las laminas de teoria: cada concepto esta completo</a:t>
-            </a:r>
-          </a:p>
-          <a:p>
-            <a:pPr algn="ctr">
-              <a:spcAft>
-                <a:spcPts val="600"/>
-              </a:spcAft>
-            </a:pPr>
-            <a:r>
-              <a:rPr sz="1600" b="0" i="0">
-                <a:solidFill>
-                  <a:srgbClr val="333333"/>
-                </a:solidFill>
-                <a:latin typeface="Calibri"/>
-              </a:rPr>
-              <a:t>Siguiente clase: continuamos con el siguiente tema</a:t>
-            </a:r>
-          </a:p>
-        </p:txBody>
-      </p:sp>
-      <p:sp>
-        <p:nvSpPr>
-          <p:cNvPr id="6" name="TextBox 5"/>
-          <p:cNvSpPr txBox="1"/>
-          <p:nvPr/>
-        </p:nvSpPr>
-        <p:spPr>
-          <a:xfrm>
-            <a:off x="457200" y="4754880"/>
-            <a:ext cx="11277295" cy="640080"/>
-          </a:xfrm>
-          <a:prstGeom prst="rect">
-            <a:avLst/>
-          </a:prstGeom>
-          <a:noFill/>
-        </p:spPr>
-        <p:txBody>
-          <a:bodyPr wrap="square">
-            <a:spAutoFit/>
-          </a:bodyPr>
-          <a:lstStyle/>
-          <a:p>
-            <a:pPr algn="ctr"/>
-            <a:r>
-              <a:rPr sz="2000" b="1" i="0">
-                <a:solidFill>
-                  <a:srgbClr val="269CCB"/>
-                </a:solidFill>
-                <a:latin typeface="Calibri"/>
-              </a:rPr>
-              <a:t>Teoria al servicio del diseño</a:t>
             </a:r>
           </a:p>
         </p:txBody>

--- a/Seminario de Sistemas/Clases/Clase 1 - Conceptos iniciales/Presentacion.pptx
+++ b/Seminario de Sistemas/Clases/Clase 1 - Conceptos iniciales/Presentacion.pptx
@@ -624,7 +624,7 @@
           <a:p/>
           <a:p>
             <a:r>
-              <a:t>Comparemos en VetCare.</a:t>
+              <a:t>Comparemos en el sistema de la clinica.</a:t>
             </a:r>
           </a:p>
           <a:p/>
@@ -952,7 +952,7 @@
           <a:p/>
           <a:p>
             <a:r>
-              <a:t>Por eso en este curso cada entregable tiene un lector concreto, y la pregunta que se hace al calificar no es cuantas paginas tiene sino si ese lector podria trabajar con el sin preguntarle nada al autor.</a:t>
+              <a:t>Por eso en este curso cada artefacto tiene un lector concreto, y la pregunta que se hace al calificar no es cuantas paginas tiene sino si ese lector podria trabajar con el sin preguntarle nada al autor.</a:t>
             </a:r>
           </a:p>
         </p:txBody>
@@ -1186,7 +1186,7 @@
           <a:p/>
           <a:p>
             <a:r>
-              <a:t>De ahi salen dos reglas que este curso aplica a todos los entregables.</a:t>
+              <a:t>De ahi salen dos reglas que este curso aplica a todos los artefactos.</a:t>
             </a:r>
           </a:p>
           <a:p/>
@@ -1262,7 +1262,7 @@
           <a:lstStyle/>
           <a:p>
             <a:r>
-              <a:t>En VetCare, un diagrama de casos de uso responde quien hace que y con que finalidad, y le sirve al dueno de la clinica para confirmar que no falta ningun tramite; no responde en cuanto tiempo se busca un expediente ni como se guardan los datos, y quien busque eso ahi va a leer mal.</a:t>
+              <a:t>En el sistema de la clinica, un diagrama de casos de uso responde quien hace que y con que finalidad, y le sirve al dueno de la clinica para confirmar que no falta ningun tramite; no responde en cuanto tiempo se busca un expediente ni como se guardan los datos, y quien busque eso ahi va a leer mal.</a:t>
             </a:r>
           </a:p>
         </p:txBody>
@@ -4949,7 +4949,7 @@
                 </a:solidFill>
                 <a:latin typeface="Calibri"/>
               </a:rPr>
-              <a:t>–   Todo lo que se produzca en el camino se acumula en un unico paquete de diseno del proyecto VetCare, que es el entregable real de la asignatura; no hay trabajos sueltos que se boten al terminar la clase.</a:t>
+              <a:t>–   Todo lo que se produzca en el camino se acumula en un unico paquete de diseno del proyecto, que es el producto real de la asignatura; no hay trabajos sueltos que se boten al terminar la clase.</a:t>
             </a:r>
           </a:p>
         </p:txBody>
@@ -5201,7 +5201,7 @@
                 </a:solidFill>
                 <a:latin typeface="Calibri"/>
               </a:rPr>
-              <a:t>–   Un caso de VetCare que ocurre todos los semestres: el equipo no decide si una Mascota puede existir sin un Dueno registrado, porque en la primera semana parece un detalle.</a:t>
+              <a:t>–   Un caso del sistema de la clinica que ocurre todos los semestres: el equipo no decide si una Mascota puede existir sin un Dueno registrado, porque en la primera semana parece un detalle.</a:t>
             </a:r>
           </a:p>
           <a:p>
@@ -7658,7 +7658,7 @@
                 </a:solidFill>
                 <a:latin typeface="Calibri"/>
               </a:rPr>
-              <a:t>–   Ejemplo de toda la clase: VetCare, el sistema de la clinica «Huellitas».</a:t>
+              <a:t>–   Ejemplo de toda la clase: el sistema de una clinica veterinaria.</a:t>
             </a:r>
           </a:p>
         </p:txBody>
@@ -9370,7 +9370,7 @@
                 </a:solidFill>
                 <a:latin typeface="Calibri"/>
               </a:rPr>
-              <a:t>  subgraph clinica[Clinica Huellitas]</a:t>
+              <a:t>  subgraph clinica[Clinica veterinaria]</a:t>
             </a:r>
           </a:p>
           <a:p>
@@ -9450,7 +9450,7 @@
                 </a:solidFill>
                 <a:latin typeface="Calibri"/>
               </a:rPr>
-              <a:t>  subgraph vetcare[VetCare - el sistema]</a:t>
+              <a:t>  subgraph sistema_clinica[El sistema de la clinica]</a:t>
             </a:r>
           </a:p>
           <a:p>
@@ -10997,7 +10997,7 @@
                 </a:solidFill>
                 <a:latin typeface="Calibri"/>
               </a:rPr>
-              <a:t>–   Mismo dominio VetCare — no otro ejemplo. Aqui se diseña, no se programa.</a:t>
+              <a:t>–   Mismo dominio: la clinica veterinaria — no otro ejemplo. Aqui se diseña, no se programa.</a:t>
             </a:r>
           </a:p>
         </p:txBody>
@@ -11798,7 +11798,7 @@
                 </a:solidFill>
                 <a:latin typeface="Calibri"/>
               </a:rPr>
-              <a:t>Demo en vivo sobre VetCare</a:t>
+              <a:t>Demo en vivo sobre la clinica</a:t>
             </a:r>
           </a:p>
         </p:txBody>
@@ -12585,7 +12585,7 @@
                 </a:solidFill>
                 <a:latin typeface="Calibri"/>
               </a:rPr>
-              <a:t>–   En VetCare, el proyecto es el semestre; el producto es el sistema que la clinica Huellitas usaria todos los dias.</a:t>
+              <a:t>–   En el sistema de la clinica, el proyecto es el semestre; el producto es el sistema que la clinica usaria todos los dias.</a:t>
             </a:r>
           </a:p>
         </p:txBody>
@@ -13121,7 +13121,7 @@
                 </a:solidFill>
                 <a:latin typeface="Calibri"/>
               </a:rPr>
-              <a:t>–   En la clinica Huellitas hay al menos tres con intereses distintos: el dueño de la clinica quiere metricas del negocio, la recepcionista quiere agendar rapido y con pocos clics, y el veterinario quiere el historial del paciente a la mano durante la consulta.</a:t>
+              <a:t>–   En la clinica hay al menos tres con intereses distintos: el dueño de la clinica quiere metricas del negocio, la recepcionista quiere agendar rapido y con pocos clics, y el veterinario quiere el historial del paciente a la mano durante la consulta.</a:t>
             </a:r>
           </a:p>
           <a:p>
@@ -13641,7 +13641,23 @@
                 </a:solidFill>
                 <a:latin typeface="Calibri"/>
               </a:rPr>
-              <a:t>–   El codigo lo lee la maquina y quien ya conoce el sistema; los planos los lee quien todavia no lo conoce: el companero que entra a mitad de semestre, el docente que califica, el equipo de Programacion II que va a construir VetCare a partir de estos documentos</a:t>
+              <a:t>–   El codigo lo lee la maquina y quien ya conoce el sistema; los planos los lee quien todavia no lo conoce: el companero que entra a mitad de semestre</a:t>
+            </a:r>
+          </a:p>
+          <a:p>
+            <a:pPr>
+              <a:spcAft>
+                <a:spcPts val="800"/>
+              </a:spcAft>
+            </a:pPr>
+            <a:r>
+              <a:rPr sz="2000" b="0" i="0">
+                <a:solidFill>
+                  <a:srgbClr val="333333"/>
+                </a:solidFill>
+                <a:latin typeface="Calibri"/>
+              </a:rPr>
+              <a:t>–   El docente que califica, el equipo de Programacion II que va a construir el sistema a partir de estos documentos</a:t>
             </a:r>
           </a:p>
           <a:p>

--- a/Seminario de Sistemas/Clases/Clase 1 - Conceptos iniciales/Presentacion.pptx
+++ b/Seminario de Sistemas/Clases/Clase 1 - Conceptos iniciales/Presentacion.pptx
@@ -32,8 +32,6 @@
     <p:sldId id="280" r:id="rId32"/>
     <p:sldId id="281" r:id="rId33"/>
     <p:sldId id="282" r:id="rId34"/>
-    <p:sldId id="283" r:id="rId35"/>
-    <p:sldId id="284" r:id="rId36"/>
   </p:sldIdLst>
   <p:sldSz cx="12191695" cy="6858000" type="screen4x3"/>
   <p:notesSz cx="6858000" cy="9144000"/>
@@ -545,6 +543,12 @@
               <a:t>Hay un asunto de organizacion que el docente debe resolver el primer dia porque afecta la calificacion: los estudiantes llegan en tres situaciones de matricula distintas y cada una cierra su entregable de manera diferente. Primera situacion, quien cursa Seminario y Programacion II al mismo tiempo. Este es el caso ideal y hay que aprovecharlo: se acota el dominio de VetCare una sola vez y el entregable de diseno de este curso se convierte en el insumo real del codigo del otro. El riesgo es conocido, y consiste en que el estudiante se entusiasme programando y descuide el documento; la regla de cierre es que aqui se califica el plano y no la demostracion, y que si el codigo se desvio del plano lo correcto es actualizar el plano y anotar por que, nunca esconder la diferencia. Segunda situacion, quien cursa solo Programacion II: no entrega en este curso, pero importa porque los equipos son mixtos y puede haber companeros de proyecto que no esten en esta aula. De ahi sale una exigencia concreta para el documento: debe ser autosuficiente, entendible por alguien que no estuvo en las conversaciones del equipo; si el artefacto solo se entiende cuando su autor lo explica de viva voz, no sirve para ese companero y por lo tanto no sirve. Tercera situacion, quien cursa solo Seminario: cierra el semestre con el juego completo de planos y la sustentacion, y no se le exige ni una linea de codigo ni una demostracion funcionando; su nota no depende de que exista implementacion. Su prueba de calidad es otra y hay que decirsela en estos terminos: que un tercero pueda construir el producto leyendo su documento. En su caso el wireframe de la Clase 13 cumple el papel que en el otro curso cumple la pantalla.</a:t>
             </a:r>
           </a:p>
+          <a:p/>
+          <a:p>
+            <a:r>
+              <a:t>Queda la trampa pedagogica de este primer dia, y es la mas seria del curso: el estudiante que se matriculo esperando programar y descubre que va a escribir documentos. Si no se encuadra hoy, ese estudiante pasa quince semanas convencido de que el curso es trabajo administrativo, y el sintoma aparece en la primera entrega en forma de documentos hechos en la ultima hora. El encuadre tiene cuatro movimientos y conviene hacerlos en este orden. Primero, reconocerlo en voz alta, porque negarlo lo confirma: aqui varios querian programar, y programar es legitimo y necesario. Segundo, dar el argumento del costo con numeros aunque sean gruesos: borrar una caja de un diagrama toma diez segundos, mientras que eliminar un modulo ya programado, probado e integrado toma dias y arrastra todo lo que dependia de el; ese es el orden de magnitud que justifica dibujar antes. Tercero, mostrar que las decisiones que el programador ya no podra cambiar se toman aqui, con ejemplos que se sienten reales: si una Mascota puede existir sin Dueno, o si reagendar una cita es modificarla o es cancelarla y crear otra, que es una decision de diseno con consecuencias en el historial clinico durante anos. Cuarto, dar salidas legitimas al deseo de construir: en la Clase 13 hay trabajo visual concreto con interfaces, en la Clase 11 se compara el diseno con lo que se esta construyendo, y en la Clase 12 los diagramas avanzados exigen precision tecnica. Conviene tambien nombrar el perfil profesional, porque el estudiante rara vez lo tiene claro: analista, arquitecto y product owner son cargos que existen y que se pagan bien precisamente por traducir entre el negocio y la tecnica. Y hay que anticipar la pregunta textual, porque va a llegar: profesor, para que dibujo esto si lo voy a cambiar cuando programe. La respuesta es que el diagrama es justamente lo que hace barato ese cambio, y que cuando cambie, se actualiza y se anota el motivo, y ese registro es parte de lo que se evalua.</a:t>
+            </a:r>
+          </a:p>
         </p:txBody>
       </p:sp>
       <p:sp>
@@ -624,7 +628,7 @@
           <a:p/>
           <a:p>
             <a:r>
-              <a:t>Comparemos en el sistema de la clinica.</a:t>
+              <a:t>Comparemos en la clinica.</a:t>
             </a:r>
           </a:p>
           <a:p/>
@@ -637,88 +641,6 @@
           <a:p>
             <a:r>
               <a:t>La segunda version se puede programar, se puede probar y se puede discutir con el dueno de la clinica.</a:t>
-            </a:r>
-          </a:p>
-        </p:txBody>
-      </p:sp>
-      <p:sp>
-        <p:nvSpPr>
-          <p:cNvPr id="4" name="Slide Number Placeholder 3"/>
-          <p:cNvSpPr>
-            <a:spLocks noGrp="1"/>
-          </p:cNvSpPr>
-          <p:nvPr>
-            <p:ph type="sldNum" idx="5" sz="quarter"/>
-          </p:nvPr>
-        </p:nvSpPr>
-        <p:spPr/>
-      </p:sp>
-    </p:spTree>
-  </p:cSld>
-  <p:clrMapOvr>
-    <a:masterClrMapping/>
-  </p:clrMapOvr>
-</p:notes>
-</file>
-
-<file path=ppt/notesSlides/notesSlide11.xml><?xml version="1.0" encoding="utf-8"?>
-<p:notes xmlns:a="http://schemas.openxmlformats.org/drawingml/2006/main" xmlns:p="http://schemas.openxmlformats.org/presentationml/2006/main" xmlns:r="http://schemas.openxmlformats.org/officeDocument/2006/relationships">
-  <p:cSld>
-    <p:spTree>
-      <p:nvGrpSpPr>
-        <p:cNvPr id="1" name=""/>
-        <p:cNvGrpSpPr/>
-        <p:nvPr/>
-      </p:nvGrpSpPr>
-      <p:grpSpPr>
-        <a:xfrm>
-          <a:off x="0" y="0"/>
-          <a:ext cx="0" cy="0"/>
-          <a:chOff x="0" y="0"/>
-          <a:chExt cx="0" cy="0"/>
-        </a:xfrm>
-      </p:grpSpPr>
-      <p:sp>
-        <p:nvSpPr>
-          <p:cNvPr id="2" name="Slide Image Placeholder 1"/>
-          <p:cNvSpPr>
-            <a:spLocks noGrp="1"/>
-          </p:cNvSpPr>
-          <p:nvPr>
-            <p:ph type="sldImg" idx="2"/>
-          </p:nvPr>
-        </p:nvSpPr>
-        <p:spPr/>
-      </p:sp>
-      <p:sp>
-        <p:nvSpPr>
-          <p:cNvPr id="3" name="Notes Placeholder 2"/>
-          <p:cNvSpPr>
-            <a:spLocks noGrp="1"/>
-          </p:cNvSpPr>
-          <p:nvPr>
-            <p:ph type="body" idx="3" sz="quarter"/>
-          </p:nvPr>
-        </p:nvSpPr>
-        <p:spPr/>
-        <p:txBody>
-          <a:bodyPr/>
-          <a:lstStyle/>
-          <a:p>
-            <a:r>
-              <a:t>El encuadre tiene cuatro movimientos y conviene hacerlos en este orden.</a:t>
-            </a:r>
-          </a:p>
-          <a:p/>
-          <a:p>
-            <a:r>
-              <a:t>Conviene tambien nombrar el perfil profesional, porque el estudiante rara vez lo tiene claro: analista, arquitecto y product owner son cargos que existen y que se pagan bien precisamente por traducir entre el negocio y la tecnica.</a:t>
-            </a:r>
-          </a:p>
-          <a:p/>
-          <a:p>
-            <a:r>
-              <a:t>La respuesta es que el diagrama es justamente lo que hace barato ese cambio, y que cuando cambie, se actualiza y se anota el motivo, y ese registro es parte de lo que se evalua.</a:t>
             </a:r>
           </a:p>
         </p:txBody>
@@ -788,12 +710,6 @@
           <a:lstStyle/>
           <a:p>
             <a:r>
-              <a:t>Conviene separar dos palabras que se usan como sinonimos y no lo son.</a:t>
-            </a:r>
-          </a:p>
-          <a:p/>
-          <a:p>
-            <a:r>
               <a:t>Un proyecto termina; un producto puede seguir vivo diez años.</a:t>
             </a:r>
           </a:p>
@@ -1022,7 +938,7 @@
           <a:lstStyle/>
           <a:p>
             <a:r>
-              <a:t>Conviene tambien aclarar el mapa del semestre en una sola frase, porque de eso depende que el estudiante sepa donde esta parado en cada clase.</a:t>
+              <a:t>El mapa del semestre cabe en una sola frase, y de el depende saber donde se esta parado en cada clase.</a:t>
             </a:r>
           </a:p>
           <a:p/>
@@ -1262,7 +1178,7 @@
           <a:lstStyle/>
           <a:p>
             <a:r>
-              <a:t>En el sistema de la clinica, un diagrama de casos de uso responde quien hace que y con que finalidad, y le sirve al dueno de la clinica para confirmar que no falta ningun tramite; no responde en cuanto tiempo se busca un expediente ni como se guardan los datos, y quien busque eso ahi va a leer mal.</a:t>
+              <a:t>En la clinica, un diagrama de casos de uso responde quien hace que y con que finalidad, y le sirve al dueno de la clinica para confirmar que no falta ningun tramite; no responde en cuanto tiempo se busca un expediente ni como se guardan los datos, y quien busque eso ahi va a leer mal.</a:t>
             </a:r>
           </a:p>
         </p:txBody>
@@ -4862,7 +4778,7 @@
                 </a:solidFill>
                 <a:latin typeface="Calibri"/>
               </a:rPr>
-              <a:t>Conviene tambien aclarar el mapa del semestre en una sola frase, porque...</a:t>
+              <a:t>El mapa del semestre cabe en una sola frase, y de el depende saber...</a:t>
             </a:r>
           </a:p>
         </p:txBody>
@@ -5130,7 +5046,7 @@
                 </a:solidFill>
                 <a:latin typeface="Calibri"/>
               </a:rPr>
-              <a:t>Hay un concepto que explica por que este curso existe y que conviene... (1/2)</a:t>
+              <a:t>Hay un concepto que explica por que este curso existe: la deuda tecnica (1/2)</a:t>
             </a:r>
           </a:p>
         </p:txBody>
@@ -5169,7 +5085,7 @@
                 </a:solidFill>
                 <a:latin typeface="Calibri"/>
               </a:rPr>
-              <a:t>–   Hay un concepto que explica por que este curso existe y que conviene instalar el primer dia sin jerga: la deuda tecnica.</a:t>
+              <a:t>–   Hay un concepto que explica por que este curso existe: la deuda tecnica.</a:t>
             </a:r>
           </a:p>
           <a:p>
@@ -5201,7 +5117,7 @@
                 </a:solidFill>
                 <a:latin typeface="Calibri"/>
               </a:rPr>
-              <a:t>–   Un caso del sistema de la clinica que ocurre todos los semestres: el equipo no decide si una Mascota puede existir sin un Dueno registrado, porque en la primera semana parece un detalle.</a:t>
+              <a:t>–   Un caso tipico que ocurre todos los semestres: el equipo no decide si una Mascota puede existir sin un Dueno registrado, porque en la primera semana parece un detalle.</a:t>
             </a:r>
           </a:p>
           <a:p>
@@ -5398,7 +5314,7 @@
                 </a:solidFill>
                 <a:latin typeface="Calibri"/>
               </a:rPr>
-              <a:t>Hay un concepto que explica por que este curso existe y que conviene... (2/2)</a:t>
+              <a:t>Hay un concepto que explica por que este curso existe: la deuda tecnica (2/2)</a:t>
             </a:r>
           </a:p>
         </p:txBody>
@@ -8643,21 +8559,141 @@
                 </a:solidFill>
                 <a:latin typeface="Calibri"/>
               </a:rPr>
-              <a:t>Queda la trampa pedagogica de este primer dia, y es la mas seria del... (1/2)</a:t>
-            </a:r>
-          </a:p>
-        </p:txBody>
-      </p:sp>
-      <p:sp>
-        <p:nvSpPr>
-          <p:cNvPr id="5" name="TextBox 4"/>
+              <a:t>El mapa de dominio en Mermaid: la sintaxis</a:t>
+            </a:r>
+          </a:p>
+        </p:txBody>
+      </p:sp>
+      <p:sp>
+        <p:nvSpPr>
+          <p:cNvPr id="5" name="Rounded Rectangle 4"/>
+          <p:cNvSpPr/>
+          <p:nvPr/>
+        </p:nvSpPr>
+        <p:spPr>
+          <a:xfrm>
+            <a:off x="457200" y="1261872"/>
+            <a:ext cx="11277295" cy="5093208"/>
+          </a:xfrm>
+          <a:prstGeom prst="roundRect">
+            <a:avLst>
+              <a:gd name="adj" fmla="val 12000"/>
+            </a:avLst>
+          </a:prstGeom>
+          <a:solidFill>
+            <a:srgbClr val="1E2A38"/>
+          </a:solidFill>
+          <a:ln>
+            <a:noFill/>
+          </a:ln>
+        </p:spPr>
+        <p:style>
+          <a:lnRef idx="1">
+            <a:schemeClr val="accent1"/>
+          </a:lnRef>
+          <a:fillRef idx="3">
+            <a:schemeClr val="accent1"/>
+          </a:fillRef>
+          <a:effectRef idx="2">
+            <a:schemeClr val="accent1"/>
+          </a:effectRef>
+          <a:fontRef idx="minor">
+            <a:schemeClr val="lt1"/>
+          </a:fontRef>
+        </p:style>
+        <p:txBody>
+          <a:bodyPr rtlCol="0" anchor="ctr"/>
+          <a:lstStyle/>
+          <a:p>
+            <a:pPr algn="ctr"/>
+          </a:p>
+        </p:txBody>
+      </p:sp>
+      <p:sp>
+        <p:nvSpPr>
+          <p:cNvPr id="6" name="Rectangle 5"/>
+          <p:cNvSpPr/>
+          <p:nvPr/>
+        </p:nvSpPr>
+        <p:spPr>
+          <a:xfrm>
+            <a:off x="457200" y="1261872"/>
+            <a:ext cx="11277295" cy="320040"/>
+          </a:xfrm>
+          <a:prstGeom prst="rect">
+            <a:avLst/>
+          </a:prstGeom>
+          <a:solidFill>
+            <a:srgbClr val="095292"/>
+          </a:solidFill>
+          <a:ln>
+            <a:noFill/>
+          </a:ln>
+        </p:spPr>
+        <p:style>
+          <a:lnRef idx="1">
+            <a:schemeClr val="accent1"/>
+          </a:lnRef>
+          <a:fillRef idx="3">
+            <a:schemeClr val="accent1"/>
+          </a:fillRef>
+          <a:effectRef idx="2">
+            <a:schemeClr val="accent1"/>
+          </a:effectRef>
+          <a:fontRef idx="minor">
+            <a:schemeClr val="lt1"/>
+          </a:fontRef>
+        </p:style>
+        <p:txBody>
+          <a:bodyPr rtlCol="0" anchor="ctr"/>
+          <a:lstStyle/>
+          <a:p>
+            <a:pPr algn="ctr"/>
+          </a:p>
+        </p:txBody>
+      </p:sp>
+      <p:sp>
+        <p:nvSpPr>
+          <p:cNvPr id="7" name="TextBox 6"/>
           <p:cNvSpPr txBox="1"/>
           <p:nvPr/>
         </p:nvSpPr>
         <p:spPr>
           <a:xfrm>
-            <a:off x="457200" y="1170432"/>
-            <a:ext cx="11277295" cy="5230368"/>
+            <a:off x="685800" y="1307592"/>
+            <a:ext cx="10820095" cy="256032"/>
+          </a:xfrm>
+          <a:prstGeom prst="rect">
+            <a:avLst/>
+          </a:prstGeom>
+          <a:noFill/>
+        </p:spPr>
+        <p:txBody>
+          <a:bodyPr wrap="square" anchor="ctr"/>
+          <a:lstStyle/>
+          <a:p>
+            <a:r>
+              <a:rPr sz="1000" b="1" i="0">
+                <a:solidFill>
+                  <a:srgbClr val="269CCB"/>
+                </a:solidFill>
+                <a:latin typeface="Calibri"/>
+              </a:rPr>
+              <a:t>● ● ●</a:t>
+            </a:r>
+          </a:p>
+        </p:txBody>
+      </p:sp>
+      <p:sp>
+        <p:nvSpPr>
+          <p:cNvPr id="8" name="TextBox 7"/>
+          <p:cNvSpPr txBox="1"/>
+          <p:nvPr/>
+        </p:nvSpPr>
+        <p:spPr>
+          <a:xfrm>
+            <a:off x="777240" y="1719072"/>
+            <a:ext cx="10637215" cy="4453128"/>
           </a:xfrm>
           <a:prstGeom prst="rect">
             <a:avLst/>
@@ -8672,88 +8708,296 @@
           <a:p>
             <a:pPr>
               <a:spcAft>
-                <a:spcPts val="800"/>
+                <a:spcPts val="342"/>
               </a:spcAft>
             </a:pPr>
             <a:r>
-              <a:rPr sz="2000" b="0" i="0">
-                <a:solidFill>
-                  <a:srgbClr val="333333"/>
-                </a:solidFill>
-                <a:latin typeface="Calibri"/>
-              </a:rPr>
-              <a:t>–   Queda la trampa pedagogica de este primer dia, y es la mas seria del curso: el estudiante que se matriculo esperando programar y descubre que va a escribir documentos.</a:t>
+              <a:rPr sz="1200" b="0" i="0">
+                <a:solidFill>
+                  <a:srgbClr val="FFFFFF"/>
+                </a:solidFill>
+                <a:latin typeface="Calibri"/>
+              </a:rPr>
+              <a:t>flowchart LR</a:t>
             </a:r>
           </a:p>
           <a:p>
             <a:pPr>
               <a:spcAft>
-                <a:spcPts val="800"/>
+                <a:spcPts val="342"/>
               </a:spcAft>
             </a:pPr>
             <a:r>
-              <a:rPr sz="2000" b="0" i="0">
-                <a:solidFill>
-                  <a:srgbClr val="333333"/>
-                </a:solidFill>
-                <a:latin typeface="Calibri"/>
-              </a:rPr>
-              <a:t>–   Si no se encuadra hoy, ese estudiante pasa quince semanas convencido de que el curso es trabajo administrativo, y el sintoma aparece en la primera entrega en forma de documentos hechos en la ultima hora.</a:t>
+              <a:rPr sz="1200" b="0" i="0">
+                <a:solidFill>
+                  <a:srgbClr val="FFFFFF"/>
+                </a:solidFill>
+                <a:latin typeface="Calibri"/>
+              </a:rPr>
+              <a:t>  subgraph clinica[Clinica veterinaria]</a:t>
             </a:r>
           </a:p>
           <a:p>
             <a:pPr>
               <a:spcAft>
-                <a:spcPts val="800"/>
+                <a:spcPts val="342"/>
               </a:spcAft>
             </a:pPr>
             <a:r>
-              <a:rPr sz="2000" b="0" i="0">
-                <a:solidFill>
-                  <a:srgbClr val="333333"/>
-                </a:solidFill>
-                <a:latin typeface="Calibri"/>
-              </a:rPr>
-              <a:t>–   Primero, reconocerlo en voz alta, porque negarlo lo confirma: aqui varios querian programar, y programar es legitimo y necesario.</a:t>
+              <a:rPr sz="1200" b="0" i="0">
+                <a:solidFill>
+                  <a:srgbClr val="FFFFFF"/>
+                </a:solidFill>
+                <a:latin typeface="Calibri"/>
+              </a:rPr>
+              <a:t>    rec([Recepcionista])</a:t>
             </a:r>
           </a:p>
           <a:p>
             <a:pPr>
               <a:spcAft>
-                <a:spcPts val="800"/>
+                <a:spcPts val="342"/>
               </a:spcAft>
             </a:pPr>
             <a:r>
-              <a:rPr sz="2000" b="0" i="0">
-                <a:solidFill>
-                  <a:srgbClr val="333333"/>
-                </a:solidFill>
-                <a:latin typeface="Calibri"/>
-              </a:rPr>
-              <a:t>–   Segundo, dar el argumento del costo con numeros aunque sean gruesos: borrar una caja de un diagrama toma diez segundos, mientras que eliminar un modulo ya programado</a:t>
+              <a:rPr sz="1200" b="0" i="0">
+                <a:solidFill>
+                  <a:srgbClr val="FFFFFF"/>
+                </a:solidFill>
+                <a:latin typeface="Calibri"/>
+              </a:rPr>
+              <a:t>    vet([Veterinario])</a:t>
             </a:r>
           </a:p>
           <a:p>
             <a:pPr>
               <a:spcAft>
-                <a:spcPts val="800"/>
+                <a:spcPts val="342"/>
               </a:spcAft>
             </a:pPr>
             <a:r>
-              <a:rPr sz="2000" b="0" i="0">
-                <a:solidFill>
-                  <a:srgbClr val="333333"/>
-                </a:solidFill>
-                <a:latin typeface="Calibri"/>
-              </a:rPr>
-              <a:t>–   Probado e integrado toma dias y arrastra todo lo que dependia de el; ese es el orden de magnitud que justifica dibujar antes.</a:t>
-            </a:r>
-          </a:p>
-        </p:txBody>
-      </p:sp>
-      <p:sp>
-        <p:nvSpPr>
-          <p:cNvPr id="6" name="TextBox 5"/>
+              <a:rPr sz="1200" b="0" i="0">
+                <a:solidFill>
+                  <a:srgbClr val="FFFFFF"/>
+                </a:solidFill>
+                <a:latin typeface="Calibri"/>
+              </a:rPr>
+              <a:t>  end</a:t>
+            </a:r>
+          </a:p>
+          <a:p>
+            <a:pPr>
+              <a:spcAft>
+                <a:spcPts val="342"/>
+              </a:spcAft>
+            </a:pPr>
+            <a:r>
+              <a:rPr sz="1200" b="0" i="0">
+                <a:solidFill>
+                  <a:srgbClr val="FFFFFF"/>
+                </a:solidFill>
+                <a:latin typeface="Calibri"/>
+              </a:rPr>
+              <a:t/>
+            </a:r>
+          </a:p>
+          <a:p>
+            <a:pPr>
+              <a:spcAft>
+                <a:spcPts val="342"/>
+              </a:spcAft>
+            </a:pPr>
+            <a:r>
+              <a:rPr sz="1200" b="0" i="0">
+                <a:solidFill>
+                  <a:srgbClr val="FFFFFF"/>
+                </a:solidFill>
+                <a:latin typeface="Calibri"/>
+              </a:rPr>
+              <a:t>  subgraph sistema_clinica[El sistema de la clinica]</a:t>
+            </a:r>
+          </a:p>
+          <a:p>
+            <a:pPr>
+              <a:spcAft>
+                <a:spcPts val="342"/>
+              </a:spcAft>
+            </a:pPr>
+            <a:r>
+              <a:rPr sz="1200" b="0" i="0">
+                <a:solidFill>
+                  <a:srgbClr val="FFFFFF"/>
+                </a:solidFill>
+                <a:latin typeface="Calibri"/>
+              </a:rPr>
+              <a:t>    agenda[Agendar cita]</a:t>
+            </a:r>
+          </a:p>
+          <a:p>
+            <a:pPr>
+              <a:spcAft>
+                <a:spcPts val="342"/>
+              </a:spcAft>
+            </a:pPr>
+            <a:r>
+              <a:rPr sz="1200" b="0" i="0">
+                <a:solidFill>
+                  <a:srgbClr val="FFFFFF"/>
+                </a:solidFill>
+                <a:latin typeface="Calibri"/>
+              </a:rPr>
+              <a:t>    exped[Consultar expediente]</a:t>
+            </a:r>
+          </a:p>
+          <a:p>
+            <a:pPr>
+              <a:spcAft>
+                <a:spcPts val="342"/>
+              </a:spcAft>
+            </a:pPr>
+            <a:r>
+              <a:rPr sz="1200" b="0" i="0">
+                <a:solidFill>
+                  <a:srgbClr val="FFFFFF"/>
+                </a:solidFill>
+                <a:latin typeface="Calibri"/>
+              </a:rPr>
+              <a:t>  end</a:t>
+            </a:r>
+          </a:p>
+          <a:p>
+            <a:pPr>
+              <a:spcAft>
+                <a:spcPts val="342"/>
+              </a:spcAft>
+            </a:pPr>
+            <a:r>
+              <a:rPr sz="1200" b="0" i="0">
+                <a:solidFill>
+                  <a:srgbClr val="FFFFFF"/>
+                </a:solidFill>
+                <a:latin typeface="Calibri"/>
+              </a:rPr>
+              <a:t/>
+            </a:r>
+          </a:p>
+          <a:p>
+            <a:pPr>
+              <a:spcAft>
+                <a:spcPts val="342"/>
+              </a:spcAft>
+            </a:pPr>
+            <a:r>
+              <a:rPr sz="1200" b="0" i="0">
+                <a:solidFill>
+                  <a:srgbClr val="FFFFFF"/>
+                </a:solidFill>
+                <a:latin typeface="Calibri"/>
+              </a:rPr>
+              <a:t>  lab[Laboratorio externo]</a:t>
+            </a:r>
+          </a:p>
+          <a:p>
+            <a:pPr>
+              <a:spcAft>
+                <a:spcPts val="342"/>
+              </a:spcAft>
+            </a:pPr>
+            <a:r>
+              <a:rPr sz="1200" b="0" i="0">
+                <a:solidFill>
+                  <a:srgbClr val="FFFFFF"/>
+                </a:solidFill>
+                <a:latin typeface="Calibri"/>
+              </a:rPr>
+              <a:t/>
+            </a:r>
+          </a:p>
+          <a:p>
+            <a:pPr>
+              <a:spcAft>
+                <a:spcPts val="342"/>
+              </a:spcAft>
+            </a:pPr>
+            <a:r>
+              <a:rPr sz="1200" b="0" i="0">
+                <a:solidFill>
+                  <a:srgbClr val="FFFFFF"/>
+                </a:solidFill>
+                <a:latin typeface="Calibri"/>
+              </a:rPr>
+              <a:t>  rec --&gt;|agenda| agenda</a:t>
+            </a:r>
+          </a:p>
+          <a:p>
+            <a:pPr>
+              <a:spcAft>
+                <a:spcPts val="342"/>
+              </a:spcAft>
+            </a:pPr>
+            <a:r>
+              <a:rPr sz="1200" b="0" i="0">
+                <a:solidFill>
+                  <a:srgbClr val="FFFFFF"/>
+                </a:solidFill>
+                <a:latin typeface="Calibri"/>
+              </a:rPr>
+              <a:t>  vet --&gt;|consulta| exped</a:t>
+            </a:r>
+          </a:p>
+          <a:p>
+            <a:pPr>
+              <a:spcAft>
+                <a:spcPts val="342"/>
+              </a:spcAft>
+            </a:pPr>
+            <a:r>
+              <a:rPr sz="1200" b="0" i="0">
+                <a:solidFill>
+                  <a:srgbClr val="FFFFFF"/>
+                </a:solidFill>
+                <a:latin typeface="Calibri"/>
+              </a:rPr>
+              <a:t>  exped --&gt;|pide examen| lab</a:t>
+            </a:r>
+          </a:p>
+          <a:p>
+            <a:pPr>
+              <a:spcAft>
+                <a:spcPts val="342"/>
+              </a:spcAft>
+            </a:pPr>
+            <a:r>
+              <a:rPr sz="1200" b="0" i="0">
+                <a:solidFill>
+                  <a:srgbClr val="FFFFFF"/>
+                </a:solidFill>
+                <a:latin typeface="Calibri"/>
+              </a:rPr>
+              <a:t/>
+            </a:r>
+          </a:p>
+          <a:p>
+            <a:pPr>
+              <a:spcAft>
+                <a:spcPts val="342"/>
+              </a:spcAft>
+            </a:pPr>
+            <a:r>
+              <a:rPr sz="1200" b="0" i="0">
+                <a:solidFill>
+                  <a:srgbClr val="FFFFFF"/>
+                </a:solidFill>
+                <a:latin typeface="Calibri"/>
+              </a:rPr>
+              <a:t>%% Complete con SUS capacidades y actores: estas son dos de cada uno.</a:t>
+            </a:r>
+          </a:p>
+        </p:txBody>
+      </p:sp>
+      <p:sp>
+        <p:nvSpPr>
+          <p:cNvPr id="9" name="TextBox 8"/>
           <p:cNvSpPr txBox="1"/>
           <p:nvPr/>
         </p:nvSpPr>
@@ -8927,21 +9171,141 @@
                 </a:solidFill>
                 <a:latin typeface="Calibri"/>
               </a:rPr>
-              <a:t>Queda la trampa pedagogica de este primer dia, y es la mas seria del... (2/2)</a:t>
-            </a:r>
-          </a:p>
-        </p:txBody>
-      </p:sp>
-      <p:sp>
-        <p:nvSpPr>
-          <p:cNvPr id="5" name="TextBox 4"/>
+              <a:t>La ficha de requisito bien escrito, campo por campo</a:t>
+            </a:r>
+          </a:p>
+        </p:txBody>
+      </p:sp>
+      <p:sp>
+        <p:nvSpPr>
+          <p:cNvPr id="5" name="Rounded Rectangle 4"/>
+          <p:cNvSpPr/>
+          <p:nvPr/>
+        </p:nvSpPr>
+        <p:spPr>
+          <a:xfrm>
+            <a:off x="457200" y="1261872"/>
+            <a:ext cx="11277295" cy="5093208"/>
+          </a:xfrm>
+          <a:prstGeom prst="roundRect">
+            <a:avLst>
+              <a:gd name="adj" fmla="val 12000"/>
+            </a:avLst>
+          </a:prstGeom>
+          <a:solidFill>
+            <a:srgbClr val="1E2A38"/>
+          </a:solidFill>
+          <a:ln>
+            <a:noFill/>
+          </a:ln>
+        </p:spPr>
+        <p:style>
+          <a:lnRef idx="1">
+            <a:schemeClr val="accent1"/>
+          </a:lnRef>
+          <a:fillRef idx="3">
+            <a:schemeClr val="accent1"/>
+          </a:fillRef>
+          <a:effectRef idx="2">
+            <a:schemeClr val="accent1"/>
+          </a:effectRef>
+          <a:fontRef idx="minor">
+            <a:schemeClr val="lt1"/>
+          </a:fontRef>
+        </p:style>
+        <p:txBody>
+          <a:bodyPr rtlCol="0" anchor="ctr"/>
+          <a:lstStyle/>
+          <a:p>
+            <a:pPr algn="ctr"/>
+          </a:p>
+        </p:txBody>
+      </p:sp>
+      <p:sp>
+        <p:nvSpPr>
+          <p:cNvPr id="6" name="Rectangle 5"/>
+          <p:cNvSpPr/>
+          <p:nvPr/>
+        </p:nvSpPr>
+        <p:spPr>
+          <a:xfrm>
+            <a:off x="457200" y="1261872"/>
+            <a:ext cx="11277295" cy="320040"/>
+          </a:xfrm>
+          <a:prstGeom prst="rect">
+            <a:avLst/>
+          </a:prstGeom>
+          <a:solidFill>
+            <a:srgbClr val="095292"/>
+          </a:solidFill>
+          <a:ln>
+            <a:noFill/>
+          </a:ln>
+        </p:spPr>
+        <p:style>
+          <a:lnRef idx="1">
+            <a:schemeClr val="accent1"/>
+          </a:lnRef>
+          <a:fillRef idx="3">
+            <a:schemeClr val="accent1"/>
+          </a:fillRef>
+          <a:effectRef idx="2">
+            <a:schemeClr val="accent1"/>
+          </a:effectRef>
+          <a:fontRef idx="minor">
+            <a:schemeClr val="lt1"/>
+          </a:fontRef>
+        </p:style>
+        <p:txBody>
+          <a:bodyPr rtlCol="0" anchor="ctr"/>
+          <a:lstStyle/>
+          <a:p>
+            <a:pPr algn="ctr"/>
+          </a:p>
+        </p:txBody>
+      </p:sp>
+      <p:sp>
+        <p:nvSpPr>
+          <p:cNvPr id="7" name="TextBox 6"/>
           <p:cNvSpPr txBox="1"/>
           <p:nvPr/>
         </p:nvSpPr>
         <p:spPr>
           <a:xfrm>
-            <a:off x="457200" y="1170432"/>
-            <a:ext cx="11277295" cy="5230368"/>
+            <a:off x="685800" y="1307592"/>
+            <a:ext cx="10820095" cy="256032"/>
+          </a:xfrm>
+          <a:prstGeom prst="rect">
+            <a:avLst/>
+          </a:prstGeom>
+          <a:noFill/>
+        </p:spPr>
+        <p:txBody>
+          <a:bodyPr wrap="square" anchor="ctr"/>
+          <a:lstStyle/>
+          <a:p>
+            <a:r>
+              <a:rPr sz="1000" b="1" i="0">
+                <a:solidFill>
+                  <a:srgbClr val="269CCB"/>
+                </a:solidFill>
+                <a:latin typeface="Calibri"/>
+              </a:rPr>
+              <a:t>● ● ●</a:t>
+            </a:r>
+          </a:p>
+        </p:txBody>
+      </p:sp>
+      <p:sp>
+        <p:nvSpPr>
+          <p:cNvPr id="8" name="TextBox 7"/>
+          <p:cNvSpPr txBox="1"/>
+          <p:nvPr/>
+        </p:nvSpPr>
+        <p:spPr>
+          <a:xfrm>
+            <a:off x="777240" y="1719072"/>
+            <a:ext cx="10637215" cy="4453128"/>
           </a:xfrm>
           <a:prstGeom prst="rect">
             <a:avLst/>
@@ -8956,72 +9320,216 @@
           <a:p>
             <a:pPr>
               <a:spcAft>
-                <a:spcPts val="800"/>
+                <a:spcPts val="400"/>
               </a:spcAft>
             </a:pPr>
             <a:r>
-              <a:rPr sz="2000" b="0" i="0">
-                <a:solidFill>
-                  <a:srgbClr val="333333"/>
-                </a:solidFill>
-                <a:latin typeface="Calibri"/>
-              </a:rPr>
-              <a:t>–   Tercero, mostrar que las decisiones que el programador ya no podra cambiar se toman aqui, con ejemplos que se sienten reales: si una Mascota puede existir sin Dueno, o si reagendar una cita es modificarla o es cancelarla y crear otra</a:t>
+              <a:rPr sz="1400" b="0" i="0">
+                <a:solidFill>
+                  <a:srgbClr val="FFFFFF"/>
+                </a:solidFill>
+                <a:latin typeface="Calibri"/>
+              </a:rPr>
+              <a:t>RF-01  Registrar mascota</a:t>
             </a:r>
           </a:p>
           <a:p>
             <a:pPr>
               <a:spcAft>
-                <a:spcPts val="800"/>
+                <a:spcPts val="400"/>
               </a:spcAft>
             </a:pPr>
             <a:r>
-              <a:rPr sz="2000" b="0" i="0">
-                <a:solidFill>
-                  <a:srgbClr val="333333"/>
-                </a:solidFill>
-                <a:latin typeface="Calibri"/>
-              </a:rPr>
-              <a:t>–   Que es una decision de diseno con consecuencias en el historial clinico durante anos.</a:t>
+              <a:rPr sz="1400" b="0" i="0">
+                <a:solidFill>
+                  <a:srgbClr val="FFFFFF"/>
+                </a:solidFill>
+                <a:latin typeface="Calibri"/>
+              </a:rPr>
+              <a:t/>
             </a:r>
           </a:p>
           <a:p>
             <a:pPr>
               <a:spcAft>
-                <a:spcPts val="800"/>
+                <a:spcPts val="400"/>
               </a:spcAft>
             </a:pPr>
             <a:r>
-              <a:rPr sz="2000" b="0" i="0">
-                <a:solidFill>
-                  <a:srgbClr val="333333"/>
-                </a:solidFill>
-                <a:latin typeface="Calibri"/>
-              </a:rPr>
-              <a:t>–   Cuarto, dar salidas legitimas al deseo de construir: en la Clase 13 hay trabajo visual concreto con interfaces, en la Clase 11 se compara el diseno con lo que se esta construyendo, y en la Clase 12 los diagramas avanzados exigen precision tecnica.</a:t>
+              <a:rPr sz="1400" b="0" i="0">
+                <a:solidFill>
+                  <a:srgbClr val="FFFFFF"/>
+                </a:solidFill>
+                <a:latin typeface="Calibri"/>
+              </a:rPr>
+              <a:t>Actor:        Recepcionista</a:t>
             </a:r>
           </a:p>
           <a:p>
             <a:pPr>
               <a:spcAft>
-                <a:spcPts val="800"/>
+                <a:spcPts val="400"/>
               </a:spcAft>
             </a:pPr>
             <a:r>
-              <a:rPr sz="2000" b="0" i="0">
-                <a:solidFill>
-                  <a:srgbClr val="333333"/>
-                </a:solidFill>
-                <a:latin typeface="Calibri"/>
-              </a:rPr>
-              <a:t>–   Y hay que anticipar la pregunta textual, porque va a llegar: profesor, para que dibujo esto si lo voy a cambiar cuando programe.</a:t>
-            </a:r>
-          </a:p>
-        </p:txBody>
-      </p:sp>
-      <p:sp>
-        <p:nvSpPr>
-          <p:cNvPr id="6" name="TextBox 5"/>
+              <a:rPr sz="1400" b="0" i="0">
+                <a:solidFill>
+                  <a:srgbClr val="FFFFFF"/>
+                </a:solidFill>
+                <a:latin typeface="Calibri"/>
+              </a:rPr>
+              <a:t>Precondicion: el dueno ya esta registrado</a:t>
+            </a:r>
+          </a:p>
+          <a:p>
+            <a:pPr>
+              <a:spcAft>
+                <a:spcPts val="400"/>
+              </a:spcAft>
+            </a:pPr>
+            <a:r>
+              <a:rPr sz="1400" b="0" i="0">
+                <a:solidFill>
+                  <a:srgbClr val="FFFFFF"/>
+                </a:solidFill>
+                <a:latin typeface="Calibri"/>
+              </a:rPr>
+              <a:t>Descripcion:  El sistema DEBE permitir registrar una mascota con nombre,</a:t>
+            </a:r>
+          </a:p>
+          <a:p>
+            <a:pPr>
+              <a:spcAft>
+                <a:spcPts val="400"/>
+              </a:spcAft>
+            </a:pPr>
+            <a:r>
+              <a:rPr sz="1400" b="0" i="0">
+                <a:solidFill>
+                  <a:srgbClr val="FFFFFF"/>
+                </a:solidFill>
+                <a:latin typeface="Calibri"/>
+              </a:rPr>
+              <a:t>              especie, fecha de nacimiento y dueno asociado.</a:t>
+            </a:r>
+          </a:p>
+          <a:p>
+            <a:pPr>
+              <a:spcAft>
+                <a:spcPts val="400"/>
+              </a:spcAft>
+            </a:pPr>
+            <a:r>
+              <a:rPr sz="1400" b="0" i="0">
+                <a:solidFill>
+                  <a:srgbClr val="FFFFFF"/>
+                </a:solidFill>
+                <a:latin typeface="Calibri"/>
+              </a:rPr>
+              <a:t>Postcondicion: la mascota queda con expediente abierto y activa = 'S'</a:t>
+            </a:r>
+          </a:p>
+          <a:p>
+            <a:pPr>
+              <a:spcAft>
+                <a:spcPts val="400"/>
+              </a:spcAft>
+            </a:pPr>
+            <a:r>
+              <a:rPr sz="1400" b="0" i="0">
+                <a:solidFill>
+                  <a:srgbClr val="FFFFFF"/>
+                </a:solidFill>
+                <a:latin typeface="Calibri"/>
+              </a:rPr>
+              <a:t>Prioridad:    Must</a:t>
+            </a:r>
+          </a:p>
+          <a:p>
+            <a:pPr>
+              <a:spcAft>
+                <a:spcPts val="400"/>
+              </a:spcAft>
+            </a:pPr>
+            <a:r>
+              <a:rPr sz="1400" b="0" i="0">
+                <a:solidFill>
+                  <a:srgbClr val="FFFFFF"/>
+                </a:solidFill>
+                <a:latin typeface="Calibri"/>
+              </a:rPr>
+              <a:t>Origen:       entrevista Dr. Ramirez, 12/08/2026</a:t>
+            </a:r>
+          </a:p>
+          <a:p>
+            <a:pPr>
+              <a:spcAft>
+                <a:spcPts val="400"/>
+              </a:spcAft>
+            </a:pPr>
+            <a:r>
+              <a:rPr sz="1400" b="0" i="0">
+                <a:solidFill>
+                  <a:srgbClr val="FFFFFF"/>
+                </a:solidFill>
+                <a:latin typeface="Calibri"/>
+              </a:rPr>
+              <a:t/>
+            </a:r>
+          </a:p>
+          <a:p>
+            <a:pPr>
+              <a:spcAft>
+                <a:spcPts val="400"/>
+              </a:spcAft>
+            </a:pPr>
+            <a:r>
+              <a:rPr sz="1400" b="0" i="0">
+                <a:solidFill>
+                  <a:srgbClr val="FFFFFF"/>
+                </a:solidFill>
+                <a:latin typeface="Calibri"/>
+              </a:rPr>
+              <a:t>-- Lo que convierte una frase cruda en requisito: sujeto (el sistema),</a:t>
+            </a:r>
+          </a:p>
+          <a:p>
+            <a:pPr>
+              <a:spcAft>
+                <a:spcPts val="400"/>
+              </a:spcAft>
+            </a:pPr>
+            <a:r>
+              <a:rPr sz="1400" b="0" i="0">
+                <a:solidFill>
+                  <a:srgbClr val="FFFFFF"/>
+                </a:solidFill>
+                <a:latin typeface="Calibri"/>
+              </a:rPr>
+              <a:t>-- verbo normativo (DEBE), objeto verificable, y de donde salio.</a:t>
+            </a:r>
+          </a:p>
+          <a:p>
+            <a:pPr>
+              <a:spcAft>
+                <a:spcPts val="400"/>
+              </a:spcAft>
+            </a:pPr>
+            <a:r>
+              <a:rPr sz="1400" b="0" i="0">
+                <a:solidFill>
+                  <a:srgbClr val="FFFFFF"/>
+                </a:solidFill>
+                <a:latin typeface="Calibri"/>
+              </a:rPr>
+              <a:t>-- «El sistema debe ser facil de usar» no es un requisito: no se verifica.</a:t>
+            </a:r>
+          </a:p>
+        </p:txBody>
+      </p:sp>
+      <p:sp>
+        <p:nvSpPr>
+          <p:cNvPr id="9" name="TextBox 8"/>
           <p:cNvSpPr txBox="1"/>
           <p:nvPr/>
         </p:nvSpPr>
@@ -9195,7 +9703,7 @@
                 </a:solidFill>
                 <a:latin typeface="Calibri"/>
               </a:rPr>
-              <a:t>El mapa de dominio en Mermaid: la sintaxis</a:t>
+              <a:t>De frase cruda a requisito verificable</a:t>
             </a:r>
           </a:p>
         </p:txBody>
@@ -9209,7 +9717,7 @@
         <p:spPr>
           <a:xfrm>
             <a:off x="457200" y="1261872"/>
-            <a:ext cx="11277295" cy="5093208"/>
+            <a:ext cx="11277295" cy="4773168"/>
           </a:xfrm>
           <a:prstGeom prst="roundRect">
             <a:avLst>
@@ -9329,7 +9837,7 @@
         <p:spPr>
           <a:xfrm>
             <a:off x="777240" y="1719072"/>
-            <a:ext cx="10637215" cy="4453128"/>
+            <a:ext cx="10637215" cy="4133087"/>
           </a:xfrm>
           <a:prstGeom prst="rect">
             <a:avLst/>
@@ -9344,289 +9852,193 @@
           <a:p>
             <a:pPr>
               <a:spcAft>
-                <a:spcPts val="342"/>
+                <a:spcPts val="400"/>
               </a:spcAft>
             </a:pPr>
             <a:r>
-              <a:rPr sz="1200" b="0" i="0">
+              <a:rPr sz="1400" b="0" i="0">
                 <a:solidFill>
                   <a:srgbClr val="FFFFFF"/>
                 </a:solidFill>
                 <a:latin typeface="Calibri"/>
               </a:rPr>
-              <a:t>flowchart LR</a:t>
+              <a:t>FRASE DEL CLIENTE (entrevista):</a:t>
             </a:r>
           </a:p>
           <a:p>
             <a:pPr>
               <a:spcAft>
-                <a:spcPts val="342"/>
+                <a:spcPts val="400"/>
               </a:spcAft>
             </a:pPr>
             <a:r>
-              <a:rPr sz="1200" b="0" i="0">
+              <a:rPr sz="1400" b="0" i="0">
                 <a:solidFill>
                   <a:srgbClr val="FFFFFF"/>
                 </a:solidFill>
                 <a:latin typeface="Calibri"/>
               </a:rPr>
-              <a:t>  subgraph clinica[Clinica veterinaria]</a:t>
+              <a:t>  "Necesito buscar rapido el expediente de un animal usando solo su ID."</a:t>
             </a:r>
           </a:p>
           <a:p>
             <a:pPr>
               <a:spcAft>
-                <a:spcPts val="342"/>
+                <a:spcPts val="400"/>
               </a:spcAft>
             </a:pPr>
             <a:r>
-              <a:rPr sz="1200" b="0" i="0">
+              <a:rPr sz="1400" b="0" i="0">
                 <a:solidFill>
                   <a:srgbClr val="FFFFFF"/>
                 </a:solidFill>
                 <a:latin typeface="Calibri"/>
               </a:rPr>
-              <a:t>    rec([Recepcionista])</a:t>
+              <a:t/>
             </a:r>
           </a:p>
           <a:p>
             <a:pPr>
               <a:spcAft>
-                <a:spcPts val="342"/>
+                <a:spcPts val="400"/>
               </a:spcAft>
             </a:pPr>
             <a:r>
-              <a:rPr sz="1200" b="0" i="0">
+              <a:rPr sz="1400" b="0" i="0">
                 <a:solidFill>
                   <a:srgbClr val="FFFFFF"/>
                 </a:solidFill>
                 <a:latin typeface="Calibri"/>
               </a:rPr>
-              <a:t>    vet([Veterinario])</a:t>
+              <a:t>RF-01  Buscar expediente por identificador</a:t>
             </a:r>
           </a:p>
           <a:p>
             <a:pPr>
               <a:spcAft>
-                <a:spcPts val="342"/>
+                <a:spcPts val="400"/>
               </a:spcAft>
             </a:pPr>
             <a:r>
-              <a:rPr sz="1200" b="0" i="0">
+              <a:rPr sz="1400" b="0" i="0">
                 <a:solidFill>
                   <a:srgbClr val="FFFFFF"/>
                 </a:solidFill>
                 <a:latin typeface="Calibri"/>
               </a:rPr>
-              <a:t>  end</a:t>
+              <a:t>  El sistema permite consultar la ficha completa de una mascota</a:t>
             </a:r>
           </a:p>
           <a:p>
             <a:pPr>
               <a:spcAft>
-                <a:spcPts val="342"/>
+                <a:spcPts val="400"/>
               </a:spcAft>
             </a:pPr>
             <a:r>
-              <a:rPr sz="1200" b="0" i="0">
+              <a:rPr sz="1400" b="0" i="0">
                 <a:solidFill>
                   <a:srgbClr val="FFFFFF"/>
                 </a:solidFill>
                 <a:latin typeface="Calibri"/>
               </a:rPr>
-              <a:t/>
+              <a:t>  a partir de su identificador unico.</a:t>
             </a:r>
           </a:p>
           <a:p>
             <a:pPr>
               <a:spcAft>
-                <a:spcPts val="342"/>
+                <a:spcPts val="400"/>
               </a:spcAft>
             </a:pPr>
             <a:r>
-              <a:rPr sz="1200" b="0" i="0">
+              <a:rPr sz="1400" b="0" i="0">
                 <a:solidFill>
                   <a:srgbClr val="FFFFFF"/>
                 </a:solidFill>
                 <a:latin typeface="Calibri"/>
               </a:rPr>
-              <a:t>  subgraph sistema_clinica[El sistema de la clinica]</a:t>
+              <a:t>  Actor: Recepcionista, Veterinario</a:t>
             </a:r>
           </a:p>
           <a:p>
             <a:pPr>
               <a:spcAft>
-                <a:spcPts val="342"/>
+                <a:spcPts val="400"/>
               </a:spcAft>
             </a:pPr>
             <a:r>
-              <a:rPr sz="1200" b="0" i="0">
+              <a:rPr sz="1400" b="0" i="0">
                 <a:solidFill>
                   <a:srgbClr val="FFFFFF"/>
                 </a:solidFill>
                 <a:latin typeface="Calibri"/>
               </a:rPr>
-              <a:t>    agenda[Agendar cita]</a:t>
+              <a:t/>
             </a:r>
           </a:p>
           <a:p>
             <a:pPr>
               <a:spcAft>
-                <a:spcPts val="342"/>
+                <a:spcPts val="400"/>
               </a:spcAft>
             </a:pPr>
             <a:r>
-              <a:rPr sz="1200" b="0" i="0">
+              <a:rPr sz="1400" b="0" i="0">
                 <a:solidFill>
                   <a:srgbClr val="FFFFFF"/>
                 </a:solidFill>
                 <a:latin typeface="Calibri"/>
               </a:rPr>
-              <a:t>    exped[Consultar expediente]</a:t>
+              <a:t>RNF-01 Tiempo de respuesta de la busqueda</a:t>
             </a:r>
           </a:p>
           <a:p>
             <a:pPr>
               <a:spcAft>
-                <a:spcPts val="342"/>
+                <a:spcPts val="400"/>
               </a:spcAft>
             </a:pPr>
             <a:r>
-              <a:rPr sz="1200" b="0" i="0">
+              <a:rPr sz="1400" b="0" i="0">
                 <a:solidFill>
                   <a:srgbClr val="FFFFFF"/>
                 </a:solidFill>
                 <a:latin typeface="Calibri"/>
               </a:rPr>
-              <a:t>  end</a:t>
+              <a:t>  La consulta del RF-01 devuelve el resultado en menos de 2 segundos</a:t>
             </a:r>
           </a:p>
           <a:p>
             <a:pPr>
               <a:spcAft>
-                <a:spcPts val="342"/>
+                <a:spcPts val="400"/>
               </a:spcAft>
             </a:pPr>
             <a:r>
-              <a:rPr sz="1200" b="0" i="0">
+              <a:rPr sz="1400" b="0" i="0">
                 <a:solidFill>
                   <a:srgbClr val="FFFFFF"/>
                 </a:solidFill>
                 <a:latin typeface="Calibri"/>
               </a:rPr>
-              <a:t/>
+              <a:t>  con hasta 500 mascotas registradas.</a:t>
             </a:r>
           </a:p>
           <a:p>
             <a:pPr>
               <a:spcAft>
-                <a:spcPts val="342"/>
+                <a:spcPts val="400"/>
               </a:spcAft>
             </a:pPr>
             <a:r>
-              <a:rPr sz="1200" b="0" i="0">
+              <a:rPr sz="1400" b="0" i="0">
                 <a:solidFill>
                   <a:srgbClr val="FFFFFF"/>
                 </a:solidFill>
                 <a:latin typeface="Calibri"/>
               </a:rPr>
-              <a:t>  lab[Laboratorio externo]</a:t>
-            </a:r>
-          </a:p>
-          <a:p>
-            <a:pPr>
-              <a:spcAft>
-                <a:spcPts val="342"/>
-              </a:spcAft>
-            </a:pPr>
-            <a:r>
-              <a:rPr sz="1200" b="0" i="0">
-                <a:solidFill>
-                  <a:srgbClr val="FFFFFF"/>
-                </a:solidFill>
-                <a:latin typeface="Calibri"/>
-              </a:rPr>
-              <a:t/>
-            </a:r>
-          </a:p>
-          <a:p>
-            <a:pPr>
-              <a:spcAft>
-                <a:spcPts val="342"/>
-              </a:spcAft>
-            </a:pPr>
-            <a:r>
-              <a:rPr sz="1200" b="0" i="0">
-                <a:solidFill>
-                  <a:srgbClr val="FFFFFF"/>
-                </a:solidFill>
-                <a:latin typeface="Calibri"/>
-              </a:rPr>
-              <a:t>  rec --&gt;|agenda| agenda</a:t>
-            </a:r>
-          </a:p>
-          <a:p>
-            <a:pPr>
-              <a:spcAft>
-                <a:spcPts val="342"/>
-              </a:spcAft>
-            </a:pPr>
-            <a:r>
-              <a:rPr sz="1200" b="0" i="0">
-                <a:solidFill>
-                  <a:srgbClr val="FFFFFF"/>
-                </a:solidFill>
-                <a:latin typeface="Calibri"/>
-              </a:rPr>
-              <a:t>  vet --&gt;|consulta| exped</a:t>
-            </a:r>
-          </a:p>
-          <a:p>
-            <a:pPr>
-              <a:spcAft>
-                <a:spcPts val="342"/>
-              </a:spcAft>
-            </a:pPr>
-            <a:r>
-              <a:rPr sz="1200" b="0" i="0">
-                <a:solidFill>
-                  <a:srgbClr val="FFFFFF"/>
-                </a:solidFill>
-                <a:latin typeface="Calibri"/>
-              </a:rPr>
-              <a:t>  exped --&gt;|pide examen| lab</a:t>
-            </a:r>
-          </a:p>
-          <a:p>
-            <a:pPr>
-              <a:spcAft>
-                <a:spcPts val="342"/>
-              </a:spcAft>
-            </a:pPr>
-            <a:r>
-              <a:rPr sz="1200" b="0" i="0">
-                <a:solidFill>
-                  <a:srgbClr val="FFFFFF"/>
-                </a:solidFill>
-                <a:latin typeface="Calibri"/>
-              </a:rPr>
-              <a:t/>
-            </a:r>
-          </a:p>
-          <a:p>
-            <a:pPr>
-              <a:spcAft>
-                <a:spcPts val="342"/>
-              </a:spcAft>
-            </a:pPr>
-            <a:r>
-              <a:rPr sz="1200" b="0" i="0">
-                <a:solidFill>
-                  <a:srgbClr val="FFFFFF"/>
-                </a:solidFill>
-                <a:latin typeface="Calibri"/>
-              </a:rPr>
-              <a:t>%% Complete con SUS capacidades y actores: estas son dos de cada uno.</a:t>
+              <a:t>  Verificacion: medir con cronometro sobre el juego de datos de prueba.</a:t>
             </a:r>
           </a:p>
         </p:txBody>
@@ -9634,6 +10046,41 @@
       <p:sp>
         <p:nvSpPr>
           <p:cNvPr id="9" name="TextBox 8"/>
+          <p:cNvSpPr txBox="1"/>
+          <p:nvPr/>
+        </p:nvSpPr>
+        <p:spPr>
+          <a:xfrm>
+            <a:off x="457200" y="6080760"/>
+            <a:ext cx="11277295" cy="320040"/>
+          </a:xfrm>
+          <a:prstGeom prst="rect">
+            <a:avLst/>
+          </a:prstGeom>
+          <a:noFill/>
+        </p:spPr>
+        <p:txBody>
+          <a:bodyPr wrap="square">
+            <a:spAutoFit/>
+          </a:bodyPr>
+          <a:lstStyle/>
+          <a:p>
+            <a:pPr algn="ctr"/>
+            <a:r>
+              <a:rPr sz="1200" b="0" i="1">
+                <a:solidFill>
+                  <a:srgbClr val="666666"/>
+                </a:solidFill>
+                <a:latin typeface="Calibri"/>
+              </a:rPr>
+              <a:t>Si no se puede verificar, no es un requisito: es un deseo.</a:t>
+            </a:r>
+          </a:p>
+        </p:txBody>
+      </p:sp>
+      <p:sp>
+        <p:nvSpPr>
+          <p:cNvPr id="10" name="TextBox 9"/>
           <p:cNvSpPr txBox="1"/>
           <p:nvPr/>
         </p:nvSpPr>
@@ -9807,141 +10254,21 @@
                 </a:solidFill>
                 <a:latin typeface="Calibri"/>
               </a:rPr>
-              <a:t>La ficha de requisito bien escrito, campo por campo</a:t>
-            </a:r>
-          </a:p>
-        </p:txBody>
-      </p:sp>
-      <p:sp>
-        <p:nvSpPr>
-          <p:cNvPr id="5" name="Rounded Rectangle 4"/>
-          <p:cNvSpPr/>
-          <p:nvPr/>
-        </p:nvSpPr>
-        <p:spPr>
-          <a:xfrm>
-            <a:off x="457200" y="1261872"/>
-            <a:ext cx="11277295" cy="5093208"/>
-          </a:xfrm>
-          <a:prstGeom prst="roundRect">
-            <a:avLst>
-              <a:gd name="adj" fmla="val 12000"/>
-            </a:avLst>
-          </a:prstGeom>
-          <a:solidFill>
-            <a:srgbClr val="1E2A38"/>
-          </a:solidFill>
-          <a:ln>
-            <a:noFill/>
-          </a:ln>
-        </p:spPr>
-        <p:style>
-          <a:lnRef idx="1">
-            <a:schemeClr val="accent1"/>
-          </a:lnRef>
-          <a:fillRef idx="3">
-            <a:schemeClr val="accent1"/>
-          </a:fillRef>
-          <a:effectRef idx="2">
-            <a:schemeClr val="accent1"/>
-          </a:effectRef>
-          <a:fontRef idx="minor">
-            <a:schemeClr val="lt1"/>
-          </a:fontRef>
-        </p:style>
-        <p:txBody>
-          <a:bodyPr rtlCol="0" anchor="ctr"/>
-          <a:lstStyle/>
-          <a:p>
-            <a:pPr algn="ctr"/>
-          </a:p>
-        </p:txBody>
-      </p:sp>
-      <p:sp>
-        <p:nvSpPr>
-          <p:cNvPr id="6" name="Rectangle 5"/>
-          <p:cNvSpPr/>
-          <p:nvPr/>
-        </p:nvSpPr>
-        <p:spPr>
-          <a:xfrm>
-            <a:off x="457200" y="1261872"/>
-            <a:ext cx="11277295" cy="320040"/>
-          </a:xfrm>
-          <a:prstGeom prst="rect">
-            <a:avLst/>
-          </a:prstGeom>
-          <a:solidFill>
-            <a:srgbClr val="095292"/>
-          </a:solidFill>
-          <a:ln>
-            <a:noFill/>
-          </a:ln>
-        </p:spPr>
-        <p:style>
-          <a:lnRef idx="1">
-            <a:schemeClr val="accent1"/>
-          </a:lnRef>
-          <a:fillRef idx="3">
-            <a:schemeClr val="accent1"/>
-          </a:fillRef>
-          <a:effectRef idx="2">
-            <a:schemeClr val="accent1"/>
-          </a:effectRef>
-          <a:fontRef idx="minor">
-            <a:schemeClr val="lt1"/>
-          </a:fontRef>
-        </p:style>
-        <p:txBody>
-          <a:bodyPr rtlCol="0" anchor="ctr"/>
-          <a:lstStyle/>
-          <a:p>
-            <a:pPr algn="ctr"/>
-          </a:p>
-        </p:txBody>
-      </p:sp>
-      <p:sp>
-        <p:nvSpPr>
-          <p:cNvPr id="7" name="TextBox 6"/>
+              <a:t>Demo del dia</a:t>
+            </a:r>
+          </a:p>
+        </p:txBody>
+      </p:sp>
+      <p:sp>
+        <p:nvSpPr>
+          <p:cNvPr id="5" name="TextBox 4"/>
           <p:cNvSpPr txBox="1"/>
           <p:nvPr/>
         </p:nvSpPr>
         <p:spPr>
           <a:xfrm>
-            <a:off x="685800" y="1307592"/>
-            <a:ext cx="10820095" cy="256032"/>
-          </a:xfrm>
-          <a:prstGeom prst="rect">
-            <a:avLst/>
-          </a:prstGeom>
-          <a:noFill/>
-        </p:spPr>
-        <p:txBody>
-          <a:bodyPr wrap="square" anchor="ctr"/>
-          <a:lstStyle/>
-          <a:p>
-            <a:r>
-              <a:rPr sz="1000" b="1" i="0">
-                <a:solidFill>
-                  <a:srgbClr val="269CCB"/>
-                </a:solidFill>
-                <a:latin typeface="Calibri"/>
-              </a:rPr>
-              <a:t>● ● ●</a:t>
-            </a:r>
-          </a:p>
-        </p:txBody>
-      </p:sp>
-      <p:sp>
-        <p:nvSpPr>
-          <p:cNvPr id="8" name="TextBox 7"/>
-          <p:cNvSpPr txBox="1"/>
-          <p:nvPr/>
-        </p:nvSpPr>
-        <p:spPr>
-          <a:xfrm>
-            <a:off x="777240" y="1719072"/>
-            <a:ext cx="10637215" cy="4453128"/>
+            <a:off x="457200" y="1170432"/>
+            <a:ext cx="11277295" cy="5230368"/>
           </a:xfrm>
           <a:prstGeom prst="rect">
             <a:avLst/>
@@ -9956,216 +10283,92 @@
           <a:p>
             <a:pPr>
               <a:spcAft>
-                <a:spcPts val="400"/>
+                <a:spcPts val="800"/>
               </a:spcAft>
             </a:pPr>
             <a:r>
-              <a:rPr sz="1400" b="0" i="0">
-                <a:solidFill>
-                  <a:srgbClr val="FFFFFF"/>
-                </a:solidFill>
-                <a:latin typeface="Calibri"/>
-              </a:rPr>
-              <a:t>RF-01  Registrar mascota</a:t>
+              <a:rPr sz="2000" b="0" i="0">
+                <a:solidFill>
+                  <a:srgbClr val="333333"/>
+                </a:solidFill>
+                <a:latin typeface="Calibri"/>
+              </a:rPr>
+              <a:t>–   </a:t>
+            </a:r>
+            <a:r>
+              <a:rPr sz="2000" b="1" i="0">
+                <a:solidFill>
+                  <a:srgbClr val="333333"/>
+                </a:solidFill>
+                <a:latin typeface="Calibri"/>
+              </a:rPr>
+              <a:t>Herramienta:</a:t>
+            </a:r>
+            <a:r>
+              <a:rPr sz="2000" b="0" i="0">
+                <a:solidFill>
+                  <a:srgbClr val="333333"/>
+                </a:solidFill>
+                <a:latin typeface="Calibri"/>
+              </a:rPr>
+              <a:t> Google Docs · draw.io</a:t>
             </a:r>
           </a:p>
           <a:p>
             <a:pPr>
               <a:spcAft>
-                <a:spcPts val="400"/>
+                <a:spcPts val="800"/>
               </a:spcAft>
             </a:pPr>
             <a:r>
-              <a:rPr sz="1400" b="0" i="0">
-                <a:solidFill>
-                  <a:srgbClr val="FFFFFF"/>
-                </a:solidFill>
-                <a:latin typeface="Calibri"/>
-              </a:rPr>
-              <a:t/>
+              <a:rPr sz="2000" b="0" i="0">
+                <a:solidFill>
+                  <a:srgbClr val="333333"/>
+                </a:solidFill>
+                <a:latin typeface="Calibri"/>
+              </a:rPr>
+              <a:t>–   </a:t>
+            </a:r>
+            <a:r>
+              <a:rPr sz="2000" b="1" i="0">
+                <a:solidFill>
+                  <a:srgbClr val="333333"/>
+                </a:solidFill>
+                <a:latin typeface="Calibri"/>
+              </a:rPr>
+              <a:t>Demo:</a:t>
+            </a:r>
+            <a:r>
+              <a:rPr sz="2000" b="0" i="0">
+                <a:solidFill>
+                  <a:srgbClr val="333333"/>
+                </a:solidFill>
+                <a:latin typeface="Calibri"/>
+              </a:rPr>
+              <a:t> Convertir en vivo la frase cruda «necesito buscar rapido el expediente de un animal» en un requisito funcional y uno no funcional bien escritos</a:t>
             </a:r>
           </a:p>
           <a:p>
             <a:pPr>
               <a:spcAft>
-                <a:spcPts val="400"/>
+                <a:spcPts val="800"/>
               </a:spcAft>
             </a:pPr>
             <a:r>
-              <a:rPr sz="1400" b="0" i="0">
-                <a:solidFill>
-                  <a:srgbClr val="FFFFFF"/>
-                </a:solidFill>
-                <a:latin typeface="Calibri"/>
-              </a:rPr>
-              <a:t>Actor:        Recepcionista</a:t>
-            </a:r>
-          </a:p>
-          <a:p>
-            <a:pPr>
-              <a:spcAft>
-                <a:spcPts val="400"/>
-              </a:spcAft>
-            </a:pPr>
-            <a:r>
-              <a:rPr sz="1400" b="0" i="0">
-                <a:solidFill>
-                  <a:srgbClr val="FFFFFF"/>
-                </a:solidFill>
-                <a:latin typeface="Calibri"/>
-              </a:rPr>
-              <a:t>Precondicion: el dueno ya esta registrado</a:t>
-            </a:r>
-          </a:p>
-          <a:p>
-            <a:pPr>
-              <a:spcAft>
-                <a:spcPts val="400"/>
-              </a:spcAft>
-            </a:pPr>
-            <a:r>
-              <a:rPr sz="1400" b="0" i="0">
-                <a:solidFill>
-                  <a:srgbClr val="FFFFFF"/>
-                </a:solidFill>
-                <a:latin typeface="Calibri"/>
-              </a:rPr>
-              <a:t>Descripcion:  El sistema DEBE permitir registrar una mascota con nombre,</a:t>
-            </a:r>
-          </a:p>
-          <a:p>
-            <a:pPr>
-              <a:spcAft>
-                <a:spcPts val="400"/>
-              </a:spcAft>
-            </a:pPr>
-            <a:r>
-              <a:rPr sz="1400" b="0" i="0">
-                <a:solidFill>
-                  <a:srgbClr val="FFFFFF"/>
-                </a:solidFill>
-                <a:latin typeface="Calibri"/>
-              </a:rPr>
-              <a:t>              especie, fecha de nacimiento y dueno asociado.</a:t>
-            </a:r>
-          </a:p>
-          <a:p>
-            <a:pPr>
-              <a:spcAft>
-                <a:spcPts val="400"/>
-              </a:spcAft>
-            </a:pPr>
-            <a:r>
-              <a:rPr sz="1400" b="0" i="0">
-                <a:solidFill>
-                  <a:srgbClr val="FFFFFF"/>
-                </a:solidFill>
-                <a:latin typeface="Calibri"/>
-              </a:rPr>
-              <a:t>Postcondicion: la mascota queda con expediente abierto y activa = 'S'</a:t>
-            </a:r>
-          </a:p>
-          <a:p>
-            <a:pPr>
-              <a:spcAft>
-                <a:spcPts val="400"/>
-              </a:spcAft>
-            </a:pPr>
-            <a:r>
-              <a:rPr sz="1400" b="0" i="0">
-                <a:solidFill>
-                  <a:srgbClr val="FFFFFF"/>
-                </a:solidFill>
-                <a:latin typeface="Calibri"/>
-              </a:rPr>
-              <a:t>Prioridad:    Must</a:t>
-            </a:r>
-          </a:p>
-          <a:p>
-            <a:pPr>
-              <a:spcAft>
-                <a:spcPts val="400"/>
-              </a:spcAft>
-            </a:pPr>
-            <a:r>
-              <a:rPr sz="1400" b="0" i="0">
-                <a:solidFill>
-                  <a:srgbClr val="FFFFFF"/>
-                </a:solidFill>
-                <a:latin typeface="Calibri"/>
-              </a:rPr>
-              <a:t>Origen:       entrevista Dr. Ramirez, 12/08/2026</a:t>
-            </a:r>
-          </a:p>
-          <a:p>
-            <a:pPr>
-              <a:spcAft>
-                <a:spcPts val="400"/>
-              </a:spcAft>
-            </a:pPr>
-            <a:r>
-              <a:rPr sz="1400" b="0" i="0">
-                <a:solidFill>
-                  <a:srgbClr val="FFFFFF"/>
-                </a:solidFill>
-                <a:latin typeface="Calibri"/>
-              </a:rPr>
-              <a:t/>
-            </a:r>
-          </a:p>
-          <a:p>
-            <a:pPr>
-              <a:spcAft>
-                <a:spcPts val="400"/>
-              </a:spcAft>
-            </a:pPr>
-            <a:r>
-              <a:rPr sz="1400" b="0" i="0">
-                <a:solidFill>
-                  <a:srgbClr val="FFFFFF"/>
-                </a:solidFill>
-                <a:latin typeface="Calibri"/>
-              </a:rPr>
-              <a:t>-- Lo que convierte una frase cruda en requisito: sujeto (el sistema),</a:t>
-            </a:r>
-          </a:p>
-          <a:p>
-            <a:pPr>
-              <a:spcAft>
-                <a:spcPts val="400"/>
-              </a:spcAft>
-            </a:pPr>
-            <a:r>
-              <a:rPr sz="1400" b="0" i="0">
-                <a:solidFill>
-                  <a:srgbClr val="FFFFFF"/>
-                </a:solidFill>
-                <a:latin typeface="Calibri"/>
-              </a:rPr>
-              <a:t>-- verbo normativo (DEBE), objeto verificable, y de donde salio.</a:t>
-            </a:r>
-          </a:p>
-          <a:p>
-            <a:pPr>
-              <a:spcAft>
-                <a:spcPts val="400"/>
-              </a:spcAft>
-            </a:pPr>
-            <a:r>
-              <a:rPr sz="1400" b="0" i="0">
-                <a:solidFill>
-                  <a:srgbClr val="FFFFFF"/>
-                </a:solidFill>
-                <a:latin typeface="Calibri"/>
-              </a:rPr>
-              <a:t>-- «El sistema debe ser facil de usar» no es un requisito: no se verifica.</a:t>
-            </a:r>
-          </a:p>
-        </p:txBody>
-      </p:sp>
-      <p:sp>
-        <p:nvSpPr>
-          <p:cNvPr id="9" name="TextBox 8"/>
+              <a:rPr sz="2000" b="0" i="0">
+                <a:solidFill>
+                  <a:srgbClr val="333333"/>
+                </a:solidFill>
+                <a:latin typeface="Calibri"/>
+              </a:rPr>
+              <a:t>–   Mismo dominio: la clinica veterinaria — no otro ejemplo. Aqui se diseña, no se programa.</a:t>
+            </a:r>
+          </a:p>
+        </p:txBody>
+      </p:sp>
+      <p:sp>
+        <p:nvSpPr>
+          <p:cNvPr id="6" name="TextBox 5"/>
           <p:cNvSpPr txBox="1"/>
           <p:nvPr/>
         </p:nvSpPr>
@@ -10233,845 +10436,6 @@
         <p:spPr>
           <a:xfrm>
             <a:off x="0" y="0"/>
-            <a:ext cx="12191695" cy="960120"/>
-          </a:xfrm>
-          <a:prstGeom prst="rect">
-            <a:avLst/>
-          </a:prstGeom>
-          <a:solidFill>
-            <a:srgbClr val="095292"/>
-          </a:solidFill>
-          <a:ln>
-            <a:noFill/>
-          </a:ln>
-        </p:spPr>
-        <p:style>
-          <a:lnRef idx="1">
-            <a:schemeClr val="accent1"/>
-          </a:lnRef>
-          <a:fillRef idx="3">
-            <a:schemeClr val="accent1"/>
-          </a:fillRef>
-          <a:effectRef idx="2">
-            <a:schemeClr val="accent1"/>
-          </a:effectRef>
-          <a:fontRef idx="minor">
-            <a:schemeClr val="lt1"/>
-          </a:fontRef>
-        </p:style>
-        <p:txBody>
-          <a:bodyPr rtlCol="0" anchor="ctr"/>
-          <a:lstStyle/>
-          <a:p>
-            <a:pPr algn="ctr"/>
-          </a:p>
-        </p:txBody>
-      </p:sp>
-      <p:sp>
-        <p:nvSpPr>
-          <p:cNvPr id="3" name="Rectangle 2"/>
-          <p:cNvSpPr/>
-          <p:nvPr/>
-        </p:nvSpPr>
-        <p:spPr>
-          <a:xfrm>
-            <a:off x="0" y="960120"/>
-            <a:ext cx="12191695" cy="41148"/>
-          </a:xfrm>
-          <a:prstGeom prst="rect">
-            <a:avLst/>
-          </a:prstGeom>
-          <a:solidFill>
-            <a:srgbClr val="FFD000"/>
-          </a:solidFill>
-          <a:ln>
-            <a:noFill/>
-          </a:ln>
-        </p:spPr>
-        <p:style>
-          <a:lnRef idx="1">
-            <a:schemeClr val="accent1"/>
-          </a:lnRef>
-          <a:fillRef idx="3">
-            <a:schemeClr val="accent1"/>
-          </a:fillRef>
-          <a:effectRef idx="2">
-            <a:schemeClr val="accent1"/>
-          </a:effectRef>
-          <a:fontRef idx="minor">
-            <a:schemeClr val="lt1"/>
-          </a:fontRef>
-        </p:style>
-        <p:txBody>
-          <a:bodyPr rtlCol="0" anchor="ctr"/>
-          <a:lstStyle/>
-          <a:p>
-            <a:pPr algn="ctr"/>
-          </a:p>
-        </p:txBody>
-      </p:sp>
-      <p:sp>
-        <p:nvSpPr>
-          <p:cNvPr id="4" name="TextBox 3"/>
-          <p:cNvSpPr txBox="1"/>
-          <p:nvPr/>
-        </p:nvSpPr>
-        <p:spPr>
-          <a:xfrm>
-            <a:off x="457200" y="164592"/>
-            <a:ext cx="11277295" cy="502920"/>
-          </a:xfrm>
-          <a:prstGeom prst="rect">
-            <a:avLst/>
-          </a:prstGeom>
-          <a:noFill/>
-        </p:spPr>
-        <p:txBody>
-          <a:bodyPr wrap="square">
-            <a:spAutoFit/>
-          </a:bodyPr>
-          <a:lstStyle/>
-          <a:p>
-            <a:r>
-              <a:rPr sz="2600" b="1" i="0">
-                <a:solidFill>
-                  <a:srgbClr val="FFFFFF"/>
-                </a:solidFill>
-                <a:latin typeface="Calibri"/>
-              </a:rPr>
-              <a:t>De frase cruda a requisito verificable</a:t>
-            </a:r>
-          </a:p>
-        </p:txBody>
-      </p:sp>
-      <p:sp>
-        <p:nvSpPr>
-          <p:cNvPr id="5" name="Rounded Rectangle 4"/>
-          <p:cNvSpPr/>
-          <p:nvPr/>
-        </p:nvSpPr>
-        <p:spPr>
-          <a:xfrm>
-            <a:off x="457200" y="1261872"/>
-            <a:ext cx="11277295" cy="4773168"/>
-          </a:xfrm>
-          <a:prstGeom prst="roundRect">
-            <a:avLst>
-              <a:gd name="adj" fmla="val 12000"/>
-            </a:avLst>
-          </a:prstGeom>
-          <a:solidFill>
-            <a:srgbClr val="1E2A38"/>
-          </a:solidFill>
-          <a:ln>
-            <a:noFill/>
-          </a:ln>
-        </p:spPr>
-        <p:style>
-          <a:lnRef idx="1">
-            <a:schemeClr val="accent1"/>
-          </a:lnRef>
-          <a:fillRef idx="3">
-            <a:schemeClr val="accent1"/>
-          </a:fillRef>
-          <a:effectRef idx="2">
-            <a:schemeClr val="accent1"/>
-          </a:effectRef>
-          <a:fontRef idx="minor">
-            <a:schemeClr val="lt1"/>
-          </a:fontRef>
-        </p:style>
-        <p:txBody>
-          <a:bodyPr rtlCol="0" anchor="ctr"/>
-          <a:lstStyle/>
-          <a:p>
-            <a:pPr algn="ctr"/>
-          </a:p>
-        </p:txBody>
-      </p:sp>
-      <p:sp>
-        <p:nvSpPr>
-          <p:cNvPr id="6" name="Rectangle 5"/>
-          <p:cNvSpPr/>
-          <p:nvPr/>
-        </p:nvSpPr>
-        <p:spPr>
-          <a:xfrm>
-            <a:off x="457200" y="1261872"/>
-            <a:ext cx="11277295" cy="320040"/>
-          </a:xfrm>
-          <a:prstGeom prst="rect">
-            <a:avLst/>
-          </a:prstGeom>
-          <a:solidFill>
-            <a:srgbClr val="095292"/>
-          </a:solidFill>
-          <a:ln>
-            <a:noFill/>
-          </a:ln>
-        </p:spPr>
-        <p:style>
-          <a:lnRef idx="1">
-            <a:schemeClr val="accent1"/>
-          </a:lnRef>
-          <a:fillRef idx="3">
-            <a:schemeClr val="accent1"/>
-          </a:fillRef>
-          <a:effectRef idx="2">
-            <a:schemeClr val="accent1"/>
-          </a:effectRef>
-          <a:fontRef idx="minor">
-            <a:schemeClr val="lt1"/>
-          </a:fontRef>
-        </p:style>
-        <p:txBody>
-          <a:bodyPr rtlCol="0" anchor="ctr"/>
-          <a:lstStyle/>
-          <a:p>
-            <a:pPr algn="ctr"/>
-          </a:p>
-        </p:txBody>
-      </p:sp>
-      <p:sp>
-        <p:nvSpPr>
-          <p:cNvPr id="7" name="TextBox 6"/>
-          <p:cNvSpPr txBox="1"/>
-          <p:nvPr/>
-        </p:nvSpPr>
-        <p:spPr>
-          <a:xfrm>
-            <a:off x="685800" y="1307592"/>
-            <a:ext cx="10820095" cy="256032"/>
-          </a:xfrm>
-          <a:prstGeom prst="rect">
-            <a:avLst/>
-          </a:prstGeom>
-          <a:noFill/>
-        </p:spPr>
-        <p:txBody>
-          <a:bodyPr wrap="square" anchor="ctr"/>
-          <a:lstStyle/>
-          <a:p>
-            <a:r>
-              <a:rPr sz="1000" b="1" i="0">
-                <a:solidFill>
-                  <a:srgbClr val="269CCB"/>
-                </a:solidFill>
-                <a:latin typeface="Calibri"/>
-              </a:rPr>
-              <a:t>● ● ●</a:t>
-            </a:r>
-          </a:p>
-        </p:txBody>
-      </p:sp>
-      <p:sp>
-        <p:nvSpPr>
-          <p:cNvPr id="8" name="TextBox 7"/>
-          <p:cNvSpPr txBox="1"/>
-          <p:nvPr/>
-        </p:nvSpPr>
-        <p:spPr>
-          <a:xfrm>
-            <a:off x="777240" y="1719072"/>
-            <a:ext cx="10637215" cy="4133087"/>
-          </a:xfrm>
-          <a:prstGeom prst="rect">
-            <a:avLst/>
-          </a:prstGeom>
-          <a:noFill/>
-        </p:spPr>
-        <p:txBody>
-          <a:bodyPr wrap="square">
-            <a:spAutoFit/>
-          </a:bodyPr>
-          <a:lstStyle/>
-          <a:p>
-            <a:pPr>
-              <a:spcAft>
-                <a:spcPts val="400"/>
-              </a:spcAft>
-            </a:pPr>
-            <a:r>
-              <a:rPr sz="1400" b="0" i="0">
-                <a:solidFill>
-                  <a:srgbClr val="FFFFFF"/>
-                </a:solidFill>
-                <a:latin typeface="Calibri"/>
-              </a:rPr>
-              <a:t>FRASE DEL CLIENTE (entrevista):</a:t>
-            </a:r>
-          </a:p>
-          <a:p>
-            <a:pPr>
-              <a:spcAft>
-                <a:spcPts val="400"/>
-              </a:spcAft>
-            </a:pPr>
-            <a:r>
-              <a:rPr sz="1400" b="0" i="0">
-                <a:solidFill>
-                  <a:srgbClr val="FFFFFF"/>
-                </a:solidFill>
-                <a:latin typeface="Calibri"/>
-              </a:rPr>
-              <a:t>  "Necesito buscar rapido el expediente de un animal usando solo su ID."</a:t>
-            </a:r>
-          </a:p>
-          <a:p>
-            <a:pPr>
-              <a:spcAft>
-                <a:spcPts val="400"/>
-              </a:spcAft>
-            </a:pPr>
-            <a:r>
-              <a:rPr sz="1400" b="0" i="0">
-                <a:solidFill>
-                  <a:srgbClr val="FFFFFF"/>
-                </a:solidFill>
-                <a:latin typeface="Calibri"/>
-              </a:rPr>
-              <a:t/>
-            </a:r>
-          </a:p>
-          <a:p>
-            <a:pPr>
-              <a:spcAft>
-                <a:spcPts val="400"/>
-              </a:spcAft>
-            </a:pPr>
-            <a:r>
-              <a:rPr sz="1400" b="0" i="0">
-                <a:solidFill>
-                  <a:srgbClr val="FFFFFF"/>
-                </a:solidFill>
-                <a:latin typeface="Calibri"/>
-              </a:rPr>
-              <a:t>RF-01  Buscar expediente por identificador</a:t>
-            </a:r>
-          </a:p>
-          <a:p>
-            <a:pPr>
-              <a:spcAft>
-                <a:spcPts val="400"/>
-              </a:spcAft>
-            </a:pPr>
-            <a:r>
-              <a:rPr sz="1400" b="0" i="0">
-                <a:solidFill>
-                  <a:srgbClr val="FFFFFF"/>
-                </a:solidFill>
-                <a:latin typeface="Calibri"/>
-              </a:rPr>
-              <a:t>  El sistema permite consultar la ficha completa de una mascota</a:t>
-            </a:r>
-          </a:p>
-          <a:p>
-            <a:pPr>
-              <a:spcAft>
-                <a:spcPts val="400"/>
-              </a:spcAft>
-            </a:pPr>
-            <a:r>
-              <a:rPr sz="1400" b="0" i="0">
-                <a:solidFill>
-                  <a:srgbClr val="FFFFFF"/>
-                </a:solidFill>
-                <a:latin typeface="Calibri"/>
-              </a:rPr>
-              <a:t>  a partir de su identificador unico.</a:t>
-            </a:r>
-          </a:p>
-          <a:p>
-            <a:pPr>
-              <a:spcAft>
-                <a:spcPts val="400"/>
-              </a:spcAft>
-            </a:pPr>
-            <a:r>
-              <a:rPr sz="1400" b="0" i="0">
-                <a:solidFill>
-                  <a:srgbClr val="FFFFFF"/>
-                </a:solidFill>
-                <a:latin typeface="Calibri"/>
-              </a:rPr>
-              <a:t>  Actor: Recepcionista, Veterinario</a:t>
-            </a:r>
-          </a:p>
-          <a:p>
-            <a:pPr>
-              <a:spcAft>
-                <a:spcPts val="400"/>
-              </a:spcAft>
-            </a:pPr>
-            <a:r>
-              <a:rPr sz="1400" b="0" i="0">
-                <a:solidFill>
-                  <a:srgbClr val="FFFFFF"/>
-                </a:solidFill>
-                <a:latin typeface="Calibri"/>
-              </a:rPr>
-              <a:t/>
-            </a:r>
-          </a:p>
-          <a:p>
-            <a:pPr>
-              <a:spcAft>
-                <a:spcPts val="400"/>
-              </a:spcAft>
-            </a:pPr>
-            <a:r>
-              <a:rPr sz="1400" b="0" i="0">
-                <a:solidFill>
-                  <a:srgbClr val="FFFFFF"/>
-                </a:solidFill>
-                <a:latin typeface="Calibri"/>
-              </a:rPr>
-              <a:t>RNF-01 Tiempo de respuesta de la busqueda</a:t>
-            </a:r>
-          </a:p>
-          <a:p>
-            <a:pPr>
-              <a:spcAft>
-                <a:spcPts val="400"/>
-              </a:spcAft>
-            </a:pPr>
-            <a:r>
-              <a:rPr sz="1400" b="0" i="0">
-                <a:solidFill>
-                  <a:srgbClr val="FFFFFF"/>
-                </a:solidFill>
-                <a:latin typeface="Calibri"/>
-              </a:rPr>
-              <a:t>  La consulta del RF-01 devuelve el resultado en menos de 2 segundos</a:t>
-            </a:r>
-          </a:p>
-          <a:p>
-            <a:pPr>
-              <a:spcAft>
-                <a:spcPts val="400"/>
-              </a:spcAft>
-            </a:pPr>
-            <a:r>
-              <a:rPr sz="1400" b="0" i="0">
-                <a:solidFill>
-                  <a:srgbClr val="FFFFFF"/>
-                </a:solidFill>
-                <a:latin typeface="Calibri"/>
-              </a:rPr>
-              <a:t>  con hasta 500 mascotas registradas.</a:t>
-            </a:r>
-          </a:p>
-          <a:p>
-            <a:pPr>
-              <a:spcAft>
-                <a:spcPts val="400"/>
-              </a:spcAft>
-            </a:pPr>
-            <a:r>
-              <a:rPr sz="1400" b="0" i="0">
-                <a:solidFill>
-                  <a:srgbClr val="FFFFFF"/>
-                </a:solidFill>
-                <a:latin typeface="Calibri"/>
-              </a:rPr>
-              <a:t>  Verificacion: medir con cronometro sobre el juego de datos de prueba.</a:t>
-            </a:r>
-          </a:p>
-        </p:txBody>
-      </p:sp>
-      <p:sp>
-        <p:nvSpPr>
-          <p:cNvPr id="9" name="TextBox 8"/>
-          <p:cNvSpPr txBox="1"/>
-          <p:nvPr/>
-        </p:nvSpPr>
-        <p:spPr>
-          <a:xfrm>
-            <a:off x="457200" y="6080760"/>
-            <a:ext cx="11277295" cy="320040"/>
-          </a:xfrm>
-          <a:prstGeom prst="rect">
-            <a:avLst/>
-          </a:prstGeom>
-          <a:noFill/>
-        </p:spPr>
-        <p:txBody>
-          <a:bodyPr wrap="square">
-            <a:spAutoFit/>
-          </a:bodyPr>
-          <a:lstStyle/>
-          <a:p>
-            <a:pPr algn="ctr"/>
-            <a:r>
-              <a:rPr sz="1200" b="0" i="1">
-                <a:solidFill>
-                  <a:srgbClr val="666666"/>
-                </a:solidFill>
-                <a:latin typeface="Calibri"/>
-              </a:rPr>
-              <a:t>Si no se puede verificar, no es un requisito: es un deseo.</a:t>
-            </a:r>
-          </a:p>
-        </p:txBody>
-      </p:sp>
-      <p:sp>
-        <p:nvSpPr>
-          <p:cNvPr id="10" name="TextBox 9"/>
-          <p:cNvSpPr txBox="1"/>
-          <p:nvPr/>
-        </p:nvSpPr>
-        <p:spPr>
-          <a:xfrm>
-            <a:off x="11185855" y="6473952"/>
-            <a:ext cx="640080" cy="274320"/>
-          </a:xfrm>
-          <a:prstGeom prst="rect">
-            <a:avLst/>
-          </a:prstGeom>
-          <a:noFill/>
-        </p:spPr>
-        <p:txBody>
-          <a:bodyPr wrap="square">
-            <a:spAutoFit/>
-          </a:bodyPr>
-          <a:lstStyle/>
-          <a:p>
-            <a:pPr algn="r"/>
-            <a:r>
-              <a:rPr sz="1100" b="0" i="0">
-                <a:solidFill>
-                  <a:srgbClr val="666666"/>
-                </a:solidFill>
-                <a:latin typeface="Calibri"/>
-              </a:rPr>
-              <a:t>27</a:t>
-            </a:r>
-          </a:p>
-        </p:txBody>
-      </p:sp>
-    </p:spTree>
-  </p:cSld>
-  <p:clrMapOvr>
-    <a:masterClrMapping/>
-  </p:clrMapOvr>
-</p:sld>
-</file>
-
-<file path=ppt/slides/slide28.xml><?xml version="1.0" encoding="utf-8"?>
-<p:sld xmlns:a="http://schemas.openxmlformats.org/drawingml/2006/main" xmlns:p="http://schemas.openxmlformats.org/presentationml/2006/main" xmlns:r="http://schemas.openxmlformats.org/officeDocument/2006/relationships">
-  <p:cSld>
-    <p:bg>
-      <p:bgPr>
-        <a:solidFill>
-          <a:srgbClr val="FFFFFF"/>
-        </a:solidFill>
-        <a:effectLst/>
-      </p:bgPr>
-    </p:bg>
-    <p:spTree>
-      <p:nvGrpSpPr>
-        <p:cNvPr id="1" name=""/>
-        <p:cNvGrpSpPr/>
-        <p:nvPr/>
-      </p:nvGrpSpPr>
-      <p:grpSpPr/>
-      <p:sp>
-        <p:nvSpPr>
-          <p:cNvPr id="2" name="Rectangle 1"/>
-          <p:cNvSpPr/>
-          <p:nvPr/>
-        </p:nvSpPr>
-        <p:spPr>
-          <a:xfrm>
-            <a:off x="0" y="0"/>
-            <a:ext cx="12191695" cy="960120"/>
-          </a:xfrm>
-          <a:prstGeom prst="rect">
-            <a:avLst/>
-          </a:prstGeom>
-          <a:solidFill>
-            <a:srgbClr val="095292"/>
-          </a:solidFill>
-          <a:ln>
-            <a:noFill/>
-          </a:ln>
-        </p:spPr>
-        <p:style>
-          <a:lnRef idx="1">
-            <a:schemeClr val="accent1"/>
-          </a:lnRef>
-          <a:fillRef idx="3">
-            <a:schemeClr val="accent1"/>
-          </a:fillRef>
-          <a:effectRef idx="2">
-            <a:schemeClr val="accent1"/>
-          </a:effectRef>
-          <a:fontRef idx="minor">
-            <a:schemeClr val="lt1"/>
-          </a:fontRef>
-        </p:style>
-        <p:txBody>
-          <a:bodyPr rtlCol="0" anchor="ctr"/>
-          <a:lstStyle/>
-          <a:p>
-            <a:pPr algn="ctr"/>
-          </a:p>
-        </p:txBody>
-      </p:sp>
-      <p:sp>
-        <p:nvSpPr>
-          <p:cNvPr id="3" name="Rectangle 2"/>
-          <p:cNvSpPr/>
-          <p:nvPr/>
-        </p:nvSpPr>
-        <p:spPr>
-          <a:xfrm>
-            <a:off x="0" y="960120"/>
-            <a:ext cx="12191695" cy="41148"/>
-          </a:xfrm>
-          <a:prstGeom prst="rect">
-            <a:avLst/>
-          </a:prstGeom>
-          <a:solidFill>
-            <a:srgbClr val="FFD000"/>
-          </a:solidFill>
-          <a:ln>
-            <a:noFill/>
-          </a:ln>
-        </p:spPr>
-        <p:style>
-          <a:lnRef idx="1">
-            <a:schemeClr val="accent1"/>
-          </a:lnRef>
-          <a:fillRef idx="3">
-            <a:schemeClr val="accent1"/>
-          </a:fillRef>
-          <a:effectRef idx="2">
-            <a:schemeClr val="accent1"/>
-          </a:effectRef>
-          <a:fontRef idx="minor">
-            <a:schemeClr val="lt1"/>
-          </a:fontRef>
-        </p:style>
-        <p:txBody>
-          <a:bodyPr rtlCol="0" anchor="ctr"/>
-          <a:lstStyle/>
-          <a:p>
-            <a:pPr algn="ctr"/>
-          </a:p>
-        </p:txBody>
-      </p:sp>
-      <p:sp>
-        <p:nvSpPr>
-          <p:cNvPr id="4" name="TextBox 3"/>
-          <p:cNvSpPr txBox="1"/>
-          <p:nvPr/>
-        </p:nvSpPr>
-        <p:spPr>
-          <a:xfrm>
-            <a:off x="457200" y="164592"/>
-            <a:ext cx="11277295" cy="502920"/>
-          </a:xfrm>
-          <a:prstGeom prst="rect">
-            <a:avLst/>
-          </a:prstGeom>
-          <a:noFill/>
-        </p:spPr>
-        <p:txBody>
-          <a:bodyPr wrap="square">
-            <a:spAutoFit/>
-          </a:bodyPr>
-          <a:lstStyle/>
-          <a:p>
-            <a:r>
-              <a:rPr sz="2600" b="1" i="0">
-                <a:solidFill>
-                  <a:srgbClr val="FFFFFF"/>
-                </a:solidFill>
-                <a:latin typeface="Calibri"/>
-              </a:rPr>
-              <a:t>Demo del dia</a:t>
-            </a:r>
-          </a:p>
-        </p:txBody>
-      </p:sp>
-      <p:sp>
-        <p:nvSpPr>
-          <p:cNvPr id="5" name="TextBox 4"/>
-          <p:cNvSpPr txBox="1"/>
-          <p:nvPr/>
-        </p:nvSpPr>
-        <p:spPr>
-          <a:xfrm>
-            <a:off x="457200" y="1170432"/>
-            <a:ext cx="11277295" cy="5230368"/>
-          </a:xfrm>
-          <a:prstGeom prst="rect">
-            <a:avLst/>
-          </a:prstGeom>
-          <a:noFill/>
-        </p:spPr>
-        <p:txBody>
-          <a:bodyPr wrap="square">
-            <a:spAutoFit/>
-          </a:bodyPr>
-          <a:lstStyle/>
-          <a:p>
-            <a:pPr>
-              <a:spcAft>
-                <a:spcPts val="800"/>
-              </a:spcAft>
-            </a:pPr>
-            <a:r>
-              <a:rPr sz="2000" b="0" i="0">
-                <a:solidFill>
-                  <a:srgbClr val="333333"/>
-                </a:solidFill>
-                <a:latin typeface="Calibri"/>
-              </a:rPr>
-              <a:t>–   </a:t>
-            </a:r>
-            <a:r>
-              <a:rPr sz="2000" b="1" i="0">
-                <a:solidFill>
-                  <a:srgbClr val="333333"/>
-                </a:solidFill>
-                <a:latin typeface="Calibri"/>
-              </a:rPr>
-              <a:t>Herramienta:</a:t>
-            </a:r>
-            <a:r>
-              <a:rPr sz="2000" b="0" i="0">
-                <a:solidFill>
-                  <a:srgbClr val="333333"/>
-                </a:solidFill>
-                <a:latin typeface="Calibri"/>
-              </a:rPr>
-              <a:t> Google Docs · draw.io</a:t>
-            </a:r>
-          </a:p>
-          <a:p>
-            <a:pPr>
-              <a:spcAft>
-                <a:spcPts val="800"/>
-              </a:spcAft>
-            </a:pPr>
-            <a:r>
-              <a:rPr sz="2000" b="0" i="0">
-                <a:solidFill>
-                  <a:srgbClr val="333333"/>
-                </a:solidFill>
-                <a:latin typeface="Calibri"/>
-              </a:rPr>
-              <a:t>–   </a:t>
-            </a:r>
-            <a:r>
-              <a:rPr sz="2000" b="1" i="0">
-                <a:solidFill>
-                  <a:srgbClr val="333333"/>
-                </a:solidFill>
-                <a:latin typeface="Calibri"/>
-              </a:rPr>
-              <a:t>Demo:</a:t>
-            </a:r>
-            <a:r>
-              <a:rPr sz="2000" b="0" i="0">
-                <a:solidFill>
-                  <a:srgbClr val="333333"/>
-                </a:solidFill>
-                <a:latin typeface="Calibri"/>
-              </a:rPr>
-              <a:t> Convertir en vivo la frase cruda «necesito buscar rapido el expediente de un animal» en un requisito funcional y uno no funcional bien escritos</a:t>
-            </a:r>
-          </a:p>
-          <a:p>
-            <a:pPr>
-              <a:spcAft>
-                <a:spcPts val="800"/>
-              </a:spcAft>
-            </a:pPr>
-            <a:r>
-              <a:rPr sz="2000" b="0" i="0">
-                <a:solidFill>
-                  <a:srgbClr val="333333"/>
-                </a:solidFill>
-                <a:latin typeface="Calibri"/>
-              </a:rPr>
-              <a:t>–   Mismo dominio: la clinica veterinaria — no otro ejemplo. Aqui se diseña, no se programa.</a:t>
-            </a:r>
-          </a:p>
-        </p:txBody>
-      </p:sp>
-      <p:sp>
-        <p:nvSpPr>
-          <p:cNvPr id="6" name="TextBox 5"/>
-          <p:cNvSpPr txBox="1"/>
-          <p:nvPr/>
-        </p:nvSpPr>
-        <p:spPr>
-          <a:xfrm>
-            <a:off x="11185855" y="6473952"/>
-            <a:ext cx="640080" cy="274320"/>
-          </a:xfrm>
-          <a:prstGeom prst="rect">
-            <a:avLst/>
-          </a:prstGeom>
-          <a:noFill/>
-        </p:spPr>
-        <p:txBody>
-          <a:bodyPr wrap="square">
-            <a:spAutoFit/>
-          </a:bodyPr>
-          <a:lstStyle/>
-          <a:p>
-            <a:pPr algn="r"/>
-            <a:r>
-              <a:rPr sz="1100" b="0" i="0">
-                <a:solidFill>
-                  <a:srgbClr val="666666"/>
-                </a:solidFill>
-                <a:latin typeface="Calibri"/>
-              </a:rPr>
-              <a:t>28</a:t>
-            </a:r>
-          </a:p>
-        </p:txBody>
-      </p:sp>
-    </p:spTree>
-  </p:cSld>
-  <p:clrMapOvr>
-    <a:masterClrMapping/>
-  </p:clrMapOvr>
-</p:sld>
-</file>
-
-<file path=ppt/slides/slide29.xml><?xml version="1.0" encoding="utf-8"?>
-<p:sld xmlns:a="http://schemas.openxmlformats.org/drawingml/2006/main" xmlns:p="http://schemas.openxmlformats.org/presentationml/2006/main" xmlns:r="http://schemas.openxmlformats.org/officeDocument/2006/relationships">
-  <p:cSld>
-    <p:bg>
-      <p:bgPr>
-        <a:solidFill>
-          <a:srgbClr val="FFFFFF"/>
-        </a:solidFill>
-        <a:effectLst/>
-      </p:bgPr>
-    </p:bg>
-    <p:spTree>
-      <p:nvGrpSpPr>
-        <p:cNvPr id="1" name=""/>
-        <p:cNvGrpSpPr/>
-        <p:nvPr/>
-      </p:nvGrpSpPr>
-      <p:grpSpPr/>
-      <p:sp>
-        <p:nvSpPr>
-          <p:cNvPr id="2" name="Rectangle 1"/>
-          <p:cNvSpPr/>
-          <p:nvPr/>
-        </p:nvSpPr>
-        <p:spPr>
-          <a:xfrm>
-            <a:off x="0" y="0"/>
             <a:ext cx="12191695" cy="164592"/>
           </a:xfrm>
           <a:prstGeom prst="rect">
@@ -12514,7 +11878,7 @@
                 </a:solidFill>
                 <a:latin typeface="Calibri"/>
               </a:rPr>
-              <a:t>Conviene separar dos palabras que se usan como sinonimos y no lo son</a:t>
+              <a:t>Proyecto y producto son dos palabras que se usan como sinonimos y no lo...</a:t>
             </a:r>
           </a:p>
         </p:txBody>
@@ -12553,7 +11917,7 @@
                 </a:solidFill>
                 <a:latin typeface="Calibri"/>
               </a:rPr>
-              <a:t>–   El producto es el software y su documentacion: lo que queda cuando todos se van.</a:t>
+              <a:t>–   Proyecto y producto son dos palabras que se usan como sinonimos y no lo son.</a:t>
             </a:r>
           </a:p>
           <a:p>
@@ -12569,7 +11933,7 @@
                 </a:solidFill>
                 <a:latin typeface="Calibri"/>
               </a:rPr>
-              <a:t>–   El proyecto es el esfuerzo acotado en tiempo y recursos para construirlo.</a:t>
+              <a:t>–   El producto es el software y su documentacion: lo que queda cuando todos se van.</a:t>
             </a:r>
           </a:p>
           <a:p>
@@ -12585,7 +11949,23 @@
                 </a:solidFill>
                 <a:latin typeface="Calibri"/>
               </a:rPr>
-              <a:t>–   En el sistema de la clinica, el proyecto es el semestre; el producto es el sistema que la clinica usaria todos los dias.</a:t>
+              <a:t>–   El proyecto es el esfuerzo acotado en tiempo y recursos para construirlo.</a:t>
+            </a:r>
+          </a:p>
+          <a:p>
+            <a:pPr>
+              <a:spcAft>
+                <a:spcPts val="800"/>
+              </a:spcAft>
+            </a:pPr>
+            <a:r>
+              <a:rPr sz="2000" b="0" i="0">
+                <a:solidFill>
+                  <a:srgbClr val="333333"/>
+                </a:solidFill>
+                <a:latin typeface="Calibri"/>
+              </a:rPr>
+              <a:t>–   En la clinica, el proyecto es el semestre; el producto es el sistema que la clinica usaria todos los dias.</a:t>
             </a:r>
           </a:p>
         </p:txBody>
@@ -13586,7 +12966,7 @@
                 </a:solidFill>
                 <a:latin typeface="Calibri"/>
               </a:rPr>
-              <a:t>Queda una pregunta que el estudiante hace el primer dia y conviene...</a:t>
+              <a:t>Para que sirve documentar si al final lo que se usa es el codigo:...</a:t>
             </a:r>
           </a:p>
         </p:txBody>
@@ -13625,7 +13005,7 @@
                 </a:solidFill>
                 <a:latin typeface="Calibri"/>
               </a:rPr>
-              <a:t>–   Queda una pregunta que el estudiante hace el primer dia y conviene responder sin rodeos: para que sirve documentar si al final lo que se usa es el codigo.</a:t>
+              <a:t>–   Para que sirve documentar si al final lo que se usa es el codigo: depende de quien lee.</a:t>
             </a:r>
           </a:p>
           <a:p>
@@ -13641,23 +13021,7 @@
                 </a:solidFill>
                 <a:latin typeface="Calibri"/>
               </a:rPr>
-              <a:t>–   El codigo lo lee la maquina y quien ya conoce el sistema; los planos los lee quien todavia no lo conoce: el companero que entra a mitad de semestre</a:t>
-            </a:r>
-          </a:p>
-          <a:p>
-            <a:pPr>
-              <a:spcAft>
-                <a:spcPts val="800"/>
-              </a:spcAft>
-            </a:pPr>
-            <a:r>
-              <a:rPr sz="2000" b="0" i="0">
-                <a:solidFill>
-                  <a:srgbClr val="333333"/>
-                </a:solidFill>
-                <a:latin typeface="Calibri"/>
-              </a:rPr>
-              <a:t>–   El docente que califica, el equipo de Programacion II que va a construir el sistema a partir de estos documentos</a:t>
+              <a:t>–   El codigo lo lee la maquina y quien ya conoce el sistema; los planos los lee quien todavia no lo conoce: el companero que entra a mitad de semestre, quien revisa el diseño, el equipo de Programacion II que va a construir el sistema a partir de estos documentos</a:t>
             </a:r>
           </a:p>
           <a:p>

--- a/Seminario de Sistemas/Clases/Clase 1 - Conceptos iniciales/Presentacion.pptx
+++ b/Seminario de Sistemas/Clases/Clase 1 - Conceptos iniciales/Presentacion.pptx
@@ -1121,94 +1121,6 @@
           <a:p>
             <a:r>
               <a:t>Esta es tambien la razon por la que en la Clase 11 se revisa el avance mirando la coherencia entre artefactos y no la cantidad de paginas.</a:t>
-            </a:r>
-          </a:p>
-        </p:txBody>
-      </p:sp>
-      <p:sp>
-        <p:nvSpPr>
-          <p:cNvPr id="4" name="Slide Number Placeholder 3"/>
-          <p:cNvSpPr>
-            <a:spLocks noGrp="1"/>
-          </p:cNvSpPr>
-          <p:nvPr>
-            <p:ph type="sldNum" idx="5" sz="quarter"/>
-          </p:nvPr>
-        </p:nvSpPr>
-        <p:spPr/>
-      </p:sp>
-    </p:spTree>
-  </p:cSld>
-  <p:clrMapOvr>
-    <a:masterClrMapping/>
-  </p:clrMapOvr>
-</p:notes>
-</file>
-
-<file path=ppt/notesSlides/notesSlide14.xml><?xml version="1.0" encoding="utf-8"?>
-<p:notes xmlns:a="http://schemas.openxmlformats.org/drawingml/2006/main" xmlns:p="http://schemas.openxmlformats.org/presentationml/2006/main" xmlns:r="http://schemas.openxmlformats.org/officeDocument/2006/relationships">
-  <p:cSld>
-    <p:spTree>
-      <p:nvGrpSpPr>
-        <p:cNvPr id="1" name=""/>
-        <p:cNvGrpSpPr/>
-        <p:nvPr/>
-      </p:nvGrpSpPr>
-      <p:grpSpPr>
-        <a:xfrm>
-          <a:off x="0" y="0"/>
-          <a:ext cx="0" cy="0"/>
-          <a:chOff x="0" y="0"/>
-          <a:chExt cx="0" cy="0"/>
-        </a:xfrm>
-      </p:grpSpPr>
-      <p:sp>
-        <p:nvSpPr>
-          <p:cNvPr id="2" name="Slide Image Placeholder 1"/>
-          <p:cNvSpPr>
-            <a:spLocks noGrp="1"/>
-          </p:cNvSpPr>
-          <p:nvPr>
-            <p:ph type="sldImg" idx="2"/>
-          </p:nvPr>
-        </p:nvSpPr>
-        <p:spPr/>
-      </p:sp>
-      <p:sp>
-        <p:nvSpPr>
-          <p:cNvPr id="3" name="Notes Placeholder 2"/>
-          <p:cNvSpPr>
-            <a:spLocks noGrp="1"/>
-          </p:cNvSpPr>
-          <p:nvPr>
-            <p:ph type="body" idx="3" sz="quarter"/>
-          </p:nvPr>
-        </p:nvSpPr>
-        <p:spPr/>
-        <p:txBody>
-          <a:bodyPr/>
-          <a:lstStyle/>
-          <a:p>
-            <a:r>
-              <a:t>TEXTO COMPLETO DE LA LÁMINA (se proyecta resumido):</a:t>
-            </a:r>
-          </a:p>
-          <a:p/>
-          <a:p>
-            <a:r>
-              <a:t>Herramienta: Google Docs · draw.io</a:t>
-            </a:r>
-          </a:p>
-          <a:p/>
-          <a:p>
-            <a:r>
-              <a:t>Demo: Convertir en vivo la frase cruda «necesito buscar rapido el expediente de un animal» en un requisito funcional y uno no funcional bien escritos</a:t>
-            </a:r>
-          </a:p>
-          <a:p/>
-          <a:p>
-            <a:r>
-              <a:t>Mismo dominio: la clinica veterinaria — no otro ejemplo. Aqui se diseña, no se programa.</a:t>
             </a:r>
           </a:p>
         </p:txBody>
@@ -7877,118 +7789,14 @@
       </p:sp>
       <p:sp>
         <p:nvSpPr>
-          <p:cNvPr id="5" name="Rounded Rectangle 4"/>
-          <p:cNvSpPr/>
-          <p:nvPr/>
-        </p:nvSpPr>
-        <p:spPr>
-          <a:xfrm>
-            <a:off x="5797149" y="1573813"/>
-            <a:ext cx="6010497" cy="4057845"/>
-          </a:xfrm>
-          <a:prstGeom prst="roundRect">
-            <a:avLst>
-              <a:gd name="adj" fmla="val 4000"/>
-            </a:avLst>
-          </a:prstGeom>
-          <a:solidFill>
-            <a:srgbClr val="E8EEF4"/>
-          </a:solidFill>
-          <a:ln>
-            <a:noFill/>
-          </a:ln>
-        </p:spPr>
-        <p:style>
-          <a:lnRef idx="1">
-            <a:schemeClr val="accent1"/>
-          </a:lnRef>
-          <a:fillRef idx="3">
-            <a:schemeClr val="accent1"/>
-          </a:fillRef>
-          <a:effectRef idx="2">
-            <a:schemeClr val="accent1"/>
-          </a:effectRef>
-          <a:fontRef idx="minor">
-            <a:schemeClr val="lt1"/>
-          </a:fontRef>
-        </p:style>
-        <p:txBody>
-          <a:bodyPr rtlCol="0" anchor="ctr"/>
-          <a:lstStyle/>
-          <a:p>
-            <a:pPr algn="ctr"/>
-          </a:p>
-        </p:txBody>
-      </p:sp>
-      <p:pic>
-        <p:nvPicPr>
-          <p:cNvPr id="6" name="Picture 5" descr="architect-reading-blueprints.jpg"/>
-          <p:cNvPicPr>
-            <a:picLocks noChangeAspect="1"/>
-          </p:cNvPicPr>
-          <p:nvPr/>
-        </p:nvPicPr>
-        <p:blipFill>
-          <a:blip r:embed="rId2"/>
-          <a:stretch>
-            <a:fillRect/>
-          </a:stretch>
-        </p:blipFill>
-        <p:spPr>
-          <a:xfrm>
-            <a:off x="5870301" y="1646965"/>
-            <a:ext cx="5864193" cy="3911541"/>
-          </a:xfrm>
-          <a:prstGeom prst="rect">
-            <a:avLst/>
-          </a:prstGeom>
-        </p:spPr>
-      </p:pic>
-      <p:sp>
-        <p:nvSpPr>
-          <p:cNvPr id="7" name="TextBox 6"/>
+          <p:cNvPr id="5" name="TextBox 4"/>
           <p:cNvSpPr txBox="1"/>
           <p:nvPr/>
         </p:nvSpPr>
         <p:spPr>
           <a:xfrm>
-            <a:off x="5870301" y="5961888"/>
-            <a:ext cx="5864193" cy="320040"/>
-          </a:xfrm>
-          <a:prstGeom prst="rect">
-            <a:avLst/>
-          </a:prstGeom>
-          <a:noFill/>
-        </p:spPr>
-        <p:txBody>
-          <a:bodyPr wrap="square">
-            <a:spAutoFit/>
-          </a:bodyPr>
-          <a:lstStyle/>
-          <a:p>
-            <a:pPr algn="ctr"/>
-            <a:r>
-              <a:rPr sz="1100" b="0" i="1">
-                <a:solidFill>
-                  <a:srgbClr val="666666"/>
-                </a:solidFill>
-                <a:latin typeface="Calibri"/>
-              </a:rPr>
-              <a:t>Foto: Thirdman · Pexels</a:t>
-            </a:r>
-          </a:p>
-        </p:txBody>
-      </p:sp>
-      <p:sp>
-        <p:nvSpPr>
-          <p:cNvPr id="8" name="TextBox 7"/>
-          <p:cNvSpPr txBox="1"/>
-          <p:nvPr/>
-        </p:nvSpPr>
-        <p:spPr>
-          <a:xfrm>
-            <a:off x="457200" y="1353312"/>
-            <a:ext cx="5093061" cy="5047488"/>
+            <a:off x="457200" y="1170432"/>
+            <a:ext cx="11277295" cy="5230368"/>
           </a:xfrm>
           <a:prstGeom prst="rect">
             <a:avLst/>
@@ -8068,7 +7876,7 @@
       </p:sp>
       <p:sp>
         <p:nvSpPr>
-          <p:cNvPr id="9" name="TextBox 8"/>
+          <p:cNvPr id="6" name="TextBox 5"/>
           <p:cNvSpPr txBox="1"/>
           <p:nvPr/>
         </p:nvSpPr>
@@ -9994,118 +9802,14 @@
       </p:sp>
       <p:sp>
         <p:nvSpPr>
-          <p:cNvPr id="5" name="Rounded Rectangle 4"/>
-          <p:cNvSpPr/>
-          <p:nvPr/>
-        </p:nvSpPr>
-        <p:spPr>
-          <a:xfrm>
-            <a:off x="5797149" y="1573813"/>
-            <a:ext cx="6010497" cy="4057845"/>
-          </a:xfrm>
-          <a:prstGeom prst="roundRect">
-            <a:avLst>
-              <a:gd name="adj" fmla="val 4000"/>
-            </a:avLst>
-          </a:prstGeom>
-          <a:solidFill>
-            <a:srgbClr val="E8EEF4"/>
-          </a:solidFill>
-          <a:ln>
-            <a:noFill/>
-          </a:ln>
-        </p:spPr>
-        <p:style>
-          <a:lnRef idx="1">
-            <a:schemeClr val="accent1"/>
-          </a:lnRef>
-          <a:fillRef idx="3">
-            <a:schemeClr val="accent1"/>
-          </a:fillRef>
-          <a:effectRef idx="2">
-            <a:schemeClr val="accent1"/>
-          </a:effectRef>
-          <a:fontRef idx="minor">
-            <a:schemeClr val="lt1"/>
-          </a:fontRef>
-        </p:style>
-        <p:txBody>
-          <a:bodyPr rtlCol="0" anchor="ctr"/>
-          <a:lstStyle/>
-          <a:p>
-            <a:pPr algn="ctr"/>
-          </a:p>
-        </p:txBody>
-      </p:sp>
-      <p:pic>
-        <p:nvPicPr>
-          <p:cNvPr id="6" name="Picture 5" descr="folded-paper-map.jpg"/>
-          <p:cNvPicPr>
-            <a:picLocks noChangeAspect="1"/>
-          </p:cNvPicPr>
-          <p:nvPr/>
-        </p:nvPicPr>
-        <p:blipFill>
-          <a:blip r:embed="rId2"/>
-          <a:stretch>
-            <a:fillRect/>
-          </a:stretch>
-        </p:blipFill>
-        <p:spPr>
-          <a:xfrm>
-            <a:off x="5870301" y="1646965"/>
-            <a:ext cx="5864193" cy="3911541"/>
-          </a:xfrm>
-          <a:prstGeom prst="rect">
-            <a:avLst/>
-          </a:prstGeom>
-        </p:spPr>
-      </p:pic>
-      <p:sp>
-        <p:nvSpPr>
-          <p:cNvPr id="7" name="TextBox 6"/>
+          <p:cNvPr id="5" name="TextBox 4"/>
           <p:cNvSpPr txBox="1"/>
           <p:nvPr/>
         </p:nvSpPr>
         <p:spPr>
           <a:xfrm>
-            <a:off x="5870301" y="5961888"/>
-            <a:ext cx="5864193" cy="320040"/>
-          </a:xfrm>
-          <a:prstGeom prst="rect">
-            <a:avLst/>
-          </a:prstGeom>
-          <a:noFill/>
-        </p:spPr>
-        <p:txBody>
-          <a:bodyPr wrap="square">
-            <a:spAutoFit/>
-          </a:bodyPr>
-          <a:lstStyle/>
-          <a:p>
-            <a:pPr algn="ctr"/>
-            <a:r>
-              <a:rPr sz="1100" b="0" i="1">
-                <a:solidFill>
-                  <a:srgbClr val="666666"/>
-                </a:solidFill>
-                <a:latin typeface="Calibri"/>
-              </a:rPr>
-              <a:t>Foto: Marina Leonova · Pexels</a:t>
-            </a:r>
-          </a:p>
-        </p:txBody>
-      </p:sp>
-      <p:sp>
-        <p:nvSpPr>
-          <p:cNvPr id="8" name="TextBox 7"/>
-          <p:cNvSpPr txBox="1"/>
-          <p:nvPr/>
-        </p:nvSpPr>
-        <p:spPr>
-          <a:xfrm>
-            <a:off x="457200" y="1353312"/>
-            <a:ext cx="5093061" cy="5047488"/>
+            <a:off x="457200" y="1170432"/>
+            <a:ext cx="11277295" cy="5230368"/>
           </a:xfrm>
           <a:prstGeom prst="rect">
             <a:avLst/>
@@ -10185,7 +9889,7 @@
       </p:sp>
       <p:sp>
         <p:nvSpPr>
-          <p:cNvPr id="9" name="TextBox 8"/>
+          <p:cNvPr id="6" name="TextBox 5"/>
           <p:cNvSpPr txBox="1"/>
           <p:nvPr/>
         </p:nvSpPr>
@@ -12034,118 +11738,14 @@
       </p:sp>
       <p:sp>
         <p:nvSpPr>
-          <p:cNvPr id="5" name="Rounded Rectangle 4"/>
-          <p:cNvSpPr/>
-          <p:nvPr/>
-        </p:nvSpPr>
-        <p:spPr>
-          <a:xfrm>
-            <a:off x="5797149" y="1573813"/>
-            <a:ext cx="6010497" cy="4057845"/>
-          </a:xfrm>
-          <a:prstGeom prst="roundRect">
-            <a:avLst>
-              <a:gd name="adj" fmla="val 4000"/>
-            </a:avLst>
-          </a:prstGeom>
-          <a:solidFill>
-            <a:srgbClr val="E8EEF4"/>
-          </a:solidFill>
-          <a:ln>
-            <a:noFill/>
-          </a:ln>
-        </p:spPr>
-        <p:style>
-          <a:lnRef idx="1">
-            <a:schemeClr val="accent1"/>
-          </a:lnRef>
-          <a:fillRef idx="3">
-            <a:schemeClr val="accent1"/>
-          </a:fillRef>
-          <a:effectRef idx="2">
-            <a:schemeClr val="accent1"/>
-          </a:effectRef>
-          <a:fontRef idx="minor">
-            <a:schemeClr val="lt1"/>
-          </a:fontRef>
-        </p:style>
-        <p:txBody>
-          <a:bodyPr rtlCol="0" anchor="ctr"/>
-          <a:lstStyle/>
-          <a:p>
-            <a:pPr algn="ctr"/>
-          </a:p>
-        </p:txBody>
-      </p:sp>
-      <p:pic>
-        <p:nvPicPr>
-          <p:cNvPr id="6" name="Picture 5" descr="notebook-planning-desk-coffee.jpg"/>
-          <p:cNvPicPr>
-            <a:picLocks noChangeAspect="1"/>
-          </p:cNvPicPr>
-          <p:nvPr/>
-        </p:nvPicPr>
-        <p:blipFill>
-          <a:blip r:embed="rId2"/>
-          <a:stretch>
-            <a:fillRect/>
-          </a:stretch>
-        </p:blipFill>
-        <p:spPr>
-          <a:xfrm>
-            <a:off x="5870301" y="1646965"/>
-            <a:ext cx="5864193" cy="3911541"/>
-          </a:xfrm>
-          <a:prstGeom prst="rect">
-            <a:avLst/>
-          </a:prstGeom>
-        </p:spPr>
-      </p:pic>
-      <p:sp>
-        <p:nvSpPr>
-          <p:cNvPr id="7" name="TextBox 6"/>
+          <p:cNvPr id="5" name="TextBox 4"/>
           <p:cNvSpPr txBox="1"/>
           <p:nvPr/>
         </p:nvSpPr>
         <p:spPr>
           <a:xfrm>
-            <a:off x="5870301" y="5961888"/>
-            <a:ext cx="5864193" cy="320040"/>
-          </a:xfrm>
-          <a:prstGeom prst="rect">
-            <a:avLst/>
-          </a:prstGeom>
-          <a:noFill/>
-        </p:spPr>
-        <p:txBody>
-          <a:bodyPr wrap="square">
-            <a:spAutoFit/>
-          </a:bodyPr>
-          <a:lstStyle/>
-          <a:p>
-            <a:pPr algn="ctr"/>
-            <a:r>
-              <a:rPr sz="1100" b="0" i="1">
-                <a:solidFill>
-                  <a:srgbClr val="666666"/>
-                </a:solidFill>
-                <a:latin typeface="Calibri"/>
-              </a:rPr>
-              <a:t>Foto: Cup of  Couple · Pexels</a:t>
-            </a:r>
-          </a:p>
-        </p:txBody>
-      </p:sp>
-      <p:sp>
-        <p:nvSpPr>
-          <p:cNvPr id="8" name="TextBox 7"/>
-          <p:cNvSpPr txBox="1"/>
-          <p:nvPr/>
-        </p:nvSpPr>
-        <p:spPr>
-          <a:xfrm>
-            <a:off x="457200" y="1353312"/>
-            <a:ext cx="5093061" cy="5047488"/>
+            <a:off x="457200" y="1170432"/>
+            <a:ext cx="11277295" cy="5230368"/>
           </a:xfrm>
           <a:prstGeom prst="rect">
             <a:avLst/>
@@ -12270,7 +11870,7 @@
       </p:sp>
       <p:sp>
         <p:nvSpPr>
-          <p:cNvPr id="9" name="TextBox 8"/>
+          <p:cNvPr id="6" name="TextBox 5"/>
           <p:cNvSpPr txBox="1"/>
           <p:nvPr/>
         </p:nvSpPr>
@@ -12451,118 +12051,14 @@
       </p:sp>
       <p:sp>
         <p:nvSpPr>
-          <p:cNvPr id="5" name="Rounded Rectangle 4"/>
-          <p:cNvSpPr/>
-          <p:nvPr/>
-        </p:nvSpPr>
-        <p:spPr>
-          <a:xfrm>
-            <a:off x="5797149" y="1573813"/>
-            <a:ext cx="6010497" cy="4057845"/>
-          </a:xfrm>
-          <a:prstGeom prst="roundRect">
-            <a:avLst>
-              <a:gd name="adj" fmla="val 4000"/>
-            </a:avLst>
-          </a:prstGeom>
-          <a:solidFill>
-            <a:srgbClr val="E8EEF4"/>
-          </a:solidFill>
-          <a:ln>
-            <a:noFill/>
-          </a:ln>
-        </p:spPr>
-        <p:style>
-          <a:lnRef idx="1">
-            <a:schemeClr val="accent1"/>
-          </a:lnRef>
-          <a:fillRef idx="3">
-            <a:schemeClr val="accent1"/>
-          </a:fillRef>
-          <a:effectRef idx="2">
-            <a:schemeClr val="accent1"/>
-          </a:effectRef>
-          <a:fontRef idx="minor">
-            <a:schemeClr val="lt1"/>
-          </a:fontRef>
-        </p:style>
-        <p:txBody>
-          <a:bodyPr rtlCol="0" anchor="ctr"/>
-          <a:lstStyle/>
-          <a:p>
-            <a:pPr algn="ctr"/>
-          </a:p>
-        </p:txBody>
-      </p:sp>
-      <p:pic>
-        <p:nvPicPr>
-          <p:cNvPr id="6" name="Picture 5" descr="laptop-code-live-demo.jpg"/>
-          <p:cNvPicPr>
-            <a:picLocks noChangeAspect="1"/>
-          </p:cNvPicPr>
-          <p:nvPr/>
-        </p:nvPicPr>
-        <p:blipFill>
-          <a:blip r:embed="rId2"/>
-          <a:stretch>
-            <a:fillRect/>
-          </a:stretch>
-        </p:blipFill>
-        <p:spPr>
-          <a:xfrm>
-            <a:off x="5870301" y="1646965"/>
-            <a:ext cx="5864193" cy="3911541"/>
-          </a:xfrm>
-          <a:prstGeom prst="rect">
-            <a:avLst/>
-          </a:prstGeom>
-        </p:spPr>
-      </p:pic>
-      <p:sp>
-        <p:nvSpPr>
-          <p:cNvPr id="7" name="TextBox 6"/>
+          <p:cNvPr id="5" name="TextBox 4"/>
           <p:cNvSpPr txBox="1"/>
           <p:nvPr/>
         </p:nvSpPr>
         <p:spPr>
           <a:xfrm>
-            <a:off x="5870301" y="5961888"/>
-            <a:ext cx="5864193" cy="320040"/>
-          </a:xfrm>
-          <a:prstGeom prst="rect">
-            <a:avLst/>
-          </a:prstGeom>
-          <a:noFill/>
-        </p:spPr>
-        <p:txBody>
-          <a:bodyPr wrap="square">
-            <a:spAutoFit/>
-          </a:bodyPr>
-          <a:lstStyle/>
-          <a:p>
-            <a:pPr algn="ctr"/>
-            <a:r>
-              <a:rPr sz="1100" b="0" i="1">
-                <a:solidFill>
-                  <a:srgbClr val="666666"/>
-                </a:solidFill>
-                <a:latin typeface="Calibri"/>
-              </a:rPr>
-              <a:t>Foto: olia danilevich · Pexels</a:t>
-            </a:r>
-          </a:p>
-        </p:txBody>
-      </p:sp>
-      <p:sp>
-        <p:nvSpPr>
-          <p:cNvPr id="8" name="TextBox 7"/>
-          <p:cNvSpPr txBox="1"/>
-          <p:nvPr/>
-        </p:nvSpPr>
-        <p:spPr>
-          <a:xfrm>
-            <a:off x="457200" y="1353312"/>
-            <a:ext cx="5093061" cy="5047488"/>
+            <a:off x="457200" y="1170432"/>
+            <a:ext cx="11277295" cy="5230368"/>
           </a:xfrm>
           <a:prstGeom prst="rect">
             <a:avLst/>
@@ -12632,6 +12128,15 @@
               </a:rPr>
               <a:t>Demo:</a:t>
             </a:r>
+            <a:r>
+              <a:rPr sz="2000" b="0" i="0">
+                <a:solidFill>
+                  <a:srgbClr val="333333"/>
+                </a:solidFill>
+                <a:latin typeface="Calibri"/>
+              </a:rPr>
+              <a:t> Convertir en vivo la frase cruda «necesito buscar rapido el expediente de un animal» en un requisito funcional y uno no funcional bien escritos</a:t>
+            </a:r>
           </a:p>
           <a:p>
             <a:pPr>
@@ -12653,7 +12158,7 @@
       </p:sp>
       <p:sp>
         <p:nvSpPr>
-          <p:cNvPr id="9" name="TextBox 8"/>
+          <p:cNvPr id="6" name="TextBox 5"/>
           <p:cNvSpPr txBox="1"/>
           <p:nvPr/>
         </p:nvSpPr>

--- a/Seminario de Sistemas/Clases/Clase 1 - Conceptos iniciales/Presentacion.pptx
+++ b/Seminario de Sistemas/Clases/Clase 1 - Conceptos iniciales/Presentacion.pptx
@@ -1121,6 +1121,94 @@
           <a:p>
             <a:r>
               <a:t>Esta es tambien la razon por la que en la Clase 11 se revisa el avance mirando la coherencia entre artefactos y no la cantidad de paginas.</a:t>
+            </a:r>
+          </a:p>
+        </p:txBody>
+      </p:sp>
+      <p:sp>
+        <p:nvSpPr>
+          <p:cNvPr id="4" name="Slide Number Placeholder 3"/>
+          <p:cNvSpPr>
+            <a:spLocks noGrp="1"/>
+          </p:cNvSpPr>
+          <p:nvPr>
+            <p:ph type="sldNum" idx="5" sz="quarter"/>
+          </p:nvPr>
+        </p:nvSpPr>
+        <p:spPr/>
+      </p:sp>
+    </p:spTree>
+  </p:cSld>
+  <p:clrMapOvr>
+    <a:masterClrMapping/>
+  </p:clrMapOvr>
+</p:notes>
+</file>
+
+<file path=ppt/notesSlides/notesSlide14.xml><?xml version="1.0" encoding="utf-8"?>
+<p:notes xmlns:a="http://schemas.openxmlformats.org/drawingml/2006/main" xmlns:p="http://schemas.openxmlformats.org/presentationml/2006/main" xmlns:r="http://schemas.openxmlformats.org/officeDocument/2006/relationships">
+  <p:cSld>
+    <p:spTree>
+      <p:nvGrpSpPr>
+        <p:cNvPr id="1" name=""/>
+        <p:cNvGrpSpPr/>
+        <p:nvPr/>
+      </p:nvGrpSpPr>
+      <p:grpSpPr>
+        <a:xfrm>
+          <a:off x="0" y="0"/>
+          <a:ext cx="0" cy="0"/>
+          <a:chOff x="0" y="0"/>
+          <a:chExt cx="0" cy="0"/>
+        </a:xfrm>
+      </p:grpSpPr>
+      <p:sp>
+        <p:nvSpPr>
+          <p:cNvPr id="2" name="Slide Image Placeholder 1"/>
+          <p:cNvSpPr>
+            <a:spLocks noGrp="1"/>
+          </p:cNvSpPr>
+          <p:nvPr>
+            <p:ph type="sldImg" idx="2"/>
+          </p:nvPr>
+        </p:nvSpPr>
+        <p:spPr/>
+      </p:sp>
+      <p:sp>
+        <p:nvSpPr>
+          <p:cNvPr id="3" name="Notes Placeholder 2"/>
+          <p:cNvSpPr>
+            <a:spLocks noGrp="1"/>
+          </p:cNvSpPr>
+          <p:nvPr>
+            <p:ph type="body" idx="3" sz="quarter"/>
+          </p:nvPr>
+        </p:nvSpPr>
+        <p:spPr/>
+        <p:txBody>
+          <a:bodyPr/>
+          <a:lstStyle/>
+          <a:p>
+            <a:r>
+              <a:t>TEXTO COMPLETO DE LA LÁMINA (se proyecta resumido):</a:t>
+            </a:r>
+          </a:p>
+          <a:p/>
+          <a:p>
+            <a:r>
+              <a:t>Herramienta: Google Docs · draw.io</a:t>
+            </a:r>
+          </a:p>
+          <a:p/>
+          <a:p>
+            <a:r>
+              <a:t>Demo: Convertir en vivo la frase cruda «necesito buscar rapido el expediente de un animal» en un requisito funcional y uno no funcional bien escritos</a:t>
+            </a:r>
+          </a:p>
+          <a:p/>
+          <a:p>
+            <a:r>
+              <a:t>Mismo dominio: la clinica veterinaria — no otro ejemplo. Aqui se diseña, no se programa.</a:t>
             </a:r>
           </a:p>
         </p:txBody>
@@ -7789,14 +7877,83 @@
       </p:sp>
       <p:sp>
         <p:nvSpPr>
-          <p:cNvPr id="5" name="TextBox 4"/>
+          <p:cNvPr id="5" name="Rounded Rectangle 4"/>
+          <p:cNvSpPr/>
+          <p:nvPr/>
+        </p:nvSpPr>
+        <p:spPr>
+          <a:xfrm>
+            <a:off x="5797149" y="1343926"/>
+            <a:ext cx="6010497" cy="4837658"/>
+          </a:xfrm>
+          <a:prstGeom prst="roundRect">
+            <a:avLst>
+              <a:gd name="adj" fmla="val 4000"/>
+            </a:avLst>
+          </a:prstGeom>
+          <a:solidFill>
+            <a:srgbClr val="E8EEF4"/>
+          </a:solidFill>
+          <a:ln>
+            <a:noFill/>
+          </a:ln>
+        </p:spPr>
+        <p:style>
+          <a:lnRef idx="1">
+            <a:schemeClr val="accent1"/>
+          </a:lnRef>
+          <a:fillRef idx="3">
+            <a:schemeClr val="accent1"/>
+          </a:fillRef>
+          <a:effectRef idx="2">
+            <a:schemeClr val="accent1"/>
+          </a:effectRef>
+          <a:fontRef idx="minor">
+            <a:schemeClr val="lt1"/>
+          </a:fontRef>
+        </p:style>
+        <p:txBody>
+          <a:bodyPr rtlCol="0" anchor="ctr"/>
+          <a:lstStyle/>
+          <a:p>
+            <a:pPr algn="ctr"/>
+          </a:p>
+        </p:txBody>
+      </p:sp>
+      <p:pic>
+        <p:nvPicPr>
+          <p:cNvPr id="6" name="Picture 5" descr="ilus-quien-lee-paso1.png"/>
+          <p:cNvPicPr>
+            <a:picLocks noChangeAspect="1"/>
+          </p:cNvPicPr>
+          <p:nvPr/>
+        </p:nvPicPr>
+        <p:blipFill>
+          <a:blip r:embed="rId2"/>
+          <a:stretch>
+            <a:fillRect/>
+          </a:stretch>
+        </p:blipFill>
+        <p:spPr>
+          <a:xfrm>
+            <a:off x="5870301" y="1417078"/>
+            <a:ext cx="5864193" cy="4691354"/>
+          </a:xfrm>
+          <a:prstGeom prst="rect">
+            <a:avLst/>
+          </a:prstGeom>
+        </p:spPr>
+      </p:pic>
+      <p:sp>
+        <p:nvSpPr>
+          <p:cNvPr id="7" name="TextBox 6"/>
           <p:cNvSpPr txBox="1"/>
           <p:nvPr/>
         </p:nvSpPr>
         <p:spPr>
           <a:xfrm>
-            <a:off x="457200" y="1170432"/>
-            <a:ext cx="11277295" cy="5230368"/>
+            <a:off x="457200" y="1353312"/>
+            <a:ext cx="5093061" cy="5047488"/>
           </a:xfrm>
           <a:prstGeom prst="rect">
             <a:avLst/>
@@ -7876,7 +8033,7 @@
       </p:sp>
       <p:sp>
         <p:nvSpPr>
-          <p:cNvPr id="6" name="TextBox 5"/>
+          <p:cNvPr id="8" name="TextBox 7"/>
           <p:cNvSpPr txBox="1"/>
           <p:nvPr/>
         </p:nvSpPr>
@@ -9802,14 +9959,83 @@
       </p:sp>
       <p:sp>
         <p:nvSpPr>
-          <p:cNvPr id="5" name="TextBox 4"/>
+          <p:cNvPr id="5" name="Rounded Rectangle 4"/>
+          <p:cNvSpPr/>
+          <p:nvPr/>
+        </p:nvSpPr>
+        <p:spPr>
+          <a:xfrm>
+            <a:off x="5797149" y="1343926"/>
+            <a:ext cx="6010497" cy="4837658"/>
+          </a:xfrm>
+          <a:prstGeom prst="roundRect">
+            <a:avLst>
+              <a:gd name="adj" fmla="val 4000"/>
+            </a:avLst>
+          </a:prstGeom>
+          <a:solidFill>
+            <a:srgbClr val="E8EEF4"/>
+          </a:solidFill>
+          <a:ln>
+            <a:noFill/>
+          </a:ln>
+        </p:spPr>
+        <p:style>
+          <a:lnRef idx="1">
+            <a:schemeClr val="accent1"/>
+          </a:lnRef>
+          <a:fillRef idx="3">
+            <a:schemeClr val="accent1"/>
+          </a:fillRef>
+          <a:effectRef idx="2">
+            <a:schemeClr val="accent1"/>
+          </a:effectRef>
+          <a:fontRef idx="minor">
+            <a:schemeClr val="lt1"/>
+          </a:fontRef>
+        </p:style>
+        <p:txBody>
+          <a:bodyPr rtlCol="0" anchor="ctr"/>
+          <a:lstStyle/>
+          <a:p>
+            <a:pPr algn="ctr"/>
+          </a:p>
+        </p:txBody>
+      </p:sp>
+      <p:pic>
+        <p:nvPicPr>
+          <p:cNvPr id="6" name="Picture 5" descr="ilus-modelo-paso1.png"/>
+          <p:cNvPicPr>
+            <a:picLocks noChangeAspect="1"/>
+          </p:cNvPicPr>
+          <p:nvPr/>
+        </p:nvPicPr>
+        <p:blipFill>
+          <a:blip r:embed="rId2"/>
+          <a:stretch>
+            <a:fillRect/>
+          </a:stretch>
+        </p:blipFill>
+        <p:spPr>
+          <a:xfrm>
+            <a:off x="5870301" y="1417078"/>
+            <a:ext cx="5864193" cy="4691354"/>
+          </a:xfrm>
+          <a:prstGeom prst="rect">
+            <a:avLst/>
+          </a:prstGeom>
+        </p:spPr>
+      </p:pic>
+      <p:sp>
+        <p:nvSpPr>
+          <p:cNvPr id="7" name="TextBox 6"/>
           <p:cNvSpPr txBox="1"/>
           <p:nvPr/>
         </p:nvSpPr>
         <p:spPr>
           <a:xfrm>
-            <a:off x="457200" y="1170432"/>
-            <a:ext cx="11277295" cy="5230368"/>
+            <a:off x="457200" y="1353312"/>
+            <a:ext cx="5093061" cy="5047488"/>
           </a:xfrm>
           <a:prstGeom prst="rect">
             <a:avLst/>
@@ -9889,7 +10115,7 @@
       </p:sp>
       <p:sp>
         <p:nvSpPr>
-          <p:cNvPr id="6" name="TextBox 5"/>
+          <p:cNvPr id="8" name="TextBox 7"/>
           <p:cNvSpPr txBox="1"/>
           <p:nvPr/>
         </p:nvSpPr>
@@ -12051,14 +12277,83 @@
       </p:sp>
       <p:sp>
         <p:nvSpPr>
-          <p:cNvPr id="5" name="TextBox 4"/>
+          <p:cNvPr id="5" name="Rounded Rectangle 4"/>
+          <p:cNvSpPr/>
+          <p:nvPr/>
+        </p:nvSpPr>
+        <p:spPr>
+          <a:xfrm>
+            <a:off x="5797149" y="1343926"/>
+            <a:ext cx="6010497" cy="4837658"/>
+          </a:xfrm>
+          <a:prstGeom prst="roundRect">
+            <a:avLst>
+              <a:gd name="adj" fmla="val 4000"/>
+            </a:avLst>
+          </a:prstGeom>
+          <a:solidFill>
+            <a:srgbClr val="E8EEF4"/>
+          </a:solidFill>
+          <a:ln>
+            <a:noFill/>
+          </a:ln>
+        </p:spPr>
+        <p:style>
+          <a:lnRef idx="1">
+            <a:schemeClr val="accent1"/>
+          </a:lnRef>
+          <a:fillRef idx="3">
+            <a:schemeClr val="accent1"/>
+          </a:fillRef>
+          <a:effectRef idx="2">
+            <a:schemeClr val="accent1"/>
+          </a:effectRef>
+          <a:fontRef idx="minor">
+            <a:schemeClr val="lt1"/>
+          </a:fontRef>
+        </p:style>
+        <p:txBody>
+          <a:bodyPr rtlCol="0" anchor="ctr"/>
+          <a:lstStyle/>
+          <a:p>
+            <a:pPr algn="ctr"/>
+          </a:p>
+        </p:txBody>
+      </p:sp>
+      <p:pic>
+        <p:nvPicPr>
+          <p:cNvPr id="6" name="Picture 5" descr="ilus-demo-paso1.png"/>
+          <p:cNvPicPr>
+            <a:picLocks noChangeAspect="1"/>
+          </p:cNvPicPr>
+          <p:nvPr/>
+        </p:nvPicPr>
+        <p:blipFill>
+          <a:blip r:embed="rId2"/>
+          <a:stretch>
+            <a:fillRect/>
+          </a:stretch>
+        </p:blipFill>
+        <p:spPr>
+          <a:xfrm>
+            <a:off x="5870301" y="1417078"/>
+            <a:ext cx="5864193" cy="4691354"/>
+          </a:xfrm>
+          <a:prstGeom prst="rect">
+            <a:avLst/>
+          </a:prstGeom>
+        </p:spPr>
+      </p:pic>
+      <p:sp>
+        <p:nvSpPr>
+          <p:cNvPr id="7" name="TextBox 6"/>
           <p:cNvSpPr txBox="1"/>
           <p:nvPr/>
         </p:nvSpPr>
         <p:spPr>
           <a:xfrm>
-            <a:off x="457200" y="1170432"/>
-            <a:ext cx="11277295" cy="5230368"/>
+            <a:off x="457200" y="1353312"/>
+            <a:ext cx="5093061" cy="5047488"/>
           </a:xfrm>
           <a:prstGeom prst="rect">
             <a:avLst/>
@@ -12135,7 +12430,7 @@
                 </a:solidFill>
                 <a:latin typeface="Calibri"/>
               </a:rPr>
-              <a:t> Convertir en vivo la frase cruda «necesito buscar rapido el expediente de un animal» en un requisito funcional y uno no funcional bien escritos</a:t>
+              <a:t> Convertir en vivo la frase cruda «necesito buscar rapido el expediente de un animal» en un requisito funcional y uno no funcional bien…</a:t>
             </a:r>
           </a:p>
           <a:p>
@@ -12158,7 +12453,7 @@
       </p:sp>
       <p:sp>
         <p:nvSpPr>
-          <p:cNvPr id="6" name="TextBox 5"/>
+          <p:cNvPr id="8" name="TextBox 7"/>
           <p:cNvSpPr txBox="1"/>
           <p:nvPr/>
         </p:nvSpPr>

--- a/Seminario de Sistemas/Clases/Clase 1 - Conceptos iniciales/Presentacion.pptx
+++ b/Seminario de Sistemas/Clases/Clase 1 - Conceptos iniciales/Presentacion.pptx
@@ -5654,7 +5654,7 @@
         <p:spPr>
           <a:xfrm>
             <a:off x="457200" y="1261872"/>
-            <a:ext cx="11277295" cy="5052625"/>
+            <a:ext cx="6991923" cy="4573349"/>
           </a:xfrm>
           <a:prstGeom prst="roundRect">
             <a:avLst>
@@ -5699,7 +5699,7 @@
         <p:spPr>
           <a:xfrm>
             <a:off x="457200" y="1261872"/>
-            <a:ext cx="11277295" cy="365760"/>
+            <a:ext cx="6991923" cy="365760"/>
           </a:xfrm>
           <a:prstGeom prst="rect">
             <a:avLst/>
@@ -5871,7 +5871,7 @@
         <p:spPr>
           <a:xfrm>
             <a:off x="1371600" y="1298448"/>
-            <a:ext cx="10180015" cy="292608"/>
+            <a:ext cx="5894643" cy="292608"/>
           </a:xfrm>
           <a:prstGeom prst="rect">
             <a:avLst/>
@@ -5904,7 +5904,7 @@
         <p:spPr>
           <a:xfrm>
             <a:off x="685800" y="1719072"/>
-            <a:ext cx="502920" cy="4458265"/>
+            <a:ext cx="502920" cy="3978989"/>
           </a:xfrm>
           <a:prstGeom prst="rect">
             <a:avLst/>
@@ -6172,38 +6172,6 @@
               <a:t>16</a:t>
             </a:r>
           </a:p>
-          <a:p>
-            <a:pPr algn="r">
-              <a:spcAft>
-                <a:spcPts val="278"/>
-              </a:spcAft>
-            </a:pPr>
-            <a:r>
-              <a:rPr sz="1300" i="0" b="0">
-                <a:solidFill>
-                  <a:srgbClr val="858585"/>
-                </a:solidFill>
-                <a:latin typeface="Consolas"/>
-              </a:rPr>
-              <a:t>17</a:t>
-            </a:r>
-          </a:p>
-          <a:p>
-            <a:pPr algn="r">
-              <a:spcAft>
-                <a:spcPts val="278"/>
-              </a:spcAft>
-            </a:pPr>
-            <a:r>
-              <a:rPr sz="1300" i="0" b="0">
-                <a:solidFill>
-                  <a:srgbClr val="858585"/>
-                </a:solidFill>
-                <a:latin typeface="Consolas"/>
-              </a:rPr>
-              <a:t>18</a:t>
-            </a:r>
-          </a:p>
         </p:txBody>
       </p:sp>
       <p:sp>
@@ -6215,7 +6183,7 @@
         <p:spPr>
           <a:xfrm>
             <a:off x="1188720" y="1719072"/>
-            <a:ext cx="10271455" cy="4458265"/>
+            <a:ext cx="5986083" cy="3978989"/>
           </a:xfrm>
           <a:prstGeom prst="rect">
             <a:avLst/>
@@ -7104,43 +7072,150 @@
               <a:t>lab</a:t>
             </a:r>
           </a:p>
-          <a:p>
-            <a:pPr>
-              <a:spcAft>
-                <a:spcPts val="278"/>
-              </a:spcAft>
-            </a:pPr>
-            <a:r>
-              <a:rPr sz="1300" i="0" b="0">
-                <a:solidFill>
-                  <a:srgbClr val="D4D4D4"/>
-                </a:solidFill>
-                <a:latin typeface="Consolas"/>
-              </a:rPr>
-              <a:t/>
-            </a:r>
-          </a:p>
-          <a:p>
-            <a:pPr>
-              <a:spcAft>
-                <a:spcPts val="278"/>
-              </a:spcAft>
-            </a:pPr>
-            <a:r>
-              <a:rPr sz="1300" i="1" b="0">
-                <a:solidFill>
-                  <a:srgbClr val="6A9955"/>
-                </a:solidFill>
-                <a:latin typeface="Consolas"/>
-              </a:rPr>
-              <a:t>%% Complete con SUS capacidades y actores: estas son dos de cada uno.</a:t>
-            </a:r>
-          </a:p>
-        </p:txBody>
-      </p:sp>
-      <p:sp>
-        <p:nvSpPr>
-          <p:cNvPr id="13" name="TextBox 12"/>
+        </p:txBody>
+      </p:sp>
+      <p:sp>
+        <p:nvSpPr>
+          <p:cNvPr id="13" name="Rounded Rectangle 12"/>
+          <p:cNvSpPr/>
+          <p:nvPr/>
+        </p:nvSpPr>
+        <p:spPr>
+          <a:xfrm>
+            <a:off x="7668579" y="1261872"/>
+            <a:ext cx="4120780" cy="3318569"/>
+          </a:xfrm>
+          <a:prstGeom prst="roundRect">
+            <a:avLst>
+              <a:gd name="adj" fmla="val 4000"/>
+            </a:avLst>
+          </a:prstGeom>
+          <a:solidFill>
+            <a:srgbClr val="E8EEF4"/>
+          </a:solidFill>
+          <a:ln>
+            <a:noFill/>
+          </a:ln>
+        </p:spPr>
+        <p:style>
+          <a:lnRef idx="1">
+            <a:schemeClr val="accent1"/>
+          </a:lnRef>
+          <a:fillRef idx="3">
+            <a:schemeClr val="accent1"/>
+          </a:fillRef>
+          <a:effectRef idx="2">
+            <a:schemeClr val="accent1"/>
+          </a:effectRef>
+          <a:fontRef idx="minor">
+            <a:schemeClr val="lt1"/>
+          </a:fontRef>
+        </p:style>
+        <p:txBody>
+          <a:bodyPr rtlCol="0" anchor="ctr"/>
+          <a:lstStyle/>
+          <a:p>
+            <a:pPr algn="ctr"/>
+          </a:p>
+        </p:txBody>
+      </p:sp>
+      <p:pic>
+        <p:nvPicPr>
+          <p:cNvPr id="14" name="Picture 13" descr="dg-mapa-dominio-paso1.png"/>
+          <p:cNvPicPr>
+            <a:picLocks noChangeAspect="1"/>
+          </p:cNvPicPr>
+          <p:nvPr/>
+        </p:nvPicPr>
+        <p:blipFill>
+          <a:blip r:embed="rId2"/>
+          <a:stretch>
+            <a:fillRect/>
+          </a:stretch>
+        </p:blipFill>
+        <p:spPr>
+          <a:xfrm>
+            <a:off x="7723443" y="1316736"/>
+            <a:ext cx="4011052" cy="3208841"/>
+          </a:xfrm>
+          <a:prstGeom prst="rect">
+            <a:avLst/>
+          </a:prstGeom>
+        </p:spPr>
+      </p:pic>
+      <p:sp>
+        <p:nvSpPr>
+          <p:cNvPr id="15" name="TextBox 14"/>
+          <p:cNvSpPr txBox="1"/>
+          <p:nvPr/>
+        </p:nvSpPr>
+        <p:spPr>
+          <a:xfrm>
+            <a:off x="7723443" y="4580441"/>
+            <a:ext cx="4011052" cy="320040"/>
+          </a:xfrm>
+          <a:prstGeom prst="rect">
+            <a:avLst/>
+          </a:prstGeom>
+          <a:noFill/>
+        </p:spPr>
+        <p:txBody>
+          <a:bodyPr wrap="square">
+            <a:spAutoFit/>
+          </a:bodyPr>
+          <a:lstStyle/>
+          <a:p>
+            <a:pPr algn="ctr"/>
+            <a:r>
+              <a:rPr sz="1200" b="0" i="1">
+                <a:solidFill>
+                  <a:srgbClr val="666666"/>
+                </a:solidFill>
+                <a:latin typeface="Calibri"/>
+              </a:rPr>
+              <a:t>Lo que dibuja este código</a:t>
+            </a:r>
+          </a:p>
+        </p:txBody>
+      </p:sp>
+      <p:sp>
+        <p:nvSpPr>
+          <p:cNvPr id="16" name="TextBox 15"/>
+          <p:cNvSpPr txBox="1"/>
+          <p:nvPr/>
+        </p:nvSpPr>
+        <p:spPr>
+          <a:xfrm>
+            <a:off x="457200" y="6035040"/>
+            <a:ext cx="11277295" cy="365760"/>
+          </a:xfrm>
+          <a:prstGeom prst="rect">
+            <a:avLst/>
+          </a:prstGeom>
+          <a:noFill/>
+        </p:spPr>
+        <p:txBody>
+          <a:bodyPr wrap="square">
+            <a:spAutoFit/>
+          </a:bodyPr>
+          <a:lstStyle/>
+          <a:p>
+            <a:pPr algn="ctr"/>
+            <a:r>
+              <a:rPr sz="1300" b="0" i="1">
+                <a:solidFill>
+                  <a:srgbClr val="666666"/>
+                </a:solidFill>
+                <a:latin typeface="Calibri"/>
+              </a:rPr>
+              <a:t>Son dos actores y dos capacidades de muestra: el mapa real lleva todos los del dominio.</a:t>
+            </a:r>
+          </a:p>
+        </p:txBody>
+      </p:sp>
+      <p:sp>
+        <p:nvSpPr>
+          <p:cNvPr id="17" name="TextBox 16"/>
           <p:cNvSpPr txBox="1"/>
           <p:nvPr/>
         </p:nvSpPr>
@@ -15393,7 +15468,7 @@
         <p:spPr>
           <a:xfrm>
             <a:off x="457200" y="1261872"/>
-            <a:ext cx="11277295" cy="5063663"/>
+            <a:ext cx="11277295" cy="4862125"/>
           </a:xfrm>
           <a:prstGeom prst="roundRect">
             <a:avLst>
@@ -15643,7 +15718,7 @@
         <p:spPr>
           <a:xfrm>
             <a:off x="685800" y="1719072"/>
-            <a:ext cx="502920" cy="4469303"/>
+            <a:ext cx="502920" cy="4267765"/>
           </a:xfrm>
           <a:prstGeom prst="rect">
             <a:avLst/>
@@ -15658,11 +15733,11 @@
           <a:p>
             <a:pPr algn="r">
               <a:spcAft>
-                <a:spcPts val="407"/>
+                <a:spcPts val="385"/>
               </a:spcAft>
             </a:pPr>
             <a:r>
-              <a:rPr sz="1900" i="0" b="0">
+              <a:rPr sz="1800" i="0" b="0">
                 <a:solidFill>
                   <a:srgbClr val="858585"/>
                 </a:solidFill>
@@ -15674,11 +15749,11 @@
           <a:p>
             <a:pPr algn="r">
               <a:spcAft>
-                <a:spcPts val="407"/>
+                <a:spcPts val="385"/>
               </a:spcAft>
             </a:pPr>
             <a:r>
-              <a:rPr sz="1900" i="0" b="0">
+              <a:rPr sz="1800" i="0" b="0">
                 <a:solidFill>
                   <a:srgbClr val="858585"/>
                 </a:solidFill>
@@ -15690,11 +15765,11 @@
           <a:p>
             <a:pPr algn="r">
               <a:spcAft>
-                <a:spcPts val="407"/>
+                <a:spcPts val="385"/>
               </a:spcAft>
             </a:pPr>
             <a:r>
-              <a:rPr sz="1900" i="0" b="0">
+              <a:rPr sz="1800" i="0" b="0">
                 <a:solidFill>
                   <a:srgbClr val="858585"/>
                 </a:solidFill>
@@ -15706,11 +15781,11 @@
           <a:p>
             <a:pPr algn="r">
               <a:spcAft>
-                <a:spcPts val="407"/>
+                <a:spcPts val="385"/>
               </a:spcAft>
             </a:pPr>
             <a:r>
-              <a:rPr sz="1900" i="0" b="0">
+              <a:rPr sz="1800" i="0" b="0">
                 <a:solidFill>
                   <a:srgbClr val="858585"/>
                 </a:solidFill>
@@ -15722,11 +15797,11 @@
           <a:p>
             <a:pPr algn="r">
               <a:spcAft>
-                <a:spcPts val="407"/>
+                <a:spcPts val="385"/>
               </a:spcAft>
             </a:pPr>
             <a:r>
-              <a:rPr sz="1900" i="0" b="0">
+              <a:rPr sz="1800" i="0" b="0">
                 <a:solidFill>
                   <a:srgbClr val="858585"/>
                 </a:solidFill>
@@ -15738,11 +15813,11 @@
           <a:p>
             <a:pPr algn="r">
               <a:spcAft>
-                <a:spcPts val="407"/>
+                <a:spcPts val="385"/>
               </a:spcAft>
             </a:pPr>
             <a:r>
-              <a:rPr sz="1900" i="0" b="0">
+              <a:rPr sz="1800" i="0" b="0">
                 <a:solidFill>
                   <a:srgbClr val="858585"/>
                 </a:solidFill>
@@ -15754,11 +15829,11 @@
           <a:p>
             <a:pPr algn="r">
               <a:spcAft>
-                <a:spcPts val="407"/>
+                <a:spcPts val="385"/>
               </a:spcAft>
             </a:pPr>
             <a:r>
-              <a:rPr sz="1900" i="0" b="0">
+              <a:rPr sz="1800" i="0" b="0">
                 <a:solidFill>
                   <a:srgbClr val="858585"/>
                 </a:solidFill>
@@ -15770,11 +15845,11 @@
           <a:p>
             <a:pPr algn="r">
               <a:spcAft>
-                <a:spcPts val="407"/>
+                <a:spcPts val="385"/>
               </a:spcAft>
             </a:pPr>
             <a:r>
-              <a:rPr sz="1900" i="0" b="0">
+              <a:rPr sz="1800" i="0" b="0">
                 <a:solidFill>
                   <a:srgbClr val="858585"/>
                 </a:solidFill>
@@ -15786,11 +15861,11 @@
           <a:p>
             <a:pPr algn="r">
               <a:spcAft>
-                <a:spcPts val="407"/>
+                <a:spcPts val="385"/>
               </a:spcAft>
             </a:pPr>
             <a:r>
-              <a:rPr sz="1900" i="0" b="0">
+              <a:rPr sz="1800" i="0" b="0">
                 <a:solidFill>
                   <a:srgbClr val="858585"/>
                 </a:solidFill>
@@ -15802,11 +15877,11 @@
           <a:p>
             <a:pPr algn="r">
               <a:spcAft>
-                <a:spcPts val="407"/>
+                <a:spcPts val="385"/>
               </a:spcAft>
             </a:pPr>
             <a:r>
-              <a:rPr sz="1900" i="0" b="0">
+              <a:rPr sz="1800" i="0" b="0">
                 <a:solidFill>
                   <a:srgbClr val="858585"/>
                 </a:solidFill>
@@ -15818,11 +15893,11 @@
           <a:p>
             <a:pPr algn="r">
               <a:spcAft>
-                <a:spcPts val="407"/>
+                <a:spcPts val="385"/>
               </a:spcAft>
             </a:pPr>
             <a:r>
-              <a:rPr sz="1900" i="0" b="0">
+              <a:rPr sz="1800" i="0" b="0">
                 <a:solidFill>
                   <a:srgbClr val="858585"/>
                 </a:solidFill>
@@ -15834,11 +15909,11 @@
           <a:p>
             <a:pPr algn="r">
               <a:spcAft>
-                <a:spcPts val="407"/>
+                <a:spcPts val="385"/>
               </a:spcAft>
             </a:pPr>
             <a:r>
-              <a:rPr sz="1900" i="0" b="0">
+              <a:rPr sz="1800" i="0" b="0">
                 <a:solidFill>
                   <a:srgbClr val="858585"/>
                 </a:solidFill>
@@ -15850,11 +15925,11 @@
           <a:p>
             <a:pPr algn="r">
               <a:spcAft>
-                <a:spcPts val="407"/>
+                <a:spcPts val="385"/>
               </a:spcAft>
             </a:pPr>
             <a:r>
-              <a:rPr sz="1900" i="0" b="0">
+              <a:rPr sz="1800" i="0" b="0">
                 <a:solidFill>
                   <a:srgbClr val="858585"/>
                 </a:solidFill>
@@ -15874,7 +15949,7 @@
         <p:spPr>
           <a:xfrm>
             <a:off x="1188720" y="1719072"/>
-            <a:ext cx="10271455" cy="4469303"/>
+            <a:ext cx="10271455" cy="4267765"/>
           </a:xfrm>
           <a:prstGeom prst="rect">
             <a:avLst/>
@@ -15889,11 +15964,11 @@
           <a:p>
             <a:pPr>
               <a:spcAft>
-                <a:spcPts val="407"/>
+                <a:spcPts val="385"/>
               </a:spcAft>
             </a:pPr>
             <a:r>
-              <a:rPr sz="1900" i="0" b="0">
+              <a:rPr sz="1800" i="0" b="0">
                 <a:solidFill>
                   <a:srgbClr val="D4D4D4"/>
                 </a:solidFill>
@@ -15902,7 +15977,7 @@
               <a:t>RF</a:t>
             </a:r>
             <a:r>
-              <a:rPr sz="1900" i="0" b="0">
+              <a:rPr sz="1800" i="0" b="0">
                 <a:solidFill>
                   <a:srgbClr val="D4D4D4"/>
                 </a:solidFill>
@@ -15911,7 +15986,7 @@
               <a:t>-</a:t>
             </a:r>
             <a:r>
-              <a:rPr sz="1900" i="0" b="0">
+              <a:rPr sz="1800" i="0" b="0">
                 <a:solidFill>
                   <a:srgbClr val="B5CEA8"/>
                 </a:solidFill>
@@ -15920,7 +15995,7 @@
               <a:t>01</a:t>
             </a:r>
             <a:r>
-              <a:rPr sz="1900" i="0" b="0">
+              <a:rPr sz="1800" i="0" b="0">
                 <a:solidFill>
                   <a:srgbClr val="D4D4D4"/>
                 </a:solidFill>
@@ -15929,7 +16004,7 @@
               <a:t>  </a:t>
             </a:r>
             <a:r>
-              <a:rPr sz="1900" i="0" b="0">
+              <a:rPr sz="1800" i="0" b="0">
                 <a:solidFill>
                   <a:srgbClr val="D4D4D4"/>
                 </a:solidFill>
@@ -15938,7 +16013,7 @@
               <a:t>Registrar</a:t>
             </a:r>
             <a:r>
-              <a:rPr sz="1900" i="0" b="0">
+              <a:rPr sz="1800" i="0" b="0">
                 <a:solidFill>
                   <a:srgbClr val="D4D4D4"/>
                 </a:solidFill>
@@ -15947,7 +16022,7 @@
               <a:t> </a:t>
             </a:r>
             <a:r>
-              <a:rPr sz="1900" i="0" b="0">
+              <a:rPr sz="1800" i="0" b="0">
                 <a:solidFill>
                   <a:srgbClr val="D4D4D4"/>
                 </a:solidFill>
@@ -15959,11 +16034,11 @@
           <a:p>
             <a:pPr>
               <a:spcAft>
-                <a:spcPts val="407"/>
+                <a:spcPts val="385"/>
               </a:spcAft>
             </a:pPr>
             <a:r>
-              <a:rPr sz="1900" i="0" b="0">
+              <a:rPr sz="1800" i="0" b="0">
                 <a:solidFill>
                   <a:srgbClr val="D4D4D4"/>
                 </a:solidFill>
@@ -15975,11 +16050,11 @@
           <a:p>
             <a:pPr>
               <a:spcAft>
-                <a:spcPts val="407"/>
+                <a:spcPts val="385"/>
               </a:spcAft>
             </a:pPr>
             <a:r>
-              <a:rPr sz="1900" i="0" b="0">
+              <a:rPr sz="1800" i="0" b="0">
                 <a:solidFill>
                   <a:srgbClr val="D4D4D4"/>
                 </a:solidFill>
@@ -15988,7 +16063,7 @@
               <a:t>Actor</a:t>
             </a:r>
             <a:r>
-              <a:rPr sz="1900" i="0" b="0">
+              <a:rPr sz="1800" i="0" b="0">
                 <a:solidFill>
                   <a:srgbClr val="D4D4D4"/>
                 </a:solidFill>
@@ -15997,7 +16072,7 @@
               <a:t>:        </a:t>
             </a:r>
             <a:r>
-              <a:rPr sz="1900" i="0" b="0">
+              <a:rPr sz="1800" i="0" b="0">
                 <a:solidFill>
                   <a:srgbClr val="D4D4D4"/>
                 </a:solidFill>
@@ -16009,11 +16084,11 @@
           <a:p>
             <a:pPr>
               <a:spcAft>
-                <a:spcPts val="407"/>
+                <a:spcPts val="385"/>
               </a:spcAft>
             </a:pPr>
             <a:r>
-              <a:rPr sz="1900" i="0" b="0">
+              <a:rPr sz="1800" i="0" b="0">
                 <a:solidFill>
                   <a:srgbClr val="D4D4D4"/>
                 </a:solidFill>
@@ -16022,7 +16097,7 @@
               <a:t>Precondicion</a:t>
             </a:r>
             <a:r>
-              <a:rPr sz="1900" i="0" b="0">
+              <a:rPr sz="1800" i="0" b="0">
                 <a:solidFill>
                   <a:srgbClr val="D4D4D4"/>
                 </a:solidFill>
@@ -16031,7 +16106,7 @@
               <a:t>: </a:t>
             </a:r>
             <a:r>
-              <a:rPr sz="1900" i="0" b="0">
+              <a:rPr sz="1800" i="0" b="0">
                 <a:solidFill>
                   <a:srgbClr val="D4D4D4"/>
                 </a:solidFill>
@@ -16040,7 +16115,7 @@
               <a:t>el</a:t>
             </a:r>
             <a:r>
-              <a:rPr sz="1900" i="0" b="0">
+              <a:rPr sz="1800" i="0" b="0">
                 <a:solidFill>
                   <a:srgbClr val="D4D4D4"/>
                 </a:solidFill>
@@ -16049,7 +16124,7 @@
               <a:t> </a:t>
             </a:r>
             <a:r>
-              <a:rPr sz="1900" i="0" b="0">
+              <a:rPr sz="1800" i="0" b="0">
                 <a:solidFill>
                   <a:srgbClr val="D4D4D4"/>
                 </a:solidFill>
@@ -16058,7 +16133,7 @@
               <a:t>dueno</a:t>
             </a:r>
             <a:r>
-              <a:rPr sz="1900" i="0" b="0">
+              <a:rPr sz="1800" i="0" b="0">
                 <a:solidFill>
                   <a:srgbClr val="D4D4D4"/>
                 </a:solidFill>
@@ -16067,7 +16142,7 @@
               <a:t> </a:t>
             </a:r>
             <a:r>
-              <a:rPr sz="1900" i="0" b="0">
+              <a:rPr sz="1800" i="0" b="0">
                 <a:solidFill>
                   <a:srgbClr val="D4D4D4"/>
                 </a:solidFill>
@@ -16076,7 +16151,7 @@
               <a:t>ya</a:t>
             </a:r>
             <a:r>
-              <a:rPr sz="1900" i="0" b="0">
+              <a:rPr sz="1800" i="0" b="0">
                 <a:solidFill>
                   <a:srgbClr val="D4D4D4"/>
                 </a:solidFill>
@@ -16085,7 +16160,7 @@
               <a:t> </a:t>
             </a:r>
             <a:r>
-              <a:rPr sz="1900" i="0" b="0">
+              <a:rPr sz="1800" i="0" b="0">
                 <a:solidFill>
                   <a:srgbClr val="D4D4D4"/>
                 </a:solidFill>
@@ -16094,7 +16169,7 @@
               <a:t>esta</a:t>
             </a:r>
             <a:r>
-              <a:rPr sz="1900" i="0" b="0">
+              <a:rPr sz="1800" i="0" b="0">
                 <a:solidFill>
                   <a:srgbClr val="D4D4D4"/>
                 </a:solidFill>
@@ -16103,7 +16178,7 @@
               <a:t> </a:t>
             </a:r>
             <a:r>
-              <a:rPr sz="1900" i="0" b="0">
+              <a:rPr sz="1800" i="0" b="0">
                 <a:solidFill>
                   <a:srgbClr val="D4D4D4"/>
                 </a:solidFill>
@@ -16115,11 +16190,11 @@
           <a:p>
             <a:pPr>
               <a:spcAft>
-                <a:spcPts val="407"/>
+                <a:spcPts val="385"/>
               </a:spcAft>
             </a:pPr>
             <a:r>
-              <a:rPr sz="1900" i="0" b="0">
+              <a:rPr sz="1800" i="0" b="0">
                 <a:solidFill>
                   <a:srgbClr val="D4D4D4"/>
                 </a:solidFill>
@@ -16128,7 +16203,7 @@
               <a:t>Descripcion</a:t>
             </a:r>
             <a:r>
-              <a:rPr sz="1900" i="0" b="0">
+              <a:rPr sz="1800" i="0" b="0">
                 <a:solidFill>
                   <a:srgbClr val="D4D4D4"/>
                 </a:solidFill>
@@ -16137,7 +16212,7 @@
               <a:t>:  </a:t>
             </a:r>
             <a:r>
-              <a:rPr sz="1900" i="0" b="0">
+              <a:rPr sz="1800" i="0" b="0">
                 <a:solidFill>
                   <a:srgbClr val="D4D4D4"/>
                 </a:solidFill>
@@ -16146,7 +16221,7 @@
               <a:t>El</a:t>
             </a:r>
             <a:r>
-              <a:rPr sz="1900" i="0" b="0">
+              <a:rPr sz="1800" i="0" b="0">
                 <a:solidFill>
                   <a:srgbClr val="D4D4D4"/>
                 </a:solidFill>
@@ -16155,7 +16230,7 @@
               <a:t> </a:t>
             </a:r>
             <a:r>
-              <a:rPr sz="1900" i="0" b="0">
+              <a:rPr sz="1800" i="0" b="0">
                 <a:solidFill>
                   <a:srgbClr val="D4D4D4"/>
                 </a:solidFill>
@@ -16164,7 +16239,7 @@
               <a:t>sistema</a:t>
             </a:r>
             <a:r>
-              <a:rPr sz="1900" i="0" b="0">
+              <a:rPr sz="1800" i="0" b="0">
                 <a:solidFill>
                   <a:srgbClr val="D4D4D4"/>
                 </a:solidFill>
@@ -16173,7 +16248,7 @@
               <a:t> </a:t>
             </a:r>
             <a:r>
-              <a:rPr sz="1900" i="0" b="0">
+              <a:rPr sz="1800" i="0" b="0">
                 <a:solidFill>
                   <a:srgbClr val="D4D4D4"/>
                 </a:solidFill>
@@ -16182,7 +16257,7 @@
               <a:t>DEBE</a:t>
             </a:r>
             <a:r>
-              <a:rPr sz="1900" i="0" b="0">
+              <a:rPr sz="1800" i="0" b="0">
                 <a:solidFill>
                   <a:srgbClr val="D4D4D4"/>
                 </a:solidFill>
@@ -16191,7 +16266,7 @@
               <a:t> </a:t>
             </a:r>
             <a:r>
-              <a:rPr sz="1900" i="0" b="0">
+              <a:rPr sz="1800" i="0" b="0">
                 <a:solidFill>
                   <a:srgbClr val="D4D4D4"/>
                 </a:solidFill>
@@ -16200,7 +16275,7 @@
               <a:t>permitir</a:t>
             </a:r>
             <a:r>
-              <a:rPr sz="1900" i="0" b="0">
+              <a:rPr sz="1800" i="0" b="0">
                 <a:solidFill>
                   <a:srgbClr val="D4D4D4"/>
                 </a:solidFill>
@@ -16209,7 +16284,7 @@
               <a:t> </a:t>
             </a:r>
             <a:r>
-              <a:rPr sz="1900" i="0" b="0">
+              <a:rPr sz="1800" i="0" b="0">
                 <a:solidFill>
                   <a:srgbClr val="D4D4D4"/>
                 </a:solidFill>
@@ -16218,7 +16293,7 @@
               <a:t>registrar</a:t>
             </a:r>
             <a:r>
-              <a:rPr sz="1900" i="0" b="0">
+              <a:rPr sz="1800" i="0" b="0">
                 <a:solidFill>
                   <a:srgbClr val="D4D4D4"/>
                 </a:solidFill>
@@ -16227,7 +16302,7 @@
               <a:t> </a:t>
             </a:r>
             <a:r>
-              <a:rPr sz="1900" i="0" b="0">
+              <a:rPr sz="1800" i="0" b="0">
                 <a:solidFill>
                   <a:srgbClr val="D4D4D4"/>
                 </a:solidFill>
@@ -16236,7 +16311,7 @@
               <a:t>una</a:t>
             </a:r>
             <a:r>
-              <a:rPr sz="1900" i="0" b="0">
+              <a:rPr sz="1800" i="0" b="0">
                 <a:solidFill>
                   <a:srgbClr val="D4D4D4"/>
                 </a:solidFill>
@@ -16245,7 +16320,7 @@
               <a:t> </a:t>
             </a:r>
             <a:r>
-              <a:rPr sz="1900" i="0" b="0">
+              <a:rPr sz="1800" i="0" b="0">
                 <a:solidFill>
                   <a:srgbClr val="D4D4D4"/>
                 </a:solidFill>
@@ -16254,7 +16329,7 @@
               <a:t>mascota</a:t>
             </a:r>
             <a:r>
-              <a:rPr sz="1900" i="0" b="0">
+              <a:rPr sz="1800" i="0" b="0">
                 <a:solidFill>
                   <a:srgbClr val="D4D4D4"/>
                 </a:solidFill>
@@ -16263,7 +16338,7 @@
               <a:t> </a:t>
             </a:r>
             <a:r>
-              <a:rPr sz="1900" i="0" b="0">
+              <a:rPr sz="1800" i="0" b="0">
                 <a:solidFill>
                   <a:srgbClr val="D4D4D4"/>
                 </a:solidFill>
@@ -16272,7 +16347,7 @@
               <a:t>con</a:t>
             </a:r>
             <a:r>
-              <a:rPr sz="1900" i="0" b="0">
+              <a:rPr sz="1800" i="0" b="0">
                 <a:solidFill>
                   <a:srgbClr val="D4D4D4"/>
                 </a:solidFill>
@@ -16281,7 +16356,7 @@
               <a:t> </a:t>
             </a:r>
             <a:r>
-              <a:rPr sz="1900" i="0" b="0">
+              <a:rPr sz="1800" i="0" b="0">
                 <a:solidFill>
                   <a:srgbClr val="D4D4D4"/>
                 </a:solidFill>
@@ -16290,7 +16365,7 @@
               <a:t>nombre</a:t>
             </a:r>
             <a:r>
-              <a:rPr sz="1900" i="0" b="0">
+              <a:rPr sz="1800" i="0" b="0">
                 <a:solidFill>
                   <a:srgbClr val="D4D4D4"/>
                 </a:solidFill>
@@ -16302,11 +16377,11 @@
           <a:p>
             <a:pPr>
               <a:spcAft>
-                <a:spcPts val="407"/>
+                <a:spcPts val="385"/>
               </a:spcAft>
             </a:pPr>
             <a:r>
-              <a:rPr sz="1900" i="0" b="0">
+              <a:rPr sz="1800" i="0" b="0">
                 <a:solidFill>
                   <a:srgbClr val="D4D4D4"/>
                 </a:solidFill>
@@ -16315,7 +16390,7 @@
               <a:t>              </a:t>
             </a:r>
             <a:r>
-              <a:rPr sz="1900" i="0" b="0">
+              <a:rPr sz="1800" i="0" b="0">
                 <a:solidFill>
                   <a:srgbClr val="D4D4D4"/>
                 </a:solidFill>
@@ -16324,7 +16399,7 @@
               <a:t>especie</a:t>
             </a:r>
             <a:r>
-              <a:rPr sz="1900" i="0" b="0">
+              <a:rPr sz="1800" i="0" b="0">
                 <a:solidFill>
                   <a:srgbClr val="D4D4D4"/>
                 </a:solidFill>
@@ -16333,7 +16408,7 @@
               <a:t>, </a:t>
             </a:r>
             <a:r>
-              <a:rPr sz="1900" i="0" b="0">
+              <a:rPr sz="1800" i="0" b="0">
                 <a:solidFill>
                   <a:srgbClr val="D4D4D4"/>
                 </a:solidFill>
@@ -16342,7 +16417,7 @@
               <a:t>fecha</a:t>
             </a:r>
             <a:r>
-              <a:rPr sz="1900" i="0" b="0">
+              <a:rPr sz="1800" i="0" b="0">
                 <a:solidFill>
                   <a:srgbClr val="D4D4D4"/>
                 </a:solidFill>
@@ -16351,7 +16426,7 @@
               <a:t> </a:t>
             </a:r>
             <a:r>
-              <a:rPr sz="1900" i="0" b="0">
+              <a:rPr sz="1800" i="0" b="0">
                 <a:solidFill>
                   <a:srgbClr val="D4D4D4"/>
                 </a:solidFill>
@@ -16360,7 +16435,7 @@
               <a:t>de</a:t>
             </a:r>
             <a:r>
-              <a:rPr sz="1900" i="0" b="0">
+              <a:rPr sz="1800" i="0" b="0">
                 <a:solidFill>
                   <a:srgbClr val="D4D4D4"/>
                 </a:solidFill>
@@ -16369,7 +16444,7 @@
               <a:t> </a:t>
             </a:r>
             <a:r>
-              <a:rPr sz="1900" i="0" b="0">
+              <a:rPr sz="1800" i="0" b="0">
                 <a:solidFill>
                   <a:srgbClr val="D4D4D4"/>
                 </a:solidFill>
@@ -16378,7 +16453,7 @@
               <a:t>nacimiento</a:t>
             </a:r>
             <a:r>
-              <a:rPr sz="1900" i="0" b="0">
+              <a:rPr sz="1800" i="0" b="0">
                 <a:solidFill>
                   <a:srgbClr val="D4D4D4"/>
                 </a:solidFill>
@@ -16387,7 +16462,7 @@
               <a:t> </a:t>
             </a:r>
             <a:r>
-              <a:rPr sz="1900" i="0" b="0">
+              <a:rPr sz="1800" i="0" b="0">
                 <a:solidFill>
                   <a:srgbClr val="D4D4D4"/>
                 </a:solidFill>
@@ -16396,7 +16471,7 @@
               <a:t>y</a:t>
             </a:r>
             <a:r>
-              <a:rPr sz="1900" i="0" b="0">
+              <a:rPr sz="1800" i="0" b="0">
                 <a:solidFill>
                   <a:srgbClr val="D4D4D4"/>
                 </a:solidFill>
@@ -16405,7 +16480,7 @@
               <a:t> </a:t>
             </a:r>
             <a:r>
-              <a:rPr sz="1900" i="0" b="0">
+              <a:rPr sz="1800" i="0" b="0">
                 <a:solidFill>
                   <a:srgbClr val="D4D4D4"/>
                 </a:solidFill>
@@ -16414,7 +16489,7 @@
               <a:t>dueno</a:t>
             </a:r>
             <a:r>
-              <a:rPr sz="1900" i="0" b="0">
+              <a:rPr sz="1800" i="0" b="0">
                 <a:solidFill>
                   <a:srgbClr val="D4D4D4"/>
                 </a:solidFill>
@@ -16423,7 +16498,7 @@
               <a:t> </a:t>
             </a:r>
             <a:r>
-              <a:rPr sz="1900" i="0" b="0">
+              <a:rPr sz="1800" i="0" b="0">
                 <a:solidFill>
                   <a:srgbClr val="D4D4D4"/>
                 </a:solidFill>
@@ -16432,7 +16507,7 @@
               <a:t>asociado</a:t>
             </a:r>
             <a:r>
-              <a:rPr sz="1900" i="0" b="0">
+              <a:rPr sz="1800" i="0" b="0">
                 <a:solidFill>
                   <a:srgbClr val="D4D4D4"/>
                 </a:solidFill>
@@ -16444,11 +16519,11 @@
           <a:p>
             <a:pPr>
               <a:spcAft>
-                <a:spcPts val="407"/>
+                <a:spcPts val="385"/>
               </a:spcAft>
             </a:pPr>
             <a:r>
-              <a:rPr sz="1900" i="0" b="0">
+              <a:rPr sz="1800" i="0" b="0">
                 <a:solidFill>
                   <a:srgbClr val="D4D4D4"/>
                 </a:solidFill>
@@ -16457,7 +16532,7 @@
               <a:t>Postcondicion</a:t>
             </a:r>
             <a:r>
-              <a:rPr sz="1900" i="0" b="0">
+              <a:rPr sz="1800" i="0" b="0">
                 <a:solidFill>
                   <a:srgbClr val="D4D4D4"/>
                 </a:solidFill>
@@ -16466,7 +16541,7 @@
               <a:t>: </a:t>
             </a:r>
             <a:r>
-              <a:rPr sz="1900" i="0" b="0">
+              <a:rPr sz="1800" i="0" b="0">
                 <a:solidFill>
                   <a:srgbClr val="D4D4D4"/>
                 </a:solidFill>
@@ -16475,7 +16550,7 @@
               <a:t>la</a:t>
             </a:r>
             <a:r>
-              <a:rPr sz="1900" i="0" b="0">
+              <a:rPr sz="1800" i="0" b="0">
                 <a:solidFill>
                   <a:srgbClr val="D4D4D4"/>
                 </a:solidFill>
@@ -16484,7 +16559,7 @@
               <a:t> </a:t>
             </a:r>
             <a:r>
-              <a:rPr sz="1900" i="0" b="0">
+              <a:rPr sz="1800" i="0" b="0">
                 <a:solidFill>
                   <a:srgbClr val="D4D4D4"/>
                 </a:solidFill>
@@ -16493,7 +16568,7 @@
               <a:t>mascota</a:t>
             </a:r>
             <a:r>
-              <a:rPr sz="1900" i="0" b="0">
+              <a:rPr sz="1800" i="0" b="0">
                 <a:solidFill>
                   <a:srgbClr val="D4D4D4"/>
                 </a:solidFill>
@@ -16502,7 +16577,7 @@
               <a:t> </a:t>
             </a:r>
             <a:r>
-              <a:rPr sz="1900" i="0" b="0">
+              <a:rPr sz="1800" i="0" b="0">
                 <a:solidFill>
                   <a:srgbClr val="D4D4D4"/>
                 </a:solidFill>
@@ -16511,7 +16586,7 @@
               <a:t>queda</a:t>
             </a:r>
             <a:r>
-              <a:rPr sz="1900" i="0" b="0">
+              <a:rPr sz="1800" i="0" b="0">
                 <a:solidFill>
                   <a:srgbClr val="D4D4D4"/>
                 </a:solidFill>
@@ -16520,7 +16595,7 @@
               <a:t> </a:t>
             </a:r>
             <a:r>
-              <a:rPr sz="1900" i="0" b="0">
+              <a:rPr sz="1800" i="0" b="0">
                 <a:solidFill>
                   <a:srgbClr val="D4D4D4"/>
                 </a:solidFill>
@@ -16529,7 +16604,7 @@
               <a:t>con</a:t>
             </a:r>
             <a:r>
-              <a:rPr sz="1900" i="0" b="0">
+              <a:rPr sz="1800" i="0" b="0">
                 <a:solidFill>
                   <a:srgbClr val="D4D4D4"/>
                 </a:solidFill>
@@ -16538,7 +16613,7 @@
               <a:t> </a:t>
             </a:r>
             <a:r>
-              <a:rPr sz="1900" i="0" b="0">
+              <a:rPr sz="1800" i="0" b="0">
                 <a:solidFill>
                   <a:srgbClr val="D4D4D4"/>
                 </a:solidFill>
@@ -16547,7 +16622,7 @@
               <a:t>expediente</a:t>
             </a:r>
             <a:r>
-              <a:rPr sz="1900" i="0" b="0">
+              <a:rPr sz="1800" i="0" b="0">
                 <a:solidFill>
                   <a:srgbClr val="D4D4D4"/>
                 </a:solidFill>
@@ -16556,7 +16631,7 @@
               <a:t> </a:t>
             </a:r>
             <a:r>
-              <a:rPr sz="1900" i="0" b="0">
+              <a:rPr sz="1800" i="0" b="0">
                 <a:solidFill>
                   <a:srgbClr val="D4D4D4"/>
                 </a:solidFill>
@@ -16565,7 +16640,7 @@
               <a:t>abierto</a:t>
             </a:r>
             <a:r>
-              <a:rPr sz="1900" i="0" b="0">
+              <a:rPr sz="1800" i="0" b="0">
                 <a:solidFill>
                   <a:srgbClr val="D4D4D4"/>
                 </a:solidFill>
@@ -16574,7 +16649,7 @@
               <a:t> </a:t>
             </a:r>
             <a:r>
-              <a:rPr sz="1900" i="0" b="0">
+              <a:rPr sz="1800" i="0" b="0">
                 <a:solidFill>
                   <a:srgbClr val="D4D4D4"/>
                 </a:solidFill>
@@ -16583,7 +16658,7 @@
               <a:t>y</a:t>
             </a:r>
             <a:r>
-              <a:rPr sz="1900" i="0" b="0">
+              <a:rPr sz="1800" i="0" b="0">
                 <a:solidFill>
                   <a:srgbClr val="D4D4D4"/>
                 </a:solidFill>
@@ -16592,7 +16667,7 @@
               <a:t> </a:t>
             </a:r>
             <a:r>
-              <a:rPr sz="1900" i="0" b="0">
+              <a:rPr sz="1800" i="0" b="0">
                 <a:solidFill>
                   <a:srgbClr val="D4D4D4"/>
                 </a:solidFill>
@@ -16601,7 +16676,7 @@
               <a:t>activa</a:t>
             </a:r>
             <a:r>
-              <a:rPr sz="1900" i="0" b="0">
+              <a:rPr sz="1800" i="0" b="0">
                 <a:solidFill>
                   <a:srgbClr val="D4D4D4"/>
                 </a:solidFill>
@@ -16610,7 +16685,7 @@
               <a:t> = </a:t>
             </a:r>
             <a:r>
-              <a:rPr sz="1900" i="0" b="0">
+              <a:rPr sz="1800" i="0" b="0">
                 <a:solidFill>
                   <a:srgbClr val="CE9178"/>
                 </a:solidFill>
@@ -16622,11 +16697,11 @@
           <a:p>
             <a:pPr>
               <a:spcAft>
-                <a:spcPts val="407"/>
+                <a:spcPts val="385"/>
               </a:spcAft>
             </a:pPr>
             <a:r>
-              <a:rPr sz="1900" i="0" b="0">
+              <a:rPr sz="1800" i="0" b="0">
                 <a:solidFill>
                   <a:srgbClr val="D4D4D4"/>
                 </a:solidFill>
@@ -16635,7 +16710,7 @@
               <a:t>Prioridad</a:t>
             </a:r>
             <a:r>
-              <a:rPr sz="1900" i="0" b="0">
+              <a:rPr sz="1800" i="0" b="0">
                 <a:solidFill>
                   <a:srgbClr val="D4D4D4"/>
                 </a:solidFill>
@@ -16644,7 +16719,7 @@
               <a:t>:    </a:t>
             </a:r>
             <a:r>
-              <a:rPr sz="1900" i="0" b="0">
+              <a:rPr sz="1800" i="0" b="0">
                 <a:solidFill>
                   <a:srgbClr val="D4D4D4"/>
                 </a:solidFill>
@@ -16656,11 +16731,11 @@
           <a:p>
             <a:pPr>
               <a:spcAft>
-                <a:spcPts val="407"/>
+                <a:spcPts val="385"/>
               </a:spcAft>
             </a:pPr>
             <a:r>
-              <a:rPr sz="1900" i="0" b="0">
+              <a:rPr sz="1800" i="0" b="0">
                 <a:solidFill>
                   <a:srgbClr val="D4D4D4"/>
                 </a:solidFill>
@@ -16669,7 +16744,7 @@
               <a:t>Origen</a:t>
             </a:r>
             <a:r>
-              <a:rPr sz="1900" i="0" b="0">
+              <a:rPr sz="1800" i="0" b="0">
                 <a:solidFill>
                   <a:srgbClr val="D4D4D4"/>
                 </a:solidFill>
@@ -16678,7 +16753,7 @@
               <a:t>:       </a:t>
             </a:r>
             <a:r>
-              <a:rPr sz="1900" i="0" b="0">
+              <a:rPr sz="1800" i="0" b="0">
                 <a:solidFill>
                   <a:srgbClr val="D4D4D4"/>
                 </a:solidFill>
@@ -16687,7 +16762,7 @@
               <a:t>entrevista</a:t>
             </a:r>
             <a:r>
-              <a:rPr sz="1900" i="0" b="0">
+              <a:rPr sz="1800" i="0" b="0">
                 <a:solidFill>
                   <a:srgbClr val="D4D4D4"/>
                 </a:solidFill>
@@ -16696,7 +16771,7 @@
               <a:t> </a:t>
             </a:r>
             <a:r>
-              <a:rPr sz="1900" i="0" b="0">
+              <a:rPr sz="1800" i="0" b="0">
                 <a:solidFill>
                   <a:srgbClr val="D4D4D4"/>
                 </a:solidFill>
@@ -16705,7 +16780,7 @@
               <a:t>Dr</a:t>
             </a:r>
             <a:r>
-              <a:rPr sz="1900" i="0" b="0">
+              <a:rPr sz="1800" i="0" b="0">
                 <a:solidFill>
                   <a:srgbClr val="D4D4D4"/>
                 </a:solidFill>
@@ -16714,7 +16789,7 @@
               <a:t>. </a:t>
             </a:r>
             <a:r>
-              <a:rPr sz="1900" i="0" b="0">
+              <a:rPr sz="1800" i="0" b="0">
                 <a:solidFill>
                   <a:srgbClr val="D4D4D4"/>
                 </a:solidFill>
@@ -16723,7 +16798,7 @@
               <a:t>Ramirez</a:t>
             </a:r>
             <a:r>
-              <a:rPr sz="1900" i="0" b="0">
+              <a:rPr sz="1800" i="0" b="0">
                 <a:solidFill>
                   <a:srgbClr val="D4D4D4"/>
                 </a:solidFill>
@@ -16732,7 +16807,7 @@
               <a:t>, </a:t>
             </a:r>
             <a:r>
-              <a:rPr sz="1900" i="0" b="0">
+              <a:rPr sz="1800" i="0" b="0">
                 <a:solidFill>
                   <a:srgbClr val="B5CEA8"/>
                 </a:solidFill>
@@ -16741,7 +16816,7 @@
               <a:t>12</a:t>
             </a:r>
             <a:r>
-              <a:rPr sz="1900" i="0" b="0">
+              <a:rPr sz="1800" i="0" b="0">
                 <a:solidFill>
                   <a:srgbClr val="D4D4D4"/>
                 </a:solidFill>
@@ -16750,7 +16825,7 @@
               <a:t>/</a:t>
             </a:r>
             <a:r>
-              <a:rPr sz="1900" i="0" b="0">
+              <a:rPr sz="1800" i="0" b="0">
                 <a:solidFill>
                   <a:srgbClr val="B5CEA8"/>
                 </a:solidFill>
@@ -16759,7 +16834,7 @@
               <a:t>08</a:t>
             </a:r>
             <a:r>
-              <a:rPr sz="1900" i="0" b="0">
+              <a:rPr sz="1800" i="0" b="0">
                 <a:solidFill>
                   <a:srgbClr val="D4D4D4"/>
                 </a:solidFill>
@@ -16768,7 +16843,7 @@
               <a:t>/</a:t>
             </a:r>
             <a:r>
-              <a:rPr sz="1900" i="0" b="0">
+              <a:rPr sz="1800" i="0" b="0">
                 <a:solidFill>
                   <a:srgbClr val="B5CEA8"/>
                 </a:solidFill>
@@ -16780,11 +16855,11 @@
           <a:p>
             <a:pPr>
               <a:spcAft>
-                <a:spcPts val="407"/>
+                <a:spcPts val="385"/>
               </a:spcAft>
             </a:pPr>
             <a:r>
-              <a:rPr sz="1900" i="0" b="0">
+              <a:rPr sz="1800" i="0" b="0">
                 <a:solidFill>
                   <a:srgbClr val="D4D4D4"/>
                 </a:solidFill>
@@ -16796,11 +16871,11 @@
           <a:p>
             <a:pPr>
               <a:spcAft>
-                <a:spcPts val="407"/>
+                <a:spcPts val="385"/>
               </a:spcAft>
             </a:pPr>
             <a:r>
-              <a:rPr sz="1900" i="0" b="0">
+              <a:rPr sz="1800" i="0" b="0">
                 <a:solidFill>
                   <a:srgbClr val="D4D4D4"/>
                 </a:solidFill>
@@ -16812,11 +16887,11 @@
           <a:p>
             <a:pPr>
               <a:spcAft>
-                <a:spcPts val="407"/>
+                <a:spcPts val="385"/>
               </a:spcAft>
             </a:pPr>
             <a:r>
-              <a:rPr sz="1900" i="0" b="0">
+              <a:rPr sz="1800" i="0" b="0">
                 <a:solidFill>
                   <a:srgbClr val="D4D4D4"/>
                 </a:solidFill>
@@ -16828,11 +16903,11 @@
           <a:p>
             <a:pPr>
               <a:spcAft>
-                <a:spcPts val="407"/>
+                <a:spcPts val="385"/>
               </a:spcAft>
             </a:pPr>
             <a:r>
-              <a:rPr sz="1900" i="0" b="0">
+              <a:rPr sz="1800" i="0" b="0">
                 <a:solidFill>
                   <a:srgbClr val="D4D4D4"/>
                 </a:solidFill>

--- a/Seminario de Sistemas/Clases/Clase 1 - Conceptos iniciales/Presentacion.pptx
+++ b/Seminario de Sistemas/Clases/Clase 1 - Conceptos iniciales/Presentacion.pptx
@@ -936,7 +936,7 @@
           <a:p/>
           <a:p>
             <a:r>
-              <a:t>Cinco, es accionable: alguien puede tomar una decision o construir algo con el.</a:t>
+              <a:t>Cinco, sirve para actuar: alguien puede tomar una decision o construir algo con el.</a:t>
             </a:r>
           </a:p>
           <a:p/>
@@ -1408,13 +1408,13 @@
           <a:p/>
           <a:p>
             <a:r>
-              <a:t>Los no funcionales son los que mas se olvidan y, paradojicamente, los que mas condicionan la arquitectura.</a:t>
+              <a:t>Los no funcionales son los que mas se olvidan y, curiosamente, los que mas condicionan la arquitectura.</a:t>
             </a:r>
           </a:p>
           <a:p/>
           <a:p>
             <a:r>
-              <a:t>La regla practica que el estudiante debe interiorizar desde hoy es: si no se puede verificar, no es un requisito, es un deseo.</a:t>
+              <a:t>La regla practica que el estudiante debe tener clara desde hoy es: si no se puede verificar, no es un requisito, es un deseo.</a:t>
             </a:r>
           </a:p>
           <a:p/>
@@ -11111,7 +11111,7 @@
                 </a:solidFill>
                 <a:latin typeface="Calibri"/>
               </a:rPr>
-              <a:t>–   Tiene lector y pregunta · es verificable · es trazable · está fechado y versionado · es accionable.</a:t>
+              <a:t>–   Tiene lector y pregunta · es verificable · es trazable · está fechado y versionado · sirve para actuar.</a:t>
             </a:r>
           </a:p>
           <a:p>
